--- a/FINAL_0512_Stablecoin_Exorbitant_Privilege.pptx
+++ b/FINAL_0512_Stablecoin_Exorbitant_Privilege.pptx
@@ -533,8 +533,40 @@
           <a:lstStyle/>
           <a:p>
             <a:r>
-              <a:rPr lang="en-US" altLang="ko-KR" dirty="0"/>
-              <a:t>"Good [morning/afternoon] everyone. Our paper is called 'Stablecoins and the Exorbitant Privilege.' We're a team of three — Mireu, Sara, and Oybek. The core question we're trying to answer is deceptively simple: does the explosion in stablecoins like Tether and USDC actually make it cheaper for the US to borrow money, and what happens to that benefit when things go wrong? That two-sided puzzle is what this paper is about."</a:t>
+              <a:rPr lang="en-US" altLang="ko-KR" sz="1200" b="0" i="0" kern="1200" dirty="0">
+                <a:solidFill>
+                  <a:schemeClr val="tx1"/>
+                </a:solidFill>
+                <a:effectLst/>
+                <a:latin typeface="+mn-lt"/>
+                <a:ea typeface="+mn-ea"/>
+                <a:cs typeface="+mn-cs"/>
+              </a:rPr>
+              <a:t>"Good afternoon everyone. Our paper is titled </a:t>
+            </a:r>
+            <a:r>
+              <a:rPr lang="en-US" altLang="ko-KR" sz="1200" b="0" i="1" kern="1200" dirty="0">
+                <a:solidFill>
+                  <a:schemeClr val="tx1"/>
+                </a:solidFill>
+                <a:effectLst/>
+                <a:latin typeface="+mn-lt"/>
+                <a:ea typeface="+mn-ea"/>
+                <a:cs typeface="+mn-cs"/>
+              </a:rPr>
+              <a:t>Stablecoins and the Exorbitant Privilege: A New Channel for Safe-Asset Demand and Its Systemic Fragility.</a:t>
+            </a:r>
+            <a:r>
+              <a:rPr lang="en-US" altLang="ko-KR" sz="1200" b="0" i="0" kern="1200" dirty="0">
+                <a:solidFill>
+                  <a:schemeClr val="tx1"/>
+                </a:solidFill>
+                <a:effectLst/>
+                <a:latin typeface="+mn-lt"/>
+                <a:ea typeface="+mn-ea"/>
+                <a:cs typeface="+mn-cs"/>
+              </a:rPr>
+              <a:t> We're Mireu Kim, Sara Chekroune, and Oybek Ibragimov from Yonsei GSIS. Today we'll be presenting the first half of our findings."</a:t>
             </a:r>
             <a:endParaRPr kumimoji="1" lang="ko-KR" altLang="en-US" dirty="0"/>
           </a:p>
@@ -567,6 +599,556 @@
     <p:extLst>
       <p:ext uri="{BB962C8B-B14F-4D97-AF65-F5344CB8AC3E}">
         <p14:creationId xmlns:p14="http://schemas.microsoft.com/office/powerpoint/2010/main" val="2673642059"/>
+      </p:ext>
+    </p:extLst>
+  </p:cSld>
+  <p:clrMapOvr>
+    <a:masterClrMapping/>
+  </p:clrMapOvr>
+</p:notes>
+</file>
+
+<file path=ppt/notesSlides/notesSlide10.xml><?xml version="1.0" encoding="utf-8"?>
+<p:notes xmlns:a="http://schemas.openxmlformats.org/drawingml/2006/main" xmlns:r="http://schemas.openxmlformats.org/officeDocument/2006/relationships" xmlns:p="http://schemas.openxmlformats.org/presentationml/2006/main">
+  <p:cSld>
+    <p:spTree>
+      <p:nvGrpSpPr>
+        <p:cNvPr id="1" name=""/>
+        <p:cNvGrpSpPr/>
+        <p:nvPr/>
+      </p:nvGrpSpPr>
+      <p:grpSpPr>
+        <a:xfrm>
+          <a:off x="0" y="0"/>
+          <a:ext cx="0" cy="0"/>
+          <a:chOff x="0" y="0"/>
+          <a:chExt cx="0" cy="0"/>
+        </a:xfrm>
+      </p:grpSpPr>
+      <p:sp>
+        <p:nvSpPr>
+          <p:cNvPr id="2" name="슬라이드 이미지 개체 틀 1"/>
+          <p:cNvSpPr>
+            <a:spLocks noGrp="1" noRot="1" noChangeAspect="1"/>
+          </p:cNvSpPr>
+          <p:nvPr>
+            <p:ph type="sldImg"/>
+          </p:nvPr>
+        </p:nvSpPr>
+        <p:spPr/>
+      </p:sp>
+      <p:sp>
+        <p:nvSpPr>
+          <p:cNvPr id="3" name="슬라이드 노트 개체 틀 2"/>
+          <p:cNvSpPr>
+            <a:spLocks noGrp="1"/>
+          </p:cNvSpPr>
+          <p:nvPr>
+            <p:ph type="body" idx="1"/>
+          </p:nvPr>
+        </p:nvSpPr>
+        <p:spPr/>
+        <p:txBody>
+          <a:bodyPr/>
+          <a:lstStyle/>
+          <a:p>
+            <a:r>
+              <a:rPr lang="en-US" altLang="ko-KR" sz="1200" b="0" i="0" kern="1200" dirty="0">
+                <a:solidFill>
+                  <a:schemeClr val="tx1"/>
+                </a:solidFill>
+                <a:effectLst/>
+                <a:latin typeface="+mn-lt"/>
+                <a:ea typeface="+mn-ea"/>
+                <a:cs typeface="+mn-cs"/>
+              </a:rPr>
+              <a:t>"So why are the buffer variables not significant in the full sample? This is a data availability problem, not a theory problem. Reserve attestations only became comprehensive and frequent after 2023. Before that, the data is sparser and less detailed. When we restrict our sample to January 2023 through March 2026 — the 39 months where attestation coverage is best — a much clearer picture emerges. The supply effect strengthens to negative 8.14, now significant at the 1% level. And crucially, the liquid buffer interaction term — L times delta-ln-S — becomes positive 49.17, also significant at the 1% level with a p-value of 0.004. This tells us the buffer mechanism is real. Our full sample is just too short to reach significance yet. As this data series extends past 2026, we expect both channels to confirm at the full sample level."</a:t>
+            </a:r>
+            <a:endParaRPr kumimoji="1" lang="ko-KR" altLang="en-US" dirty="0"/>
+          </a:p>
+        </p:txBody>
+      </p:sp>
+      <p:sp>
+        <p:nvSpPr>
+          <p:cNvPr id="4" name="슬라이드 번호 개체 틀 3"/>
+          <p:cNvSpPr>
+            <a:spLocks noGrp="1"/>
+          </p:cNvSpPr>
+          <p:nvPr>
+            <p:ph type="sldNum" sz="quarter" idx="5"/>
+          </p:nvPr>
+        </p:nvSpPr>
+        <p:spPr/>
+        <p:txBody>
+          <a:bodyPr/>
+          <a:lstStyle/>
+          <a:p>
+            <a:fld id="{8AF3784E-D73A-6545-9F12-21649F82E67D}" type="slidenum">
+              <a:rPr kumimoji="1" lang="ko-KR" altLang="en-US" smtClean="0"/>
+              <a:t>10</a:t>
+            </a:fld>
+            <a:endParaRPr kumimoji="1" lang="ko-KR" altLang="en-US"/>
+          </a:p>
+        </p:txBody>
+      </p:sp>
+    </p:spTree>
+    <p:extLst>
+      <p:ext uri="{BB962C8B-B14F-4D97-AF65-F5344CB8AC3E}">
+        <p14:creationId xmlns:p14="http://schemas.microsoft.com/office/powerpoint/2010/main" val="3591230108"/>
+      </p:ext>
+    </p:extLst>
+  </p:cSld>
+  <p:clrMapOvr>
+    <a:masterClrMapping/>
+  </p:clrMapOvr>
+</p:notes>
+</file>
+
+<file path=ppt/notesSlides/notesSlide11.xml><?xml version="1.0" encoding="utf-8"?>
+<p:notes xmlns:a="http://schemas.openxmlformats.org/drawingml/2006/main" xmlns:r="http://schemas.openxmlformats.org/officeDocument/2006/relationships" xmlns:p="http://schemas.openxmlformats.org/presentationml/2006/main">
+  <p:cSld>
+    <p:spTree>
+      <p:nvGrpSpPr>
+        <p:cNvPr id="1" name=""/>
+        <p:cNvGrpSpPr/>
+        <p:nvPr/>
+      </p:nvGrpSpPr>
+      <p:grpSpPr>
+        <a:xfrm>
+          <a:off x="0" y="0"/>
+          <a:ext cx="0" cy="0"/>
+          <a:chOff x="0" y="0"/>
+          <a:chExt cx="0" cy="0"/>
+        </a:xfrm>
+      </p:grpSpPr>
+      <p:sp>
+        <p:nvSpPr>
+          <p:cNvPr id="2" name="슬라이드 이미지 개체 틀 1"/>
+          <p:cNvSpPr>
+            <a:spLocks noGrp="1" noRot="1" noChangeAspect="1"/>
+          </p:cNvSpPr>
+          <p:nvPr>
+            <p:ph type="sldImg"/>
+          </p:nvPr>
+        </p:nvSpPr>
+        <p:spPr/>
+      </p:sp>
+      <p:sp>
+        <p:nvSpPr>
+          <p:cNvPr id="3" name="슬라이드 노트 개체 틀 2"/>
+          <p:cNvSpPr>
+            <a:spLocks noGrp="1"/>
+          </p:cNvSpPr>
+          <p:nvPr>
+            <p:ph type="body" idx="1"/>
+          </p:nvPr>
+        </p:nvSpPr>
+        <p:spPr/>
+        <p:txBody>
+          <a:bodyPr/>
+          <a:lstStyle/>
+          <a:p>
+            <a:r>
+              <a:rPr lang="en-US" altLang="ko-KR" sz="1200" b="0" i="0" kern="1200" dirty="0">
+                <a:solidFill>
+                  <a:schemeClr val="tx1"/>
+                </a:solidFill>
+                <a:effectLst/>
+                <a:latin typeface="+mn-lt"/>
+                <a:ea typeface="+mn-ea"/>
+                <a:cs typeface="+mn-cs"/>
+              </a:rPr>
+              <a:t>"Our second result asks a more specific question: is there a particular level of liquid reserves below which an issuer becomes dangerous to the Treasury market? Using a technique called Hansen threshold regression — which searches statistically for a structural break in the data — we find a tipping point at 13% of supply. The chart on the left shows the model fit at every possible threshold value. The lowest point — where the model fits best — is at 13%. The right side states it simply: liquid cash reserves below 13% of outstanding supply is the fragility zone. Two honest notes. First, the bootstrap p-value is 0.26. This means the threshold is statistically suggestive rather than conclusive — which is expected given 51 months of data. Second, the direction is clear and consistent with our theory, and as the dataset grows past 2026, this will sharpen."</a:t>
+            </a:r>
+            <a:endParaRPr kumimoji="1" lang="ko-KR" altLang="en-US" dirty="0"/>
+          </a:p>
+        </p:txBody>
+      </p:sp>
+      <p:sp>
+        <p:nvSpPr>
+          <p:cNvPr id="4" name="슬라이드 번호 개체 틀 3"/>
+          <p:cNvSpPr>
+            <a:spLocks noGrp="1"/>
+          </p:cNvSpPr>
+          <p:nvPr>
+            <p:ph type="sldNum" sz="quarter" idx="5"/>
+          </p:nvPr>
+        </p:nvSpPr>
+        <p:spPr/>
+        <p:txBody>
+          <a:bodyPr/>
+          <a:lstStyle/>
+          <a:p>
+            <a:fld id="{8AF3784E-D73A-6545-9F12-21649F82E67D}" type="slidenum">
+              <a:rPr kumimoji="1" lang="ko-KR" altLang="en-US" smtClean="0"/>
+              <a:t>11</a:t>
+            </a:fld>
+            <a:endParaRPr kumimoji="1" lang="ko-KR" altLang="en-US"/>
+          </a:p>
+        </p:txBody>
+      </p:sp>
+    </p:spTree>
+    <p:extLst>
+      <p:ext uri="{BB962C8B-B14F-4D97-AF65-F5344CB8AC3E}">
+        <p14:creationId xmlns:p14="http://schemas.microsoft.com/office/powerpoint/2010/main" val="3526662562"/>
+      </p:ext>
+    </p:extLst>
+  </p:cSld>
+  <p:clrMapOvr>
+    <a:masterClrMapping/>
+  </p:clrMapOvr>
+</p:notes>
+</file>
+
+<file path=ppt/notesSlides/notesSlide12.xml><?xml version="1.0" encoding="utf-8"?>
+<p:notes xmlns:a="http://schemas.openxmlformats.org/drawingml/2006/main" xmlns:r="http://schemas.openxmlformats.org/officeDocument/2006/relationships" xmlns:p="http://schemas.openxmlformats.org/presentationml/2006/main">
+  <p:cSld>
+    <p:spTree>
+      <p:nvGrpSpPr>
+        <p:cNvPr id="1" name=""/>
+        <p:cNvGrpSpPr/>
+        <p:nvPr/>
+      </p:nvGrpSpPr>
+      <p:grpSpPr>
+        <a:xfrm>
+          <a:off x="0" y="0"/>
+          <a:ext cx="0" cy="0"/>
+          <a:chOff x="0" y="0"/>
+          <a:chExt cx="0" cy="0"/>
+        </a:xfrm>
+      </p:grpSpPr>
+      <p:sp>
+        <p:nvSpPr>
+          <p:cNvPr id="2" name="슬라이드 이미지 개체 틀 1"/>
+          <p:cNvSpPr>
+            <a:spLocks noGrp="1" noRot="1" noChangeAspect="1"/>
+          </p:cNvSpPr>
+          <p:nvPr>
+            <p:ph type="sldImg"/>
+          </p:nvPr>
+        </p:nvSpPr>
+        <p:spPr/>
+      </p:sp>
+      <p:sp>
+        <p:nvSpPr>
+          <p:cNvPr id="3" name="슬라이드 노트 개체 틀 2"/>
+          <p:cNvSpPr>
+            <a:spLocks noGrp="1"/>
+          </p:cNvSpPr>
+          <p:nvPr>
+            <p:ph type="body" idx="1"/>
+          </p:nvPr>
+        </p:nvSpPr>
+        <p:spPr/>
+        <p:txBody>
+          <a:bodyPr/>
+          <a:lstStyle/>
+          <a:p>
+            <a:r>
+              <a:rPr lang="en-US" altLang="ko-KR" sz="1200" b="0" i="0" kern="1200" dirty="0">
+                <a:solidFill>
+                  <a:schemeClr val="tx1"/>
+                </a:solidFill>
+                <a:effectLst/>
+                <a:latin typeface="+mn-lt"/>
+                <a:ea typeface="+mn-ea"/>
+                <a:cs typeface="+mn-cs"/>
+              </a:rPr>
+              <a:t>"The threshold result becomes most vivid when we split the data into two groups. On the left: the 38 months where the liquid buffer was below 13%. In those months, stablecoin supply growth had a coefficient of negative 6.97 — a strong compression effect. Issuers didn't have enough cash, so any growth in supply came with aggressive T-bill buying, and any redemptions came with forced T-bill selling. On the right: the 13 months where the liquid buffer was above 13%. The coefficient is positive 1.26 — the compression effect essentially disappears. Issuers with enough cash on hand didn't need to rush into or out of T-bills. Their activity didn't move the market. The takeaway is simple: the liquid cash buffer is what separates a stablecoin issuer that </a:t>
+            </a:r>
+            <a:r>
+              <a:rPr lang="en-US" altLang="ko-KR" sz="1200" b="0" i="0" kern="1200" dirty="0" err="1">
+                <a:solidFill>
+                  <a:schemeClr val="tx1"/>
+                </a:solidFill>
+                <a:effectLst/>
+                <a:latin typeface="+mn-lt"/>
+                <a:ea typeface="+mn-ea"/>
+                <a:cs typeface="+mn-cs"/>
+              </a:rPr>
+              <a:t>stabilises</a:t>
+            </a:r>
+            <a:r>
+              <a:rPr lang="en-US" altLang="ko-KR" sz="1200" b="0" i="0" kern="1200" dirty="0">
+                <a:solidFill>
+                  <a:schemeClr val="tx1"/>
+                </a:solidFill>
+                <a:effectLst/>
+                <a:latin typeface="+mn-lt"/>
+                <a:ea typeface="+mn-ea"/>
+                <a:cs typeface="+mn-cs"/>
+              </a:rPr>
+              <a:t> Treasury markets from one that disrupts them. That is the core empirical finding of our paper, and it has a direct implication for how regulators should write reserve requirements."</a:t>
+            </a:r>
+          </a:p>
+          <a:p>
+            <a:br>
+              <a:rPr lang="en-US" altLang="ko-KR" dirty="0"/>
+            </a:br>
+            <a:endParaRPr kumimoji="1" lang="ko-KR" altLang="en-US" dirty="0"/>
+          </a:p>
+        </p:txBody>
+      </p:sp>
+      <p:sp>
+        <p:nvSpPr>
+          <p:cNvPr id="4" name="슬라이드 번호 개체 틀 3"/>
+          <p:cNvSpPr>
+            <a:spLocks noGrp="1"/>
+          </p:cNvSpPr>
+          <p:nvPr>
+            <p:ph type="sldNum" sz="quarter" idx="5"/>
+          </p:nvPr>
+        </p:nvSpPr>
+        <p:spPr/>
+        <p:txBody>
+          <a:bodyPr/>
+          <a:lstStyle/>
+          <a:p>
+            <a:fld id="{8AF3784E-D73A-6545-9F12-21649F82E67D}" type="slidenum">
+              <a:rPr kumimoji="1" lang="ko-KR" altLang="en-US" smtClean="0"/>
+              <a:t>12</a:t>
+            </a:fld>
+            <a:endParaRPr kumimoji="1" lang="ko-KR" altLang="en-US"/>
+          </a:p>
+        </p:txBody>
+      </p:sp>
+    </p:spTree>
+    <p:extLst>
+      <p:ext uri="{BB962C8B-B14F-4D97-AF65-F5344CB8AC3E}">
+        <p14:creationId xmlns:p14="http://schemas.microsoft.com/office/powerpoint/2010/main" val="3118385602"/>
+      </p:ext>
+    </p:extLst>
+  </p:cSld>
+  <p:clrMapOvr>
+    <a:masterClrMapping/>
+  </p:clrMapOvr>
+</p:notes>
+</file>
+
+<file path=ppt/notesSlides/notesSlide13.xml><?xml version="1.0" encoding="utf-8"?>
+<p:notes xmlns:a="http://schemas.openxmlformats.org/drawingml/2006/main" xmlns:r="http://schemas.openxmlformats.org/officeDocument/2006/relationships" xmlns:p="http://schemas.openxmlformats.org/presentationml/2006/main">
+  <p:cSld>
+    <p:spTree>
+      <p:nvGrpSpPr>
+        <p:cNvPr id="1" name=""/>
+        <p:cNvGrpSpPr/>
+        <p:nvPr/>
+      </p:nvGrpSpPr>
+      <p:grpSpPr>
+        <a:xfrm>
+          <a:off x="0" y="0"/>
+          <a:ext cx="0" cy="0"/>
+          <a:chOff x="0" y="0"/>
+          <a:chExt cx="0" cy="0"/>
+        </a:xfrm>
+      </p:grpSpPr>
+      <p:sp>
+        <p:nvSpPr>
+          <p:cNvPr id="2" name="슬라이드 이미지 개체 틀 1"/>
+          <p:cNvSpPr>
+            <a:spLocks noGrp="1" noRot="1" noChangeAspect="1"/>
+          </p:cNvSpPr>
+          <p:nvPr>
+            <p:ph type="sldImg"/>
+          </p:nvPr>
+        </p:nvSpPr>
+        <p:spPr/>
+      </p:sp>
+      <p:sp>
+        <p:nvSpPr>
+          <p:cNvPr id="3" name="슬라이드 노트 개체 틀 2"/>
+          <p:cNvSpPr>
+            <a:spLocks noGrp="1"/>
+          </p:cNvSpPr>
+          <p:nvPr>
+            <p:ph type="body" idx="1"/>
+          </p:nvPr>
+        </p:nvSpPr>
+        <p:spPr/>
+        <p:txBody>
+          <a:bodyPr/>
+          <a:lstStyle/>
+          <a:p>
+            <a:r>
+              <a:rPr lang="en-US" altLang="ko-KR" dirty="0"/>
+              <a:t>"To wrap up our first half: we’ve shown that in normal times, stablecoins act as a massive support pillar for the U.S. dollar, effectively lowering borrowing costs for the government. But next week, we’re going to look at the </a:t>
+            </a:r>
+            <a:r>
+              <a:rPr lang="en-US" altLang="ko-KR" b="1" dirty="0"/>
+              <a:t>'danger zone.'</a:t>
+            </a:r>
+            <a:endParaRPr lang="en-US" altLang="ko-KR" dirty="0"/>
+          </a:p>
+          <a:p>
+            <a:r>
+              <a:rPr lang="en-US" altLang="ko-KR" dirty="0"/>
+              <a:t>We will present our </a:t>
+            </a:r>
+            <a:r>
+              <a:rPr lang="en-US" altLang="ko-KR" b="1" dirty="0"/>
+              <a:t>Event Study</a:t>
+            </a:r>
+            <a:r>
+              <a:rPr lang="en-US" altLang="ko-KR" dirty="0"/>
+              <a:t>, which functions like a financial 'crash test.' We looked at daily data from real-world disasters like the LUNA collapse and the Silicon Valley Bank crisis to see how the markets reacted in real-time. What we found is fascinating: when a stablecoin issuer has a </a:t>
+            </a:r>
+            <a:r>
+              <a:rPr lang="en-US" altLang="ko-KR" b="1" dirty="0"/>
+              <a:t>low cash buffer</a:t>
+            </a:r>
+            <a:r>
+              <a:rPr lang="en-US" altLang="ko-KR" dirty="0"/>
+              <a:t>, a run on the coin causes a shock that actually </a:t>
+            </a:r>
+            <a:r>
+              <a:rPr lang="en-US" altLang="ko-KR" b="1" dirty="0"/>
+              <a:t>drives up U.S. Treasury yields</a:t>
+            </a:r>
+            <a:r>
+              <a:rPr lang="en-US" altLang="ko-KR" dirty="0"/>
+              <a:t>—validating the 'New Triffin Dilemma'. However, when the buffer is high, we see the opposite: a 'flight-to-safety' that actually stabilizes the market.</a:t>
+            </a:r>
+          </a:p>
+          <a:p>
+            <a:r>
+              <a:rPr lang="en-US" altLang="ko-KR" dirty="0"/>
+              <a:t>We will also share our </a:t>
+            </a:r>
+            <a:r>
+              <a:rPr lang="en-US" altLang="ko-KR" b="1" dirty="0"/>
+              <a:t>'13% Rule.'</a:t>
+            </a:r>
+            <a:r>
+              <a:rPr lang="en-US" altLang="ko-KR" dirty="0"/>
+              <a:t> Based on our mathematical threshold, we’ve identified a specific number that regulators can use. We’ll explain why requiring stablecoin issuers to keep at least 13% of their reserves in pure cash—not just T-bills—is the key to making sure a crypto crisis never turns into a U.S. government debt crisis.</a:t>
+            </a:r>
+          </a:p>
+          <a:p>
+            <a:r>
+              <a:rPr lang="en-US" altLang="ko-KR" dirty="0"/>
+              <a:t>See you next week for the causal proof and the policy solutions!"</a:t>
+            </a:r>
+          </a:p>
+          <a:p>
+            <a:endParaRPr kumimoji="1" lang="ko-KR" altLang="en-US" dirty="0"/>
+          </a:p>
+        </p:txBody>
+      </p:sp>
+      <p:sp>
+        <p:nvSpPr>
+          <p:cNvPr id="4" name="슬라이드 번호 개체 틀 3"/>
+          <p:cNvSpPr>
+            <a:spLocks noGrp="1"/>
+          </p:cNvSpPr>
+          <p:nvPr>
+            <p:ph type="sldNum" sz="quarter" idx="5"/>
+          </p:nvPr>
+        </p:nvSpPr>
+        <p:spPr/>
+        <p:txBody>
+          <a:bodyPr/>
+          <a:lstStyle/>
+          <a:p>
+            <a:fld id="{8AF3784E-D73A-6545-9F12-21649F82E67D}" type="slidenum">
+              <a:rPr kumimoji="1" lang="ko-KR" altLang="en-US" smtClean="0"/>
+              <a:t>13</a:t>
+            </a:fld>
+            <a:endParaRPr kumimoji="1" lang="ko-KR" altLang="en-US"/>
+          </a:p>
+        </p:txBody>
+      </p:sp>
+    </p:spTree>
+    <p:extLst>
+      <p:ext uri="{BB962C8B-B14F-4D97-AF65-F5344CB8AC3E}">
+        <p14:creationId xmlns:p14="http://schemas.microsoft.com/office/powerpoint/2010/main" val="688535619"/>
+      </p:ext>
+    </p:extLst>
+  </p:cSld>
+  <p:clrMapOvr>
+    <a:masterClrMapping/>
+  </p:clrMapOvr>
+</p:notes>
+</file>
+
+<file path=ppt/notesSlides/notesSlide14.xml><?xml version="1.0" encoding="utf-8"?>
+<p:notes xmlns:a="http://schemas.openxmlformats.org/drawingml/2006/main" xmlns:r="http://schemas.openxmlformats.org/officeDocument/2006/relationships" xmlns:p="http://schemas.openxmlformats.org/presentationml/2006/main">
+  <p:cSld>
+    <p:spTree>
+      <p:nvGrpSpPr>
+        <p:cNvPr id="1" name=""/>
+        <p:cNvGrpSpPr/>
+        <p:nvPr/>
+      </p:nvGrpSpPr>
+      <p:grpSpPr>
+        <a:xfrm>
+          <a:off x="0" y="0"/>
+          <a:ext cx="0" cy="0"/>
+          <a:chOff x="0" y="0"/>
+          <a:chExt cx="0" cy="0"/>
+        </a:xfrm>
+      </p:grpSpPr>
+      <p:sp>
+        <p:nvSpPr>
+          <p:cNvPr id="2" name="슬라이드 이미지 개체 틀 1"/>
+          <p:cNvSpPr>
+            <a:spLocks noGrp="1" noRot="1" noChangeAspect="1"/>
+          </p:cNvSpPr>
+          <p:nvPr>
+            <p:ph type="sldImg"/>
+          </p:nvPr>
+        </p:nvSpPr>
+        <p:spPr/>
+      </p:sp>
+      <p:sp>
+        <p:nvSpPr>
+          <p:cNvPr id="3" name="슬라이드 노트 개체 틀 2"/>
+          <p:cNvSpPr>
+            <a:spLocks noGrp="1"/>
+          </p:cNvSpPr>
+          <p:nvPr>
+            <p:ph type="body" idx="1"/>
+          </p:nvPr>
+        </p:nvSpPr>
+        <p:spPr/>
+        <p:txBody>
+          <a:bodyPr/>
+          <a:lstStyle/>
+          <a:p>
+            <a:r>
+              <a:rPr lang="en-US" altLang="ko-KR" dirty="0"/>
+              <a:t>"Thank you. We're happy to take any questions on the theory, the data construction, the Hansen threshold methodology, or the event study design."</a:t>
+            </a:r>
+            <a:endParaRPr kumimoji="1" lang="ko-KR" altLang="en-US" dirty="0"/>
+          </a:p>
+        </p:txBody>
+      </p:sp>
+      <p:sp>
+        <p:nvSpPr>
+          <p:cNvPr id="4" name="슬라이드 번호 개체 틀 3"/>
+          <p:cNvSpPr>
+            <a:spLocks noGrp="1"/>
+          </p:cNvSpPr>
+          <p:nvPr>
+            <p:ph type="sldNum" sz="quarter" idx="5"/>
+          </p:nvPr>
+        </p:nvSpPr>
+        <p:spPr/>
+        <p:txBody>
+          <a:bodyPr/>
+          <a:lstStyle/>
+          <a:p>
+            <a:fld id="{5D514313-3BDE-834F-BE4B-14A4F858B1F2}" type="slidenum">
+              <a:rPr kumimoji="1" lang="ko-KR" altLang="en-US" smtClean="0"/>
+              <a:t>14</a:t>
+            </a:fld>
+            <a:endParaRPr kumimoji="1" lang="ko-KR" altLang="en-US"/>
+          </a:p>
+        </p:txBody>
+      </p:sp>
+    </p:spTree>
+    <p:extLst>
+      <p:ext uri="{BB962C8B-B14F-4D97-AF65-F5344CB8AC3E}">
+        <p14:creationId xmlns:p14="http://schemas.microsoft.com/office/powerpoint/2010/main" val="1222221790"/>
       </p:ext>
     </p:extLst>
   </p:cSld>
@@ -621,72 +1203,22 @@
           <a:lstStyle/>
           <a:p>
             <a:r>
-              <a:rPr lang="en-US" altLang="ko-KR" b="1" dirty="0"/>
-              <a:t>Presenter’s Script: Plain English Wrap-Up</a:t>
-            </a:r>
-          </a:p>
-          <a:p>
-            <a:r>
+              <a:rPr lang="en-US" altLang="ko-KR" sz="1200" b="0" i="0" kern="1200" dirty="0">
+                <a:solidFill>
+                  <a:schemeClr val="tx1"/>
+                </a:solidFill>
+                <a:effectLst/>
+                <a:latin typeface="+mn-lt"/>
+                <a:ea typeface="+mn-ea"/>
+                <a:cs typeface="+mn-cs"/>
+              </a:rPr>
+              <a:t>"Here's our roadmap for today. We'll start with motivation — why stablecoins matter for sovereign debt markets. Then we'll introduce our core argument, which we call the New Triffin Dilemma. From there we move to the theoretical model, our data, and then two empirical results: the privilege amplification regression and the reserve adequacy threshold. The third result — the buffer-conditioned event study — and our policy conclusions will come next week."</a:t>
+            </a:r>
+          </a:p>
+          <a:p>
+            <a:br>
               <a:rPr lang="en-US" altLang="ko-KR" dirty="0"/>
-              <a:t>"To wrap up our first half: we’ve shown that in normal times, stablecoins act as a massive support pillar for the U.S. dollar, effectively lowering borrowing costs for the government. But next week, we’re going to look at the </a:t>
-            </a:r>
-            <a:r>
-              <a:rPr lang="en-US" altLang="ko-KR" b="1" dirty="0"/>
-              <a:t>'danger zone.'</a:t>
-            </a:r>
-            <a:endParaRPr lang="en-US" altLang="ko-KR" dirty="0"/>
-          </a:p>
-          <a:p>
-            <a:r>
-              <a:rPr lang="en-US" altLang="ko-KR" dirty="0"/>
-              <a:t>We will present our </a:t>
-            </a:r>
-            <a:r>
-              <a:rPr lang="en-US" altLang="ko-KR" b="1" dirty="0"/>
-              <a:t>Event Study</a:t>
-            </a:r>
-            <a:r>
-              <a:rPr lang="en-US" altLang="ko-KR" dirty="0"/>
-              <a:t>, which functions like a financial 'crash test.' We looked at daily data from real-world disasters like the LUNA collapse and the Silicon Valley Bank crisis to see how the markets reacted in real-time. What we found is fascinating: when a stablecoin issuer has a </a:t>
-            </a:r>
-            <a:r>
-              <a:rPr lang="en-US" altLang="ko-KR" b="1" dirty="0"/>
-              <a:t>low cash buffer</a:t>
-            </a:r>
-            <a:r>
-              <a:rPr lang="en-US" altLang="ko-KR" dirty="0"/>
-              <a:t>, a run on the coin causes a shock that actually </a:t>
-            </a:r>
-            <a:r>
-              <a:rPr lang="en-US" altLang="ko-KR" b="1" dirty="0"/>
-              <a:t>drives up U.S. Treasury yields</a:t>
-            </a:r>
-            <a:r>
-              <a:rPr lang="en-US" altLang="ko-KR" dirty="0"/>
-              <a:t>—validating the 'New Triffin Dilemma'. However, when the buffer is high, we see the opposite: a 'flight-to-safety' that actually stabilizes the market.</a:t>
-            </a:r>
-          </a:p>
-          <a:p>
-            <a:r>
-              <a:rPr lang="en-US" altLang="ko-KR" dirty="0"/>
-              <a:t>We will also share our </a:t>
-            </a:r>
-            <a:r>
-              <a:rPr lang="en-US" altLang="ko-KR" b="1" dirty="0"/>
-              <a:t>'13% Rule.'</a:t>
-            </a:r>
-            <a:r>
-              <a:rPr lang="en-US" altLang="ko-KR" dirty="0"/>
-              <a:t> Based on our mathematical threshold, we’ve identified a specific number that regulators can use. We’ll explain why requiring stablecoin issuers to keep at least 13% of their reserves in pure cash—not just T-bills—is the key to making sure a crypto crisis never turns into a U.S. government debt crisis.</a:t>
-            </a:r>
-          </a:p>
-          <a:p>
-            <a:r>
-              <a:rPr lang="en-US" altLang="ko-KR" dirty="0"/>
-              <a:t>See you next week for the causal proof and the policy solutions!"</a:t>
-            </a:r>
-          </a:p>
-          <a:p>
+            </a:br>
             <a:endParaRPr kumimoji="1" lang="ko-KR" altLang="en-US" dirty="0"/>
           </a:p>
         </p:txBody>
@@ -708,7 +1240,7 @@
           <a:p>
             <a:fld id="{8AF3784E-D73A-6545-9F12-21649F82E67D}" type="slidenum">
               <a:rPr kumimoji="1" lang="ko-KR" altLang="en-US" smtClean="0"/>
-              <a:t>13</a:t>
+              <a:t>2</a:t>
             </a:fld>
             <a:endParaRPr kumimoji="1" lang="ko-KR" altLang="en-US"/>
           </a:p>
@@ -717,7 +1249,7 @@
     </p:spTree>
     <p:extLst>
       <p:ext uri="{BB962C8B-B14F-4D97-AF65-F5344CB8AC3E}">
-        <p14:creationId xmlns:p14="http://schemas.microsoft.com/office/powerpoint/2010/main" val="688535619"/>
+        <p14:creationId xmlns:p14="http://schemas.microsoft.com/office/powerpoint/2010/main" val="3576715235"/>
       </p:ext>
     </p:extLst>
   </p:cSld>
@@ -772,9 +1304,22 @@
           <a:lstStyle/>
           <a:p>
             <a:r>
+              <a:rPr lang="en-US" altLang="ko-KR" sz="1200" b="0" i="0" kern="1200" dirty="0">
+                <a:solidFill>
+                  <a:schemeClr val="tx1"/>
+                </a:solidFill>
+                <a:effectLst/>
+                <a:latin typeface="+mn-lt"/>
+                <a:ea typeface="+mn-ea"/>
+                <a:cs typeface="+mn-cs"/>
+              </a:rPr>
+              <a:t>"Why should a course on international finance care about stablecoins? The scale alone makes them impossible to ignore. The combined market cap of USD-pegged stablecoins has gone from under fifty billion in 2021 to over three hundred billion in 2026. Tether alone holds a hundred and twenty-seven billion dollars in U.S. Treasury bills — comparable to the foreign reserves of a mid-sized sovereign nation. Four major jurisdictions are right now writing legislation to regulate their reserve requirements. And projections put this ecosystem at one to two trillion dollars within the decade. These are not niche crypto instruments anymore — they are Treasury buyers operating at scale, and that has consequences for the U.S. safe-asset market."</a:t>
+            </a:r>
+          </a:p>
+          <a:p>
+            <a:br>
               <a:rPr lang="en-US" altLang="ko-KR" dirty="0"/>
-              <a:t>"Thank you. We're happy to take any questions on the theory, the data construction, the Hansen threshold methodology, or the event study design."</a:t>
-            </a:r>
+            </a:br>
             <a:endParaRPr kumimoji="1" lang="ko-KR" altLang="en-US" dirty="0"/>
           </a:p>
         </p:txBody>
@@ -794,9 +1339,9 @@
           <a:bodyPr/>
           <a:lstStyle/>
           <a:p>
-            <a:fld id="{5D514313-3BDE-834F-BE4B-14A4F858B1F2}" type="slidenum">
+            <a:fld id="{8AF3784E-D73A-6545-9F12-21649F82E67D}" type="slidenum">
               <a:rPr kumimoji="1" lang="ko-KR" altLang="en-US" smtClean="0"/>
-              <a:t>14</a:t>
+              <a:t>3</a:t>
             </a:fld>
             <a:endParaRPr kumimoji="1" lang="ko-KR" altLang="en-US"/>
           </a:p>
@@ -805,7 +1350,617 @@
     </p:spTree>
     <p:extLst>
       <p:ext uri="{BB962C8B-B14F-4D97-AF65-F5344CB8AC3E}">
-        <p14:creationId xmlns:p14="http://schemas.microsoft.com/office/powerpoint/2010/main" val="1222221790"/>
+        <p14:creationId xmlns:p14="http://schemas.microsoft.com/office/powerpoint/2010/main" val="2254327232"/>
+      </p:ext>
+    </p:extLst>
+  </p:cSld>
+  <p:clrMapOvr>
+    <a:masterClrMapping/>
+  </p:clrMapOvr>
+</p:notes>
+</file>
+
+<file path=ppt/notesSlides/notesSlide4.xml><?xml version="1.0" encoding="utf-8"?>
+<p:notes xmlns:a="http://schemas.openxmlformats.org/drawingml/2006/main" xmlns:r="http://schemas.openxmlformats.org/officeDocument/2006/relationships" xmlns:p="http://schemas.openxmlformats.org/presentationml/2006/main">
+  <p:cSld>
+    <p:spTree>
+      <p:nvGrpSpPr>
+        <p:cNvPr id="1" name=""/>
+        <p:cNvGrpSpPr/>
+        <p:nvPr/>
+      </p:nvGrpSpPr>
+      <p:grpSpPr>
+        <a:xfrm>
+          <a:off x="0" y="0"/>
+          <a:ext cx="0" cy="0"/>
+          <a:chOff x="0" y="0"/>
+          <a:chExt cx="0" cy="0"/>
+        </a:xfrm>
+      </p:grpSpPr>
+      <p:sp>
+        <p:nvSpPr>
+          <p:cNvPr id="2" name="슬라이드 이미지 개체 틀 1"/>
+          <p:cNvSpPr>
+            <a:spLocks noGrp="1" noRot="1" noChangeAspect="1"/>
+          </p:cNvSpPr>
+          <p:nvPr>
+            <p:ph type="sldImg"/>
+          </p:nvPr>
+        </p:nvSpPr>
+        <p:spPr/>
+      </p:sp>
+      <p:sp>
+        <p:nvSpPr>
+          <p:cNvPr id="3" name="슬라이드 노트 개체 틀 2"/>
+          <p:cNvSpPr>
+            <a:spLocks noGrp="1"/>
+          </p:cNvSpPr>
+          <p:nvPr>
+            <p:ph type="body" idx="1"/>
+          </p:nvPr>
+        </p:nvSpPr>
+        <p:spPr/>
+        <p:txBody>
+          <a:bodyPr/>
+          <a:lstStyle/>
+          <a:p>
+            <a:r>
+              <a:rPr lang="en-US" altLang="ko-KR" sz="1200" b="0" i="0" kern="1200" dirty="0">
+                <a:solidFill>
+                  <a:schemeClr val="tx1"/>
+                </a:solidFill>
+                <a:effectLst/>
+                <a:latin typeface="+mn-lt"/>
+                <a:ea typeface="+mn-ea"/>
+                <a:cs typeface="+mn-cs"/>
+              </a:rPr>
+              <a:t>"Our core argument is built on an analogy to the original Triffin Dilemma from 1960. Triffin observed that the United States had to run deficits to supply the world with dollars — but those same deficits eventually undermined confidence in the dollar. We find the same structural tension in stablecoin issuers. In normal times, when stablecoins grow, issuers buy more T-bills to back their tokens. This deepens safe-asset demand and compresses Treasury spreads — amplifying the U.S. exorbitant privilege. But when a run occurs, those same T-bill holdings get liquidated to pay redemptions. Yields spike, and the privilege reverses. What separates these two outcomes is the quality of the reserve buffer. We decompose reserves into two components: theta, which measures T-bill exposure — the privilege channel — and L, the liquid cash buffer — the fragility channel. Our paper estimates the threshold L-star that separates safe from fragile."</a:t>
+            </a:r>
+            <a:endParaRPr kumimoji="1" lang="ko-KR" altLang="en-US" dirty="0"/>
+          </a:p>
+        </p:txBody>
+      </p:sp>
+      <p:sp>
+        <p:nvSpPr>
+          <p:cNvPr id="4" name="슬라이드 번호 개체 틀 3"/>
+          <p:cNvSpPr>
+            <a:spLocks noGrp="1"/>
+          </p:cNvSpPr>
+          <p:nvPr>
+            <p:ph type="sldNum" sz="quarter" idx="5"/>
+          </p:nvPr>
+        </p:nvSpPr>
+        <p:spPr/>
+        <p:txBody>
+          <a:bodyPr/>
+          <a:lstStyle/>
+          <a:p>
+            <a:fld id="{8AF3784E-D73A-6545-9F12-21649F82E67D}" type="slidenum">
+              <a:rPr kumimoji="1" lang="ko-KR" altLang="en-US" smtClean="0"/>
+              <a:t>4</a:t>
+            </a:fld>
+            <a:endParaRPr kumimoji="1" lang="ko-KR" altLang="en-US"/>
+          </a:p>
+        </p:txBody>
+      </p:sp>
+    </p:spTree>
+    <p:extLst>
+      <p:ext uri="{BB962C8B-B14F-4D97-AF65-F5344CB8AC3E}">
+        <p14:creationId xmlns:p14="http://schemas.microsoft.com/office/powerpoint/2010/main" val="3574446139"/>
+      </p:ext>
+    </p:extLst>
+  </p:cSld>
+  <p:clrMapOvr>
+    <a:masterClrMapping/>
+  </p:clrMapOvr>
+</p:notes>
+</file>
+
+<file path=ppt/notesSlides/notesSlide5.xml><?xml version="1.0" encoding="utf-8"?>
+<p:notes xmlns:a="http://schemas.openxmlformats.org/drawingml/2006/main" xmlns:r="http://schemas.openxmlformats.org/officeDocument/2006/relationships" xmlns:p="http://schemas.openxmlformats.org/presentationml/2006/main">
+  <p:cSld>
+    <p:spTree>
+      <p:nvGrpSpPr>
+        <p:cNvPr id="1" name=""/>
+        <p:cNvGrpSpPr/>
+        <p:nvPr/>
+      </p:nvGrpSpPr>
+      <p:grpSpPr>
+        <a:xfrm>
+          <a:off x="0" y="0"/>
+          <a:ext cx="0" cy="0"/>
+          <a:chOff x="0" y="0"/>
+          <a:chExt cx="0" cy="0"/>
+        </a:xfrm>
+      </p:grpSpPr>
+      <p:sp>
+        <p:nvSpPr>
+          <p:cNvPr id="2" name="슬라이드 이미지 개체 틀 1"/>
+          <p:cNvSpPr>
+            <a:spLocks noGrp="1" noRot="1" noChangeAspect="1"/>
+          </p:cNvSpPr>
+          <p:nvPr>
+            <p:ph type="sldImg"/>
+          </p:nvPr>
+        </p:nvSpPr>
+        <p:spPr/>
+      </p:sp>
+      <p:sp>
+        <p:nvSpPr>
+          <p:cNvPr id="3" name="슬라이드 노트 개체 틀 2"/>
+          <p:cNvSpPr>
+            <a:spLocks noGrp="1"/>
+          </p:cNvSpPr>
+          <p:nvPr>
+            <p:ph type="body" idx="1"/>
+          </p:nvPr>
+        </p:nvSpPr>
+        <p:spPr/>
+        <p:txBody>
+          <a:bodyPr/>
+          <a:lstStyle/>
+          <a:p>
+            <a:r>
+              <a:rPr lang="en-US" altLang="ko-KR" sz="1200" b="0" i="0" kern="1200" dirty="0">
+                <a:solidFill>
+                  <a:schemeClr val="tx1"/>
+                </a:solidFill>
+                <a:effectLst/>
+                <a:latin typeface="+mn-lt"/>
+                <a:ea typeface="+mn-ea"/>
+                <a:cs typeface="+mn-cs"/>
+              </a:rPr>
+              <a:t>"Our theoretical framework extends Maggiori's 2017 model of safe-asset demand. In the original model, demand is driven solely by the rest-of-world's marginal value of net worth — what Maggiori calls Omega-star. We add three new elements: stablecoin supply S, Treasury exposure theta, and liquid buffer L. The key innovation is that L enters asymmetrically. When L is above the threshold L-star, any redemptions can be absorbed using cash — no T-bills need to be sold, and the market is undisturbed. When L falls below L-star, the issuer is forced to sell T-bills to meet redemptions, and the spread spikes. This asymmetry generates testable predictions. Beta-one should be negative — supply growth compresses spreads. Beta-two should be positive — higher T-bill exposure amplifies demand. And beta-four should be positive — a higher liquid buffer dampens crisis transmission."</a:t>
+            </a:r>
+            <a:endParaRPr kumimoji="1" lang="ko-KR" altLang="en-US" dirty="0"/>
+          </a:p>
+        </p:txBody>
+      </p:sp>
+      <p:sp>
+        <p:nvSpPr>
+          <p:cNvPr id="4" name="슬라이드 번호 개체 틀 3"/>
+          <p:cNvSpPr>
+            <a:spLocks noGrp="1"/>
+          </p:cNvSpPr>
+          <p:nvPr>
+            <p:ph type="sldNum" sz="quarter" idx="5"/>
+          </p:nvPr>
+        </p:nvSpPr>
+        <p:spPr/>
+        <p:txBody>
+          <a:bodyPr/>
+          <a:lstStyle/>
+          <a:p>
+            <a:fld id="{8AF3784E-D73A-6545-9F12-21649F82E67D}" type="slidenum">
+              <a:rPr kumimoji="1" lang="ko-KR" altLang="en-US" smtClean="0"/>
+              <a:t>5</a:t>
+            </a:fld>
+            <a:endParaRPr kumimoji="1" lang="ko-KR" altLang="en-US"/>
+          </a:p>
+        </p:txBody>
+      </p:sp>
+    </p:spTree>
+    <p:extLst>
+      <p:ext uri="{BB962C8B-B14F-4D97-AF65-F5344CB8AC3E}">
+        <p14:creationId xmlns:p14="http://schemas.microsoft.com/office/powerpoint/2010/main" val="2944668387"/>
+      </p:ext>
+    </p:extLst>
+  </p:cSld>
+  <p:clrMapOvr>
+    <a:masterClrMapping/>
+  </p:clrMapOvr>
+</p:notes>
+</file>
+
+<file path=ppt/notesSlides/notesSlide6.xml><?xml version="1.0" encoding="utf-8"?>
+<p:notes xmlns:a="http://schemas.openxmlformats.org/drawingml/2006/main" xmlns:r="http://schemas.openxmlformats.org/officeDocument/2006/relationships" xmlns:p="http://schemas.openxmlformats.org/presentationml/2006/main">
+  <p:cSld>
+    <p:spTree>
+      <p:nvGrpSpPr>
+        <p:cNvPr id="1" name=""/>
+        <p:cNvGrpSpPr/>
+        <p:nvPr/>
+      </p:nvGrpSpPr>
+      <p:grpSpPr>
+        <a:xfrm>
+          <a:off x="0" y="0"/>
+          <a:ext cx="0" cy="0"/>
+          <a:chOff x="0" y="0"/>
+          <a:chExt cx="0" cy="0"/>
+        </a:xfrm>
+      </p:grpSpPr>
+      <p:sp>
+        <p:nvSpPr>
+          <p:cNvPr id="2" name="슬라이드 이미지 개체 틀 1"/>
+          <p:cNvSpPr>
+            <a:spLocks noGrp="1" noRot="1" noChangeAspect="1"/>
+          </p:cNvSpPr>
+          <p:nvPr>
+            <p:ph type="sldImg"/>
+          </p:nvPr>
+        </p:nvSpPr>
+        <p:spPr/>
+      </p:sp>
+      <p:sp>
+        <p:nvSpPr>
+          <p:cNvPr id="3" name="슬라이드 노트 개체 틀 2"/>
+          <p:cNvSpPr>
+            <a:spLocks noGrp="1"/>
+          </p:cNvSpPr>
+          <p:nvPr>
+            <p:ph type="body" idx="1"/>
+          </p:nvPr>
+        </p:nvSpPr>
+        <p:spPr/>
+        <p:txBody>
+          <a:bodyPr/>
+          <a:lstStyle/>
+          <a:p>
+            <a:r>
+              <a:rPr lang="en-US" altLang="ko-KR" sz="1200" b="0" i="0" kern="1200" dirty="0">
+                <a:solidFill>
+                  <a:schemeClr val="tx1"/>
+                </a:solidFill>
+                <a:effectLst/>
+                <a:latin typeface="+mn-lt"/>
+                <a:ea typeface="+mn-ea"/>
+                <a:cs typeface="+mn-cs"/>
+              </a:rPr>
+              <a:t>"Our dataset covers January 2022 through March 2026 — 51 monthly observations. The dependent variable is the OIS-Treasury spread, constructed as the 3-month T-bill rate minus the 90-day SOFR average, both from FRED. Stablecoin supply is the combined market cap of USDT and USDC from </a:t>
+            </a:r>
+            <a:r>
+              <a:rPr lang="en-US" altLang="ko-KR" sz="1200" b="0" i="0" kern="1200" dirty="0" err="1">
+                <a:solidFill>
+                  <a:schemeClr val="tx1"/>
+                </a:solidFill>
+                <a:effectLst/>
+                <a:latin typeface="+mn-lt"/>
+                <a:ea typeface="+mn-ea"/>
+                <a:cs typeface="+mn-cs"/>
+              </a:rPr>
+              <a:t>DeFiLlama</a:t>
+            </a:r>
+            <a:r>
+              <a:rPr lang="en-US" altLang="ko-KR" sz="1200" b="0" i="0" kern="1200" dirty="0">
+                <a:solidFill>
+                  <a:schemeClr val="tx1"/>
+                </a:solidFill>
+                <a:effectLst/>
+                <a:latin typeface="+mn-lt"/>
+                <a:ea typeface="+mn-ea"/>
+                <a:cs typeface="+mn-cs"/>
+              </a:rPr>
+              <a:t>. Our two key reserve variables — theta and L — come from quarterly and monthly reserve attestations published by Tether's auditor BDO and Circle's auditor Deloitte. We also include velocity, which captures the pace of redemptions, the VIX as a global risk control, and the log return on the ACWX ETF as a proxy for rest-of-world equity returns. The sample starts in January 2022 because reliable, disaggregated attestation data only becomes available from that point."</a:t>
+            </a:r>
+            <a:endParaRPr kumimoji="1" lang="ko-KR" altLang="en-US" dirty="0"/>
+          </a:p>
+        </p:txBody>
+      </p:sp>
+      <p:sp>
+        <p:nvSpPr>
+          <p:cNvPr id="4" name="슬라이드 번호 개체 틀 3"/>
+          <p:cNvSpPr>
+            <a:spLocks noGrp="1"/>
+          </p:cNvSpPr>
+          <p:nvPr>
+            <p:ph type="sldNum" sz="quarter" idx="5"/>
+          </p:nvPr>
+        </p:nvSpPr>
+        <p:spPr/>
+        <p:txBody>
+          <a:bodyPr/>
+          <a:lstStyle/>
+          <a:p>
+            <a:fld id="{8AF3784E-D73A-6545-9F12-21649F82E67D}" type="slidenum">
+              <a:rPr kumimoji="1" lang="ko-KR" altLang="en-US" smtClean="0"/>
+              <a:t>6</a:t>
+            </a:fld>
+            <a:endParaRPr kumimoji="1" lang="ko-KR" altLang="en-US"/>
+          </a:p>
+        </p:txBody>
+      </p:sp>
+    </p:spTree>
+    <p:extLst>
+      <p:ext uri="{BB962C8B-B14F-4D97-AF65-F5344CB8AC3E}">
+        <p14:creationId xmlns:p14="http://schemas.microsoft.com/office/powerpoint/2010/main" val="1717355898"/>
+      </p:ext>
+    </p:extLst>
+  </p:cSld>
+  <p:clrMapOvr>
+    <a:masterClrMapping/>
+  </p:clrMapOvr>
+</p:notes>
+</file>
+
+<file path=ppt/notesSlides/notesSlide7.xml><?xml version="1.0" encoding="utf-8"?>
+<p:notes xmlns:a="http://schemas.openxmlformats.org/drawingml/2006/main" xmlns:r="http://schemas.openxmlformats.org/officeDocument/2006/relationships" xmlns:p="http://schemas.openxmlformats.org/presentationml/2006/main">
+  <p:cSld>
+    <p:spTree>
+      <p:nvGrpSpPr>
+        <p:cNvPr id="1" name=""/>
+        <p:cNvGrpSpPr/>
+        <p:nvPr/>
+      </p:nvGrpSpPr>
+      <p:grpSpPr>
+        <a:xfrm>
+          <a:off x="0" y="0"/>
+          <a:ext cx="0" cy="0"/>
+          <a:chOff x="0" y="0"/>
+          <a:chExt cx="0" cy="0"/>
+        </a:xfrm>
+      </p:grpSpPr>
+      <p:sp>
+        <p:nvSpPr>
+          <p:cNvPr id="2" name="슬라이드 이미지 개체 틀 1"/>
+          <p:cNvSpPr>
+            <a:spLocks noGrp="1" noRot="1" noChangeAspect="1"/>
+          </p:cNvSpPr>
+          <p:nvPr>
+            <p:ph type="sldImg"/>
+          </p:nvPr>
+        </p:nvSpPr>
+        <p:spPr/>
+      </p:sp>
+      <p:sp>
+        <p:nvSpPr>
+          <p:cNvPr id="3" name="슬라이드 노트 개체 틀 2"/>
+          <p:cNvSpPr>
+            <a:spLocks noGrp="1"/>
+          </p:cNvSpPr>
+          <p:nvPr>
+            <p:ph type="body" idx="1"/>
+          </p:nvPr>
+        </p:nvSpPr>
+        <p:spPr/>
+        <p:txBody>
+          <a:bodyPr/>
+          <a:lstStyle/>
+          <a:p>
+            <a:r>
+              <a:rPr lang="en-US" altLang="ko-KR" sz="1200" b="0" i="0" kern="1200" dirty="0">
+                <a:solidFill>
+                  <a:schemeClr val="tx1"/>
+                </a:solidFill>
+                <a:effectLst/>
+                <a:latin typeface="+mn-lt"/>
+                <a:ea typeface="+mn-ea"/>
+                <a:cs typeface="+mn-cs"/>
+              </a:rPr>
+              <a:t>"Now let me walk you through what the data actually looks like. This chart has three panels covering January 2022 to March 2026. The top panel is our dependent variable — the spread between Treasury yields and overnight rates. You can see it compress as stablecoin supply grew, and spike sharply during two major crises in May 2022. The middle panel shows the combined supply of USDT and USDC — it grew from around a hundred billion to over two hundred billion over this period. The bottom panel is the variable that's central to our second result: the liquid cash buffer L. The red dashed line is the safety threshold we estimate — 13%. You can see that during the crisis period of 2022, the buffer was well below that line. The three red vertical lines mark the three stress events we study. Keep these patterns in mind — our regressions are quantifying exactly what you see here visually."</a:t>
+            </a:r>
+            <a:endParaRPr kumimoji="1" lang="ko-KR" altLang="en-US" dirty="0"/>
+          </a:p>
+        </p:txBody>
+      </p:sp>
+      <p:sp>
+        <p:nvSpPr>
+          <p:cNvPr id="4" name="슬라이드 번호 개체 틀 3"/>
+          <p:cNvSpPr>
+            <a:spLocks noGrp="1"/>
+          </p:cNvSpPr>
+          <p:nvPr>
+            <p:ph type="sldNum" sz="quarter" idx="5"/>
+          </p:nvPr>
+        </p:nvSpPr>
+        <p:spPr/>
+        <p:txBody>
+          <a:bodyPr/>
+          <a:lstStyle/>
+          <a:p>
+            <a:fld id="{8AF3784E-D73A-6545-9F12-21649F82E67D}" type="slidenum">
+              <a:rPr kumimoji="1" lang="ko-KR" altLang="en-US" smtClean="0"/>
+              <a:t>7</a:t>
+            </a:fld>
+            <a:endParaRPr kumimoji="1" lang="ko-KR" altLang="en-US"/>
+          </a:p>
+        </p:txBody>
+      </p:sp>
+    </p:spTree>
+    <p:extLst>
+      <p:ext uri="{BB962C8B-B14F-4D97-AF65-F5344CB8AC3E}">
+        <p14:creationId xmlns:p14="http://schemas.microsoft.com/office/powerpoint/2010/main" val="2280035872"/>
+      </p:ext>
+    </p:extLst>
+  </p:cSld>
+  <p:clrMapOvr>
+    <a:masterClrMapping/>
+  </p:clrMapOvr>
+</p:notes>
+</file>
+
+<file path=ppt/notesSlides/notesSlide8.xml><?xml version="1.0" encoding="utf-8"?>
+<p:notes xmlns:a="http://schemas.openxmlformats.org/drawingml/2006/main" xmlns:r="http://schemas.openxmlformats.org/officeDocument/2006/relationships" xmlns:p="http://schemas.openxmlformats.org/presentationml/2006/main">
+  <p:cSld>
+    <p:spTree>
+      <p:nvGrpSpPr>
+        <p:cNvPr id="1" name=""/>
+        <p:cNvGrpSpPr/>
+        <p:nvPr/>
+      </p:nvGrpSpPr>
+      <p:grpSpPr>
+        <a:xfrm>
+          <a:off x="0" y="0"/>
+          <a:ext cx="0" cy="0"/>
+          <a:chOff x="0" y="0"/>
+          <a:chExt cx="0" cy="0"/>
+        </a:xfrm>
+      </p:grpSpPr>
+      <p:sp>
+        <p:nvSpPr>
+          <p:cNvPr id="2" name="슬라이드 이미지 개체 틀 1"/>
+          <p:cNvSpPr>
+            <a:spLocks noGrp="1" noRot="1" noChangeAspect="1"/>
+          </p:cNvSpPr>
+          <p:nvPr>
+            <p:ph type="sldImg"/>
+          </p:nvPr>
+        </p:nvSpPr>
+        <p:spPr/>
+      </p:sp>
+      <p:sp>
+        <p:nvSpPr>
+          <p:cNvPr id="3" name="슬라이드 노트 개체 틀 2"/>
+          <p:cNvSpPr>
+            <a:spLocks noGrp="1"/>
+          </p:cNvSpPr>
+          <p:nvPr>
+            <p:ph type="body" idx="1"/>
+          </p:nvPr>
+        </p:nvSpPr>
+        <p:spPr/>
+        <p:txBody>
+          <a:bodyPr/>
+          <a:lstStyle/>
+          <a:p>
+            <a:r>
+              <a:rPr lang="en-US" altLang="ko-KR" sz="1200" b="0" i="0" kern="1200" dirty="0">
+                <a:solidFill>
+                  <a:schemeClr val="tx1"/>
+                </a:solidFill>
+                <a:effectLst/>
+                <a:latin typeface="+mn-lt"/>
+                <a:ea typeface="+mn-ea"/>
+                <a:cs typeface="+mn-cs"/>
+              </a:rPr>
+              <a:t>"Before we get to the numbers, let me translate what we just saw into plain terms — because the story is actually quite intuitive. First: more supply means lower spreads. As Tether and Circle grew, they bought more T-bills to back their tokens. More T-bill buying pushes Treasury yields down relative to overnight rates — that's the spread compressing. Second: when a crisis hits, spreads spike. During the LUNA collapse in May 2022, issuers were forced to sell T-bills to pay back redemptions. That sudden selling pushed yields up — the privilege reversed. Third: the buffer was dangerously thin exactly when it mattered most. In 2022, liquid cash reserves were near zero. Issuers had no cushion. They had to sell assets into a falling market. These three patterns together are what our regressions test."</a:t>
+            </a:r>
+          </a:p>
+          <a:p>
+            <a:br>
+              <a:rPr lang="en-US" altLang="ko-KR" dirty="0"/>
+            </a:br>
+            <a:endParaRPr kumimoji="1" lang="ko-KR" altLang="en-US" dirty="0"/>
+          </a:p>
+        </p:txBody>
+      </p:sp>
+      <p:sp>
+        <p:nvSpPr>
+          <p:cNvPr id="4" name="슬라이드 번호 개체 틀 3"/>
+          <p:cNvSpPr>
+            <a:spLocks noGrp="1"/>
+          </p:cNvSpPr>
+          <p:nvPr>
+            <p:ph type="sldNum" sz="quarter" idx="5"/>
+          </p:nvPr>
+        </p:nvSpPr>
+        <p:spPr/>
+        <p:txBody>
+          <a:bodyPr/>
+          <a:lstStyle/>
+          <a:p>
+            <a:fld id="{8AF3784E-D73A-6545-9F12-21649F82E67D}" type="slidenum">
+              <a:rPr kumimoji="1" lang="ko-KR" altLang="en-US" smtClean="0"/>
+              <a:t>8</a:t>
+            </a:fld>
+            <a:endParaRPr kumimoji="1" lang="ko-KR" altLang="en-US"/>
+          </a:p>
+        </p:txBody>
+      </p:sp>
+    </p:spTree>
+    <p:extLst>
+      <p:ext uri="{BB962C8B-B14F-4D97-AF65-F5344CB8AC3E}">
+        <p14:creationId xmlns:p14="http://schemas.microsoft.com/office/powerpoint/2010/main" val="3067529411"/>
+      </p:ext>
+    </p:extLst>
+  </p:cSld>
+  <p:clrMapOvr>
+    <a:masterClrMapping/>
+  </p:clrMapOvr>
+</p:notes>
+</file>
+
+<file path=ppt/notesSlides/notesSlide9.xml><?xml version="1.0" encoding="utf-8"?>
+<p:notes xmlns:a="http://schemas.openxmlformats.org/drawingml/2006/main" xmlns:r="http://schemas.openxmlformats.org/officeDocument/2006/relationships" xmlns:p="http://schemas.openxmlformats.org/presentationml/2006/main">
+  <p:cSld>
+    <p:spTree>
+      <p:nvGrpSpPr>
+        <p:cNvPr id="1" name=""/>
+        <p:cNvGrpSpPr/>
+        <p:nvPr/>
+      </p:nvGrpSpPr>
+      <p:grpSpPr>
+        <a:xfrm>
+          <a:off x="0" y="0"/>
+          <a:ext cx="0" cy="0"/>
+          <a:chOff x="0" y="0"/>
+          <a:chExt cx="0" cy="0"/>
+        </a:xfrm>
+      </p:grpSpPr>
+      <p:sp>
+        <p:nvSpPr>
+          <p:cNvPr id="2" name="슬라이드 이미지 개체 틀 1"/>
+          <p:cNvSpPr>
+            <a:spLocks noGrp="1" noRot="1" noChangeAspect="1"/>
+          </p:cNvSpPr>
+          <p:nvPr>
+            <p:ph type="sldImg"/>
+          </p:nvPr>
+        </p:nvSpPr>
+        <p:spPr/>
+      </p:sp>
+      <p:sp>
+        <p:nvSpPr>
+          <p:cNvPr id="3" name="슬라이드 노트 개체 틀 2"/>
+          <p:cNvSpPr>
+            <a:spLocks noGrp="1"/>
+          </p:cNvSpPr>
+          <p:nvPr>
+            <p:ph type="body" idx="1"/>
+          </p:nvPr>
+        </p:nvSpPr>
+        <p:spPr/>
+        <p:txBody>
+          <a:bodyPr/>
+          <a:lstStyle/>
+          <a:p>
+            <a:r>
+              <a:rPr lang="en-US" altLang="ko-KR" sz="1200" b="0" i="0" kern="1200" dirty="0">
+                <a:solidFill>
+                  <a:schemeClr val="tx1"/>
+                </a:solidFill>
+                <a:effectLst/>
+                <a:latin typeface="+mn-lt"/>
+                <a:ea typeface="+mn-ea"/>
+                <a:cs typeface="+mn-cs"/>
+              </a:rPr>
+              <a:t>"Our first result confirms Hypothesis 1. The coefficient on stablecoin supply growth — beta-one — is negative 6.02, and it is statistically significant at the 5% level. The double star here means there is less than a 5% chance this result is due to random noise. In practical terms: every 1% growth in stablecoin supply compresses the Treasury spread by about 6 basis points. When you consider that the typical monthly move in this spread is only 10 to 15 basis points, that's a meaningful effect. The model explains 50% of the variation in the spread — which is strong for a monthly macro regression. Looking at the table, you'll notice that the buffer variables — theta, L, and the interaction term — are not individually significant at this sample size of 51 months. We address that directly on the next slide."</a:t>
+            </a:r>
+          </a:p>
+          <a:p>
+            <a:br>
+              <a:rPr lang="en-US" altLang="ko-KR" dirty="0"/>
+            </a:br>
+            <a:endParaRPr kumimoji="1" lang="ko-KR" altLang="en-US" dirty="0"/>
+          </a:p>
+        </p:txBody>
+      </p:sp>
+      <p:sp>
+        <p:nvSpPr>
+          <p:cNvPr id="4" name="슬라이드 번호 개체 틀 3"/>
+          <p:cNvSpPr>
+            <a:spLocks noGrp="1"/>
+          </p:cNvSpPr>
+          <p:nvPr>
+            <p:ph type="sldNum" sz="quarter" idx="5"/>
+          </p:nvPr>
+        </p:nvSpPr>
+        <p:spPr/>
+        <p:txBody>
+          <a:bodyPr/>
+          <a:lstStyle/>
+          <a:p>
+            <a:fld id="{8AF3784E-D73A-6545-9F12-21649F82E67D}" type="slidenum">
+              <a:rPr kumimoji="1" lang="ko-KR" altLang="en-US" smtClean="0"/>
+              <a:t>9</a:t>
+            </a:fld>
+            <a:endParaRPr kumimoji="1" lang="ko-KR" altLang="en-US"/>
+          </a:p>
+        </p:txBody>
+      </p:sp>
+    </p:spTree>
+    <p:extLst>
+      <p:ext uri="{BB962C8B-B14F-4D97-AF65-F5344CB8AC3E}">
+        <p14:creationId xmlns:p14="http://schemas.microsoft.com/office/powerpoint/2010/main" val="1687992856"/>
       </p:ext>
     </p:extLst>
   </p:cSld>
@@ -5023,7 +6178,7 @@
           <p:nvPr/>
         </p:nvPicPr>
         <p:blipFill>
-          <a:blip r:embed="rId2"/>
+          <a:blip r:embed="rId3"/>
           <a:stretch>
             <a:fillRect/>
           </a:stretch>
@@ -7280,7 +8435,7 @@
         <p:spPr>
           <a:xfrm>
             <a:off x="640080" y="1005840"/>
-            <a:ext cx="11155680" cy="5486400"/>
+            <a:ext cx="11155680" cy="4396075"/>
           </a:xfrm>
           <a:prstGeom prst="rect">
             <a:avLst/>
@@ -7298,7 +8453,11 @@
                 <a:spcPts val="0"/>
               </a:spcBef>
             </a:pPr>
-            <a:endParaRPr/>
+            <a:r>
+              <a:rPr lang="en-US" dirty="0"/>
+              <a:t>This week: </a:t>
+            </a:r>
+            <a:endParaRPr dirty="0"/>
           </a:p>
           <a:p>
             <a:pPr algn="l">
@@ -7307,7 +8466,7 @@
               </a:spcBef>
             </a:pPr>
             <a:r>
-              <a:rPr sz="2000" b="0" i="0">
+              <a:rPr sz="2000" b="0" i="0" dirty="0">
                 <a:solidFill>
                   <a:srgbClr val="1A1A2E"/>
                 </a:solidFill>
@@ -7323,7 +8482,7 @@
               </a:spcBef>
             </a:pPr>
             <a:r>
-              <a:rPr sz="2000" b="0" i="0">
+              <a:rPr sz="2000" b="0" i="0" dirty="0">
                 <a:solidFill>
                   <a:srgbClr val="1A1A2E"/>
                 </a:solidFill>
@@ -7339,7 +8498,7 @@
               </a:spcBef>
             </a:pPr>
             <a:r>
-              <a:rPr sz="2000" b="0" i="0">
+              <a:rPr sz="2000" b="0" i="0" dirty="0">
                 <a:solidFill>
                   <a:srgbClr val="1A1A2E"/>
                 </a:solidFill>
@@ -7355,7 +8514,7 @@
               </a:spcBef>
             </a:pPr>
             <a:r>
-              <a:rPr sz="2000" b="0" i="0">
+              <a:rPr sz="2000" b="0" i="0" dirty="0">
                 <a:solidFill>
                   <a:srgbClr val="1A1A2E"/>
                 </a:solidFill>
@@ -7371,7 +8530,7 @@
               </a:spcBef>
             </a:pPr>
             <a:r>
-              <a:rPr sz="2000" b="0" i="0">
+              <a:rPr sz="2000" b="0" i="0" dirty="0">
                 <a:solidFill>
                   <a:srgbClr val="1A1A2E"/>
                 </a:solidFill>
@@ -7387,7 +8546,7 @@
               </a:spcBef>
             </a:pPr>
             <a:r>
-              <a:rPr sz="2000" b="0" i="0">
+              <a:rPr sz="2000" b="0" i="0" dirty="0">
                 <a:solidFill>
                   <a:srgbClr val="1A1A2E"/>
                 </a:solidFill>
@@ -7395,6 +8554,12 @@
               </a:rPr>
               <a:t>❖  Result 2 — Reserve adequacy threshold (Hansen 2000)</a:t>
             </a:r>
+            <a:endParaRPr lang="en-US" sz="2000" b="0" i="0" dirty="0">
+              <a:solidFill>
+                <a:srgbClr val="1A1A2E"/>
+              </a:solidFill>
+              <a:latin typeface="Calibri"/>
+            </a:endParaRPr>
           </a:p>
           <a:p>
             <a:pPr algn="l">
@@ -7402,15 +8567,12 @@
                 <a:spcPts val="800"/>
               </a:spcBef>
             </a:pPr>
-            <a:r>
-              <a:rPr sz="2000" b="0" i="0">
-                <a:solidFill>
-                  <a:srgbClr val="1A1A2E"/>
-                </a:solidFill>
-                <a:latin typeface="Calibri"/>
-              </a:rPr>
-              <a:t>❖  Result 3 — Buffer-conditioned event study</a:t>
-            </a:r>
+            <a:endParaRPr lang="en-US" sz="2000" dirty="0">
+              <a:solidFill>
+                <a:srgbClr val="1A1A2E"/>
+              </a:solidFill>
+              <a:latin typeface="Calibri"/>
+            </a:endParaRPr>
           </a:p>
           <a:p>
             <a:pPr algn="l">
@@ -7419,7 +8581,45 @@
               </a:spcBef>
             </a:pPr>
             <a:r>
-              <a:rPr sz="2000" b="0" i="0">
+              <a:rPr lang="en-US" sz="2000" b="0" i="0" dirty="0">
+                <a:solidFill>
+                  <a:srgbClr val="1A1A2E"/>
+                </a:solidFill>
+                <a:latin typeface="Calibri"/>
+              </a:rPr>
+              <a:t>Next week: </a:t>
+            </a:r>
+            <a:endParaRPr sz="2000" b="0" i="0" dirty="0">
+              <a:solidFill>
+                <a:srgbClr val="1A1A2E"/>
+              </a:solidFill>
+              <a:latin typeface="Calibri"/>
+            </a:endParaRPr>
+          </a:p>
+          <a:p>
+            <a:pPr algn="l">
+              <a:spcBef>
+                <a:spcPts val="800"/>
+              </a:spcBef>
+            </a:pPr>
+            <a:r>
+              <a:rPr sz="2000" b="0" i="0" dirty="0">
+                <a:solidFill>
+                  <a:srgbClr val="1A1A2E"/>
+                </a:solidFill>
+                <a:latin typeface="Calibri"/>
+              </a:rPr>
+              <a:t>❖  Result 3 — Buffer-conditioned event study</a:t>
+            </a:r>
+          </a:p>
+          <a:p>
+            <a:pPr algn="l">
+              <a:spcBef>
+                <a:spcPts val="800"/>
+              </a:spcBef>
+            </a:pPr>
+            <a:r>
+              <a:rPr sz="2000" b="0" i="0" dirty="0">
                 <a:solidFill>
                   <a:srgbClr val="1A1A2E"/>
                 </a:solidFill>
@@ -12068,7 +13268,7 @@
           <p:nvPr/>
         </p:nvPicPr>
         <p:blipFill>
-          <a:blip r:embed="rId2"/>
+          <a:blip r:embed="rId3"/>
           <a:stretch>
             <a:fillRect/>
           </a:stretch>

--- a/FINAL_0512_Stablecoin_Exorbitant_Privilege.pptx
+++ b/FINAL_0512_Stablecoin_Exorbitant_Privilege.pptx
@@ -652,6 +652,23 @@
           <a:bodyPr/>
           <a:lstStyle/>
           <a:p>
+            <a:pPr marL="0" marR="0" lvl="0" indent="0" algn="l" defTabSz="914400" rtl="0" eaLnBrk="1" fontAlgn="auto" latinLnBrk="1" hangingPunct="1">
+              <a:lnSpc>
+                <a:spcPct val="100000"/>
+              </a:lnSpc>
+              <a:spcBef>
+                <a:spcPts val="0"/>
+              </a:spcBef>
+              <a:spcAft>
+                <a:spcPts val="0"/>
+              </a:spcAft>
+              <a:buClrTx/>
+              <a:buSzTx/>
+              <a:buFontTx/>
+              <a:buNone/>
+              <a:tabLst/>
+              <a:defRPr/>
+            </a:pPr>
             <a:r>
               <a:rPr lang="en-US" altLang="ko-KR" sz="1200" b="0" i="0" kern="1200" dirty="0">
                 <a:solidFill>
@@ -662,8 +679,67 @@
                 <a:ea typeface="+mn-ea"/>
                 <a:cs typeface="+mn-cs"/>
               </a:rPr>
-              <a:t>"So why are the buffer variables not significant in the full sample? This is a data availability problem, not a theory problem. Reserve attestations only became comprehensive and frequent after 2023. Before that, the data is sparser and less detailed. When we restrict our sample to January 2023 through March 2026 — the 39 months where attestation coverage is best — a much clearer picture emerges. The supply effect strengthens to negative 8.14, now significant at the 1% level. And crucially, the liquid buffer interaction term — L times delta-ln-S — becomes positive 49.17, also significant at the 1% level with a p-value of 0.004. This tells us the buffer mechanism is real. Our full sample is just too short to reach significance yet. As this data series extends past 2026, we expect both channels to confirm at the full sample level."</a:t>
-            </a:r>
+              <a:t>"So why are the buffer variables not significant in the full sample? </a:t>
+            </a:r>
+            <a:r>
+              <a:rPr lang="en-US" altLang="ko-KR" sz="1200" kern="1200" dirty="0">
+                <a:solidFill>
+                  <a:schemeClr val="tx1"/>
+                </a:solidFill>
+                <a:effectLst/>
+                <a:latin typeface="+mn-lt"/>
+                <a:ea typeface="+mn-ea"/>
+                <a:cs typeface="+mn-cs"/>
+              </a:rPr>
+              <a:t>It comes down to </a:t>
+            </a:r>
+            <a:r>
+              <a:rPr lang="en-US" altLang="ko-KR" sz="1200" b="1" kern="1200" dirty="0">
+                <a:solidFill>
+                  <a:schemeClr val="tx1"/>
+                </a:solidFill>
+                <a:effectLst/>
+                <a:latin typeface="+mn-lt"/>
+                <a:ea typeface="+mn-ea"/>
+                <a:cs typeface="+mn-cs"/>
+              </a:rPr>
+              <a:t>data quality, not theory</a:t>
+            </a:r>
+            <a:r>
+              <a:rPr lang="en-US" altLang="ko-KR" sz="1200" kern="1200" dirty="0">
+                <a:solidFill>
+                  <a:schemeClr val="tx1"/>
+                </a:solidFill>
+                <a:effectLst/>
+                <a:latin typeface="+mn-lt"/>
+                <a:ea typeface="+mn-ea"/>
+                <a:cs typeface="+mn-cs"/>
+              </a:rPr>
+              <a:t>. Tether and Circle only started publishing detailed, frequent reserve breakdowns after 2023. Before that, the cash reserves figures were either missing, infrequent, or less precise. So the early part of our 51-month sample has noisy buffer data — which makes it harder for the regression to detect a real pattern. When we restrict our sample to January 2023 through March 2026 — the 39 months where attestation coverage is best — a much clearer picture emerges. The supply effect strengthens to negative 8.14, now significant at the 1% level. And crucially, the liquid buffer interaction term — L times delta-ln-S — becomes positive 49.17, also significant at the 1% level with a p-value of 0.004. This tells us the buffer mechanism is real. Our full sample is just too short to reach significance yet. As this data series extends past 2026, we expect both channels to confirm at the full sample level." </a:t>
+            </a:r>
+            <a:r>
+              <a:rPr lang="en-US" altLang="ko-KR" sz="1200" i="1" kern="1200" dirty="0">
+                <a:solidFill>
+                  <a:schemeClr val="tx1"/>
+                </a:solidFill>
+                <a:effectLst/>
+                <a:latin typeface="+mn-lt"/>
+                <a:ea typeface="+mn-ea"/>
+                <a:cs typeface="+mn-cs"/>
+              </a:rPr>
+              <a:t>Issuers with enough cash don't need to buy or sell T-bills when their supply changes. That's the fragility channel our theory predicted, and the data confirms it."</a:t>
+            </a:r>
+            <a:endParaRPr lang="en-US" altLang="ko-KR" sz="1200" kern="1200" dirty="0">
+              <a:solidFill>
+                <a:schemeClr val="tx1"/>
+              </a:solidFill>
+              <a:effectLst/>
+              <a:latin typeface="+mn-lt"/>
+              <a:ea typeface="+mn-ea"/>
+              <a:cs typeface="+mn-cs"/>
+            </a:endParaRPr>
+          </a:p>
+          <a:p>
             <a:endParaRPr kumimoji="1" lang="ko-KR" altLang="en-US" dirty="0"/>
           </a:p>
         </p:txBody>
@@ -758,8 +834,215 @@
                 <a:ea typeface="+mn-ea"/>
                 <a:cs typeface="+mn-cs"/>
               </a:rPr>
-              <a:t>"Our second result asks a more specific question: is there a particular level of liquid reserves below which an issuer becomes dangerous to the Treasury market? Using a technique called Hansen threshold regression — which searches statistically for a structural break in the data — we find a tipping point at 13% of supply. The chart on the left shows the model fit at every possible threshold value. The lowest point — where the model fits best — is at 13%. The right side states it simply: liquid cash reserves below 13% of outstanding supply is the fragility zone. Two honest notes. First, the bootstrap p-value is 0.26. This means the threshold is statistically suggestive rather than conclusive — which is expected given 51 months of data. Second, the direction is clear and consistent with our theory, and as the dataset grows past 2026, this will sharpen."</a:t>
-            </a:r>
+              <a:t>Our second result asks a more specific question: is there a particular level of liquid reserves below which an issuer becomes dangerous to the Treasury market? Using a technique called Hansen threshold regression — which searches statistically for a structural break in the data — we find a tipping point at 13% of supply. </a:t>
+            </a:r>
+            <a:r>
+              <a:rPr lang="en-US" altLang="ko-KR" sz="1200" kern="1200" dirty="0">
+                <a:solidFill>
+                  <a:schemeClr val="tx1"/>
+                </a:solidFill>
+                <a:effectLst/>
+                <a:latin typeface="+mn-lt"/>
+                <a:ea typeface="+mn-ea"/>
+                <a:cs typeface="+mn-cs"/>
+              </a:rPr>
+              <a:t>The x-axis shows every possible value of L (the liquid buffer) from low to high. The y-axis shows how well the model fits at each value — technically called the </a:t>
+            </a:r>
+            <a:r>
+              <a:rPr lang="en-US" altLang="ko-KR" sz="1200" b="1" kern="1200" dirty="0">
+                <a:solidFill>
+                  <a:schemeClr val="tx1"/>
+                </a:solidFill>
+                <a:effectLst/>
+                <a:latin typeface="+mn-lt"/>
+                <a:ea typeface="+mn-ea"/>
+                <a:cs typeface="+mn-cs"/>
+              </a:rPr>
+              <a:t>Sum of Squared Residuals (SSR)</a:t>
+            </a:r>
+            <a:r>
+              <a:rPr lang="en-US" altLang="ko-KR" sz="1200" kern="1200" dirty="0">
+                <a:solidFill>
+                  <a:schemeClr val="tx1"/>
+                </a:solidFill>
+                <a:effectLst/>
+                <a:latin typeface="+mn-lt"/>
+                <a:ea typeface="+mn-ea"/>
+                <a:cs typeface="+mn-cs"/>
+              </a:rPr>
+              <a:t>. A lower point on the y-axis means a better fit.</a:t>
+            </a:r>
+          </a:p>
+          <a:p>
+            <a:r>
+              <a:rPr lang="en-US" altLang="ko-KR" sz="1200" kern="1200" dirty="0">
+                <a:solidFill>
+                  <a:schemeClr val="tx1"/>
+                </a:solidFill>
+                <a:effectLst/>
+                <a:latin typeface="+mn-lt"/>
+                <a:ea typeface="+mn-ea"/>
+                <a:cs typeface="+mn-cs"/>
+              </a:rPr>
+              <a:t>The method — </a:t>
+            </a:r>
+            <a:r>
+              <a:rPr lang="en-US" altLang="ko-KR" sz="1200" b="1" kern="1200" dirty="0">
+                <a:solidFill>
+                  <a:schemeClr val="tx1"/>
+                </a:solidFill>
+                <a:effectLst/>
+                <a:latin typeface="+mn-lt"/>
+                <a:ea typeface="+mn-ea"/>
+                <a:cs typeface="+mn-cs"/>
+              </a:rPr>
+              <a:t>Hansen (2000) threshold regression</a:t>
+            </a:r>
+            <a:r>
+              <a:rPr lang="en-US" altLang="ko-KR" sz="1200" kern="1200" dirty="0">
+                <a:solidFill>
+                  <a:schemeClr val="tx1"/>
+                </a:solidFill>
+                <a:effectLst/>
+                <a:latin typeface="+mn-lt"/>
+                <a:ea typeface="+mn-ea"/>
+                <a:cs typeface="+mn-cs"/>
+              </a:rPr>
+              <a:t> — works like this: it tries splitting the 51 months at every possible value of L and asks </a:t>
+            </a:r>
+            <a:r>
+              <a:rPr lang="en-US" altLang="ko-KR" sz="1200" i="1" kern="1200" dirty="0">
+                <a:solidFill>
+                  <a:schemeClr val="tx1"/>
+                </a:solidFill>
+                <a:effectLst/>
+                <a:latin typeface="+mn-lt"/>
+                <a:ea typeface="+mn-ea"/>
+                <a:cs typeface="+mn-cs"/>
+              </a:rPr>
+              <a:t>"if I use this value as my cut-off, how well does a two-group model explain the spread data?"</a:t>
+            </a:r>
+            <a:r>
+              <a:rPr lang="en-US" altLang="ko-KR" sz="1200" kern="1200" dirty="0">
+                <a:solidFill>
+                  <a:schemeClr val="tx1"/>
+                </a:solidFill>
+                <a:effectLst/>
+                <a:latin typeface="+mn-lt"/>
+                <a:ea typeface="+mn-ea"/>
+                <a:cs typeface="+mn-cs"/>
+              </a:rPr>
+              <a:t> It does this for every candidate value, one by one.</a:t>
+            </a:r>
+          </a:p>
+          <a:p>
+            <a:r>
+              <a:rPr lang="en-US" altLang="ko-KR" sz="1200" kern="1200" dirty="0">
+                <a:solidFill>
+                  <a:schemeClr val="tx1"/>
+                </a:solidFill>
+                <a:effectLst/>
+                <a:latin typeface="+mn-lt"/>
+                <a:ea typeface="+mn-ea"/>
+                <a:cs typeface="+mn-cs"/>
+              </a:rPr>
+              <a:t>The </a:t>
+            </a:r>
+            <a:r>
+              <a:rPr lang="en-US" altLang="ko-KR" sz="1200" b="1" kern="1200" dirty="0">
+                <a:solidFill>
+                  <a:schemeClr val="tx1"/>
+                </a:solidFill>
+                <a:effectLst/>
+                <a:latin typeface="+mn-lt"/>
+                <a:ea typeface="+mn-ea"/>
+                <a:cs typeface="+mn-cs"/>
+              </a:rPr>
+              <a:t>lowest point on the curve</a:t>
+            </a:r>
+            <a:r>
+              <a:rPr lang="en-US" altLang="ko-KR" sz="1200" kern="1200" dirty="0">
+                <a:solidFill>
+                  <a:schemeClr val="tx1"/>
+                </a:solidFill>
+                <a:effectLst/>
+                <a:latin typeface="+mn-lt"/>
+                <a:ea typeface="+mn-ea"/>
+                <a:cs typeface="+mn-cs"/>
+              </a:rPr>
+              <a:t> is where the model fits best. That lowest point lands at </a:t>
+            </a:r>
+            <a:r>
+              <a:rPr lang="en-US" altLang="ko-KR" sz="1200" b="1" kern="1200" dirty="0">
+                <a:solidFill>
+                  <a:schemeClr val="tx1"/>
+                </a:solidFill>
+                <a:effectLst/>
+                <a:latin typeface="+mn-lt"/>
+                <a:ea typeface="+mn-ea"/>
+                <a:cs typeface="+mn-cs"/>
+              </a:rPr>
+              <a:t>L = 0.1301 — 13%</a:t>
+            </a:r>
+            <a:r>
+              <a:rPr lang="en-US" altLang="ko-KR" sz="1200" kern="1200" dirty="0">
+                <a:solidFill>
+                  <a:schemeClr val="tx1"/>
+                </a:solidFill>
+                <a:effectLst/>
+                <a:latin typeface="+mn-lt"/>
+                <a:ea typeface="+mn-ea"/>
+                <a:cs typeface="+mn-cs"/>
+              </a:rPr>
+              <a:t>. That is the data telling us: </a:t>
+            </a:r>
+            <a:r>
+              <a:rPr lang="en-US" altLang="ko-KR" sz="1200" i="1" kern="1200" dirty="0">
+                <a:solidFill>
+                  <a:schemeClr val="tx1"/>
+                </a:solidFill>
+                <a:effectLst/>
+                <a:latin typeface="+mn-lt"/>
+                <a:ea typeface="+mn-ea"/>
+                <a:cs typeface="+mn-cs"/>
+              </a:rPr>
+              <a:t>"the most natural dividing line between two different </a:t>
+            </a:r>
+            <a:r>
+              <a:rPr lang="en-US" altLang="ko-KR" sz="1200" i="1" kern="1200" dirty="0" err="1">
+                <a:solidFill>
+                  <a:schemeClr val="tx1"/>
+                </a:solidFill>
+                <a:effectLst/>
+                <a:latin typeface="+mn-lt"/>
+                <a:ea typeface="+mn-ea"/>
+                <a:cs typeface="+mn-cs"/>
+              </a:rPr>
+              <a:t>behaviours</a:t>
+            </a:r>
+            <a:r>
+              <a:rPr lang="en-US" altLang="ko-KR" sz="1200" i="1" kern="1200" dirty="0">
+                <a:solidFill>
+                  <a:schemeClr val="tx1"/>
+                </a:solidFill>
+                <a:effectLst/>
+                <a:latin typeface="+mn-lt"/>
+                <a:ea typeface="+mn-ea"/>
+                <a:cs typeface="+mn-cs"/>
+              </a:rPr>
+              <a:t> is at 13% liquid reserves."</a:t>
+            </a:r>
+            <a:endParaRPr lang="en-US" altLang="ko-KR" sz="1200" kern="1200" dirty="0">
+              <a:solidFill>
+                <a:schemeClr val="tx1"/>
+              </a:solidFill>
+              <a:effectLst/>
+              <a:latin typeface="+mn-lt"/>
+              <a:ea typeface="+mn-ea"/>
+              <a:cs typeface="+mn-cs"/>
+            </a:endParaRPr>
+          </a:p>
+          <a:p>
             <a:endParaRPr kumimoji="1" lang="ko-KR" altLang="en-US" dirty="0"/>
           </a:p>
         </p:txBody>
@@ -854,10 +1137,10 @@
                 <a:ea typeface="+mn-ea"/>
                 <a:cs typeface="+mn-cs"/>
               </a:rPr>
-              <a:t>"The threshold result becomes most vivid when we split the data into two groups. On the left: the 38 months where the liquid buffer was below 13%. In those months, stablecoin supply growth had a coefficient of negative 6.97 — a strong compression effect. Issuers didn't have enough cash, so any growth in supply came with aggressive T-bill buying, and any redemptions came with forced T-bill selling. On the right: the 13 months where the liquid buffer was above 13%. The coefficient is positive 1.26 — the compression effect essentially disappears. Issuers with enough cash on hand didn't need to rush into or out of T-bills. Their activity didn't move the market. The takeaway is simple: the liquid cash buffer is what separates a stablecoin issuer that </a:t>
-            </a:r>
-            <a:r>
-              <a:rPr lang="en-US" altLang="ko-KR" sz="1200" b="0" i="0" kern="1200" dirty="0" err="1">
+              <a:t>When supply </a:t>
+            </a:r>
+            <a:r>
+              <a:rPr lang="en-US" altLang="ko-KR" sz="1200" b="1" i="0" kern="1200" dirty="0">
                 <a:solidFill>
                   <a:schemeClr val="tx1"/>
                 </a:solidFill>
@@ -866,7 +1149,7 @@
                 <a:ea typeface="+mn-ea"/>
                 <a:cs typeface="+mn-cs"/>
               </a:rPr>
-              <a:t>stabilises</a:t>
+              <a:t>grows</a:t>
             </a:r>
             <a:r>
               <a:rPr lang="en-US" altLang="ko-KR" sz="1200" b="0" i="0" kern="1200" dirty="0">
@@ -878,10 +1161,233 @@
                 <a:ea typeface="+mn-ea"/>
                 <a:cs typeface="+mn-cs"/>
               </a:rPr>
-              <a:t> Treasury markets from one that disrupts them. That is the core empirical finding of our paper, and it has a direct implication for how regulators should write reserve requirements."</a:t>
-            </a:r>
-          </a:p>
-          <a:p>
+              <a:t>, issuers need to back every new token they issue with reserves. The question is: do they use </a:t>
+            </a:r>
+            <a:r>
+              <a:rPr lang="en-US" altLang="ko-KR" sz="1200" b="1" i="0" kern="1200" dirty="0">
+                <a:solidFill>
+                  <a:schemeClr val="tx1"/>
+                </a:solidFill>
+                <a:effectLst/>
+                <a:latin typeface="+mn-lt"/>
+                <a:ea typeface="+mn-ea"/>
+                <a:cs typeface="+mn-cs"/>
+              </a:rPr>
+              <a:t>cash</a:t>
+            </a:r>
+            <a:r>
+              <a:rPr lang="en-US" altLang="ko-KR" sz="1200" b="0" i="0" kern="1200" dirty="0">
+                <a:solidFill>
+                  <a:schemeClr val="tx1"/>
+                </a:solidFill>
+                <a:effectLst/>
+                <a:latin typeface="+mn-lt"/>
+                <a:ea typeface="+mn-ea"/>
+                <a:cs typeface="+mn-cs"/>
+              </a:rPr>
+              <a:t> or do they go buy </a:t>
+            </a:r>
+            <a:r>
+              <a:rPr lang="en-US" altLang="ko-KR" sz="1200" b="1" i="0" kern="1200" dirty="0">
+                <a:solidFill>
+                  <a:schemeClr val="tx1"/>
+                </a:solidFill>
+                <a:effectLst/>
+                <a:latin typeface="+mn-lt"/>
+                <a:ea typeface="+mn-ea"/>
+                <a:cs typeface="+mn-cs"/>
+              </a:rPr>
+              <a:t>T-bills</a:t>
+            </a:r>
+            <a:r>
+              <a:rPr lang="en-US" altLang="ko-KR" sz="1200" b="0" i="0" kern="1200" dirty="0">
+                <a:solidFill>
+                  <a:schemeClr val="tx1"/>
+                </a:solidFill>
+                <a:effectLst/>
+                <a:latin typeface="+mn-lt"/>
+                <a:ea typeface="+mn-ea"/>
+                <a:cs typeface="+mn-cs"/>
+              </a:rPr>
+              <a:t>?</a:t>
+            </a:r>
+          </a:p>
+          <a:p>
+            <a:r>
+              <a:rPr lang="en-US" altLang="ko-KR" sz="1200" b="1" i="0" kern="1200" dirty="0">
+                <a:solidFill>
+                  <a:schemeClr val="tx1"/>
+                </a:solidFill>
+                <a:effectLst/>
+                <a:latin typeface="+mn-lt"/>
+                <a:ea typeface="+mn-ea"/>
+                <a:cs typeface="+mn-cs"/>
+              </a:rPr>
+              <a:t>Low buffer (left box) — </a:t>
+            </a:r>
+            <a:r>
+              <a:rPr lang="el-GR" altLang="ko-KR" sz="1200" b="1" i="0" kern="1200" dirty="0">
+                <a:solidFill>
+                  <a:schemeClr val="tx1"/>
+                </a:solidFill>
+                <a:effectLst/>
+                <a:latin typeface="+mn-lt"/>
+                <a:ea typeface="+mn-ea"/>
+                <a:cs typeface="+mn-cs"/>
+              </a:rPr>
+              <a:t>β = −6.97:</a:t>
+            </a:r>
+            <a:r>
+              <a:rPr lang="el-GR" altLang="ko-KR" sz="1200" b="0" i="0" kern="1200" dirty="0">
+                <a:solidFill>
+                  <a:schemeClr val="tx1"/>
+                </a:solidFill>
+                <a:effectLst/>
+                <a:latin typeface="+mn-lt"/>
+                <a:ea typeface="+mn-ea"/>
+                <a:cs typeface="+mn-cs"/>
+              </a:rPr>
+              <a:t> </a:t>
+            </a:r>
+            <a:r>
+              <a:rPr lang="en-US" altLang="ko-KR" sz="1200" b="0" i="0" kern="1200" dirty="0">
+                <a:solidFill>
+                  <a:schemeClr val="tx1"/>
+                </a:solidFill>
+                <a:effectLst/>
+                <a:latin typeface="+mn-lt"/>
+                <a:ea typeface="+mn-ea"/>
+                <a:cs typeface="+mn-cs"/>
+              </a:rPr>
+              <a:t>The issuer has almost no cash. So every time supply grows, they must </a:t>
+            </a:r>
+            <a:r>
+              <a:rPr lang="en-US" altLang="ko-KR" sz="1200" b="1" i="0" kern="1200" dirty="0">
+                <a:solidFill>
+                  <a:schemeClr val="tx1"/>
+                </a:solidFill>
+                <a:effectLst/>
+                <a:latin typeface="+mn-lt"/>
+                <a:ea typeface="+mn-ea"/>
+                <a:cs typeface="+mn-cs"/>
+              </a:rPr>
+              <a:t>go out and buy T-bills</a:t>
+            </a:r>
+            <a:r>
+              <a:rPr lang="en-US" altLang="ko-KR" sz="1200" b="0" i="0" kern="1200" dirty="0">
+                <a:solidFill>
+                  <a:schemeClr val="tx1"/>
+                </a:solidFill>
+                <a:effectLst/>
+                <a:latin typeface="+mn-lt"/>
+                <a:ea typeface="+mn-ea"/>
+                <a:cs typeface="+mn-cs"/>
+              </a:rPr>
+              <a:t> to back the new tokens. That extra T-bill buying pushes T-bill prices up, yields down — the spread </a:t>
+            </a:r>
+            <a:r>
+              <a:rPr lang="en-US" altLang="ko-KR" sz="1200" b="1" i="0" kern="1200" dirty="0">
+                <a:solidFill>
+                  <a:schemeClr val="tx1"/>
+                </a:solidFill>
+                <a:effectLst/>
+                <a:latin typeface="+mn-lt"/>
+                <a:ea typeface="+mn-ea"/>
+                <a:cs typeface="+mn-cs"/>
+              </a:rPr>
+              <a:t>compresses strongly</a:t>
+            </a:r>
+            <a:r>
+              <a:rPr lang="en-US" altLang="ko-KR" sz="1200" b="0" i="0" kern="1200" dirty="0">
+                <a:solidFill>
+                  <a:schemeClr val="tx1"/>
+                </a:solidFill>
+                <a:effectLst/>
+                <a:latin typeface="+mn-lt"/>
+                <a:ea typeface="+mn-ea"/>
+                <a:cs typeface="+mn-cs"/>
+              </a:rPr>
+              <a:t>. They are completely dependent on the T-bill market for everything.</a:t>
+            </a:r>
+          </a:p>
+          <a:p>
+            <a:r>
+              <a:rPr lang="en-US" altLang="ko-KR" sz="1200" b="1" i="0" kern="1200" dirty="0">
+                <a:solidFill>
+                  <a:schemeClr val="tx1"/>
+                </a:solidFill>
+                <a:effectLst/>
+                <a:latin typeface="+mn-lt"/>
+                <a:ea typeface="+mn-ea"/>
+                <a:cs typeface="+mn-cs"/>
+              </a:rPr>
+              <a:t>High buffer (right box) — </a:t>
+            </a:r>
+            <a:r>
+              <a:rPr lang="el-GR" altLang="ko-KR" sz="1200" b="1" i="0" kern="1200" dirty="0">
+                <a:solidFill>
+                  <a:schemeClr val="tx1"/>
+                </a:solidFill>
+                <a:effectLst/>
+                <a:latin typeface="+mn-lt"/>
+                <a:ea typeface="+mn-ea"/>
+                <a:cs typeface="+mn-cs"/>
+              </a:rPr>
+              <a:t>β = +1.26:</a:t>
+            </a:r>
+            <a:r>
+              <a:rPr lang="el-GR" altLang="ko-KR" sz="1200" b="0" i="0" kern="1200" dirty="0">
+                <a:solidFill>
+                  <a:schemeClr val="tx1"/>
+                </a:solidFill>
+                <a:effectLst/>
+                <a:latin typeface="+mn-lt"/>
+                <a:ea typeface="+mn-ea"/>
+                <a:cs typeface="+mn-cs"/>
+              </a:rPr>
+              <a:t> </a:t>
+            </a:r>
+            <a:r>
+              <a:rPr lang="en-US" altLang="ko-KR" sz="1200" b="0" i="0" kern="1200" dirty="0">
+                <a:solidFill>
+                  <a:schemeClr val="tx1"/>
+                </a:solidFill>
+                <a:effectLst/>
+                <a:latin typeface="+mn-lt"/>
+                <a:ea typeface="+mn-ea"/>
+                <a:cs typeface="+mn-cs"/>
+              </a:rPr>
+              <a:t>The issuer already has plenty of cash sitting in reserve. When supply grows, they can use that cash to back new tokens — </a:t>
+            </a:r>
+            <a:r>
+              <a:rPr lang="en-US" altLang="ko-KR" sz="1200" b="1" i="0" kern="1200" dirty="0">
+                <a:solidFill>
+                  <a:schemeClr val="tx1"/>
+                </a:solidFill>
+                <a:effectLst/>
+                <a:latin typeface="+mn-lt"/>
+                <a:ea typeface="+mn-ea"/>
+                <a:cs typeface="+mn-cs"/>
+              </a:rPr>
+              <a:t>no T-bill buying needed</a:t>
+            </a:r>
+            <a:r>
+              <a:rPr lang="en-US" altLang="ko-KR" sz="1200" b="0" i="0" kern="1200" dirty="0">
+                <a:solidFill>
+                  <a:schemeClr val="tx1"/>
+                </a:solidFill>
+                <a:effectLst/>
+                <a:latin typeface="+mn-lt"/>
+                <a:ea typeface="+mn-ea"/>
+                <a:cs typeface="+mn-cs"/>
+              </a:rPr>
+              <a:t>. The T-bill market is undisturbed. The compression effect disappears.</a:t>
+            </a:r>
+          </a:p>
+          <a:p>
+            <a:br>
+              <a:rPr lang="en-US" altLang="ko-KR" dirty="0"/>
+            </a:br>
             <a:br>
               <a:rPr lang="en-US" altLang="ko-KR" dirty="0"/>
             </a:br>
@@ -1726,8 +2232,438 @@
                 <a:ea typeface="+mn-ea"/>
                 <a:cs typeface="+mn-cs"/>
               </a:rPr>
-              <a:t>"Now let me walk you through what the data actually looks like. This chart has three panels covering January 2022 to March 2026. The top panel is our dependent variable — the spread between Treasury yields and overnight rates. You can see it compress as stablecoin supply grew, and spike sharply during two major crises in May 2022. The middle panel shows the combined supply of USDT and USDC — it grew from around a hundred billion to over two hundred billion over this period. The bottom panel is the variable that's central to our second result: the liquid cash buffer L. The red dashed line is the safety threshold we estimate — 13%. You can see that during the crisis period of 2022, the buffer was well below that line. The three red vertical lines mark the three stress events we study. Keep these patterns in mind — our regressions are quantifying exactly what you see here visually."</a:t>
-            </a:r>
+              <a:t>"Now let me walk you through what the data actually looks like. </a:t>
+            </a:r>
+          </a:p>
+          <a:p>
+            <a:endParaRPr lang="en-US" altLang="ko-KR" sz="1200" b="0" i="0" kern="1200" dirty="0">
+              <a:solidFill>
+                <a:schemeClr val="tx1"/>
+              </a:solidFill>
+              <a:effectLst/>
+              <a:latin typeface="+mn-lt"/>
+              <a:ea typeface="+mn-ea"/>
+              <a:cs typeface="+mn-cs"/>
+            </a:endParaRPr>
+          </a:p>
+          <a:p>
+            <a:r>
+              <a:rPr lang="en-US" altLang="ko-KR" sz="1200" kern="1200" dirty="0">
+                <a:solidFill>
+                  <a:schemeClr val="tx1"/>
+                </a:solidFill>
+                <a:effectLst/>
+                <a:latin typeface="+mn-lt"/>
+                <a:ea typeface="+mn-ea"/>
+                <a:cs typeface="+mn-cs"/>
+              </a:rPr>
+              <a:t>A: T-bill (DTB3) is a </a:t>
+            </a:r>
+            <a:r>
+              <a:rPr lang="en-US" altLang="ko-KR" sz="1200" b="1" kern="1200" dirty="0">
+                <a:solidFill>
+                  <a:schemeClr val="tx1"/>
+                </a:solidFill>
+                <a:effectLst/>
+                <a:latin typeface="+mn-lt"/>
+                <a:ea typeface="+mn-ea"/>
+                <a:cs typeface="+mn-cs"/>
+              </a:rPr>
+              <a:t>3-month U.S. government bond</a:t>
+            </a:r>
+            <a:r>
+              <a:rPr lang="en-US" altLang="ko-KR" sz="1200" kern="1200" dirty="0">
+                <a:solidFill>
+                  <a:schemeClr val="tx1"/>
+                </a:solidFill>
+                <a:effectLst/>
+                <a:latin typeface="+mn-lt"/>
+                <a:ea typeface="+mn-ea"/>
+                <a:cs typeface="+mn-cs"/>
+              </a:rPr>
+              <a:t>.</a:t>
+            </a:r>
+          </a:p>
+          <a:p>
+            <a:r>
+              <a:rPr lang="en-US" altLang="ko-KR" sz="1200" b="1" kern="1200" dirty="0">
+                <a:solidFill>
+                  <a:schemeClr val="tx1"/>
+                </a:solidFill>
+                <a:effectLst/>
+                <a:latin typeface="+mn-lt"/>
+                <a:ea typeface="+mn-ea"/>
+                <a:cs typeface="+mn-cs"/>
+              </a:rPr>
+              <a:t>Secured Overnight Financing Rate</a:t>
+            </a:r>
+            <a:r>
+              <a:rPr lang="en-US" altLang="ko-KR" sz="1200" kern="1200" dirty="0">
+                <a:solidFill>
+                  <a:schemeClr val="tx1"/>
+                </a:solidFill>
+                <a:effectLst/>
+                <a:latin typeface="+mn-lt"/>
+                <a:ea typeface="+mn-ea"/>
+                <a:cs typeface="+mn-cs"/>
+              </a:rPr>
+              <a:t>. - Think of it as the interest rate banks charge each other to lend money </a:t>
+            </a:r>
+            <a:r>
+              <a:rPr lang="en-US" altLang="ko-KR" sz="1200" b="1" kern="1200" dirty="0">
+                <a:solidFill>
+                  <a:schemeClr val="tx1"/>
+                </a:solidFill>
+                <a:effectLst/>
+                <a:latin typeface="+mn-lt"/>
+                <a:ea typeface="+mn-ea"/>
+                <a:cs typeface="+mn-cs"/>
+              </a:rPr>
+              <a:t>just for one night</a:t>
+            </a:r>
+            <a:r>
+              <a:rPr lang="en-US" altLang="ko-KR" sz="1200" kern="1200" dirty="0">
+                <a:solidFill>
+                  <a:schemeClr val="tx1"/>
+                </a:solidFill>
+                <a:effectLst/>
+                <a:latin typeface="+mn-lt"/>
+                <a:ea typeface="+mn-ea"/>
+                <a:cs typeface="+mn-cs"/>
+              </a:rPr>
+              <a:t>, using U.S. Treasury bonds as collateral.</a:t>
+            </a:r>
+          </a:p>
+          <a:p>
+            <a:r>
+              <a:rPr lang="en-US" altLang="ko-KR" sz="1200" kern="1200" dirty="0">
+                <a:solidFill>
+                  <a:schemeClr val="tx1"/>
+                </a:solidFill>
+                <a:effectLst/>
+                <a:latin typeface="+mn-lt"/>
+                <a:ea typeface="+mn-ea"/>
+                <a:cs typeface="+mn-cs"/>
+              </a:rPr>
+              <a:t>In a normal world with no stablecoins, these two rates should be roughly equal — both risk-free, both short-term. The spread should hover near zero.</a:t>
+            </a:r>
+          </a:p>
+          <a:p>
+            <a:r>
+              <a:rPr lang="en-US" altLang="ko-KR" sz="1200" kern="1200" dirty="0">
+                <a:solidFill>
+                  <a:schemeClr val="tx1"/>
+                </a:solidFill>
+                <a:effectLst/>
+                <a:latin typeface="+mn-lt"/>
+                <a:ea typeface="+mn-ea"/>
+                <a:cs typeface="+mn-cs"/>
+              </a:rPr>
+              <a:t>When stablecoin issuers </a:t>
+            </a:r>
+            <a:r>
+              <a:rPr lang="en-US" altLang="ko-KR" sz="1200" b="1" kern="1200" dirty="0">
+                <a:solidFill>
+                  <a:schemeClr val="tx1"/>
+                </a:solidFill>
+                <a:effectLst/>
+                <a:latin typeface="+mn-lt"/>
+                <a:ea typeface="+mn-ea"/>
+                <a:cs typeface="+mn-cs"/>
+              </a:rPr>
+              <a:t>grow</a:t>
+            </a:r>
+            <a:r>
+              <a:rPr lang="en-US" altLang="ko-KR" sz="1200" kern="1200" dirty="0">
+                <a:solidFill>
+                  <a:schemeClr val="tx1"/>
+                </a:solidFill>
+                <a:effectLst/>
+                <a:latin typeface="+mn-lt"/>
+                <a:ea typeface="+mn-ea"/>
+                <a:cs typeface="+mn-cs"/>
+              </a:rPr>
+              <a:t> (buy T-bills), the spread </a:t>
+            </a:r>
+            <a:r>
+              <a:rPr lang="en-US" altLang="ko-KR" sz="1200" b="1" kern="1200" dirty="0">
+                <a:solidFill>
+                  <a:schemeClr val="tx1"/>
+                </a:solidFill>
+                <a:effectLst/>
+                <a:latin typeface="+mn-lt"/>
+                <a:ea typeface="+mn-ea"/>
+                <a:cs typeface="+mn-cs"/>
+              </a:rPr>
+              <a:t>compresses</a:t>
+            </a:r>
+            <a:r>
+              <a:rPr lang="en-US" altLang="ko-KR" sz="1200" kern="1200" dirty="0">
+                <a:solidFill>
+                  <a:schemeClr val="tx1"/>
+                </a:solidFill>
+                <a:effectLst/>
+                <a:latin typeface="+mn-lt"/>
+                <a:ea typeface="+mn-ea"/>
+                <a:cs typeface="+mn-cs"/>
+              </a:rPr>
+              <a:t> (goes negative). When they're hit by a run and </a:t>
+            </a:r>
+            <a:r>
+              <a:rPr lang="en-US" altLang="ko-KR" sz="1200" b="1" kern="1200" dirty="0">
+                <a:solidFill>
+                  <a:schemeClr val="tx1"/>
+                </a:solidFill>
+                <a:effectLst/>
+                <a:latin typeface="+mn-lt"/>
+                <a:ea typeface="+mn-ea"/>
+                <a:cs typeface="+mn-cs"/>
+              </a:rPr>
+              <a:t>sell</a:t>
+            </a:r>
+            <a:r>
+              <a:rPr lang="en-US" altLang="ko-KR" sz="1200" kern="1200" dirty="0">
+                <a:solidFill>
+                  <a:schemeClr val="tx1"/>
+                </a:solidFill>
+                <a:effectLst/>
+                <a:latin typeface="+mn-lt"/>
+                <a:ea typeface="+mn-ea"/>
+                <a:cs typeface="+mn-cs"/>
+              </a:rPr>
+              <a:t> T-bills, the spread </a:t>
+            </a:r>
+            <a:r>
+              <a:rPr lang="en-US" altLang="ko-KR" sz="1200" b="1" kern="1200" dirty="0">
+                <a:solidFill>
+                  <a:schemeClr val="tx1"/>
+                </a:solidFill>
+                <a:effectLst/>
+                <a:latin typeface="+mn-lt"/>
+                <a:ea typeface="+mn-ea"/>
+                <a:cs typeface="+mn-cs"/>
+              </a:rPr>
+              <a:t>spikes</a:t>
+            </a:r>
+            <a:r>
+              <a:rPr lang="en-US" altLang="ko-KR" sz="1200" kern="1200" dirty="0">
+                <a:solidFill>
+                  <a:schemeClr val="tx1"/>
+                </a:solidFill>
+                <a:effectLst/>
+                <a:latin typeface="+mn-lt"/>
+                <a:ea typeface="+mn-ea"/>
+                <a:cs typeface="+mn-cs"/>
+              </a:rPr>
+              <a:t> (goes positive).</a:t>
+            </a:r>
+          </a:p>
+          <a:p>
+            <a:br>
+              <a:rPr lang="en-US" altLang="ko-KR" sz="1200" kern="1200" dirty="0">
+                <a:solidFill>
+                  <a:schemeClr val="tx1"/>
+                </a:solidFill>
+                <a:effectLst/>
+                <a:latin typeface="+mn-lt"/>
+                <a:ea typeface="+mn-ea"/>
+                <a:cs typeface="+mn-cs"/>
+              </a:rPr>
+            </a:br>
+            <a:endParaRPr lang="en-US" altLang="ko-KR" sz="1200" kern="1200" dirty="0">
+              <a:solidFill>
+                <a:schemeClr val="tx1"/>
+              </a:solidFill>
+              <a:effectLst/>
+              <a:latin typeface="+mn-lt"/>
+              <a:ea typeface="+mn-ea"/>
+              <a:cs typeface="+mn-cs"/>
+            </a:endParaRPr>
+          </a:p>
+          <a:p>
+            <a:r>
+              <a:rPr lang="en-US" altLang="ko-KR" sz="1200" kern="1200" dirty="0">
+                <a:solidFill>
+                  <a:schemeClr val="tx1"/>
+                </a:solidFill>
+                <a:effectLst/>
+                <a:latin typeface="+mn-lt"/>
+                <a:ea typeface="+mn-ea"/>
+                <a:cs typeface="+mn-cs"/>
+              </a:rPr>
+              <a:t>B: middle panel shows the combined supply of USDT and USDC — it grew from around a hundred billion to over two hundred billion over this period. </a:t>
+            </a:r>
+          </a:p>
+          <a:p>
+            <a:br>
+              <a:rPr lang="en-US" altLang="ko-KR" sz="1200" kern="1200" dirty="0">
+                <a:solidFill>
+                  <a:schemeClr val="tx1"/>
+                </a:solidFill>
+                <a:effectLst/>
+                <a:latin typeface="+mn-lt"/>
+                <a:ea typeface="+mn-ea"/>
+                <a:cs typeface="+mn-cs"/>
+              </a:rPr>
+            </a:br>
+            <a:endParaRPr lang="en-US" altLang="ko-KR" sz="1200" kern="1200" dirty="0">
+              <a:solidFill>
+                <a:schemeClr val="tx1"/>
+              </a:solidFill>
+              <a:effectLst/>
+              <a:latin typeface="+mn-lt"/>
+              <a:ea typeface="+mn-ea"/>
+              <a:cs typeface="+mn-cs"/>
+            </a:endParaRPr>
+          </a:p>
+          <a:p>
+            <a:pPr marL="0" marR="0" lvl="0" indent="0" algn="l" defTabSz="914400" rtl="0" eaLnBrk="1" fontAlgn="auto" latinLnBrk="1" hangingPunct="1">
+              <a:lnSpc>
+                <a:spcPct val="100000"/>
+              </a:lnSpc>
+              <a:spcBef>
+                <a:spcPts val="0"/>
+              </a:spcBef>
+              <a:spcAft>
+                <a:spcPts val="0"/>
+              </a:spcAft>
+              <a:buClrTx/>
+              <a:buSzTx/>
+              <a:buFontTx/>
+              <a:buNone/>
+              <a:tabLst/>
+              <a:defRPr/>
+            </a:pPr>
+            <a:r>
+              <a:rPr lang="en-US" altLang="ko-KR" sz="1200" kern="1200" dirty="0">
+                <a:solidFill>
+                  <a:schemeClr val="tx1"/>
+                </a:solidFill>
+                <a:effectLst/>
+                <a:latin typeface="+mn-lt"/>
+                <a:ea typeface="+mn-ea"/>
+                <a:cs typeface="+mn-cs"/>
+              </a:rPr>
+              <a:t>C: The red dashed line is the safety threshold we estimate — 13%.  When the </a:t>
+            </a:r>
+            <a:r>
+              <a:rPr lang="en-US" altLang="ko-KR" sz="1200" b="1" kern="1200" dirty="0">
+                <a:solidFill>
+                  <a:schemeClr val="tx1"/>
+                </a:solidFill>
+                <a:effectLst/>
+                <a:latin typeface="+mn-lt"/>
+                <a:ea typeface="+mn-ea"/>
+                <a:cs typeface="+mn-cs"/>
+              </a:rPr>
+              <a:t>denominator (supply) falls fast</a:t>
+            </a:r>
+            <a:r>
+              <a:rPr lang="en-US" altLang="ko-KR" sz="1200" kern="1200" dirty="0">
+                <a:solidFill>
+                  <a:schemeClr val="tx1"/>
+                </a:solidFill>
+                <a:effectLst/>
+                <a:latin typeface="+mn-lt"/>
+                <a:ea typeface="+mn-ea"/>
+                <a:cs typeface="+mn-cs"/>
+              </a:rPr>
+              <a:t> </a:t>
+            </a:r>
+            <a:r>
+              <a:rPr lang="en-US" altLang="ko-KR" sz="1200" i="1" kern="1200" dirty="0">
+                <a:solidFill>
+                  <a:schemeClr val="tx1"/>
+                </a:solidFill>
+                <a:effectLst/>
+                <a:latin typeface="+mn-lt"/>
+                <a:ea typeface="+mn-ea"/>
+                <a:cs typeface="+mn-cs"/>
+              </a:rPr>
+              <a:t>our paper studies,</a:t>
+            </a:r>
+            <a:r>
+              <a:rPr lang="ko-KR" altLang="en-US" sz="1200" i="1" kern="1200" dirty="0">
+                <a:solidFill>
+                  <a:schemeClr val="tx1"/>
+                </a:solidFill>
+                <a:effectLst/>
+                <a:latin typeface="+mn-lt"/>
+                <a:ea typeface="+mn-ea"/>
+                <a:cs typeface="+mn-cs"/>
+              </a:rPr>
+              <a:t> </a:t>
+            </a:r>
+            <a:r>
+              <a:rPr lang="en-US" altLang="ko-KR" sz="1200" kern="1200" dirty="0">
+                <a:solidFill>
+                  <a:schemeClr val="tx1"/>
+                </a:solidFill>
+                <a:effectLst/>
+                <a:latin typeface="+mn-lt"/>
+                <a:ea typeface="+mn-ea"/>
+                <a:cs typeface="+mn-cs"/>
+              </a:rPr>
+              <a:t>but the cash reserves number hasn't been updated yet, </a:t>
+            </a:r>
+            <a:r>
+              <a:rPr lang="en-US" altLang="ko-KR" sz="1200" b="1" kern="1200" dirty="0">
+                <a:solidFill>
+                  <a:schemeClr val="tx1"/>
+                </a:solidFill>
+                <a:effectLst/>
+                <a:latin typeface="+mn-lt"/>
+                <a:ea typeface="+mn-ea"/>
+                <a:cs typeface="+mn-cs"/>
+              </a:rPr>
+              <a:t>the ratio spikes up</a:t>
+            </a:r>
+            <a:r>
+              <a:rPr lang="en-US" altLang="ko-KR" sz="1200" kern="1200" dirty="0">
+                <a:solidFill>
+                  <a:schemeClr val="tx1"/>
+                </a:solidFill>
+                <a:effectLst/>
+                <a:latin typeface="+mn-lt"/>
+                <a:ea typeface="+mn-ea"/>
+                <a:cs typeface="+mn-cs"/>
+              </a:rPr>
+              <a:t>. </a:t>
+            </a:r>
+            <a:r>
+              <a:rPr lang="en-US" altLang="ko-KR" sz="1200" i="1" kern="1200" dirty="0">
+                <a:solidFill>
+                  <a:schemeClr val="tx1"/>
+                </a:solidFill>
+                <a:effectLst/>
+                <a:latin typeface="+mn-lt"/>
+                <a:ea typeface="+mn-ea"/>
+                <a:cs typeface="+mn-cs"/>
+              </a:rPr>
+              <a:t>"The small spike in mid-2022 reflects the LUNA crisis — supply collapsed so fast that the buffer ratio temporarily jumped. But once new reserve data came in, it became clear that cash had also been used to fund those redemptions, and the buffer fell back. It's a good illustration of exactly the fragility mechanism our paper studies."</a:t>
+            </a:r>
+            <a:endParaRPr lang="en-US" altLang="ko-KR" sz="1200" kern="1200" dirty="0">
+              <a:solidFill>
+                <a:schemeClr val="tx1"/>
+              </a:solidFill>
+              <a:effectLst/>
+              <a:latin typeface="+mn-lt"/>
+              <a:ea typeface="+mn-ea"/>
+              <a:cs typeface="+mn-cs"/>
+            </a:endParaRPr>
+          </a:p>
+          <a:p>
+            <a:endParaRPr lang="en-US" altLang="ko-KR" sz="1200" kern="1200" dirty="0">
+              <a:solidFill>
+                <a:schemeClr val="tx1"/>
+              </a:solidFill>
+              <a:effectLst/>
+              <a:latin typeface="+mn-lt"/>
+              <a:ea typeface="+mn-ea"/>
+              <a:cs typeface="+mn-cs"/>
+            </a:endParaRPr>
+          </a:p>
+          <a:p>
             <a:endParaRPr kumimoji="1" lang="ko-KR" altLang="en-US" dirty="0"/>
           </a:p>
         </p:txBody>
@@ -1822,7 +2758,57 @@
                 <a:ea typeface="+mn-ea"/>
                 <a:cs typeface="+mn-cs"/>
               </a:rPr>
-              <a:t>"Before we get to the numbers, let me translate what we just saw into plain terms — because the story is actually quite intuitive. First: more supply means lower spreads. As Tether and Circle grew, they bought more T-bills to back their tokens. More T-bill buying pushes Treasury yields down relative to overnight rates — that's the spread compressing. Second: when a crisis hits, spreads spike. During the LUNA collapse in May 2022, issuers were forced to sell T-bills to pay back redemptions. That sudden selling pushed yields up — the privilege reversed. Third: the buffer was dangerously thin exactly when it mattered most. In 2022, liquid cash reserves were near zero. Issuers had no cushion. They had to sell assets into a falling market. These three patterns together are what our regressions test."</a:t>
+              <a:t>"Before we get to the numbers, let me translate what we just saw into plain terms — because the story is actually quite intuitive. First: more supply means lower spreads. As Tether and Circle grew, they bought more T-bills to back their tokens. More T-bill buying pushes Treasury yields down relative to overnight rates — that's the spread compressing. </a:t>
+            </a:r>
+          </a:p>
+          <a:p>
+            <a:endParaRPr lang="en-US" altLang="ko-KR" sz="1200" b="0" i="0" kern="1200" dirty="0">
+              <a:solidFill>
+                <a:schemeClr val="tx1"/>
+              </a:solidFill>
+              <a:effectLst/>
+              <a:latin typeface="+mn-lt"/>
+              <a:ea typeface="+mn-ea"/>
+              <a:cs typeface="+mn-cs"/>
+            </a:endParaRPr>
+          </a:p>
+          <a:p>
+            <a:r>
+              <a:rPr lang="en-US" altLang="ko-KR" sz="1200" b="0" i="0" kern="1200" dirty="0">
+                <a:solidFill>
+                  <a:schemeClr val="tx1"/>
+                </a:solidFill>
+                <a:effectLst/>
+                <a:latin typeface="+mn-lt"/>
+                <a:ea typeface="+mn-ea"/>
+                <a:cs typeface="+mn-cs"/>
+              </a:rPr>
+              <a:t>Second: when a crisis hits, spreads spike. During the LUNA collapse in May 2022, issuers were forced to sell T-bills to pay back redemptions. That sudden selling pushed yields up — the privilege reversed. </a:t>
+            </a:r>
+          </a:p>
+          <a:p>
+            <a:endParaRPr lang="en-US" altLang="ko-KR" sz="1200" b="0" i="0" kern="1200" dirty="0">
+              <a:solidFill>
+                <a:schemeClr val="tx1"/>
+              </a:solidFill>
+              <a:effectLst/>
+              <a:latin typeface="+mn-lt"/>
+              <a:ea typeface="+mn-ea"/>
+              <a:cs typeface="+mn-cs"/>
+            </a:endParaRPr>
+          </a:p>
+          <a:p>
+            <a:r>
+              <a:rPr lang="en-US" altLang="ko-KR" sz="1200" b="0" i="0" kern="1200" dirty="0">
+                <a:solidFill>
+                  <a:schemeClr val="tx1"/>
+                </a:solidFill>
+                <a:effectLst/>
+                <a:latin typeface="+mn-lt"/>
+                <a:ea typeface="+mn-ea"/>
+                <a:cs typeface="+mn-cs"/>
+              </a:rPr>
+              <a:t>Third: the buffer was dangerously thin exactly when it mattered most. In 2022, liquid cash reserves were near zero. Issuers had no cushion. They had to sell assets into a falling market. These three patterns together are what our regressions test."</a:t>
             </a:r>
           </a:p>
           <a:p>
@@ -1914,7 +2900,7 @@
           <a:lstStyle/>
           <a:p>
             <a:r>
-              <a:rPr lang="en-US" altLang="ko-KR" sz="1200" b="0" i="0" kern="1200" dirty="0">
+              <a:rPr lang="en-US" altLang="ko-KR" sz="1200" i="1" kern="1200" dirty="0">
                 <a:solidFill>
                   <a:schemeClr val="tx1"/>
                 </a:solidFill>
@@ -1923,14 +2909,20 @@
                 <a:ea typeface="+mn-ea"/>
                 <a:cs typeface="+mn-cs"/>
               </a:rPr>
-              <a:t>"Our first result confirms Hypothesis 1. The coefficient on stablecoin supply growth — beta-one — is negative 6.02, and it is statistically significant at the 5% level. The double star here means there is less than a 5% chance this result is due to random noise. In practical terms: every 1% growth in stablecoin supply compresses the Treasury spread by about 6 basis points. When you consider that the typical monthly move in this spread is only 10 to 15 basis points, that's a meaningful effect. The model explains 50% of the variation in the spread — which is strong for a monthly macro regression. Looking at the table, you'll notice that the buffer variables — theta, L, and the interaction term — are not individually significant at this sample size of 51 months. We address that directly on the next slide."</a:t>
-            </a:r>
-          </a:p>
-          <a:p>
-            <a:br>
-              <a:rPr lang="en-US" altLang="ko-KR" dirty="0"/>
-            </a:br>
-            <a:endParaRPr kumimoji="1" lang="ko-KR" altLang="en-US" dirty="0"/>
+              <a:t>"To estimate this equation, we used OLS — ordinary least squares — which finds the line that best fits our 51 months of data. The standard errors are adjusted for time-series correlation using the Newey-West method. Here's what we found." </a:t>
+            </a:r>
+            <a:r>
+              <a:rPr lang="en-US" altLang="ko-KR" sz="1200" kern="1200" dirty="0">
+                <a:solidFill>
+                  <a:schemeClr val="tx1"/>
+                </a:solidFill>
+                <a:effectLst/>
+                <a:latin typeface="+mn-lt"/>
+                <a:ea typeface="+mn-ea"/>
+                <a:cs typeface="+mn-cs"/>
+              </a:rPr>
+              <a:t>Our first result confirms Hypothesis 1. The coefficient on stablecoin supply growth — beta-one — is negative 6.02, and it is statistically significant at the 5% level. The double star here means there is less than a 5% chance this result is due to random noise. Looking at the table, you'll notice that the buffer variables — theta, L, and the interaction term — are not individually significant at this sample size of 51 months. So why wasn’t it significant?</a:t>
+            </a:r>
           </a:p>
         </p:txBody>
       </p:sp>
@@ -5370,7 +6362,7 @@
         <p:spPr>
           <a:xfrm>
             <a:off x="365760" y="960120"/>
-            <a:ext cx="11430000" cy="1005840"/>
+            <a:ext cx="11430000" cy="621792"/>
           </a:xfrm>
           <a:prstGeom prst="rect">
             <a:avLst/>
@@ -5466,7 +6458,7 @@
         </p:nvSpPr>
         <p:spPr>
           <a:xfrm>
-            <a:off x="365760" y="2103120"/>
+            <a:off x="365760" y="1664208"/>
             <a:ext cx="11430000" cy="365760"/>
           </a:xfrm>
           <a:prstGeom prst="rect">
@@ -5501,8 +6493,8 @@
         </p:nvSpPr>
         <p:spPr>
           <a:xfrm>
-            <a:off x="365760" y="2606040"/>
-            <a:ext cx="5577840" cy="2926080"/>
+            <a:off x="365760" y="2167128"/>
+            <a:ext cx="3596640" cy="2926080"/>
           </a:xfrm>
           <a:prstGeom prst="rect">
             <a:avLst/>
@@ -5545,7 +6537,7 @@
         </p:nvSpPr>
         <p:spPr>
           <a:xfrm>
-            <a:off x="548640" y="2724912"/>
+            <a:off x="548640" y="2286000"/>
             <a:ext cx="5212080" cy="347472"/>
           </a:xfrm>
           <a:prstGeom prst="rect">
@@ -5580,7 +6572,7 @@
         </p:nvSpPr>
         <p:spPr>
           <a:xfrm>
-            <a:off x="548640" y="3108960"/>
+            <a:off x="548640" y="2670048"/>
             <a:ext cx="5212080" cy="777240"/>
           </a:xfrm>
           <a:prstGeom prst="rect">
@@ -5615,7 +6607,7 @@
         </p:nvSpPr>
         <p:spPr>
           <a:xfrm>
-            <a:off x="548640" y="3913632"/>
+            <a:off x="548640" y="3474720"/>
             <a:ext cx="5212080" cy="347472"/>
           </a:xfrm>
           <a:prstGeom prst="rect">
@@ -5650,7 +6642,7 @@
         </p:nvSpPr>
         <p:spPr>
           <a:xfrm>
-            <a:off x="548640" y="4315968"/>
+            <a:off x="548640" y="3877056"/>
             <a:ext cx="5212080" cy="914400"/>
           </a:xfrm>
           <a:prstGeom prst="rect">
@@ -5666,7 +6658,7 @@
           <a:p>
             <a:pPr algn="l"/>
             <a:r>
-              <a:rPr sz="1300" b="0" i="0">
+              <a:rPr sz="1300" b="0" i="0" dirty="0">
                 <a:solidFill>
                   <a:srgbClr val="AAC4E8"/>
                 </a:solidFill>
@@ -5686,8 +6678,8 @@
         </p:nvSpPr>
         <p:spPr>
           <a:xfrm>
-            <a:off x="6217920" y="2606040"/>
-            <a:ext cx="5577840" cy="2926080"/>
+            <a:off x="4145280" y="2167128"/>
+            <a:ext cx="7650480" cy="2926080"/>
           </a:xfrm>
           <a:prstGeom prst="rect">
             <a:avLst/>
@@ -5730,7 +6722,7 @@
         </p:nvSpPr>
         <p:spPr>
           <a:xfrm>
-            <a:off x="6400800" y="2724912"/>
+            <a:off x="4328160" y="2286000"/>
             <a:ext cx="5212080" cy="347472"/>
           </a:xfrm>
           <a:prstGeom prst="rect">
@@ -5765,8 +6757,8 @@
         </p:nvSpPr>
         <p:spPr>
           <a:xfrm>
-            <a:off x="6400800" y="3108960"/>
-            <a:ext cx="5212080" cy="777240"/>
+            <a:off x="4328160" y="2670048"/>
+            <a:ext cx="5212080" cy="830997"/>
           </a:xfrm>
           <a:prstGeom prst="rect">
             <a:avLst/>
@@ -5781,13 +6773,46 @@
           <a:p>
             <a:pPr algn="l"/>
             <a:r>
-              <a:rPr sz="3000" b="1" i="0">
+              <a:rPr sz="3000" b="1" i="0" dirty="0" err="1">
                 <a:solidFill>
                   <a:srgbClr val="FFFFFF"/>
                 </a:solidFill>
                 <a:latin typeface="Calibri"/>
               </a:rPr>
-              <a:t>L×ΔlnS  =  +49.17</a:t>
+              <a:t>L×ΔlnS</a:t>
+            </a:r>
+            <a:r>
+              <a:rPr sz="3000" b="1" i="0" dirty="0">
+                <a:solidFill>
+                  <a:srgbClr val="FFFFFF"/>
+                </a:solidFill>
+                <a:latin typeface="Calibri"/>
+              </a:rPr>
+              <a:t>  =  +49.17</a:t>
+            </a:r>
+            <a:endParaRPr lang="en-US" sz="3000" b="1" i="0" dirty="0">
+              <a:solidFill>
+                <a:srgbClr val="FFFFFF"/>
+              </a:solidFill>
+              <a:latin typeface="Calibri"/>
+            </a:endParaRPr>
+          </a:p>
+          <a:p>
+            <a:r>
+              <a:rPr lang="el-GR" altLang="ko-KR" dirty="0">
+                <a:solidFill>
+                  <a:schemeClr val="bg1"/>
+                </a:solidFill>
+              </a:rPr>
+              <a:t>β₁ + β₄ × </a:t>
+            </a:r>
+            <a:r>
+              <a:rPr lang="en-US" altLang="ko-KR" dirty="0">
+                <a:solidFill>
+                  <a:schemeClr val="bg1"/>
+                </a:solidFill>
+              </a:rPr>
+              <a:t>L = −8.14 + 49.17 × L</a:t>
             </a:r>
           </a:p>
         </p:txBody>
@@ -5800,7 +6825,7 @@
         </p:nvSpPr>
         <p:spPr>
           <a:xfrm>
-            <a:off x="6400800" y="3913632"/>
+            <a:off x="7342632" y="2823603"/>
             <a:ext cx="5212080" cy="347472"/>
           </a:xfrm>
           <a:prstGeom prst="rect">
@@ -5816,7 +6841,7 @@
           <a:p>
             <a:pPr algn="l"/>
             <a:r>
-              <a:rPr sz="1800" b="1" i="0">
+              <a:rPr sz="1800" b="1" i="0" dirty="0">
                 <a:solidFill>
                   <a:srgbClr val="FFD700"/>
                 </a:solidFill>
@@ -5835,8 +6860,8 @@
         </p:nvSpPr>
         <p:spPr>
           <a:xfrm>
-            <a:off x="6400800" y="4315968"/>
-            <a:ext cx="5212080" cy="914400"/>
+            <a:off x="4310742" y="3548793"/>
+            <a:ext cx="7485017" cy="2077492"/>
           </a:xfrm>
           <a:prstGeom prst="rect">
             <a:avLst/>
@@ -5849,11 +6874,104 @@
           </a:bodyPr>
           <a:lstStyle/>
           <a:p>
+            <a:r>
+              <a:rPr lang="en-US" altLang="ko-KR" dirty="0">
+                <a:solidFill>
+                  <a:schemeClr val="bg1"/>
+                </a:solidFill>
+              </a:rPr>
+              <a:t>When L is </a:t>
+            </a:r>
+            <a:r>
+              <a:rPr lang="en-US" altLang="ko-KR" b="1" dirty="0">
+                <a:solidFill>
+                  <a:schemeClr val="bg1"/>
+                </a:solidFill>
+              </a:rPr>
+              <a:t>low</a:t>
+            </a:r>
+            <a:r>
+              <a:rPr lang="en-US" altLang="ko-KR" dirty="0">
+                <a:solidFill>
+                  <a:schemeClr val="bg1"/>
+                </a:solidFill>
+              </a:rPr>
+              <a:t> (say 0.05): total effect = −8.14 + (49.17 × 0.05) = </a:t>
+            </a:r>
+            <a:r>
+              <a:rPr lang="en-US" altLang="ko-KR" b="1" dirty="0">
+                <a:solidFill>
+                  <a:schemeClr val="bg1"/>
+                </a:solidFill>
+              </a:rPr>
+              <a:t>−5.68</a:t>
+            </a:r>
+            <a:r>
+              <a:rPr lang="en-US" altLang="ko-KR" dirty="0">
+                <a:solidFill>
+                  <a:schemeClr val="bg1"/>
+                </a:solidFill>
+              </a:rPr>
+              <a:t> → strong compression, issuers are actively buying T-bills</a:t>
+            </a:r>
+          </a:p>
+          <a:p>
+            <a:r>
+              <a:rPr lang="en-US" altLang="ko-KR" dirty="0">
+                <a:solidFill>
+                  <a:schemeClr val="bg1"/>
+                </a:solidFill>
+              </a:rPr>
+              <a:t>When L is </a:t>
+            </a:r>
+            <a:r>
+              <a:rPr lang="en-US" altLang="ko-KR" b="1" dirty="0">
+                <a:solidFill>
+                  <a:schemeClr val="bg1"/>
+                </a:solidFill>
+              </a:rPr>
+              <a:t>high</a:t>
+            </a:r>
+            <a:r>
+              <a:rPr lang="en-US" altLang="ko-KR" dirty="0">
+                <a:solidFill>
+                  <a:schemeClr val="bg1"/>
+                </a:solidFill>
+              </a:rPr>
+              <a:t> (say 0.16): total effect = −8.14 + (49.17 × 0.16) = </a:t>
+            </a:r>
+            <a:r>
+              <a:rPr lang="en-US" altLang="ko-KR" b="1" dirty="0">
+                <a:solidFill>
+                  <a:schemeClr val="bg1"/>
+                </a:solidFill>
+              </a:rPr>
+              <a:t>−0.27</a:t>
+            </a:r>
+            <a:r>
+              <a:rPr lang="en-US" altLang="ko-KR" dirty="0">
+                <a:solidFill>
+                  <a:schemeClr val="bg1"/>
+                </a:solidFill>
+              </a:rPr>
+              <a:t> → effect nearly disappears, issuers have enough cash and don't need to move T-bill markets</a:t>
+            </a:r>
+          </a:p>
+          <a:p>
             <a:pPr algn="l"/>
-            <a:r>
-              <a:rPr sz="1300" b="0" i="0">
-                <a:solidFill>
-                  <a:srgbClr val="AAC4E8"/>
+            <a:endParaRPr lang="en-US" sz="1300" b="0" i="0" dirty="0">
+              <a:solidFill>
+                <a:schemeClr val="bg1"/>
+              </a:solidFill>
+              <a:latin typeface="Calibri"/>
+            </a:endParaRPr>
+          </a:p>
+          <a:p>
+            <a:pPr algn="l"/>
+            <a:r>
+              <a:rPr sz="1300" b="0" i="0" dirty="0">
+                <a:solidFill>
+                  <a:schemeClr val="bg1"/>
                 </a:solidFill>
                 <a:latin typeface="Calibri"/>
               </a:rPr>
@@ -6051,7 +7169,11 @@
           <a:lstStyle/>
           <a:p>
             <a:pPr algn="ctr"/>
-            <a:endParaRPr/>
+            <a:r>
+              <a:rPr lang="en-US" dirty="0"/>
+              <a:t>d</a:t>
+            </a:r>
+            <a:endParaRPr dirty="0"/>
           </a:p>
         </p:txBody>
       </p:sp>
@@ -6410,7 +7532,7 @@
           <a:p>
             <a:pPr algn="l"/>
             <a:r>
-              <a:rPr sz="1300" b="0" i="0">
+              <a:rPr sz="1300" b="0" i="0" dirty="0">
                 <a:solidFill>
                   <a:srgbClr val="1A1A2E"/>
                 </a:solidFill>
@@ -6430,8 +7552,8 @@
         </p:nvSpPr>
         <p:spPr>
           <a:xfrm>
-            <a:off x="320040" y="6035040"/>
-            <a:ext cx="6400800" cy="274320"/>
+            <a:off x="2931795" y="4678198"/>
+            <a:ext cx="6400800" cy="246221"/>
           </a:xfrm>
           <a:prstGeom prst="rect">
             <a:avLst/>
@@ -6446,13 +7568,13 @@
           <a:p>
             <a:pPr algn="l"/>
             <a:r>
-              <a:rPr sz="1000" b="0" i="1">
+              <a:rPr sz="1000" b="0" i="1" dirty="0">
                 <a:solidFill>
                   <a:srgbClr val="555566"/>
                 </a:solidFill>
                 <a:latin typeface="Calibri"/>
               </a:rPr>
-              <a:t>← Lower SSR = better model fit at that threshold value</a:t>
+              <a:t> Lower SSR = better model fit at that threshold value</a:t>
             </a:r>
           </a:p>
         </p:txBody>
@@ -6481,7 +7603,7 @@
           <a:p>
             <a:pPr algn="ctr"/>
             <a:r>
-              <a:rPr sz="1100" b="0" i="1">
+              <a:rPr sz="1100" b="0" i="1" dirty="0">
                 <a:solidFill>
                   <a:srgbClr val="555566"/>
                 </a:solidFill>
@@ -6533,6 +7655,101 @@
                 <a:schemeClr val="bg1"/>
               </a:solidFill>
             </a:endParaRPr>
+          </a:p>
+        </p:txBody>
+      </p:sp>
+      <p:sp>
+        <p:nvSpPr>
+          <p:cNvPr id="16" name="TextBox 15">
+            <a:extLst>
+              <a:ext uri="{FF2B5EF4-FFF2-40B4-BE49-F238E27FC236}">
+                <a16:creationId xmlns:a16="http://schemas.microsoft.com/office/drawing/2014/main" id="{289DC43A-B951-5EA0-989B-41C703A8AEE5}"/>
+              </a:ext>
+            </a:extLst>
+          </p:cNvPr>
+          <p:cNvSpPr txBox="1"/>
+          <p:nvPr/>
+        </p:nvSpPr>
+        <p:spPr>
+          <a:xfrm>
+            <a:off x="320040" y="1440898"/>
+            <a:ext cx="4663440" cy="292388"/>
+          </a:xfrm>
+          <a:prstGeom prst="rect">
+            <a:avLst/>
+          </a:prstGeom>
+          <a:noFill/>
+        </p:spPr>
+        <p:txBody>
+          <a:bodyPr wrap="square">
+            <a:spAutoFit/>
+          </a:bodyPr>
+          <a:lstStyle/>
+          <a:p>
+            <a:pPr algn="l"/>
+            <a:r>
+              <a:rPr lang="en-US" sz="1300" b="0" i="0" dirty="0">
+                <a:solidFill>
+                  <a:srgbClr val="1A1A2E"/>
+                </a:solidFill>
+                <a:latin typeface="Calibri"/>
+              </a:rPr>
+              <a:t>SSR : Sum of Squared Residuals </a:t>
+            </a:r>
+            <a:endParaRPr sz="1300" b="0" i="0" dirty="0">
+              <a:solidFill>
+                <a:srgbClr val="1A1A2E"/>
+              </a:solidFill>
+              <a:latin typeface="Calibri"/>
+            </a:endParaRPr>
+          </a:p>
+        </p:txBody>
+      </p:sp>
+      <p:sp>
+        <p:nvSpPr>
+          <p:cNvPr id="18" name="위쪽 화살표[U] 17">
+            <a:extLst>
+              <a:ext uri="{FF2B5EF4-FFF2-40B4-BE49-F238E27FC236}">
+                <a16:creationId xmlns:a16="http://schemas.microsoft.com/office/drawing/2014/main" id="{45E3C1A4-961C-FE06-84C4-123F730A75B0}"/>
+              </a:ext>
+            </a:extLst>
+          </p:cNvPr>
+          <p:cNvSpPr/>
+          <p:nvPr/>
+        </p:nvSpPr>
+        <p:spPr>
+          <a:xfrm>
+            <a:off x="5193665" y="5097563"/>
+            <a:ext cx="1527175" cy="846037"/>
+          </a:xfrm>
+          <a:prstGeom prst="upArrow">
+            <a:avLst/>
+          </a:prstGeom>
+        </p:spPr>
+        <p:style>
+          <a:lnRef idx="1">
+            <a:schemeClr val="accent1"/>
+          </a:lnRef>
+          <a:fillRef idx="3">
+            <a:schemeClr val="accent1"/>
+          </a:fillRef>
+          <a:effectRef idx="2">
+            <a:schemeClr val="accent1"/>
+          </a:effectRef>
+          <a:fontRef idx="minor">
+            <a:schemeClr val="lt1"/>
+          </a:fontRef>
+        </p:style>
+        <p:txBody>
+          <a:bodyPr rtlCol="0" anchor="ctr"/>
+          <a:lstStyle/>
+          <a:p>
+            <a:pPr algn="ctr"/>
+            <a:r>
+              <a:rPr kumimoji="1" lang="en-US" altLang="ko-KR" dirty="0"/>
+              <a:t>13%</a:t>
+            </a:r>
+            <a:endParaRPr kumimoji="1" lang="ko-KR" altLang="en-US" dirty="0"/>
           </a:p>
         </p:txBody>
       </p:sp>
@@ -6956,7 +8173,7 @@
         <p:spPr>
           <a:xfrm>
             <a:off x="548640" y="3291840"/>
-            <a:ext cx="5120640" cy="2103120"/>
+            <a:ext cx="5120640" cy="1754326"/>
           </a:xfrm>
           <a:prstGeom prst="rect">
             <a:avLst/>
@@ -6969,17 +8186,16 @@
           </a:bodyPr>
           <a:lstStyle/>
           <a:p>
-            <a:pPr algn="l"/>
-            <a:r>
-              <a:rPr sz="1400" b="0" i="0">
-                <a:solidFill>
-                  <a:srgbClr val="1A1A2E"/>
-                </a:solidFill>
-                <a:latin typeface="Calibri"/>
-              </a:rPr>
-              <a:t>Supply growth STRONGLY compresses spreads.
-Issuers don't have enough cash to pay redemptions, so they sell T-bills — moving the market.</a:t>
-            </a:r>
+            <a:r>
+              <a:rPr lang="en-US" altLang="ko-KR" i="1" dirty="0"/>
+              <a:t>"With no cash buffer, every new token issued requires buying T-bills. That constant T-bill demand compresses spreads strongly. And during redemptions, they have no cash — so they must sell T-bills too. Their activity moves the market in both directions."</a:t>
+            </a:r>
+            <a:endParaRPr sz="1400" b="0" i="0" dirty="0">
+              <a:solidFill>
+                <a:srgbClr val="1A1A2E"/>
+              </a:solidFill>
+              <a:latin typeface="Calibri"/>
+            </a:endParaRPr>
           </a:p>
         </p:txBody>
       </p:sp>
@@ -7165,7 +8381,7 @@
           <a:p>
             <a:pPr algn="ctr"/>
             <a:r>
-              <a:rPr sz="4200" b="1" i="0">
+              <a:rPr sz="4200" b="1" i="0" dirty="0">
                 <a:solidFill>
                   <a:srgbClr val="1A7A4A"/>
                 </a:solidFill>
@@ -7185,7 +8401,7 @@
         <p:spPr>
           <a:xfrm>
             <a:off x="6492240" y="3291840"/>
-            <a:ext cx="5120640" cy="2103120"/>
+            <a:ext cx="5120640" cy="1200329"/>
           </a:xfrm>
           <a:prstGeom prst="rect">
             <a:avLst/>
@@ -7198,17 +8414,16 @@
           </a:bodyPr>
           <a:lstStyle/>
           <a:p>
-            <a:pPr algn="l"/>
-            <a:r>
-              <a:rPr sz="1400" b="0" i="0">
-                <a:solidFill>
-                  <a:srgbClr val="1A1A2E"/>
-                </a:solidFill>
-                <a:latin typeface="Calibri"/>
-              </a:rPr>
-              <a:t>Supply growth has NO compression effect.
-Issuers use their cash buffer to absorb redemptions — T-bill holdings stay intact, spreads are undisturbed.</a:t>
-            </a:r>
+            <a:r>
+              <a:rPr lang="en-US" altLang="ko-KR" i="1" dirty="0"/>
+              <a:t>"With enough cash on hand, new tokens are backed by existing reserves — no T-bill buying needed. During redemptions, cash absorbs the shock instead of T-bill selling. The T-bill market is undisturbed."</a:t>
+            </a:r>
+            <a:endParaRPr sz="1400" b="0" i="0" dirty="0">
+              <a:solidFill>
+                <a:srgbClr val="1A1A2E"/>
+              </a:solidFill>
+              <a:latin typeface="Calibri"/>
+            </a:endParaRPr>
           </a:p>
         </p:txBody>
       </p:sp>
@@ -13292,7 +14507,7 @@
         <p:spPr>
           <a:xfrm>
             <a:off x="8119871" y="1075509"/>
-            <a:ext cx="3887071" cy="5216813"/>
+            <a:ext cx="4068954" cy="5463034"/>
           </a:xfrm>
           <a:prstGeom prst="rect">
             <a:avLst/>
@@ -13317,23 +14532,65 @@
                 </a:solidFill>
                 <a:latin typeface="Calibri"/>
               </a:rPr>
-              <a:t>Three panels, one story</a:t>
-            </a:r>
+              <a:t>Three panels</a:t>
+            </a:r>
+            <a:endParaRPr lang="en-US" b="1" i="0" dirty="0">
+              <a:solidFill>
+                <a:srgbClr val="1B3A72"/>
+              </a:solidFill>
+              <a:latin typeface="Calibri"/>
+            </a:endParaRPr>
           </a:p>
           <a:p>
             <a:pPr algn="l">
+              <a:spcBef>
+                <a:spcPts val="400"/>
+              </a:spcBef>
+            </a:pPr>
+            <a:r>
+              <a:rPr sz="1600" b="0" i="0" dirty="0">
+                <a:solidFill>
+                  <a:srgbClr val="1A1A2E"/>
+                </a:solidFill>
+                <a:latin typeface="Calibri"/>
+              </a:rPr>
+              <a:t>❖  A: Treasury spread — compresses when supply grows, spikes in crises</a:t>
+            </a:r>
+            <a:r>
+              <a:rPr lang="en-US" sz="1600" b="0" i="0" dirty="0">
+                <a:solidFill>
+                  <a:srgbClr val="1A1A2E"/>
+                </a:solidFill>
+                <a:latin typeface="Calibri"/>
+              </a:rPr>
+              <a:t>.</a:t>
+            </a:r>
+          </a:p>
+          <a:p>
+            <a:pPr>
               <a:spcBef>
                 <a:spcPts val="900"/>
               </a:spcBef>
             </a:pPr>
             <a:r>
-              <a:rPr sz="1600" b="0" i="0" dirty="0">
-                <a:solidFill>
-                  <a:srgbClr val="1A1A2E"/>
-                </a:solidFill>
-                <a:latin typeface="Calibri"/>
-              </a:rPr>
-              <a:t>❖  A: Treasury spread — compresses when supply grows, spikes in crises</a:t>
+              <a:rPr lang="en-US" altLang="ko-KR" sz="1600" dirty="0"/>
+              <a:t>T-bill (DTB3) is a </a:t>
+            </a:r>
+            <a:r>
+              <a:rPr lang="en-US" altLang="ko-KR" sz="1600" b="1" dirty="0"/>
+              <a:t>3-month U.S. government bond</a:t>
+            </a:r>
+            <a:r>
+              <a:rPr lang="en-US" altLang="ko-KR" sz="1600" dirty="0"/>
+              <a:t>. </a:t>
+            </a:r>
+            <a:r>
+              <a:rPr lang="en-US" altLang="ko-KR" sz="1600" b="1" dirty="0"/>
+              <a:t>Secured Overnight Financing Rate </a:t>
+            </a:r>
+            <a:r>
+              <a:rPr lang="en-US" altLang="ko-KR" sz="1600" dirty="0"/>
+              <a:t>is the rate banks charge for one night. </a:t>
             </a:r>
             <a:endParaRPr lang="en-US" sz="1600" b="0" i="0" dirty="0">
               <a:solidFill>
@@ -13356,19 +14613,6 @@
               </a:rPr>
               <a:t>❖  Red vertical lines = stress events we study</a:t>
             </a:r>
-          </a:p>
-          <a:p>
-            <a:pPr algn="l">
-              <a:spcBef>
-                <a:spcPts val="900"/>
-              </a:spcBef>
-            </a:pPr>
-            <a:endParaRPr lang="en-US" sz="1600" b="0" i="0" dirty="0">
-              <a:solidFill>
-                <a:srgbClr val="1A1A2E"/>
-              </a:solidFill>
-              <a:latin typeface="Calibri"/>
-            </a:endParaRPr>
           </a:p>
           <a:p>
             <a:pPr algn="l">

--- a/FINAL_0512_Stablecoin_Exorbitant_Privilege.pptx
+++ b/FINAL_0512_Stablecoin_Exorbitant_Privilege.pptx
@@ -670,7 +670,7 @@
               <a:defRPr/>
             </a:pPr>
             <a:r>
-              <a:rPr lang="en-US" altLang="ko-KR" sz="1200" b="0" i="0" kern="1200" dirty="0">
+              <a:rPr lang="en-US" altLang="ko-KR" sz="1200" kern="1200" dirty="0">
                 <a:solidFill>
                   <a:schemeClr val="tx1"/>
                 </a:solidFill>
@@ -679,10 +679,10 @@
                 <a:ea typeface="+mn-ea"/>
                 <a:cs typeface="+mn-cs"/>
               </a:rPr>
-              <a:t>"So why are the buffer variables not significant in the full sample? </a:t>
-            </a:r>
-            <a:r>
-              <a:rPr lang="en-US" altLang="ko-KR" sz="1200" kern="1200" dirty="0">
+              <a:t>It comes down to </a:t>
+            </a:r>
+            <a:r>
+              <a:rPr lang="en-US" altLang="ko-KR" sz="1200" b="1" kern="1200" dirty="0">
                 <a:solidFill>
                   <a:schemeClr val="tx1"/>
                 </a:solidFill>
@@ -691,10 +691,10 @@
                 <a:ea typeface="+mn-ea"/>
                 <a:cs typeface="+mn-cs"/>
               </a:rPr>
-              <a:t>It comes down to </a:t>
-            </a:r>
-            <a:r>
-              <a:rPr lang="en-US" altLang="ko-KR" sz="1200" b="1" kern="1200" dirty="0">
+              <a:t>data quality, not theory</a:t>
+            </a:r>
+            <a:r>
+              <a:rPr lang="en-US" altLang="ko-KR" sz="1200" kern="1200" dirty="0">
                 <a:solidFill>
                   <a:schemeClr val="tx1"/>
                 </a:solidFill>
@@ -703,8 +703,55 @@
                 <a:ea typeface="+mn-ea"/>
                 <a:cs typeface="+mn-cs"/>
               </a:rPr>
-              <a:t>data quality, not theory</a:t>
-            </a:r>
+              <a:t>. Tether and Circle only started publishing detailed, frequent reserve breakdowns after 2023. Before that, the cash reserves figures were either missing, infrequent, or less precise. </a:t>
+            </a:r>
+          </a:p>
+          <a:p>
+            <a:pPr marL="0" marR="0" lvl="0" indent="0" algn="l" defTabSz="914400" rtl="0" eaLnBrk="1" fontAlgn="auto" latinLnBrk="1" hangingPunct="1">
+              <a:lnSpc>
+                <a:spcPct val="100000"/>
+              </a:lnSpc>
+              <a:spcBef>
+                <a:spcPts val="0"/>
+              </a:spcBef>
+              <a:spcAft>
+                <a:spcPts val="0"/>
+              </a:spcAft>
+              <a:buClrTx/>
+              <a:buSzTx/>
+              <a:buFontTx/>
+              <a:buNone/>
+              <a:tabLst/>
+              <a:defRPr/>
+            </a:pPr>
+            <a:endParaRPr lang="en-US" altLang="ko-KR" sz="1200" kern="1200" dirty="0">
+              <a:solidFill>
+                <a:schemeClr val="tx1"/>
+              </a:solidFill>
+              <a:effectLst/>
+              <a:latin typeface="+mn-lt"/>
+              <a:ea typeface="+mn-ea"/>
+              <a:cs typeface="+mn-cs"/>
+            </a:endParaRPr>
+          </a:p>
+          <a:p>
+            <a:pPr marL="0" marR="0" lvl="0" indent="0" algn="l" defTabSz="914400" rtl="0" eaLnBrk="1" fontAlgn="auto" latinLnBrk="1" hangingPunct="1">
+              <a:lnSpc>
+                <a:spcPct val="100000"/>
+              </a:lnSpc>
+              <a:spcBef>
+                <a:spcPts val="0"/>
+              </a:spcBef>
+              <a:spcAft>
+                <a:spcPts val="0"/>
+              </a:spcAft>
+              <a:buClrTx/>
+              <a:buSzTx/>
+              <a:buFontTx/>
+              <a:buNone/>
+              <a:tabLst/>
+              <a:defRPr/>
+            </a:pPr>
             <a:r>
               <a:rPr lang="en-US" altLang="ko-KR" sz="1200" kern="1200" dirty="0">
                 <a:solidFill>
@@ -715,7 +762,23 @@
                 <a:ea typeface="+mn-ea"/>
                 <a:cs typeface="+mn-cs"/>
               </a:rPr>
-              <a:t>. Tether and Circle only started publishing detailed, frequent reserve breakdowns after 2023. Before that, the cash reserves figures were either missing, infrequent, or less precise. So the early part of our 51-month sample has noisy buffer data — which makes it harder for the regression to detect a real pattern. When we restrict our sample to January 2023 through March 2026 — the 39 months where attestation coverage is best — a much clearer picture emerges. The supply effect strengthens to negative 8.14, now significant at the 1% level. And crucially, the liquid buffer interaction term — L times delta-ln-S — becomes positive 49.17, also significant at the 1% level with a p-value of 0.004. This tells us the buffer mechanism is real. Our full sample is just too short to reach significance yet. As this data series extends past 2026, we expect both channels to confirm at the full sample level." </a:t>
+              <a:t>When we restrict our sample to January 2023 through March 2026 — the 39 months where attestation coverage is best — a much clearer picture emerges. The supply effect strengthens to negative 8.14, now significant at the 1% level. And crucially, the liquid buffer interaction term — L times delta-ln-S (</a:t>
+            </a:r>
+            <a:r>
+              <a:rPr lang="en-US" altLang="ko-KR" dirty="0"/>
+              <a:t>change in the natural log of S)</a:t>
+            </a:r>
+            <a:r>
+              <a:rPr lang="en-US" altLang="ko-KR" sz="1200" kern="1200" dirty="0">
+                <a:solidFill>
+                  <a:schemeClr val="tx1"/>
+                </a:solidFill>
+                <a:effectLst/>
+                <a:latin typeface="+mn-lt"/>
+                <a:ea typeface="+mn-ea"/>
+                <a:cs typeface="+mn-cs"/>
+              </a:rPr>
+              <a:t>— becomes positive 49.17, also significant at the 1% level with a p-value of 0.004. This tells us the buffer mechanism is real. Our full sample is just too short to reach significance yet. As this data series extends past 2026, we expect both channels to confirm at the full sample level." </a:t>
             </a:r>
             <a:r>
               <a:rPr lang="en-US" altLang="ko-KR" sz="1200" i="1" kern="1200" dirty="0">
@@ -870,7 +933,7 @@
                 <a:ea typeface="+mn-ea"/>
                 <a:cs typeface="+mn-cs"/>
               </a:rPr>
-              <a:t>. A lower point on the y-axis means a better fit.</a:t>
+              <a:t>. </a:t>
             </a:r>
           </a:p>
           <a:p>
@@ -884,10 +947,10 @@
                 <a:ea typeface="+mn-ea"/>
                 <a:cs typeface="+mn-cs"/>
               </a:rPr>
-              <a:t>The method — </a:t>
-            </a:r>
-            <a:r>
-              <a:rPr lang="en-US" altLang="ko-KR" sz="1200" b="1" kern="1200" dirty="0">
+              <a:t>The method tries splitting the 51 months at every possible value of L and asks </a:t>
+            </a:r>
+            <a:r>
+              <a:rPr lang="en-US" altLang="ko-KR" sz="1200" i="1" kern="1200" dirty="0">
                 <a:solidFill>
                   <a:schemeClr val="tx1"/>
                 </a:solidFill>
@@ -896,7 +959,7 @@
                 <a:ea typeface="+mn-ea"/>
                 <a:cs typeface="+mn-cs"/>
               </a:rPr>
-              <a:t>Hansen (2000) threshold regression</a:t>
+              <a:t>"if I use this value as my cut-off, how well does a two-group model explain the spread data?"</a:t>
             </a:r>
             <a:r>
               <a:rPr lang="en-US" altLang="ko-KR" sz="1200" kern="1200" dirty="0">
@@ -908,31 +971,7 @@
                 <a:ea typeface="+mn-ea"/>
                 <a:cs typeface="+mn-cs"/>
               </a:rPr>
-              <a:t> — works like this: it tries splitting the 51 months at every possible value of L and asks </a:t>
-            </a:r>
-            <a:r>
-              <a:rPr lang="en-US" altLang="ko-KR" sz="1200" i="1" kern="1200" dirty="0">
-                <a:solidFill>
-                  <a:schemeClr val="tx1"/>
-                </a:solidFill>
-                <a:effectLst/>
-                <a:latin typeface="+mn-lt"/>
-                <a:ea typeface="+mn-ea"/>
-                <a:cs typeface="+mn-cs"/>
-              </a:rPr>
-              <a:t>"if I use this value as my cut-off, how well does a two-group model explain the spread data?"</a:t>
-            </a:r>
-            <a:r>
-              <a:rPr lang="en-US" altLang="ko-KR" sz="1200" kern="1200" dirty="0">
-                <a:solidFill>
-                  <a:schemeClr val="tx1"/>
-                </a:solidFill>
-                <a:effectLst/>
-                <a:latin typeface="+mn-lt"/>
-                <a:ea typeface="+mn-ea"/>
-                <a:cs typeface="+mn-cs"/>
-              </a:rPr>
-              <a:t> It does this for every candidate value, one by one.</a:t>
+              <a:t> </a:t>
             </a:r>
           </a:p>
           <a:p>
@@ -1381,7 +1420,7 @@
                 <a:ea typeface="+mn-ea"/>
                 <a:cs typeface="+mn-cs"/>
               </a:rPr>
-              <a:t>. The T-bill market is undisturbed. The compression effect disappears.</a:t>
+              <a:t>. The T-bill market is undisturbed. The compression effect disappears. </a:t>
             </a:r>
           </a:p>
           <a:p>
@@ -2331,7 +2370,7 @@
                 <a:ea typeface="+mn-ea"/>
                 <a:cs typeface="+mn-cs"/>
               </a:rPr>
-              <a:t>, using U.S. Treasury bonds as collateral.</a:t>
+              <a:t>.</a:t>
             </a:r>
           </a:p>
           <a:p>
@@ -2544,7 +2583,7 @@
                 <a:ea typeface="+mn-ea"/>
                 <a:cs typeface="+mn-cs"/>
               </a:rPr>
-              <a:t>C: The red dashed line is the safety threshold we estimate — 13%.  When the </a:t>
+              <a:t>C: The red dashed line is the safety threshold we estimate to be the buffer— 13%.  When the </a:t>
             </a:r>
             <a:r>
               <a:rPr lang="en-US" altLang="ko-KR" sz="1200" b="1" kern="1200" dirty="0">
@@ -2556,31 +2595,7 @@
                 <a:ea typeface="+mn-ea"/>
                 <a:cs typeface="+mn-cs"/>
               </a:rPr>
-              <a:t>denominator (supply) falls fast</a:t>
-            </a:r>
-            <a:r>
-              <a:rPr lang="en-US" altLang="ko-KR" sz="1200" kern="1200" dirty="0">
-                <a:solidFill>
-                  <a:schemeClr val="tx1"/>
-                </a:solidFill>
-                <a:effectLst/>
-                <a:latin typeface="+mn-lt"/>
-                <a:ea typeface="+mn-ea"/>
-                <a:cs typeface="+mn-cs"/>
-              </a:rPr>
-              <a:t> </a:t>
-            </a:r>
-            <a:r>
-              <a:rPr lang="en-US" altLang="ko-KR" sz="1200" i="1" kern="1200" dirty="0">
-                <a:solidFill>
-                  <a:schemeClr val="tx1"/>
-                </a:solidFill>
-                <a:effectLst/>
-                <a:latin typeface="+mn-lt"/>
-                <a:ea typeface="+mn-ea"/>
-                <a:cs typeface="+mn-cs"/>
-              </a:rPr>
-              <a:t>our paper studies,</a:t>
+              <a:t>supply falls fast</a:t>
             </a:r>
             <a:r>
               <a:rPr lang="ko-KR" altLang="en-US" sz="1200" i="1" kern="1200" dirty="0">
@@ -2758,7 +2773,32 @@
                 <a:ea typeface="+mn-ea"/>
                 <a:cs typeface="+mn-cs"/>
               </a:rPr>
-              <a:t>"Before we get to the numbers, let me translate what we just saw into plain terms — because the story is actually quite intuitive. First: more supply means lower spreads. As Tether and Circle grew, they bought more T-bills to back their tokens. More T-bill buying pushes Treasury yields down relative to overnight rates — that's the spread compressing. </a:t>
+              <a:t>"Before we get to the numbers, let me translate what we just saw into plain terms.</a:t>
+            </a:r>
+          </a:p>
+          <a:p>
+            <a:endParaRPr lang="en-US" altLang="ko-KR" sz="1200" b="0" i="0" kern="1200" dirty="0">
+              <a:solidFill>
+                <a:schemeClr val="tx1"/>
+              </a:solidFill>
+              <a:effectLst/>
+              <a:latin typeface="+mn-lt"/>
+              <a:ea typeface="+mn-ea"/>
+              <a:cs typeface="+mn-cs"/>
+            </a:endParaRPr>
+          </a:p>
+          <a:p>
+            <a:r>
+              <a:rPr lang="en-US" altLang="ko-KR" sz="1200" b="0" i="0" kern="1200" dirty="0">
+                <a:solidFill>
+                  <a:schemeClr val="tx1"/>
+                </a:solidFill>
+                <a:effectLst/>
+                <a:latin typeface="+mn-lt"/>
+                <a:ea typeface="+mn-ea"/>
+                <a:cs typeface="+mn-cs"/>
+              </a:rPr>
+              <a:t>First: more supply means lower spreads. As Tether and Circle grew, they bought more T-bills to back their tokens. More T-bill buying pushes Treasury yields down relative to overnight rates — that's the spread compressing. </a:t>
             </a:r>
           </a:p>
           <a:p>
@@ -2909,8 +2949,10 @@
                 <a:ea typeface="+mn-ea"/>
                 <a:cs typeface="+mn-cs"/>
               </a:rPr>
-              <a:t>"To estimate this equation, we used OLS — ordinary least squares — which finds the line that best fits our 51 months of data. The standard errors are adjusted for time-series correlation using the Newey-West method. Here's what we found." </a:t>
-            </a:r>
+              <a:t>"To estimate this equation, we used OLS — ordinary least squares — which finds the line that best fits our 51 months of data. </a:t>
+            </a:r>
+          </a:p>
+          <a:p>
             <a:r>
               <a:rPr lang="en-US" altLang="ko-KR" sz="1200" kern="1200" dirty="0">
                 <a:solidFill>
@@ -2921,7 +2963,32 @@
                 <a:ea typeface="+mn-ea"/>
                 <a:cs typeface="+mn-cs"/>
               </a:rPr>
-              <a:t>Our first result confirms Hypothesis 1. The coefficient on stablecoin supply growth — beta-one — is negative 6.02, and it is statistically significant at the 5% level. The double star here means there is less than a 5% chance this result is due to random noise. Looking at the table, you'll notice that the buffer variables — theta, L, and the interaction term — are not individually significant at this sample size of 51 months. So why wasn’t it significant?</a:t>
+              <a:t>Our first result confirms Hypothesis 1. The coefficient on stablecoin supply growth — beta-one — is negative 6.02, and it is statistically significant at the 5% level. </a:t>
+            </a:r>
+          </a:p>
+          <a:p>
+            <a:endParaRPr lang="en-US" altLang="ko-KR" sz="1200" kern="1200" dirty="0">
+              <a:solidFill>
+                <a:schemeClr val="tx1"/>
+              </a:solidFill>
+              <a:effectLst/>
+              <a:latin typeface="+mn-lt"/>
+              <a:ea typeface="+mn-ea"/>
+              <a:cs typeface="+mn-cs"/>
+            </a:endParaRPr>
+          </a:p>
+          <a:p>
+            <a:r>
+              <a:rPr lang="en-US" altLang="ko-KR" sz="1200" kern="1200" dirty="0">
+                <a:solidFill>
+                  <a:schemeClr val="tx1"/>
+                </a:solidFill>
+                <a:effectLst/>
+                <a:latin typeface="+mn-lt"/>
+                <a:ea typeface="+mn-ea"/>
+                <a:cs typeface="+mn-cs"/>
+              </a:rPr>
+              <a:t>Looking at the table, you'll notice that the buffer variables — theta, L, and the interaction term — are not individually significant at this sample size of 51 months. So why wasn’t it significant?</a:t>
             </a:r>
           </a:p>
         </p:txBody>
@@ -7034,7 +7101,7 @@
         <p:spPr>
           <a:xfrm>
             <a:off x="548640" y="5760720"/>
-            <a:ext cx="11274552" cy="804672"/>
+            <a:ext cx="11274552" cy="830997"/>
           </a:xfrm>
           <a:prstGeom prst="rect">
             <a:avLst/>
@@ -7049,7 +7116,7 @@
           <a:p>
             <a:pPr algn="ctr"/>
             <a:r>
-              <a:rPr sz="1400" b="1" i="0">
+              <a:rPr sz="2400" b="1" i="0" dirty="0">
                 <a:solidFill>
                   <a:srgbClr val="FFFFFF"/>
                 </a:solidFill>
@@ -8188,9 +8255,13 @@
           <a:p>
             <a:r>
               <a:rPr lang="en-US" altLang="ko-KR" i="1" dirty="0"/>
-              <a:t>"With no cash buffer, every new token issued requires buying T-bills. That constant T-bill demand compresses spreads strongly. And during redemptions, they have no cash — so they must sell T-bills too. Their activity moves the market in both directions."</a:t>
-            </a:r>
-            <a:endParaRPr sz="1400" b="0" i="0" dirty="0">
+              <a:t>"With no cash buffer, every new token issued requires buying T-bills. That constant T-bill demand compresses spreads strongly. And during redemptions, they have no cash — so they must sell T-bills too. </a:t>
+            </a:r>
+            <a:r>
+              <a:rPr lang="en-US" altLang="ko-KR" b="1" i="1" dirty="0"/>
+              <a:t>Their activity moves the market in both directions."</a:t>
+            </a:r>
+            <a:endParaRPr sz="1400" b="1" i="0" dirty="0">
               <a:solidFill>
                 <a:srgbClr val="1A1A2E"/>
               </a:solidFill>
@@ -8416,9 +8487,13 @@
           <a:p>
             <a:r>
               <a:rPr lang="en-US" altLang="ko-KR" i="1" dirty="0"/>
-              <a:t>"With enough cash on hand, new tokens are backed by existing reserves — no T-bill buying needed. During redemptions, cash absorbs the shock instead of T-bill selling. The T-bill market is undisturbed."</a:t>
-            </a:r>
-            <a:endParaRPr sz="1400" b="0" i="0" dirty="0">
+              <a:t>"With enough cash on hand, new tokens are backed by existing reserves — no T-bill buying needed. During redemptions, cash absorbs the shock instead of T-bill selling. </a:t>
+            </a:r>
+            <a:r>
+              <a:rPr lang="en-US" altLang="ko-KR" b="1" i="1" dirty="0"/>
+              <a:t>The T-bill market is undisturbed."</a:t>
+            </a:r>
+            <a:endParaRPr sz="1400" b="1" i="0" dirty="0">
               <a:solidFill>
                 <a:srgbClr val="1A1A2E"/>
               </a:solidFill>
@@ -14893,6 +14968,53 @@
               <a:t>SVB</a:t>
             </a:r>
             <a:endParaRPr kumimoji="1" lang="ko-KR" altLang="en-US" dirty="0"/>
+          </a:p>
+        </p:txBody>
+      </p:sp>
+      <p:sp>
+        <p:nvSpPr>
+          <p:cNvPr id="11" name="오른쪽 화살표[R] 10">
+            <a:extLst>
+              <a:ext uri="{FF2B5EF4-FFF2-40B4-BE49-F238E27FC236}">
+                <a16:creationId xmlns:a16="http://schemas.microsoft.com/office/drawing/2014/main" id="{AC24544B-7ED7-9DC2-903C-F911A2F2D61B}"/>
+              </a:ext>
+            </a:extLst>
+          </p:cNvPr>
+          <p:cNvSpPr/>
+          <p:nvPr/>
+        </p:nvSpPr>
+        <p:spPr>
+          <a:xfrm>
+            <a:off x="991892" y="5238427"/>
+            <a:ext cx="650928" cy="356461"/>
+          </a:xfrm>
+          <a:prstGeom prst="rightArrow">
+            <a:avLst/>
+          </a:prstGeom>
+          <a:solidFill>
+            <a:srgbClr val="FF0000"/>
+          </a:solidFill>
+        </p:spPr>
+        <p:style>
+          <a:lnRef idx="1">
+            <a:schemeClr val="accent1"/>
+          </a:lnRef>
+          <a:fillRef idx="3">
+            <a:schemeClr val="accent1"/>
+          </a:fillRef>
+          <a:effectRef idx="2">
+            <a:schemeClr val="accent1"/>
+          </a:effectRef>
+          <a:fontRef idx="minor">
+            <a:schemeClr val="lt1"/>
+          </a:fontRef>
+        </p:style>
+        <p:txBody>
+          <a:bodyPr rtlCol="0" anchor="ctr"/>
+          <a:lstStyle/>
+          <a:p>
+            <a:pPr algn="ctr"/>
+            <a:endParaRPr kumimoji="1" lang="ko-KR" altLang="en-US"/>
           </a:p>
         </p:txBody>
       </p:sp>
@@ -16700,13 +16822,22 @@
           <a:p>
             <a:pPr algn="l"/>
             <a:r>
-              <a:rPr sz="1100" b="0" i="0">
+              <a:rPr sz="1100" b="0" i="0" dirty="0" err="1">
                 <a:solidFill>
                   <a:srgbClr val="1A1A2E"/>
                 </a:solidFill>
                 <a:latin typeface="Calibri"/>
               </a:rPr>
-              <a:t>θ  (Treasury Exposure)</a:t>
+              <a:t>θ</a:t>
+            </a:r>
+            <a:r>
+              <a:rPr sz="1100" b="0" i="0" dirty="0">
+                <a:solidFill>
+                  <a:srgbClr val="1A1A2E"/>
+                </a:solidFill>
+                <a:latin typeface="Calibri"/>
+              </a:rPr>
+              <a:t>  (Treasury Exposure)</a:t>
             </a:r>
           </a:p>
         </p:txBody>
@@ -17296,6 +17427,54 @@
                 <a:schemeClr val="bg1"/>
               </a:solidFill>
             </a:endParaRPr>
+          </a:p>
+        </p:txBody>
+      </p:sp>
+      <p:sp>
+        <p:nvSpPr>
+          <p:cNvPr id="40" name="오각형[P] 39">
+            <a:extLst>
+              <a:ext uri="{FF2B5EF4-FFF2-40B4-BE49-F238E27FC236}">
+                <a16:creationId xmlns:a16="http://schemas.microsoft.com/office/drawing/2014/main" id="{26F34FDF-1B68-ED00-129A-5CBE6EFCEE66}"/>
+              </a:ext>
+            </a:extLst>
+          </p:cNvPr>
+          <p:cNvSpPr/>
+          <p:nvPr/>
+        </p:nvSpPr>
+        <p:spPr>
+          <a:xfrm>
+            <a:off x="9756648" y="4645152"/>
+            <a:ext cx="2340864" cy="1042416"/>
+          </a:xfrm>
+          <a:prstGeom prst="homePlate">
+            <a:avLst/>
+          </a:prstGeom>
+        </p:spPr>
+        <p:style>
+          <a:lnRef idx="1">
+            <a:schemeClr val="accent1"/>
+          </a:lnRef>
+          <a:fillRef idx="3">
+            <a:schemeClr val="accent1"/>
+          </a:fillRef>
+          <a:effectRef idx="2">
+            <a:schemeClr val="accent1"/>
+          </a:effectRef>
+          <a:fontRef idx="minor">
+            <a:schemeClr val="lt1"/>
+          </a:fontRef>
+        </p:style>
+        <p:txBody>
+          <a:bodyPr rtlCol="0" anchor="ctr"/>
+          <a:lstStyle/>
+          <a:p>
+            <a:pPr algn="ctr"/>
+            <a:r>
+              <a:rPr kumimoji="1" lang="en-US" altLang="ko-KR" dirty="0"/>
+              <a:t>Not significant enough</a:t>
+            </a:r>
+            <a:endParaRPr kumimoji="1" lang="ko-KR" altLang="en-US" dirty="0"/>
           </a:p>
         </p:txBody>
       </p:sp>

--- a/FINAL_0512_Stablecoin_Exorbitant_Privilege.pptx
+++ b/FINAL_0512_Stablecoin_Exorbitant_Privilege.pptx
@@ -221,7 +221,7 @@
           <a:p>
             <a:fld id="{83EC6BE1-A4B7-974B-915D-03C1CF773469}" type="datetimeFigureOut">
               <a:rPr kumimoji="1" lang="ko-KR" altLang="en-US" smtClean="0"/>
-              <a:t>2026. 5. 10.</a:t>
+              <a:t>2026. 5. 11.</a:t>
             </a:fld>
             <a:endParaRPr kumimoji="1" lang="ko-KR" altLang="en-US"/>
           </a:p>
@@ -3208,7 +3208,7 @@
           <a:p>
             <a:fld id="{5BCAD085-E8A6-8845-BD4E-CB4CCA059FC4}" type="datetimeFigureOut">
               <a:rPr lang="en-US" smtClean="0"/>
-              <a:t>5/10/26</a:t>
+              <a:t>5/11/26</a:t>
             </a:fld>
             <a:endParaRPr lang="en-US"/>
           </a:p>
@@ -3376,7 +3376,7 @@
           <a:p>
             <a:fld id="{5BCAD085-E8A6-8845-BD4E-CB4CCA059FC4}" type="datetimeFigureOut">
               <a:rPr lang="en-US" smtClean="0"/>
-              <a:t>5/10/26</a:t>
+              <a:t>5/11/26</a:t>
             </a:fld>
             <a:endParaRPr lang="en-US"/>
           </a:p>
@@ -3554,7 +3554,7 @@
           <a:p>
             <a:fld id="{5BCAD085-E8A6-8845-BD4E-CB4CCA059FC4}" type="datetimeFigureOut">
               <a:rPr lang="en-US" smtClean="0"/>
-              <a:t>5/10/26</a:t>
+              <a:t>5/11/26</a:t>
             </a:fld>
             <a:endParaRPr lang="en-US"/>
           </a:p>
@@ -3722,7 +3722,7 @@
           <a:p>
             <a:fld id="{5BCAD085-E8A6-8845-BD4E-CB4CCA059FC4}" type="datetimeFigureOut">
               <a:rPr lang="en-US" smtClean="0"/>
-              <a:t>5/10/26</a:t>
+              <a:t>5/11/26</a:t>
             </a:fld>
             <a:endParaRPr lang="en-US"/>
           </a:p>
@@ -3967,7 +3967,7 @@
           <a:p>
             <a:fld id="{5BCAD085-E8A6-8845-BD4E-CB4CCA059FC4}" type="datetimeFigureOut">
               <a:rPr lang="en-US" smtClean="0"/>
-              <a:t>5/10/26</a:t>
+              <a:t>5/11/26</a:t>
             </a:fld>
             <a:endParaRPr lang="en-US"/>
           </a:p>
@@ -4252,7 +4252,7 @@
           <a:p>
             <a:fld id="{5BCAD085-E8A6-8845-BD4E-CB4CCA059FC4}" type="datetimeFigureOut">
               <a:rPr lang="en-US" smtClean="0"/>
-              <a:t>5/10/26</a:t>
+              <a:t>5/11/26</a:t>
             </a:fld>
             <a:endParaRPr lang="en-US"/>
           </a:p>
@@ -4671,7 +4671,7 @@
           <a:p>
             <a:fld id="{5BCAD085-E8A6-8845-BD4E-CB4CCA059FC4}" type="datetimeFigureOut">
               <a:rPr lang="en-US" smtClean="0"/>
-              <a:t>5/10/26</a:t>
+              <a:t>5/11/26</a:t>
             </a:fld>
             <a:endParaRPr lang="en-US"/>
           </a:p>
@@ -4788,7 +4788,7 @@
           <a:p>
             <a:fld id="{5BCAD085-E8A6-8845-BD4E-CB4CCA059FC4}" type="datetimeFigureOut">
               <a:rPr lang="en-US" smtClean="0"/>
-              <a:t>5/10/26</a:t>
+              <a:t>5/11/26</a:t>
             </a:fld>
             <a:endParaRPr lang="en-US"/>
           </a:p>
@@ -4883,7 +4883,7 @@
           <a:p>
             <a:fld id="{5BCAD085-E8A6-8845-BD4E-CB4CCA059FC4}" type="datetimeFigureOut">
               <a:rPr lang="en-US" smtClean="0"/>
-              <a:t>5/10/26</a:t>
+              <a:t>5/11/26</a:t>
             </a:fld>
             <a:endParaRPr lang="en-US"/>
           </a:p>
@@ -5158,7 +5158,7 @@
           <a:p>
             <a:fld id="{5BCAD085-E8A6-8845-BD4E-CB4CCA059FC4}" type="datetimeFigureOut">
               <a:rPr lang="en-US" smtClean="0"/>
-              <a:t>5/10/26</a:t>
+              <a:t>5/11/26</a:t>
             </a:fld>
             <a:endParaRPr lang="en-US"/>
           </a:p>
@@ -5410,7 +5410,7 @@
           <a:p>
             <a:fld id="{5BCAD085-E8A6-8845-BD4E-CB4CCA059FC4}" type="datetimeFigureOut">
               <a:rPr lang="en-US" smtClean="0"/>
-              <a:t>5/10/26</a:t>
+              <a:t>5/11/26</a:t>
             </a:fld>
             <a:endParaRPr lang="en-US"/>
           </a:p>
@@ -5621,7 +5621,7 @@
           <a:p>
             <a:fld id="{5BCAD085-E8A6-8845-BD4E-CB4CCA059FC4}" type="datetimeFigureOut">
               <a:rPr lang="en-US" smtClean="0"/>
-              <a:t>5/10/26</a:t>
+              <a:t>5/11/26</a:t>
             </a:fld>
             <a:endParaRPr lang="en-US"/>
           </a:p>
@@ -7715,7 +7715,7 @@
                   <a:schemeClr val="bg1"/>
                 </a:solidFill>
               </a:rPr>
-              <a:t>Mimi</a:t>
+              <a:t>Sara</a:t>
             </a:r>
             <a:endParaRPr kumimoji="1" lang="ko-KR" altLang="en-US" dirty="0">
               <a:solidFill>
@@ -8633,7 +8633,7 @@
                   <a:schemeClr val="bg1"/>
                 </a:solidFill>
               </a:rPr>
-              <a:t>Mimi</a:t>
+              <a:t>Sara</a:t>
             </a:r>
             <a:endParaRPr kumimoji="1" lang="ko-KR" altLang="en-US" dirty="0">
               <a:solidFill>

--- a/FINAL_0512_Stablecoin_Exorbitant_Privilege.pptx
+++ b/FINAL_0512_Stablecoin_Exorbitant_Privilege.pptx
@@ -124,7 +124,7 @@
   <p:extLst>
     <p:ext uri="{EFAFB233-063F-42B5-8137-9DF3F51BA10A}">
       <p15:sldGuideLst xmlns:p15="http://schemas.microsoft.com/office/powerpoint/2012/main">
-        <p15:guide id="1" orient="horz" pos="2090" userDrawn="1">
+        <p15:guide id="1" orient="horz" pos="2119" userDrawn="1">
           <p15:clr>
             <a:srgbClr val="A4A3A4"/>
           </p15:clr>
@@ -13482,7 +13482,7 @@
         <p:spPr>
           <a:xfrm>
             <a:off x="6263005" y="3336290"/>
-            <a:ext cx="5624195" cy="384175"/>
+            <a:ext cx="5668645" cy="384175"/>
           </a:xfrm>
           <a:prstGeom prst="rect">
             <a:avLst/>
@@ -13525,7 +13525,7 @@
         <p:spPr>
           <a:xfrm>
             <a:off x="6366510" y="3375025"/>
-            <a:ext cx="5532755" cy="306705"/>
+            <a:ext cx="5319395" cy="306705"/>
           </a:xfrm>
           <a:prstGeom prst="rect">
             <a:avLst/>
@@ -14833,7 +14833,7 @@
         <p:spPr>
           <a:xfrm>
             <a:off x="2455545" y="3830320"/>
-            <a:ext cx="6411595" cy="306705"/>
+            <a:ext cx="6230620" cy="306705"/>
           </a:xfrm>
           <a:prstGeom prst="rect">
             <a:avLst/>
@@ -14986,6 +14986,14 @@
               </a:rPr>
               <a:t>	•	L &lt; L* → forced liquidation, sovereign spread disruption</a:t>
             </a:r>
+            <a:br>
+              <a:rPr lang="en-US" altLang="en-US" sz="1300" b="0" i="0">
+                <a:solidFill>
+                  <a:srgbClr val="1A1A2E"/>
+                </a:solidFill>
+                <a:latin typeface="Calibri"/>
+              </a:rPr>
+            </a:br>
             <a:endParaRPr lang="en-US" altLang="en-US" sz="1300" b="0" i="0">
               <a:solidFill>
                 <a:srgbClr val="1A1A2E"/>

--- a/FINAL_0512_Stablecoin_Exorbitant_Privilege.pptx
+++ b/FINAL_0512_Stablecoin_Exorbitant_Privilege.pptx
@@ -5,24 +5,24 @@
     <p:sldMasterId id="2147483648" r:id="rId1"/>
   </p:sldMasterIdLst>
   <p:notesMasterIdLst>
-    <p:notesMasterId r:id="rId4"/>
+    <p:notesMasterId r:id="rId17"/>
   </p:notesMasterIdLst>
   <p:sldIdLst>
-    <p:sldId id="271" r:id="rId3"/>
-    <p:sldId id="257" r:id="rId5"/>
-    <p:sldId id="258" r:id="rId6"/>
-    <p:sldId id="275" r:id="rId7"/>
-    <p:sldId id="276" r:id="rId8"/>
-    <p:sldId id="260" r:id="rId9"/>
-    <p:sldId id="261" r:id="rId10"/>
-    <p:sldId id="262" r:id="rId11"/>
-    <p:sldId id="263" r:id="rId12"/>
-    <p:sldId id="264" r:id="rId13"/>
-    <p:sldId id="265" r:id="rId14"/>
-    <p:sldId id="266" r:id="rId15"/>
-    <p:sldId id="267" r:id="rId16"/>
-    <p:sldId id="273" r:id="rId17"/>
-    <p:sldId id="272" r:id="rId18"/>
+    <p:sldId id="271" r:id="rId2"/>
+    <p:sldId id="257" r:id="rId3"/>
+    <p:sldId id="258" r:id="rId4"/>
+    <p:sldId id="275" r:id="rId5"/>
+    <p:sldId id="276" r:id="rId6"/>
+    <p:sldId id="260" r:id="rId7"/>
+    <p:sldId id="261" r:id="rId8"/>
+    <p:sldId id="262" r:id="rId9"/>
+    <p:sldId id="263" r:id="rId10"/>
+    <p:sldId id="264" r:id="rId11"/>
+    <p:sldId id="265" r:id="rId12"/>
+    <p:sldId id="266" r:id="rId13"/>
+    <p:sldId id="267" r:id="rId14"/>
+    <p:sldId id="273" r:id="rId15"/>
+    <p:sldId id="272" r:id="rId16"/>
   </p:sldIdLst>
   <p:sldSz cx="12188825" cy="6858000"/>
   <p:notesSz cx="6858000" cy="9144000"/>
@@ -222,6 +222,7 @@
           <a:p>
             <a:fld id="{83EC6BE1-A4B7-974B-915D-03C1CF773469}" type="datetimeFigureOut">
               <a:rPr kumimoji="1" lang="ko-KR" altLang="en-US" smtClean="0"/>
+              <a:t>2026. 5. 11.</a:t>
             </a:fld>
             <a:endParaRPr kumimoji="1" lang="ko-KR" altLang="en-US"/>
           </a:p>
@@ -288,7 +289,6 @@
               <a:rPr kumimoji="1" lang="ko-KR" altLang="en-US"/>
               <a:t>마스터 텍스트 스타일을 편집하려면 클릭</a:t>
             </a:r>
-            <a:endParaRPr kumimoji="1" lang="ko-KR" altLang="en-US"/>
           </a:p>
           <a:p>
             <a:pPr lvl="1"/>
@@ -296,7 +296,6 @@
               <a:rPr kumimoji="1" lang="ko-KR" altLang="en-US"/>
               <a:t>두 번째 수준</a:t>
             </a:r>
-            <a:endParaRPr kumimoji="1" lang="ko-KR" altLang="en-US"/>
           </a:p>
           <a:p>
             <a:pPr lvl="2"/>
@@ -304,7 +303,6 @@
               <a:rPr kumimoji="1" lang="ko-KR" altLang="en-US"/>
               <a:t>세 번째 수준</a:t>
             </a:r>
-            <a:endParaRPr kumimoji="1" lang="ko-KR" altLang="en-US"/>
           </a:p>
           <a:p>
             <a:pPr lvl="3"/>
@@ -312,7 +310,6 @@
               <a:rPr kumimoji="1" lang="ko-KR" altLang="en-US"/>
               <a:t>네 번째 수준</a:t>
             </a:r>
-            <a:endParaRPr kumimoji="1" lang="ko-KR" altLang="en-US"/>
           </a:p>
           <a:p>
             <a:pPr lvl="4"/>
@@ -320,7 +317,6 @@
               <a:rPr kumimoji="1" lang="ko-KR" altLang="en-US"/>
               <a:t>다섯 번째 수준</a:t>
             </a:r>
-            <a:endParaRPr kumimoji="1" lang="ko-KR" altLang="en-US"/>
           </a:p>
         </p:txBody>
       </p:sp>
@@ -384,6 +380,7 @@
           <a:p>
             <a:fld id="{8AF3784E-D73A-6545-9F12-21649F82E67D}" type="slidenum">
               <a:rPr kumimoji="1" lang="ko-KR" altLang="en-US" smtClean="0"/>
+              <a:t>‹#›</a:t>
             </a:fld>
             <a:endParaRPr kumimoji="1" lang="ko-KR" altLang="en-US"/>
           </a:p>
@@ -588,6 +585,7 @@
           <a:p>
             <a:fld id="{5D514313-3BDE-834F-BE4B-14A4F858B1F2}" type="slidenum">
               <a:rPr kumimoji="1" lang="ko-KR" altLang="en-US" smtClean="0"/>
+              <a:t>1</a:t>
             </a:fld>
             <a:endParaRPr kumimoji="1" lang="ko-KR" altLang="en-US"/>
           </a:p>
@@ -657,15 +655,6 @@
               </a:rPr>
               <a:t>"To estimate this equation, we used OLS — ordinary least squares — which finds the line that best fits our 51 months of data. </a:t>
             </a:r>
-            <a:endParaRPr lang="en-US" altLang="ko-KR" sz="1200" i="1" kern="1200" dirty="0">
-              <a:solidFill>
-                <a:schemeClr val="tx1"/>
-              </a:solidFill>
-              <a:effectLst/>
-              <a:latin typeface="+mn-lt"/>
-              <a:ea typeface="+mn-ea"/>
-              <a:cs typeface="+mn-cs"/>
-            </a:endParaRPr>
           </a:p>
           <a:p>
             <a:r>
@@ -680,6 +669,8 @@
               </a:rPr>
               <a:t>Our first result confirms Hypothesis 1. The coefficient on stablecoin supply growth — beta-one — is negative 6.02, and it is statistically significant at the 5% level. </a:t>
             </a:r>
+          </a:p>
+          <a:p>
             <a:endParaRPr lang="en-US" altLang="ko-KR" sz="1200" kern="1200" dirty="0">
               <a:solidFill>
                 <a:schemeClr val="tx1"/>
@@ -691,17 +682,6 @@
             </a:endParaRPr>
           </a:p>
           <a:p>
-            <a:endParaRPr lang="en-US" altLang="ko-KR" sz="1200" kern="1200" dirty="0">
-              <a:solidFill>
-                <a:schemeClr val="tx1"/>
-              </a:solidFill>
-              <a:effectLst/>
-              <a:latin typeface="+mn-lt"/>
-              <a:ea typeface="+mn-ea"/>
-              <a:cs typeface="+mn-cs"/>
-            </a:endParaRPr>
-          </a:p>
-          <a:p>
             <a:r>
               <a:rPr lang="en-US" altLang="ko-KR" sz="1200" kern="1200" dirty="0">
                 <a:solidFill>
@@ -714,15 +694,6 @@
               </a:rPr>
               <a:t>Looking at the table, you'll notice that the buffer variables — theta, L, and the interaction term — are not individually significant at this sample size of 51 months. So why wasn’t it significant?</a:t>
             </a:r>
-            <a:endParaRPr lang="en-US" altLang="ko-KR" sz="1200" kern="1200" dirty="0">
-              <a:solidFill>
-                <a:schemeClr val="tx1"/>
-              </a:solidFill>
-              <a:effectLst/>
-              <a:latin typeface="+mn-lt"/>
-              <a:ea typeface="+mn-ea"/>
-              <a:cs typeface="+mn-cs"/>
-            </a:endParaRPr>
           </a:p>
         </p:txBody>
       </p:sp>
@@ -743,6 +714,7 @@
           <a:p>
             <a:fld id="{8AF3784E-D73A-6545-9F12-21649F82E67D}" type="slidenum">
               <a:rPr kumimoji="1" lang="ko-KR" altLang="en-US" smtClean="0"/>
+              <a:t>10</a:t>
             </a:fld>
             <a:endParaRPr kumimoji="1" lang="ko-KR" altLang="en-US"/>
           </a:p>
@@ -852,15 +824,6 @@
               </a:rPr>
               <a:t>. Tether and Circle only started publishing detailed, frequent reserve breakdowns after 2023. Before that, the cash reserves figures were either missing, infrequent, or less precise. </a:t>
             </a:r>
-            <a:endParaRPr lang="en-US" altLang="ko-KR" sz="1200" kern="1200" dirty="0">
-              <a:solidFill>
-                <a:schemeClr val="tx1"/>
-              </a:solidFill>
-              <a:effectLst/>
-              <a:latin typeface="+mn-lt"/>
-              <a:ea typeface="+mn-ea"/>
-              <a:cs typeface="+mn-cs"/>
-            </a:endParaRPr>
           </a:p>
           <a:p>
             <a:pPr marL="0" marR="0" lvl="0" indent="0" algn="l" defTabSz="914400" rtl="0" eaLnBrk="1" fontAlgn="auto" latinLnBrk="1" hangingPunct="1">
@@ -978,6 +941,7 @@
           <a:p>
             <a:fld id="{8AF3784E-D73A-6545-9F12-21649F82E67D}" type="slidenum">
               <a:rPr kumimoji="1" lang="ko-KR" altLang="en-US" smtClean="0"/>
+              <a:t>11</a:t>
             </a:fld>
             <a:endParaRPr kumimoji="1" lang="ko-KR" altLang="en-US"/>
           </a:p>
@@ -1083,6 +1047,142 @@
               </a:rPr>
               <a:t>. </a:t>
             </a:r>
+          </a:p>
+          <a:p>
+            <a:r>
+              <a:rPr lang="en-US" altLang="ko-KR" sz="1200" kern="1200" dirty="0">
+                <a:solidFill>
+                  <a:schemeClr val="tx1"/>
+                </a:solidFill>
+                <a:effectLst/>
+                <a:latin typeface="+mn-lt"/>
+                <a:ea typeface="+mn-ea"/>
+                <a:cs typeface="+mn-cs"/>
+              </a:rPr>
+              <a:t>The method tries splitting the 51 months at every possible value of L and asks </a:t>
+            </a:r>
+            <a:r>
+              <a:rPr lang="en-US" altLang="ko-KR" sz="1200" i="1" kern="1200" dirty="0">
+                <a:solidFill>
+                  <a:schemeClr val="tx1"/>
+                </a:solidFill>
+                <a:effectLst/>
+                <a:latin typeface="+mn-lt"/>
+                <a:ea typeface="+mn-ea"/>
+                <a:cs typeface="+mn-cs"/>
+              </a:rPr>
+              <a:t>"if I use this value as my cut-off, how well does a two-group model explain the spread data?"</a:t>
+            </a:r>
+            <a:r>
+              <a:rPr lang="en-US" altLang="ko-KR" sz="1200" kern="1200" dirty="0">
+                <a:solidFill>
+                  <a:schemeClr val="tx1"/>
+                </a:solidFill>
+                <a:effectLst/>
+                <a:latin typeface="+mn-lt"/>
+                <a:ea typeface="+mn-ea"/>
+                <a:cs typeface="+mn-cs"/>
+              </a:rPr>
+              <a:t> </a:t>
+            </a:r>
+          </a:p>
+          <a:p>
+            <a:r>
+              <a:rPr lang="en-US" altLang="ko-KR" sz="1200" kern="1200" dirty="0">
+                <a:solidFill>
+                  <a:schemeClr val="tx1"/>
+                </a:solidFill>
+                <a:effectLst/>
+                <a:latin typeface="+mn-lt"/>
+                <a:ea typeface="+mn-ea"/>
+                <a:cs typeface="+mn-cs"/>
+              </a:rPr>
+              <a:t>The </a:t>
+            </a:r>
+            <a:r>
+              <a:rPr lang="en-US" altLang="ko-KR" sz="1200" b="1" kern="1200" dirty="0">
+                <a:solidFill>
+                  <a:schemeClr val="tx1"/>
+                </a:solidFill>
+                <a:effectLst/>
+                <a:latin typeface="+mn-lt"/>
+                <a:ea typeface="+mn-ea"/>
+                <a:cs typeface="+mn-cs"/>
+              </a:rPr>
+              <a:t>lowest point on the curve</a:t>
+            </a:r>
+            <a:r>
+              <a:rPr lang="en-US" altLang="ko-KR" sz="1200" kern="1200" dirty="0">
+                <a:solidFill>
+                  <a:schemeClr val="tx1"/>
+                </a:solidFill>
+                <a:effectLst/>
+                <a:latin typeface="+mn-lt"/>
+                <a:ea typeface="+mn-ea"/>
+                <a:cs typeface="+mn-cs"/>
+              </a:rPr>
+              <a:t> is where the model fits best. That lowest point lands at </a:t>
+            </a:r>
+            <a:r>
+              <a:rPr lang="en-US" altLang="ko-KR" sz="1200" b="1" kern="1200" dirty="0">
+                <a:solidFill>
+                  <a:schemeClr val="tx1"/>
+                </a:solidFill>
+                <a:effectLst/>
+                <a:latin typeface="+mn-lt"/>
+                <a:ea typeface="+mn-ea"/>
+                <a:cs typeface="+mn-cs"/>
+              </a:rPr>
+              <a:t>L = 0.1301 — 13%</a:t>
+            </a:r>
+            <a:r>
+              <a:rPr lang="en-US" altLang="ko-KR" sz="1200" kern="1200" dirty="0">
+                <a:solidFill>
+                  <a:schemeClr val="tx1"/>
+                </a:solidFill>
+                <a:effectLst/>
+                <a:latin typeface="+mn-lt"/>
+                <a:ea typeface="+mn-ea"/>
+                <a:cs typeface="+mn-cs"/>
+              </a:rPr>
+              <a:t>. That is the data telling us: </a:t>
+            </a:r>
+            <a:r>
+              <a:rPr lang="en-US" altLang="ko-KR" sz="1200" i="1" kern="1200" dirty="0">
+                <a:solidFill>
+                  <a:schemeClr val="tx1"/>
+                </a:solidFill>
+                <a:effectLst/>
+                <a:latin typeface="+mn-lt"/>
+                <a:ea typeface="+mn-ea"/>
+                <a:cs typeface="+mn-cs"/>
+              </a:rPr>
+              <a:t>"the most natural dividing line between two different </a:t>
+            </a:r>
+            <a:r>
+              <a:rPr lang="en-US" altLang="ko-KR" sz="1200" i="1" kern="1200" dirty="0" err="1">
+                <a:solidFill>
+                  <a:schemeClr val="tx1"/>
+                </a:solidFill>
+                <a:effectLst/>
+                <a:latin typeface="+mn-lt"/>
+                <a:ea typeface="+mn-ea"/>
+                <a:cs typeface="+mn-cs"/>
+              </a:rPr>
+              <a:t>behaviours</a:t>
+            </a:r>
+            <a:r>
+              <a:rPr lang="en-US" altLang="ko-KR" sz="1200" i="1" kern="1200" dirty="0">
+                <a:solidFill>
+                  <a:schemeClr val="tx1"/>
+                </a:solidFill>
+                <a:effectLst/>
+                <a:latin typeface="+mn-lt"/>
+                <a:ea typeface="+mn-ea"/>
+                <a:cs typeface="+mn-cs"/>
+              </a:rPr>
+              <a:t> is at 13% liquid reserves."</a:t>
+            </a:r>
             <a:endParaRPr lang="en-US" altLang="ko-KR" sz="1200" kern="1200" dirty="0">
               <a:solidFill>
                 <a:schemeClr val="tx1"/>
@@ -1094,160 +1194,6 @@
             </a:endParaRPr>
           </a:p>
           <a:p>
-            <a:r>
-              <a:rPr lang="en-US" altLang="ko-KR" sz="1200" kern="1200" dirty="0">
-                <a:solidFill>
-                  <a:schemeClr val="tx1"/>
-                </a:solidFill>
-                <a:effectLst/>
-                <a:latin typeface="+mn-lt"/>
-                <a:ea typeface="+mn-ea"/>
-                <a:cs typeface="+mn-cs"/>
-              </a:rPr>
-              <a:t>The method tries splitting the 51 months at every possible value of L and asks </a:t>
-            </a:r>
-            <a:r>
-              <a:rPr lang="en-US" altLang="ko-KR" sz="1200" i="1" kern="1200" dirty="0">
-                <a:solidFill>
-                  <a:schemeClr val="tx1"/>
-                </a:solidFill>
-                <a:effectLst/>
-                <a:latin typeface="+mn-lt"/>
-                <a:ea typeface="+mn-ea"/>
-                <a:cs typeface="+mn-cs"/>
-              </a:rPr>
-              <a:t>"if I use this value as my cut-off, how well does a two-group model explain the spread data?"</a:t>
-            </a:r>
-            <a:r>
-              <a:rPr lang="en-US" altLang="ko-KR" sz="1200" kern="1200" dirty="0">
-                <a:solidFill>
-                  <a:schemeClr val="tx1"/>
-                </a:solidFill>
-                <a:effectLst/>
-                <a:latin typeface="+mn-lt"/>
-                <a:ea typeface="+mn-ea"/>
-                <a:cs typeface="+mn-cs"/>
-              </a:rPr>
-              <a:t> </a:t>
-            </a:r>
-            <a:endParaRPr lang="en-US" altLang="ko-KR" sz="1200" kern="1200" dirty="0">
-              <a:solidFill>
-                <a:schemeClr val="tx1"/>
-              </a:solidFill>
-              <a:effectLst/>
-              <a:latin typeface="+mn-lt"/>
-              <a:ea typeface="+mn-ea"/>
-              <a:cs typeface="+mn-cs"/>
-            </a:endParaRPr>
-          </a:p>
-          <a:p>
-            <a:r>
-              <a:rPr lang="en-US" altLang="ko-KR" sz="1200" kern="1200" dirty="0">
-                <a:solidFill>
-                  <a:schemeClr val="tx1"/>
-                </a:solidFill>
-                <a:effectLst/>
-                <a:latin typeface="+mn-lt"/>
-                <a:ea typeface="+mn-ea"/>
-                <a:cs typeface="+mn-cs"/>
-              </a:rPr>
-              <a:t>The </a:t>
-            </a:r>
-            <a:r>
-              <a:rPr lang="en-US" altLang="ko-KR" sz="1200" b="1" kern="1200" dirty="0">
-                <a:solidFill>
-                  <a:schemeClr val="tx1"/>
-                </a:solidFill>
-                <a:effectLst/>
-                <a:latin typeface="+mn-lt"/>
-                <a:ea typeface="+mn-ea"/>
-                <a:cs typeface="+mn-cs"/>
-              </a:rPr>
-              <a:t>lowest point on the curve</a:t>
-            </a:r>
-            <a:r>
-              <a:rPr lang="en-US" altLang="ko-KR" sz="1200" kern="1200" dirty="0">
-                <a:solidFill>
-                  <a:schemeClr val="tx1"/>
-                </a:solidFill>
-                <a:effectLst/>
-                <a:latin typeface="+mn-lt"/>
-                <a:ea typeface="+mn-ea"/>
-                <a:cs typeface="+mn-cs"/>
-              </a:rPr>
-              <a:t> is where the model fits best. That lowest point lands at </a:t>
-            </a:r>
-            <a:r>
-              <a:rPr lang="en-US" altLang="ko-KR" sz="1200" b="1" kern="1200" dirty="0">
-                <a:solidFill>
-                  <a:schemeClr val="tx1"/>
-                </a:solidFill>
-                <a:effectLst/>
-                <a:latin typeface="+mn-lt"/>
-                <a:ea typeface="+mn-ea"/>
-                <a:cs typeface="+mn-cs"/>
-              </a:rPr>
-              <a:t>L = 0.1301 — 13%</a:t>
-            </a:r>
-            <a:r>
-              <a:rPr lang="en-US" altLang="ko-KR" sz="1200" kern="1200" dirty="0">
-                <a:solidFill>
-                  <a:schemeClr val="tx1"/>
-                </a:solidFill>
-                <a:effectLst/>
-                <a:latin typeface="+mn-lt"/>
-                <a:ea typeface="+mn-ea"/>
-                <a:cs typeface="+mn-cs"/>
-              </a:rPr>
-              <a:t>. That is the data telling us: </a:t>
-            </a:r>
-            <a:r>
-              <a:rPr lang="en-US" altLang="ko-KR" sz="1200" i="1" kern="1200" dirty="0">
-                <a:solidFill>
-                  <a:schemeClr val="tx1"/>
-                </a:solidFill>
-                <a:effectLst/>
-                <a:latin typeface="+mn-lt"/>
-                <a:ea typeface="+mn-ea"/>
-                <a:cs typeface="+mn-cs"/>
-              </a:rPr>
-              <a:t>"the most natural dividing line between two different </a:t>
-            </a:r>
-            <a:r>
-              <a:rPr lang="en-US" altLang="ko-KR" sz="1200" i="1" kern="1200" dirty="0" err="1">
-                <a:solidFill>
-                  <a:schemeClr val="tx1"/>
-                </a:solidFill>
-                <a:effectLst/>
-                <a:latin typeface="+mn-lt"/>
-                <a:ea typeface="+mn-ea"/>
-                <a:cs typeface="+mn-cs"/>
-              </a:rPr>
-              <a:t>behaviours</a:t>
-            </a:r>
-            <a:r>
-              <a:rPr lang="en-US" altLang="ko-KR" sz="1200" i="1" kern="1200" dirty="0">
-                <a:solidFill>
-                  <a:schemeClr val="tx1"/>
-                </a:solidFill>
-                <a:effectLst/>
-                <a:latin typeface="+mn-lt"/>
-                <a:ea typeface="+mn-ea"/>
-                <a:cs typeface="+mn-cs"/>
-              </a:rPr>
-              <a:t> is at 13% liquid reserves."</a:t>
-            </a:r>
-            <a:endParaRPr lang="en-US" altLang="ko-KR" sz="1200" kern="1200" dirty="0">
-              <a:solidFill>
-                <a:schemeClr val="tx1"/>
-              </a:solidFill>
-              <a:effectLst/>
-              <a:latin typeface="+mn-lt"/>
-              <a:ea typeface="+mn-ea"/>
-              <a:cs typeface="+mn-cs"/>
-            </a:endParaRPr>
-          </a:p>
-          <a:p>
             <a:endParaRPr kumimoji="1" lang="ko-KR" altLang="en-US" dirty="0"/>
           </a:p>
         </p:txBody>
@@ -1269,6 +1215,7 @@
           <a:p>
             <a:fld id="{8AF3784E-D73A-6545-9F12-21649F82E67D}" type="slidenum">
               <a:rPr kumimoji="1" lang="ko-KR" altLang="en-US" smtClean="0"/>
+              <a:t>12</a:t>
             </a:fld>
             <a:endParaRPr kumimoji="1" lang="ko-KR" altLang="en-US"/>
           </a:p>
@@ -1410,15 +1357,6 @@
               </a:rPr>
               <a:t>?</a:t>
             </a:r>
-            <a:endParaRPr lang="en-US" altLang="ko-KR" sz="1200" b="0" i="0" kern="1200" dirty="0">
-              <a:solidFill>
-                <a:schemeClr val="tx1"/>
-              </a:solidFill>
-              <a:effectLst/>
-              <a:latin typeface="+mn-lt"/>
-              <a:ea typeface="+mn-ea"/>
-              <a:cs typeface="+mn-cs"/>
-            </a:endParaRPr>
           </a:p>
           <a:p>
             <a:r>
@@ -1517,15 +1455,6 @@
               </a:rPr>
               <a:t>. They are completely dependent on the T-bill market for everything.</a:t>
             </a:r>
-            <a:endParaRPr lang="en-US" altLang="ko-KR" sz="1200" b="0" i="0" kern="1200" dirty="0">
-              <a:solidFill>
-                <a:schemeClr val="tx1"/>
-              </a:solidFill>
-              <a:effectLst/>
-              <a:latin typeface="+mn-lt"/>
-              <a:ea typeface="+mn-ea"/>
-              <a:cs typeface="+mn-cs"/>
-            </a:endParaRPr>
           </a:p>
           <a:p>
             <a:r>
@@ -1600,15 +1529,6 @@
               </a:rPr>
               <a:t>. The T-bill market is undisturbed. The compression effect disappears. </a:t>
             </a:r>
-            <a:endParaRPr lang="en-US" altLang="ko-KR" sz="1200" b="0" i="0" kern="1200" dirty="0">
-              <a:solidFill>
-                <a:schemeClr val="tx1"/>
-              </a:solidFill>
-              <a:effectLst/>
-              <a:latin typeface="+mn-lt"/>
-              <a:ea typeface="+mn-ea"/>
-              <a:cs typeface="+mn-cs"/>
-            </a:endParaRPr>
           </a:p>
           <a:p>
             <a:br>
@@ -1638,6 +1558,7 @@
           <a:p>
             <a:fld id="{8AF3784E-D73A-6545-9F12-21649F82E67D}" type="slidenum">
               <a:rPr kumimoji="1" lang="ko-KR" altLang="en-US" smtClean="0"/>
+              <a:t>13</a:t>
             </a:fld>
             <a:endParaRPr kumimoji="1" lang="ko-KR" altLang="en-US"/>
           </a:p>
@@ -1734,7 +1655,6 @@
               <a:rPr lang="en-US" altLang="ko-KR" dirty="0"/>
               <a:t>—validating the 'New Triffin Dilemma'. However, when the buffer is high, we see the opposite: a 'flight-to-safety' that actually stabilizes the market.</a:t>
             </a:r>
-            <a:endParaRPr lang="en-US" altLang="ko-KR" dirty="0"/>
           </a:p>
           <a:p>
             <a:r>
@@ -1749,14 +1669,12 @@
               <a:rPr lang="en-US" altLang="ko-KR" dirty="0"/>
               <a:t> Based on our mathematical threshold, we’ve identified a specific number that regulators can use. We’ll explain why requiring stablecoin issuers to keep at least 13% of their reserves in pure cash—not just T-bills—is the key to making sure a crypto crisis never turns into a U.S. government debt crisis.</a:t>
             </a:r>
-            <a:endParaRPr lang="en-US" altLang="ko-KR" dirty="0"/>
           </a:p>
           <a:p>
             <a:r>
               <a:rPr lang="en-US" altLang="ko-KR" dirty="0"/>
               <a:t>See you next week for the causal proof and the policy solutions!"</a:t>
             </a:r>
-            <a:endParaRPr lang="en-US" altLang="ko-KR" dirty="0"/>
           </a:p>
           <a:p>
             <a:endParaRPr kumimoji="1" lang="ko-KR" altLang="en-US" dirty="0"/>
@@ -1780,6 +1698,7 @@
           <a:p>
             <a:fld id="{8AF3784E-D73A-6545-9F12-21649F82E67D}" type="slidenum">
               <a:rPr kumimoji="1" lang="ko-KR" altLang="en-US" smtClean="0"/>
+              <a:t>14</a:t>
             </a:fld>
             <a:endParaRPr kumimoji="1" lang="ko-KR" altLang="en-US"/>
           </a:p>
@@ -1862,6 +1781,7 @@
           <a:p>
             <a:fld id="{5D514313-3BDE-834F-BE4B-14A4F858B1F2}" type="slidenum">
               <a:rPr kumimoji="1" lang="ko-KR" altLang="en-US" smtClean="0"/>
+              <a:t>15</a:t>
             </a:fld>
             <a:endParaRPr kumimoji="1" lang="ko-KR" altLang="en-US"/>
           </a:p>
@@ -1931,15 +1851,6 @@
               </a:rPr>
               <a:t>"Here's our roadmap for today. We'll start with motivation — why stablecoins matter for sovereign debt markets. Then we'll introduce our core argument, which we call the New Triffin Dilemma. From there we move to the theoretical model, our data, and then two empirical results: the privilege amplification regression and the reserve adequacy threshold. The third result — the buffer-conditioned event study — and our policy conclusions will come next week."</a:t>
             </a:r>
-            <a:endParaRPr lang="en-US" altLang="ko-KR" sz="1200" b="0" i="0" kern="1200" dirty="0">
-              <a:solidFill>
-                <a:schemeClr val="tx1"/>
-              </a:solidFill>
-              <a:effectLst/>
-              <a:latin typeface="+mn-lt"/>
-              <a:ea typeface="+mn-ea"/>
-              <a:cs typeface="+mn-cs"/>
-            </a:endParaRPr>
           </a:p>
           <a:p>
             <a:br>
@@ -1966,6 +1877,7 @@
           <a:p>
             <a:fld id="{8AF3784E-D73A-6545-9F12-21649F82E67D}" type="slidenum">
               <a:rPr kumimoji="1" lang="ko-KR" altLang="en-US" smtClean="0"/>
+              <a:t>2</a:t>
             </a:fld>
             <a:endParaRPr kumimoji="1" lang="ko-KR" altLang="en-US"/>
           </a:p>
@@ -2035,15 +1947,6 @@
               </a:rPr>
               <a:t>"Why should a course on international finance care about stablecoins? The scale alone makes them impossible to ignore. The combined market cap of USD-pegged stablecoins has gone from under fifty billion in 2021 to over three hundred billion in 2026. Tether alone holds a hundred and twenty-seven billion dollars in U.S. Treasury bills — comparable to the foreign reserves of a mid-sized sovereign nation. Four major jurisdictions are right now writing legislation to regulate their reserve requirements. And projections put this ecosystem at one to two trillion dollars within the decade. These are not niche crypto instruments anymore — they are Treasury buyers operating at scale, and that has consequences for the U.S. safe-asset market."</a:t>
             </a:r>
-            <a:endParaRPr lang="en-US" altLang="ko-KR" sz="1200" b="0" i="0" kern="1200" dirty="0">
-              <a:solidFill>
-                <a:schemeClr val="tx1"/>
-              </a:solidFill>
-              <a:effectLst/>
-              <a:latin typeface="+mn-lt"/>
-              <a:ea typeface="+mn-ea"/>
-              <a:cs typeface="+mn-cs"/>
-            </a:endParaRPr>
           </a:p>
           <a:p>
             <a:br>
@@ -2070,6 +1973,7 @@
           <a:p>
             <a:fld id="{8AF3784E-D73A-6545-9F12-21649F82E67D}" type="slidenum">
               <a:rPr kumimoji="1" lang="ko-KR" altLang="en-US" smtClean="0"/>
+              <a:t>3</a:t>
             </a:fld>
             <a:endParaRPr kumimoji="1" lang="ko-KR" altLang="en-US"/>
           </a:p>
@@ -2160,6 +2064,7 @@
           <a:p>
             <a:fld id="{8AF3784E-D73A-6545-9F12-21649F82E67D}" type="slidenum">
               <a:rPr kumimoji="1" lang="ko-KR" altLang="en-US" smtClean="0"/>
+              <a:t>4</a:t>
             </a:fld>
             <a:endParaRPr kumimoji="1" lang="ko-KR" altLang="en-US"/>
           </a:p>
@@ -2250,6 +2155,7 @@
           <a:p>
             <a:fld id="{8AF3784E-D73A-6545-9F12-21649F82E67D}" type="slidenum">
               <a:rPr kumimoji="1" lang="ko-KR" altLang="en-US" smtClean="0"/>
+              <a:t>5</a:t>
             </a:fld>
             <a:endParaRPr kumimoji="1" lang="ko-KR" altLang="en-US"/>
           </a:p>
@@ -2340,6 +2246,7 @@
           <a:p>
             <a:fld id="{8AF3784E-D73A-6545-9F12-21649F82E67D}" type="slidenum">
               <a:rPr kumimoji="1" lang="ko-KR" altLang="en-US" smtClean="0"/>
+              <a:t>6</a:t>
             </a:fld>
             <a:endParaRPr kumimoji="1" lang="ko-KR" altLang="en-US"/>
           </a:p>
@@ -2454,6 +2361,7 @@
           <a:p>
             <a:fld id="{8AF3784E-D73A-6545-9F12-21649F82E67D}" type="slidenum">
               <a:rPr kumimoji="1" lang="ko-KR" altLang="en-US" smtClean="0"/>
+              <a:t>7</a:t>
             </a:fld>
             <a:endParaRPr kumimoji="1" lang="ko-KR" altLang="en-US"/>
           </a:p>
@@ -2523,6 +2431,8 @@
               </a:rPr>
               <a:t>"Now let me walk you through what the data actually looks like. </a:t>
             </a:r>
+          </a:p>
+          <a:p>
             <a:endParaRPr lang="en-US" altLang="ko-KR" sz="1200" b="0" i="0" kern="1200" dirty="0">
               <a:solidFill>
                 <a:schemeClr val="tx1"/>
@@ -2534,17 +2444,6 @@
             </a:endParaRPr>
           </a:p>
           <a:p>
-            <a:endParaRPr lang="en-US" altLang="ko-KR" sz="1200" b="0" i="0" kern="1200" dirty="0">
-              <a:solidFill>
-                <a:schemeClr val="tx1"/>
-              </a:solidFill>
-              <a:effectLst/>
-              <a:latin typeface="+mn-lt"/>
-              <a:ea typeface="+mn-ea"/>
-              <a:cs typeface="+mn-cs"/>
-            </a:endParaRPr>
-          </a:p>
-          <a:p>
             <a:r>
               <a:rPr lang="en-US" altLang="ko-KR" sz="1200" kern="1200" dirty="0">
                 <a:solidFill>
@@ -2581,15 +2480,6 @@
               </a:rPr>
               <a:t>.</a:t>
             </a:r>
-            <a:endParaRPr lang="en-US" altLang="ko-KR" sz="1200" kern="1200" dirty="0">
-              <a:solidFill>
-                <a:schemeClr val="tx1"/>
-              </a:solidFill>
-              <a:effectLst/>
-              <a:latin typeface="+mn-lt"/>
-              <a:ea typeface="+mn-ea"/>
-              <a:cs typeface="+mn-cs"/>
-            </a:endParaRPr>
           </a:p>
           <a:p>
             <a:r>
@@ -2640,15 +2530,6 @@
               </a:rPr>
               <a:t>.</a:t>
             </a:r>
-            <a:endParaRPr lang="en-US" altLang="ko-KR" sz="1200" kern="1200" dirty="0">
-              <a:solidFill>
-                <a:schemeClr val="tx1"/>
-              </a:solidFill>
-              <a:effectLst/>
-              <a:latin typeface="+mn-lt"/>
-              <a:ea typeface="+mn-ea"/>
-              <a:cs typeface="+mn-cs"/>
-            </a:endParaRPr>
           </a:p>
           <a:p>
             <a:r>
@@ -2663,15 +2544,6 @@
               </a:rPr>
               <a:t>In a normal world with no stablecoins, these two rates should be roughly equal — both risk-free, both short-term. The spread should hover near zero.</a:t>
             </a:r>
-            <a:endParaRPr lang="en-US" altLang="ko-KR" sz="1200" kern="1200" dirty="0">
-              <a:solidFill>
-                <a:schemeClr val="tx1"/>
-              </a:solidFill>
-              <a:effectLst/>
-              <a:latin typeface="+mn-lt"/>
-              <a:ea typeface="+mn-ea"/>
-              <a:cs typeface="+mn-cs"/>
-            </a:endParaRPr>
           </a:p>
           <a:p>
             <a:r>
@@ -2782,15 +2654,6 @@
               </a:rPr>
               <a:t> (goes positive).</a:t>
             </a:r>
-            <a:endParaRPr lang="en-US" altLang="ko-KR" sz="1200" kern="1200" dirty="0">
-              <a:solidFill>
-                <a:schemeClr val="tx1"/>
-              </a:solidFill>
-              <a:effectLst/>
-              <a:latin typeface="+mn-lt"/>
-              <a:ea typeface="+mn-ea"/>
-              <a:cs typeface="+mn-cs"/>
-            </a:endParaRPr>
           </a:p>
           <a:p>
             <a:br>
@@ -2827,15 +2690,6 @@
               </a:rPr>
               <a:t>B: middle panel shows the combined supply of USDT and USDC — it grew from around a hundred billion to over two hundred billion over this period. </a:t>
             </a:r>
-            <a:endParaRPr lang="en-US" altLang="ko-KR" sz="1200" kern="1200" dirty="0">
-              <a:solidFill>
-                <a:schemeClr val="tx1"/>
-              </a:solidFill>
-              <a:effectLst/>
-              <a:latin typeface="+mn-lt"/>
-              <a:ea typeface="+mn-ea"/>
-              <a:cs typeface="+mn-cs"/>
-            </a:endParaRPr>
           </a:p>
           <a:p>
             <a:br>
@@ -3003,6 +2857,7 @@
           <a:p>
             <a:fld id="{8AF3784E-D73A-6545-9F12-21649F82E67D}" type="slidenum">
               <a:rPr kumimoji="1" lang="ko-KR" altLang="en-US" smtClean="0"/>
+              <a:t>8</a:t>
             </a:fld>
             <a:endParaRPr kumimoji="1" lang="ko-KR" altLang="en-US"/>
           </a:p>
@@ -3072,6 +2927,8 @@
               </a:rPr>
               <a:t>"Before we get to the numbers, let me translate what we just saw into plain terms.</a:t>
             </a:r>
+          </a:p>
+          <a:p>
             <a:endParaRPr lang="en-US" altLang="ko-KR" sz="1200" b="0" i="0" kern="1200" dirty="0">
               <a:solidFill>
                 <a:schemeClr val="tx1"/>
@@ -3083,6 +2940,20 @@
             </a:endParaRPr>
           </a:p>
           <a:p>
+            <a:r>
+              <a:rPr lang="en-US" altLang="ko-KR" sz="1200" b="0" i="0" kern="1200" dirty="0">
+                <a:solidFill>
+                  <a:schemeClr val="tx1"/>
+                </a:solidFill>
+                <a:effectLst/>
+                <a:latin typeface="+mn-lt"/>
+                <a:ea typeface="+mn-ea"/>
+                <a:cs typeface="+mn-cs"/>
+              </a:rPr>
+              <a:t>First: more supply means lower spreads. As Tether and Circle grew, they bought more T-bills to back their tokens. More T-bill buying pushes Treasury yields down relative to overnight rates — that's the spread compressing. </a:t>
+            </a:r>
+          </a:p>
+          <a:p>
             <a:endParaRPr lang="en-US" altLang="ko-KR" sz="1200" b="0" i="0" kern="1200" dirty="0">
               <a:solidFill>
                 <a:schemeClr val="tx1"/>
@@ -3104,8 +2975,10 @@
                 <a:ea typeface="+mn-ea"/>
                 <a:cs typeface="+mn-cs"/>
               </a:rPr>
-              <a:t>First: more supply means lower spreads. As Tether and Circle grew, they bought more T-bills to back their tokens. More T-bill buying pushes Treasury yields down relative to overnight rates — that's the spread compressing. </a:t>
-            </a:r>
+              <a:t>Second: when a crisis hits, spreads spike. During the LUNA collapse in May 2022, issuers were forced to sell T-bills to pay back redemptions. That sudden selling pushed yields up — the privilege reversed. </a:t>
+            </a:r>
+          </a:p>
+          <a:p>
             <a:endParaRPr lang="en-US" altLang="ko-KR" sz="1200" b="0" i="0" kern="1200" dirty="0">
               <a:solidFill>
                 <a:schemeClr val="tx1"/>
@@ -3117,17 +2990,6 @@
             </a:endParaRPr>
           </a:p>
           <a:p>
-            <a:endParaRPr lang="en-US" altLang="ko-KR" sz="1200" b="0" i="0" kern="1200" dirty="0">
-              <a:solidFill>
-                <a:schemeClr val="tx1"/>
-              </a:solidFill>
-              <a:effectLst/>
-              <a:latin typeface="+mn-lt"/>
-              <a:ea typeface="+mn-ea"/>
-              <a:cs typeface="+mn-cs"/>
-            </a:endParaRPr>
-          </a:p>
-          <a:p>
             <a:r>
               <a:rPr lang="en-US" altLang="ko-KR" sz="1200" b="0" i="0" kern="1200" dirty="0">
                 <a:solidFill>
@@ -3138,51 +3000,8 @@
                 <a:ea typeface="+mn-ea"/>
                 <a:cs typeface="+mn-cs"/>
               </a:rPr>
-              <a:t>Second: when a crisis hits, spreads spike. During the LUNA collapse in May 2022, issuers were forced to sell T-bills to pay back redemptions. That sudden selling pushed yields up — the privilege reversed. </a:t>
-            </a:r>
-            <a:endParaRPr lang="en-US" altLang="ko-KR" sz="1200" b="0" i="0" kern="1200" dirty="0">
-              <a:solidFill>
-                <a:schemeClr val="tx1"/>
-              </a:solidFill>
-              <a:effectLst/>
-              <a:latin typeface="+mn-lt"/>
-              <a:ea typeface="+mn-ea"/>
-              <a:cs typeface="+mn-cs"/>
-            </a:endParaRPr>
-          </a:p>
-          <a:p>
-            <a:endParaRPr lang="en-US" altLang="ko-KR" sz="1200" b="0" i="0" kern="1200" dirty="0">
-              <a:solidFill>
-                <a:schemeClr val="tx1"/>
-              </a:solidFill>
-              <a:effectLst/>
-              <a:latin typeface="+mn-lt"/>
-              <a:ea typeface="+mn-ea"/>
-              <a:cs typeface="+mn-cs"/>
-            </a:endParaRPr>
-          </a:p>
-          <a:p>
-            <a:r>
-              <a:rPr lang="en-US" altLang="ko-KR" sz="1200" b="0" i="0" kern="1200" dirty="0">
-                <a:solidFill>
-                  <a:schemeClr val="tx1"/>
-                </a:solidFill>
-                <a:effectLst/>
-                <a:latin typeface="+mn-lt"/>
-                <a:ea typeface="+mn-ea"/>
-                <a:cs typeface="+mn-cs"/>
-              </a:rPr>
               <a:t>Third: the buffer was dangerously thin exactly when it mattered most. In 2022, liquid cash reserves were near zero. Issuers had no cushion. They had to sell assets into a falling market. These three patterns together are what our regressions test."</a:t>
             </a:r>
-            <a:endParaRPr lang="en-US" altLang="ko-KR" sz="1200" b="0" i="0" kern="1200" dirty="0">
-              <a:solidFill>
-                <a:schemeClr val="tx1"/>
-              </a:solidFill>
-              <a:effectLst/>
-              <a:latin typeface="+mn-lt"/>
-              <a:ea typeface="+mn-ea"/>
-              <a:cs typeface="+mn-cs"/>
-            </a:endParaRPr>
           </a:p>
           <a:p>
             <a:br>
@@ -3209,6 +3028,7 @@
           <a:p>
             <a:fld id="{8AF3784E-D73A-6545-9F12-21649F82E67D}" type="slidenum">
               <a:rPr kumimoji="1" lang="ko-KR" altLang="en-US" smtClean="0"/>
+              <a:t>9</a:t>
             </a:fld>
             <a:endParaRPr kumimoji="1" lang="ko-KR" altLang="en-US"/>
           </a:p>
@@ -3263,7 +3083,6 @@
               <a:rPr lang="en-US"/>
               <a:t>Click to edit Master title style</a:t>
             </a:r>
-            <a:endParaRPr lang="en-US"/>
           </a:p>
         </p:txBody>
       </p:sp>
@@ -3382,7 +3201,6 @@
               <a:rPr lang="en-US"/>
               <a:t>Click to edit Master subtitle style</a:t>
             </a:r>
-            <a:endParaRPr lang="en-US"/>
           </a:p>
         </p:txBody>
       </p:sp>
@@ -3401,8 +3219,9 @@
           <a:bodyPr/>
           <a:lstStyle/>
           <a:p>
-            <a:fld id="{5BCAD085-E8A6-8845-BD4E-CB4CCA059FC4}" type="datetimeFigureOut">
-              <a:rPr lang="en-US" smtClean="0"/>
+            <a:fld id="{A1C20BC9-927F-2446-AECF-AD03478862A8}" type="datetime1">
+              <a:rPr lang="ko-KR" altLang="en-US" smtClean="0"/>
+              <a:t>2026. 5. 11.</a:t>
             </a:fld>
             <a:endParaRPr lang="en-US"/>
           </a:p>
@@ -3444,6 +3263,7 @@
           <a:p>
             <a:fld id="{C1FF6DA9-008F-8B48-92A6-B652298478BF}" type="slidenum">
               <a:rPr lang="en-US" smtClean="0"/>
+              <a:t>‹#›</a:t>
             </a:fld>
             <a:endParaRPr lang="en-US"/>
           </a:p>
@@ -3493,7 +3313,6 @@
               <a:rPr lang="en-US"/>
               <a:t>Click to edit Master title style</a:t>
             </a:r>
-            <a:endParaRPr lang="en-US"/>
           </a:p>
         </p:txBody>
       </p:sp>
@@ -3517,7 +3336,6 @@
               <a:rPr lang="en-US"/>
               <a:t>Click to edit Master text styles</a:t>
             </a:r>
-            <a:endParaRPr lang="en-US"/>
           </a:p>
           <a:p>
             <a:pPr lvl="1"/>
@@ -3525,7 +3343,6 @@
               <a:rPr lang="en-US"/>
               <a:t>Second level</a:t>
             </a:r>
-            <a:endParaRPr lang="en-US"/>
           </a:p>
           <a:p>
             <a:pPr lvl="2"/>
@@ -3533,7 +3350,6 @@
               <a:rPr lang="en-US"/>
               <a:t>Third level</a:t>
             </a:r>
-            <a:endParaRPr lang="en-US"/>
           </a:p>
           <a:p>
             <a:pPr lvl="3"/>
@@ -3541,7 +3357,6 @@
               <a:rPr lang="en-US"/>
               <a:t>Fourth level</a:t>
             </a:r>
-            <a:endParaRPr lang="en-US"/>
           </a:p>
           <a:p>
             <a:pPr lvl="4"/>
@@ -3549,7 +3364,6 @@
               <a:rPr lang="en-US"/>
               <a:t>Fifth level</a:t>
             </a:r>
-            <a:endParaRPr lang="en-US"/>
           </a:p>
         </p:txBody>
       </p:sp>
@@ -3568,8 +3382,9 @@
           <a:bodyPr/>
           <a:lstStyle/>
           <a:p>
-            <a:fld id="{5BCAD085-E8A6-8845-BD4E-CB4CCA059FC4}" type="datetimeFigureOut">
-              <a:rPr lang="en-US" smtClean="0"/>
+            <a:fld id="{C6249789-0936-6140-A27E-880DD3FC8288}" type="datetime1">
+              <a:rPr lang="ko-KR" altLang="en-US" smtClean="0"/>
+              <a:t>2026. 5. 11.</a:t>
             </a:fld>
             <a:endParaRPr lang="en-US"/>
           </a:p>
@@ -3611,6 +3426,7 @@
           <a:p>
             <a:fld id="{C1FF6DA9-008F-8B48-92A6-B652298478BF}" type="slidenum">
               <a:rPr lang="en-US" smtClean="0"/>
+              <a:t>‹#›</a:t>
             </a:fld>
             <a:endParaRPr lang="en-US"/>
           </a:p>
@@ -3665,7 +3481,6 @@
               <a:rPr lang="en-US"/>
               <a:t>Click to edit Master title style</a:t>
             </a:r>
-            <a:endParaRPr lang="en-US"/>
           </a:p>
         </p:txBody>
       </p:sp>
@@ -3694,7 +3509,6 @@
               <a:rPr lang="en-US"/>
               <a:t>Click to edit Master text styles</a:t>
             </a:r>
-            <a:endParaRPr lang="en-US"/>
           </a:p>
           <a:p>
             <a:pPr lvl="1"/>
@@ -3702,7 +3516,6 @@
               <a:rPr lang="en-US"/>
               <a:t>Second level</a:t>
             </a:r>
-            <a:endParaRPr lang="en-US"/>
           </a:p>
           <a:p>
             <a:pPr lvl="2"/>
@@ -3710,7 +3523,6 @@
               <a:rPr lang="en-US"/>
               <a:t>Third level</a:t>
             </a:r>
-            <a:endParaRPr lang="en-US"/>
           </a:p>
           <a:p>
             <a:pPr lvl="3"/>
@@ -3718,7 +3530,6 @@
               <a:rPr lang="en-US"/>
               <a:t>Fourth level</a:t>
             </a:r>
-            <a:endParaRPr lang="en-US"/>
           </a:p>
           <a:p>
             <a:pPr lvl="4"/>
@@ -3726,7 +3537,6 @@
               <a:rPr lang="en-US"/>
               <a:t>Fifth level</a:t>
             </a:r>
-            <a:endParaRPr lang="en-US"/>
           </a:p>
         </p:txBody>
       </p:sp>
@@ -3745,8 +3555,9 @@
           <a:bodyPr/>
           <a:lstStyle/>
           <a:p>
-            <a:fld id="{5BCAD085-E8A6-8845-BD4E-CB4CCA059FC4}" type="datetimeFigureOut">
-              <a:rPr lang="en-US" smtClean="0"/>
+            <a:fld id="{2EEA7C15-8000-344F-B602-B2D07D350112}" type="datetime1">
+              <a:rPr lang="ko-KR" altLang="en-US" smtClean="0"/>
+              <a:t>2026. 5. 11.</a:t>
             </a:fld>
             <a:endParaRPr lang="en-US"/>
           </a:p>
@@ -3788,6 +3599,7 @@
           <a:p>
             <a:fld id="{C1FF6DA9-008F-8B48-92A6-B652298478BF}" type="slidenum">
               <a:rPr lang="en-US" smtClean="0"/>
+              <a:t>‹#›</a:t>
             </a:fld>
             <a:endParaRPr lang="en-US"/>
           </a:p>
@@ -3837,7 +3649,6 @@
               <a:rPr lang="en-US"/>
               <a:t>Click to edit Master title style</a:t>
             </a:r>
-            <a:endParaRPr lang="en-US"/>
           </a:p>
         </p:txBody>
       </p:sp>
@@ -3861,7 +3672,6 @@
               <a:rPr lang="en-US"/>
               <a:t>Click to edit Master text styles</a:t>
             </a:r>
-            <a:endParaRPr lang="en-US"/>
           </a:p>
           <a:p>
             <a:pPr lvl="1"/>
@@ -3869,7 +3679,6 @@
               <a:rPr lang="en-US"/>
               <a:t>Second level</a:t>
             </a:r>
-            <a:endParaRPr lang="en-US"/>
           </a:p>
           <a:p>
             <a:pPr lvl="2"/>
@@ -3877,7 +3686,6 @@
               <a:rPr lang="en-US"/>
               <a:t>Third level</a:t>
             </a:r>
-            <a:endParaRPr lang="en-US"/>
           </a:p>
           <a:p>
             <a:pPr lvl="3"/>
@@ -3885,7 +3693,6 @@
               <a:rPr lang="en-US"/>
               <a:t>Fourth level</a:t>
             </a:r>
-            <a:endParaRPr lang="en-US"/>
           </a:p>
           <a:p>
             <a:pPr lvl="4"/>
@@ -3893,7 +3700,6 @@
               <a:rPr lang="en-US"/>
               <a:t>Fifth level</a:t>
             </a:r>
-            <a:endParaRPr lang="en-US"/>
           </a:p>
         </p:txBody>
       </p:sp>
@@ -3912,8 +3718,9 @@
           <a:bodyPr/>
           <a:lstStyle/>
           <a:p>
-            <a:fld id="{5BCAD085-E8A6-8845-BD4E-CB4CCA059FC4}" type="datetimeFigureOut">
-              <a:rPr lang="en-US" smtClean="0"/>
+            <a:fld id="{59EB9A13-99E8-C946-8422-525720E95D70}" type="datetime1">
+              <a:rPr lang="ko-KR" altLang="en-US" smtClean="0"/>
+              <a:t>2026. 5. 11.</a:t>
             </a:fld>
             <a:endParaRPr lang="en-US"/>
           </a:p>
@@ -3955,6 +3762,7 @@
           <a:p>
             <a:fld id="{C1FF6DA9-008F-8B48-92A6-B652298478BF}" type="slidenum">
               <a:rPr lang="en-US" smtClean="0"/>
+              <a:t>‹#›</a:t>
             </a:fld>
             <a:endParaRPr lang="en-US"/>
           </a:p>
@@ -4013,7 +3821,6 @@
               <a:rPr lang="en-US"/>
               <a:t>Click to edit Master title style</a:t>
             </a:r>
-            <a:endParaRPr lang="en-US"/>
           </a:p>
         </p:txBody>
       </p:sp>
@@ -4133,7 +3940,6 @@
               <a:rPr lang="en-US"/>
               <a:t>Click to edit Master text styles</a:t>
             </a:r>
-            <a:endParaRPr lang="en-US"/>
           </a:p>
         </p:txBody>
       </p:sp>
@@ -4152,8 +3958,9 @@
           <a:bodyPr/>
           <a:lstStyle/>
           <a:p>
-            <a:fld id="{5BCAD085-E8A6-8845-BD4E-CB4CCA059FC4}" type="datetimeFigureOut">
-              <a:rPr lang="en-US" smtClean="0"/>
+            <a:fld id="{8D0CDB8A-853B-5741-A8F8-E6BEBA996F73}" type="datetime1">
+              <a:rPr lang="ko-KR" altLang="en-US" smtClean="0"/>
+              <a:t>2026. 5. 11.</a:t>
             </a:fld>
             <a:endParaRPr lang="en-US"/>
           </a:p>
@@ -4195,6 +4002,7 @@
           <a:p>
             <a:fld id="{C1FF6DA9-008F-8B48-92A6-B652298478BF}" type="slidenum">
               <a:rPr lang="en-US" smtClean="0"/>
+              <a:t>‹#›</a:t>
             </a:fld>
             <a:endParaRPr lang="en-US"/>
           </a:p>
@@ -4244,7 +4052,6 @@
               <a:rPr lang="en-US"/>
               <a:t>Click to edit Master title style</a:t>
             </a:r>
-            <a:endParaRPr lang="en-US"/>
           </a:p>
         </p:txBody>
       </p:sp>
@@ -4301,7 +4108,6 @@
               <a:rPr lang="en-US"/>
               <a:t>Click to edit Master text styles</a:t>
             </a:r>
-            <a:endParaRPr lang="en-US"/>
           </a:p>
           <a:p>
             <a:pPr lvl="1"/>
@@ -4309,7 +4115,6 @@
               <a:rPr lang="en-US"/>
               <a:t>Second level</a:t>
             </a:r>
-            <a:endParaRPr lang="en-US"/>
           </a:p>
           <a:p>
             <a:pPr lvl="2"/>
@@ -4317,7 +4122,6 @@
               <a:rPr lang="en-US"/>
               <a:t>Third level</a:t>
             </a:r>
-            <a:endParaRPr lang="en-US"/>
           </a:p>
           <a:p>
             <a:pPr lvl="3"/>
@@ -4325,7 +4129,6 @@
               <a:rPr lang="en-US"/>
               <a:t>Fourth level</a:t>
             </a:r>
-            <a:endParaRPr lang="en-US"/>
           </a:p>
           <a:p>
             <a:pPr lvl="4"/>
@@ -4333,7 +4136,6 @@
               <a:rPr lang="en-US"/>
               <a:t>Fifth level</a:t>
             </a:r>
-            <a:endParaRPr lang="en-US"/>
           </a:p>
         </p:txBody>
       </p:sp>
@@ -4390,7 +4192,6 @@
               <a:rPr lang="en-US"/>
               <a:t>Click to edit Master text styles</a:t>
             </a:r>
-            <a:endParaRPr lang="en-US"/>
           </a:p>
           <a:p>
             <a:pPr lvl="1"/>
@@ -4398,7 +4199,6 @@
               <a:rPr lang="en-US"/>
               <a:t>Second level</a:t>
             </a:r>
-            <a:endParaRPr lang="en-US"/>
           </a:p>
           <a:p>
             <a:pPr lvl="2"/>
@@ -4406,7 +4206,6 @@
               <a:rPr lang="en-US"/>
               <a:t>Third level</a:t>
             </a:r>
-            <a:endParaRPr lang="en-US"/>
           </a:p>
           <a:p>
             <a:pPr lvl="3"/>
@@ -4414,7 +4213,6 @@
               <a:rPr lang="en-US"/>
               <a:t>Fourth level</a:t>
             </a:r>
-            <a:endParaRPr lang="en-US"/>
           </a:p>
           <a:p>
             <a:pPr lvl="4"/>
@@ -4422,7 +4220,6 @@
               <a:rPr lang="en-US"/>
               <a:t>Fifth level</a:t>
             </a:r>
-            <a:endParaRPr lang="en-US"/>
           </a:p>
         </p:txBody>
       </p:sp>
@@ -4441,8 +4238,9 @@
           <a:bodyPr/>
           <a:lstStyle/>
           <a:p>
-            <a:fld id="{5BCAD085-E8A6-8845-BD4E-CB4CCA059FC4}" type="datetimeFigureOut">
-              <a:rPr lang="en-US" smtClean="0"/>
+            <a:fld id="{1F728279-CA28-1D46-8FD5-CDFF7ECB90D0}" type="datetime1">
+              <a:rPr lang="ko-KR" altLang="en-US" smtClean="0"/>
+              <a:t>2026. 5. 11.</a:t>
             </a:fld>
             <a:endParaRPr lang="en-US"/>
           </a:p>
@@ -4484,6 +4282,7 @@
           <a:p>
             <a:fld id="{C1FF6DA9-008F-8B48-92A6-B652298478BF}" type="slidenum">
               <a:rPr lang="en-US" smtClean="0"/>
+              <a:t>‹#›</a:t>
             </a:fld>
             <a:endParaRPr lang="en-US"/>
           </a:p>
@@ -4537,7 +4336,6 @@
               <a:rPr lang="en-US"/>
               <a:t>Click to edit Master title style</a:t>
             </a:r>
-            <a:endParaRPr lang="en-US"/>
           </a:p>
         </p:txBody>
       </p:sp>
@@ -4603,7 +4401,6 @@
               <a:rPr lang="en-US"/>
               <a:t>Click to edit Master text styles</a:t>
             </a:r>
-            <a:endParaRPr lang="en-US"/>
           </a:p>
         </p:txBody>
       </p:sp>
@@ -4660,7 +4457,6 @@
               <a:rPr lang="en-US"/>
               <a:t>Click to edit Master text styles</a:t>
             </a:r>
-            <a:endParaRPr lang="en-US"/>
           </a:p>
           <a:p>
             <a:pPr lvl="1"/>
@@ -4668,7 +4464,6 @@
               <a:rPr lang="en-US"/>
               <a:t>Second level</a:t>
             </a:r>
-            <a:endParaRPr lang="en-US"/>
           </a:p>
           <a:p>
             <a:pPr lvl="2"/>
@@ -4676,7 +4471,6 @@
               <a:rPr lang="en-US"/>
               <a:t>Third level</a:t>
             </a:r>
-            <a:endParaRPr lang="en-US"/>
           </a:p>
           <a:p>
             <a:pPr lvl="3"/>
@@ -4684,7 +4478,6 @@
               <a:rPr lang="en-US"/>
               <a:t>Fourth level</a:t>
             </a:r>
-            <a:endParaRPr lang="en-US"/>
           </a:p>
           <a:p>
             <a:pPr lvl="4"/>
@@ -4692,7 +4485,6 @@
               <a:rPr lang="en-US"/>
               <a:t>Fifth level</a:t>
             </a:r>
-            <a:endParaRPr lang="en-US"/>
           </a:p>
         </p:txBody>
       </p:sp>
@@ -4758,7 +4550,6 @@
               <a:rPr lang="en-US"/>
               <a:t>Click to edit Master text styles</a:t>
             </a:r>
-            <a:endParaRPr lang="en-US"/>
           </a:p>
         </p:txBody>
       </p:sp>
@@ -4815,7 +4606,6 @@
               <a:rPr lang="en-US"/>
               <a:t>Click to edit Master text styles</a:t>
             </a:r>
-            <a:endParaRPr lang="en-US"/>
           </a:p>
           <a:p>
             <a:pPr lvl="1"/>
@@ -4823,7 +4613,6 @@
               <a:rPr lang="en-US"/>
               <a:t>Second level</a:t>
             </a:r>
-            <a:endParaRPr lang="en-US"/>
           </a:p>
           <a:p>
             <a:pPr lvl="2"/>
@@ -4831,7 +4620,6 @@
               <a:rPr lang="en-US"/>
               <a:t>Third level</a:t>
             </a:r>
-            <a:endParaRPr lang="en-US"/>
           </a:p>
           <a:p>
             <a:pPr lvl="3"/>
@@ -4839,7 +4627,6 @@
               <a:rPr lang="en-US"/>
               <a:t>Fourth level</a:t>
             </a:r>
-            <a:endParaRPr lang="en-US"/>
           </a:p>
           <a:p>
             <a:pPr lvl="4"/>
@@ -4847,7 +4634,6 @@
               <a:rPr lang="en-US"/>
               <a:t>Fifth level</a:t>
             </a:r>
-            <a:endParaRPr lang="en-US"/>
           </a:p>
         </p:txBody>
       </p:sp>
@@ -4866,8 +4652,9 @@
           <a:bodyPr/>
           <a:lstStyle/>
           <a:p>
-            <a:fld id="{5BCAD085-E8A6-8845-BD4E-CB4CCA059FC4}" type="datetimeFigureOut">
-              <a:rPr lang="en-US" smtClean="0"/>
+            <a:fld id="{985D133D-FD79-3A46-B04D-862544638E9C}" type="datetime1">
+              <a:rPr lang="ko-KR" altLang="en-US" smtClean="0"/>
+              <a:t>2026. 5. 11.</a:t>
             </a:fld>
             <a:endParaRPr lang="en-US"/>
           </a:p>
@@ -4909,6 +4696,7 @@
           <a:p>
             <a:fld id="{C1FF6DA9-008F-8B48-92A6-B652298478BF}" type="slidenum">
               <a:rPr lang="en-US" smtClean="0"/>
+              <a:t>‹#›</a:t>
             </a:fld>
             <a:endParaRPr lang="en-US"/>
           </a:p>
@@ -4958,7 +4746,6 @@
               <a:rPr lang="en-US"/>
               <a:t>Click to edit Master title style</a:t>
             </a:r>
-            <a:endParaRPr lang="en-US"/>
           </a:p>
         </p:txBody>
       </p:sp>
@@ -4977,8 +4764,9 @@
           <a:bodyPr/>
           <a:lstStyle/>
           <a:p>
-            <a:fld id="{5BCAD085-E8A6-8845-BD4E-CB4CCA059FC4}" type="datetimeFigureOut">
-              <a:rPr lang="en-US" smtClean="0"/>
+            <a:fld id="{5407E052-61D9-C94D-A482-A8E176EE8505}" type="datetime1">
+              <a:rPr lang="ko-KR" altLang="en-US" smtClean="0"/>
+              <a:t>2026. 5. 11.</a:t>
             </a:fld>
             <a:endParaRPr lang="en-US"/>
           </a:p>
@@ -5020,6 +4808,7 @@
           <a:p>
             <a:fld id="{C1FF6DA9-008F-8B48-92A6-B652298478BF}" type="slidenum">
               <a:rPr lang="en-US" smtClean="0"/>
+              <a:t>‹#›</a:t>
             </a:fld>
             <a:endParaRPr lang="en-US"/>
           </a:p>
@@ -5065,8 +4854,9 @@
           <a:bodyPr/>
           <a:lstStyle/>
           <a:p>
-            <a:fld id="{5BCAD085-E8A6-8845-BD4E-CB4CCA059FC4}" type="datetimeFigureOut">
-              <a:rPr lang="en-US" smtClean="0"/>
+            <a:fld id="{188ED6F0-C5A3-C147-B913-05FB2436882F}" type="datetime1">
+              <a:rPr lang="ko-KR" altLang="en-US" smtClean="0"/>
+              <a:t>2026. 5. 11.</a:t>
             </a:fld>
             <a:endParaRPr lang="en-US"/>
           </a:p>
@@ -5108,6 +4898,7 @@
           <a:p>
             <a:fld id="{C1FF6DA9-008F-8B48-92A6-B652298478BF}" type="slidenum">
               <a:rPr lang="en-US" smtClean="0"/>
+              <a:t>‹#›</a:t>
             </a:fld>
             <a:endParaRPr lang="en-US"/>
           </a:p>
@@ -5166,7 +4957,6 @@
               <a:rPr lang="en-US"/>
               <a:t>Click to edit Master title style</a:t>
             </a:r>
-            <a:endParaRPr lang="en-US"/>
           </a:p>
         </p:txBody>
       </p:sp>
@@ -5223,7 +5013,6 @@
               <a:rPr lang="en-US"/>
               <a:t>Click to edit Master text styles</a:t>
             </a:r>
-            <a:endParaRPr lang="en-US"/>
           </a:p>
           <a:p>
             <a:pPr lvl="1"/>
@@ -5231,7 +5020,6 @@
               <a:rPr lang="en-US"/>
               <a:t>Second level</a:t>
             </a:r>
-            <a:endParaRPr lang="en-US"/>
           </a:p>
           <a:p>
             <a:pPr lvl="2"/>
@@ -5239,7 +5027,6 @@
               <a:rPr lang="en-US"/>
               <a:t>Third level</a:t>
             </a:r>
-            <a:endParaRPr lang="en-US"/>
           </a:p>
           <a:p>
             <a:pPr lvl="3"/>
@@ -5247,7 +5034,6 @@
               <a:rPr lang="en-US"/>
               <a:t>Fourth level</a:t>
             </a:r>
-            <a:endParaRPr lang="en-US"/>
           </a:p>
           <a:p>
             <a:pPr lvl="4"/>
@@ -5255,7 +5041,6 @@
               <a:rPr lang="en-US"/>
               <a:t>Fifth level</a:t>
             </a:r>
-            <a:endParaRPr lang="en-US"/>
           </a:p>
         </p:txBody>
       </p:sp>
@@ -5321,7 +5106,6 @@
               <a:rPr lang="en-US"/>
               <a:t>Click to edit Master text styles</a:t>
             </a:r>
-            <a:endParaRPr lang="en-US"/>
           </a:p>
         </p:txBody>
       </p:sp>
@@ -5340,8 +5124,9 @@
           <a:bodyPr/>
           <a:lstStyle/>
           <a:p>
-            <a:fld id="{5BCAD085-E8A6-8845-BD4E-CB4CCA059FC4}" type="datetimeFigureOut">
-              <a:rPr lang="en-US" smtClean="0"/>
+            <a:fld id="{384C738C-69A7-E546-A7AB-BA1A924CC786}" type="datetime1">
+              <a:rPr lang="ko-KR" altLang="en-US" smtClean="0"/>
+              <a:t>2026. 5. 11.</a:t>
             </a:fld>
             <a:endParaRPr lang="en-US"/>
           </a:p>
@@ -5383,6 +5168,7 @@
           <a:p>
             <a:fld id="{C1FF6DA9-008F-8B48-92A6-B652298478BF}" type="slidenum">
               <a:rPr lang="en-US" smtClean="0"/>
+              <a:t>‹#›</a:t>
             </a:fld>
             <a:endParaRPr lang="en-US"/>
           </a:p>
@@ -5441,7 +5227,6 @@
               <a:rPr lang="en-US"/>
               <a:t>Click to edit Master title style</a:t>
             </a:r>
-            <a:endParaRPr lang="en-US"/>
           </a:p>
         </p:txBody>
       </p:sp>
@@ -5568,7 +5353,6 @@
               <a:rPr lang="en-US"/>
               <a:t>Click to edit Master text styles</a:t>
             </a:r>
-            <a:endParaRPr lang="en-US"/>
           </a:p>
         </p:txBody>
       </p:sp>
@@ -5587,8 +5371,9 @@
           <a:bodyPr/>
           <a:lstStyle/>
           <a:p>
-            <a:fld id="{5BCAD085-E8A6-8845-BD4E-CB4CCA059FC4}" type="datetimeFigureOut">
-              <a:rPr lang="en-US" smtClean="0"/>
+            <a:fld id="{EACC9D5A-263E-3C4A-980D-8614F39CB45A}" type="datetime1">
+              <a:rPr lang="ko-KR" altLang="en-US" smtClean="0"/>
+              <a:t>2026. 5. 11.</a:t>
             </a:fld>
             <a:endParaRPr lang="en-US"/>
           </a:p>
@@ -5630,6 +5415,7 @@
           <a:p>
             <a:fld id="{C1FF6DA9-008F-8B48-92A6-B652298478BF}" type="slidenum">
               <a:rPr lang="en-US" smtClean="0"/>
+              <a:t>‹#›</a:t>
             </a:fld>
             <a:endParaRPr lang="en-US"/>
           </a:p>
@@ -5694,7 +5480,6 @@
               <a:rPr lang="en-US"/>
               <a:t>Click to edit Master title style</a:t>
             </a:r>
-            <a:endParaRPr lang="en-US"/>
           </a:p>
         </p:txBody>
       </p:sp>
@@ -5728,7 +5513,6 @@
               <a:rPr lang="en-US"/>
               <a:t>Click to edit Master text styles</a:t>
             </a:r>
-            <a:endParaRPr lang="en-US"/>
           </a:p>
           <a:p>
             <a:pPr lvl="1"/>
@@ -5736,7 +5520,6 @@
               <a:rPr lang="en-US"/>
               <a:t>Second level</a:t>
             </a:r>
-            <a:endParaRPr lang="en-US"/>
           </a:p>
           <a:p>
             <a:pPr lvl="2"/>
@@ -5744,7 +5527,6 @@
               <a:rPr lang="en-US"/>
               <a:t>Third level</a:t>
             </a:r>
-            <a:endParaRPr lang="en-US"/>
           </a:p>
           <a:p>
             <a:pPr lvl="3"/>
@@ -5752,7 +5534,6 @@
               <a:rPr lang="en-US"/>
               <a:t>Fourth level</a:t>
             </a:r>
-            <a:endParaRPr lang="en-US"/>
           </a:p>
           <a:p>
             <a:pPr lvl="4"/>
@@ -5760,7 +5541,6 @@
               <a:rPr lang="en-US"/>
               <a:t>Fifth level</a:t>
             </a:r>
-            <a:endParaRPr lang="en-US"/>
           </a:p>
         </p:txBody>
       </p:sp>
@@ -5797,8 +5577,9 @@
             </a:lvl1pPr>
           </a:lstStyle>
           <a:p>
-            <a:fld id="{5BCAD085-E8A6-8845-BD4E-CB4CCA059FC4}" type="datetimeFigureOut">
-              <a:rPr lang="en-US" smtClean="0"/>
+            <a:fld id="{8FF2B9D6-7B72-8E44-8AB8-D2FC2E171B08}" type="datetime1">
+              <a:rPr lang="ko-KR" altLang="en-US" smtClean="0"/>
+              <a:t>2026. 5. 11.</a:t>
             </a:fld>
             <a:endParaRPr lang="en-US"/>
           </a:p>
@@ -5876,6 +5657,7 @@
           <a:p>
             <a:fld id="{C1FF6DA9-008F-8B48-92A6-B652298478BF}" type="slidenum">
               <a:rPr lang="en-US" smtClean="0"/>
+              <a:t>‹#›</a:t>
             </a:fld>
             <a:endParaRPr lang="en-US"/>
           </a:p>
@@ -5897,6 +5679,7 @@
     <p:sldLayoutId id="2147483658" r:id="rId10"/>
     <p:sldLayoutId id="2147483659" r:id="rId11"/>
   </p:sldLayoutIdLst>
+  <p:hf sldNum="0" hdr="0" ftr="0" dt="0"/>
   <p:txStyles>
     <p:titleStyle>
       <a:lvl1pPr algn="ctr" defTabSz="457200" rtl="0" eaLnBrk="1" latinLnBrk="0" hangingPunct="1">
@@ -6184,14 +5967,14 @@
           <p:nvPr/>
         </p:nvPicPr>
         <p:blipFill>
-          <a:blip r:embed="rId1">
+          <a:blip r:embed="rId3">
             <a:lum bright="70000" contrast="-70000"/>
             <a:extLst>
               <a:ext uri="{BEBA8EAE-BF5A-486C-A8C5-ECC9F3942E4B}">
                 <a14:imgProps xmlns:a14="http://schemas.microsoft.com/office/drawing/2010/main">
-                  <a14:imgLayer r:embed="rId2">
+                  <a14:imgLayer r:embed="rId4">
                     <a14:imgEffect>
-                      <a14:artisticPhotocopy trans="30000" detail="2"/>
+                      <a14:artisticPhotocopy detail="2"/>
                     </a14:imgEffect>
                   </a14:imgLayer>
                 </a14:imgProps>
@@ -6271,13 +6054,6 @@
               </a:rPr>
               <a:t>STABLECOINS AND THE EXORBITANT PRIVILEGE</a:t>
             </a:r>
-            <a:endParaRPr lang="en-US" altLang="ko-KR" sz="2400" dirty="0">
-              <a:solidFill>
-                <a:prstClr val="white"/>
-              </a:solidFill>
-              <a:latin typeface="Hiragino Kaku Gothic Std W8" panose="020B0800000000000000" pitchFamily="34" charset="-128"/>
-              <a:ea typeface="Hiragino Kaku Gothic Std W8" panose="020B0800000000000000" pitchFamily="34" charset="-128"/>
-            </a:endParaRPr>
           </a:p>
           <a:p>
             <a:pPr algn="ctr" defTabSz="914400" latinLnBrk="1">
@@ -6323,11 +6099,6 @@
               </a:rPr>
               <a:t>Yonsei GSIS 2026-1 </a:t>
             </a:r>
-            <a:endParaRPr lang="en-US" altLang="ko-KR" sz="1800" b="1" dirty="0">
-              <a:solidFill>
-                <a:schemeClr val="bg1"/>
-              </a:solidFill>
-            </a:endParaRPr>
           </a:p>
           <a:p>
             <a:r>
@@ -6426,6 +6197,7 @@
           <a:lstStyle/>
           <a:p>
             <a:pPr algn="ctr"/>
+            <a:endParaRPr/>
           </a:p>
         </p:txBody>
       </p:sp>
@@ -6469,6 +6241,7 @@
           <a:lstStyle/>
           <a:p>
             <a:pPr algn="ctr"/>
+            <a:endParaRPr/>
           </a:p>
         </p:txBody>
       </p:sp>
@@ -6504,53 +6277,6 @@
               </a:rPr>
               <a:t>Result 1: Stablecoin Growth Compresses Treasury Spreads</a:t>
             </a:r>
-            <a:endParaRPr sz="2600" b="0" i="0">
-              <a:solidFill>
-                <a:srgbClr val="FFFFFF"/>
-              </a:solidFill>
-              <a:latin typeface="Calibri"/>
-            </a:endParaRPr>
-          </a:p>
-        </p:txBody>
-      </p:sp>
-      <p:sp>
-        <p:nvSpPr>
-          <p:cNvPr id="5" name="TextBox 4"/>
-          <p:cNvSpPr txBox="1"/>
-          <p:nvPr/>
-        </p:nvSpPr>
-        <p:spPr>
-          <a:xfrm>
-            <a:off x="11686032" y="6473952"/>
-            <a:ext cx="411480" cy="320040"/>
-          </a:xfrm>
-          <a:prstGeom prst="rect">
-            <a:avLst/>
-          </a:prstGeom>
-          <a:noFill/>
-        </p:spPr>
-        <p:txBody>
-          <a:bodyPr wrap="square">
-            <a:spAutoFit/>
-          </a:bodyPr>
-          <a:lstStyle/>
-          <a:p>
-            <a:pPr algn="r"/>
-            <a:r>
-              <a:rPr sz="1300" b="0" i="0">
-                <a:solidFill>
-                  <a:srgbClr val="555566"/>
-                </a:solidFill>
-                <a:latin typeface="Calibri"/>
-              </a:rPr>
-              <a:t>9</a:t>
-            </a:r>
-            <a:endParaRPr sz="1300" b="0" i="0">
-              <a:solidFill>
-                <a:srgbClr val="555566"/>
-              </a:solidFill>
-              <a:latin typeface="Calibri"/>
-            </a:endParaRPr>
           </a:p>
         </p:txBody>
       </p:sp>
@@ -6594,6 +6320,7 @@
           <a:lstStyle/>
           <a:p>
             <a:pPr algn="ctr"/>
+            <a:endParaRPr/>
           </a:p>
         </p:txBody>
       </p:sp>
@@ -6629,12 +6356,6 @@
               </a:rPr>
               <a:t>H1  CONFIRMED    —   statistically significant at the 5% level</a:t>
             </a:r>
-            <a:endParaRPr sz="1600" b="1" i="0" dirty="0">
-              <a:solidFill>
-                <a:srgbClr val="FFFFFF"/>
-              </a:solidFill>
-              <a:latin typeface="Calibri"/>
-            </a:endParaRPr>
           </a:p>
         </p:txBody>
       </p:sp>
@@ -6678,6 +6399,7 @@
           <a:lstStyle/>
           <a:p>
             <a:pPr algn="ctr"/>
+            <a:endParaRPr/>
           </a:p>
         </p:txBody>
       </p:sp>
@@ -6713,12 +6435,6 @@
               </a:rPr>
               <a:t>β₁ = −6.02**</a:t>
             </a:r>
-            <a:endParaRPr sz="4400" b="1" i="0">
-              <a:solidFill>
-                <a:srgbClr val="FFFFFF"/>
-              </a:solidFill>
-              <a:latin typeface="Calibri"/>
-            </a:endParaRPr>
           </a:p>
         </p:txBody>
       </p:sp>
@@ -6754,12 +6470,6 @@
               </a:rPr>
               <a:t>N = 51 months  |  R² = 0.50</a:t>
             </a:r>
-            <a:endParaRPr sz="1300" b="0" i="1">
-              <a:solidFill>
-                <a:srgbClr val="AAC4E8"/>
-              </a:solidFill>
-              <a:latin typeface="Calibri"/>
-            </a:endParaRPr>
           </a:p>
         </p:txBody>
       </p:sp>
@@ -6803,6 +6513,7 @@
           <a:lstStyle/>
           <a:p>
             <a:pPr algn="ctr"/>
+            <a:endParaRPr/>
           </a:p>
         </p:txBody>
       </p:sp>
@@ -6838,12 +6549,6 @@
               </a:rPr>
               <a:t>What this means in plain terms:</a:t>
             </a:r>
-            <a:endParaRPr sz="1400" b="1" i="0" dirty="0">
-              <a:solidFill>
-                <a:srgbClr val="1B3A72"/>
-              </a:solidFill>
-              <a:latin typeface="Calibri"/>
-            </a:endParaRPr>
           </a:p>
         </p:txBody>
       </p:sp>
@@ -6898,12 +6603,6 @@
               <a:t>
 When Tether and Circle expand, they buy more U.S. T-bills — pushing Treasury yields down relative to overnight rates. This is the exorbitant privilege being amplified.</a:t>
             </a:r>
-            <a:endParaRPr sz="1300" b="0" i="0" dirty="0">
-              <a:solidFill>
-                <a:srgbClr val="1A1A2E"/>
-              </a:solidFill>
-              <a:latin typeface="Calibri"/>
-            </a:endParaRPr>
           </a:p>
         </p:txBody>
       </p:sp>
@@ -6947,6 +6646,7 @@
           <a:lstStyle/>
           <a:p>
             <a:pPr algn="ctr"/>
+            <a:endParaRPr/>
           </a:p>
         </p:txBody>
       </p:sp>
@@ -6982,12 +6682,6 @@
               </a:rPr>
               <a:t>Variable</a:t>
             </a:r>
-            <a:endParaRPr sz="1100" b="1" i="0">
-              <a:solidFill>
-                <a:srgbClr val="FFFFFF"/>
-              </a:solidFill>
-              <a:latin typeface="Calibri"/>
-            </a:endParaRPr>
           </a:p>
         </p:txBody>
       </p:sp>
@@ -7023,12 +6717,6 @@
               </a:rPr>
               <a:t>Coefficient</a:t>
             </a:r>
-            <a:endParaRPr sz="1100" b="1" i="0">
-              <a:solidFill>
-                <a:srgbClr val="FFFFFF"/>
-              </a:solidFill>
-              <a:latin typeface="Calibri"/>
-            </a:endParaRPr>
           </a:p>
         </p:txBody>
       </p:sp>
@@ -7064,12 +6752,6 @@
               </a:rPr>
               <a:t>Sig.</a:t>
             </a:r>
-            <a:endParaRPr sz="1100" b="1" i="0">
-              <a:solidFill>
-                <a:srgbClr val="FFFFFF"/>
-              </a:solidFill>
-              <a:latin typeface="Calibri"/>
-            </a:endParaRPr>
           </a:p>
         </p:txBody>
       </p:sp>
@@ -7113,6 +6795,7 @@
           <a:lstStyle/>
           <a:p>
             <a:pPr algn="ctr"/>
+            <a:endParaRPr/>
           </a:p>
         </p:txBody>
       </p:sp>
@@ -7148,12 +6831,6 @@
               </a:rPr>
               <a:t>ΔlnS  (stablecoin supply growth)</a:t>
             </a:r>
-            <a:endParaRPr sz="1100" b="1" i="0">
-              <a:solidFill>
-                <a:srgbClr val="1A1A2E"/>
-              </a:solidFill>
-              <a:latin typeface="Calibri"/>
-            </a:endParaRPr>
           </a:p>
         </p:txBody>
       </p:sp>
@@ -7189,12 +6866,6 @@
               </a:rPr>
               <a:t>−6.017</a:t>
             </a:r>
-            <a:endParaRPr sz="1100" b="1" i="0">
-              <a:solidFill>
-                <a:srgbClr val="1A1A2E"/>
-              </a:solidFill>
-              <a:latin typeface="Calibri"/>
-            </a:endParaRPr>
           </a:p>
         </p:txBody>
       </p:sp>
@@ -7230,12 +6901,6 @@
               </a:rPr>
               <a:t>**</a:t>
             </a:r>
-            <a:endParaRPr sz="1100" b="1" i="0">
-              <a:solidFill>
-                <a:srgbClr val="1A1A2E"/>
-              </a:solidFill>
-              <a:latin typeface="Calibri"/>
-            </a:endParaRPr>
           </a:p>
         </p:txBody>
       </p:sp>
@@ -7279,6 +6944,7 @@
           <a:lstStyle/>
           <a:p>
             <a:pPr algn="ctr"/>
+            <a:endParaRPr/>
           </a:p>
         </p:txBody>
       </p:sp>
@@ -7323,12 +6989,6 @@
               </a:rPr>
               <a:t>  (Treasury Exposure)</a:t>
             </a:r>
-            <a:endParaRPr sz="1100" b="0" i="0" dirty="0">
-              <a:solidFill>
-                <a:srgbClr val="1A1A2E"/>
-              </a:solidFill>
-              <a:latin typeface="Calibri"/>
-            </a:endParaRPr>
           </a:p>
         </p:txBody>
       </p:sp>
@@ -7364,12 +7024,6 @@
               </a:rPr>
               <a:t> 0.100</a:t>
             </a:r>
-            <a:endParaRPr sz="1100" b="0" i="0">
-              <a:solidFill>
-                <a:srgbClr val="1A1A2E"/>
-              </a:solidFill>
-              <a:latin typeface="Calibri"/>
-            </a:endParaRPr>
           </a:p>
         </p:txBody>
       </p:sp>
@@ -7405,12 +7059,6 @@
               </a:rPr>
               <a:t>—</a:t>
             </a:r>
-            <a:endParaRPr sz="1100" b="0" i="0">
-              <a:solidFill>
-                <a:srgbClr val="1A1A2E"/>
-              </a:solidFill>
-              <a:latin typeface="Calibri"/>
-            </a:endParaRPr>
           </a:p>
         </p:txBody>
       </p:sp>
@@ -7454,6 +7102,7 @@
           <a:lstStyle/>
           <a:p>
             <a:pPr algn="ctr"/>
+            <a:endParaRPr/>
           </a:p>
         </p:txBody>
       </p:sp>
@@ -7489,12 +7138,6 @@
               </a:rPr>
               <a:t>L  (Liquid Buffer)</a:t>
             </a:r>
-            <a:endParaRPr sz="1100" b="0" i="0">
-              <a:solidFill>
-                <a:srgbClr val="1A1A2E"/>
-              </a:solidFill>
-              <a:latin typeface="Calibri"/>
-            </a:endParaRPr>
           </a:p>
         </p:txBody>
       </p:sp>
@@ -7530,12 +7173,6 @@
               </a:rPr>
               <a:t> 1.034</a:t>
             </a:r>
-            <a:endParaRPr sz="1100" b="0" i="0">
-              <a:solidFill>
-                <a:srgbClr val="1A1A2E"/>
-              </a:solidFill>
-              <a:latin typeface="Calibri"/>
-            </a:endParaRPr>
           </a:p>
         </p:txBody>
       </p:sp>
@@ -7571,12 +7208,6 @@
               </a:rPr>
               <a:t>—</a:t>
             </a:r>
-            <a:endParaRPr sz="1100" b="0" i="0">
-              <a:solidFill>
-                <a:srgbClr val="1A1A2E"/>
-              </a:solidFill>
-              <a:latin typeface="Calibri"/>
-            </a:endParaRPr>
           </a:p>
         </p:txBody>
       </p:sp>
@@ -7620,6 +7251,7 @@
           <a:lstStyle/>
           <a:p>
             <a:pPr algn="ctr"/>
+            <a:endParaRPr/>
           </a:p>
         </p:txBody>
       </p:sp>
@@ -7655,12 +7287,6 @@
               </a:rPr>
               <a:t>L × ΔlnS  (buffer interaction)</a:t>
             </a:r>
-            <a:endParaRPr sz="1100" b="0" i="0">
-              <a:solidFill>
-                <a:srgbClr val="1A1A2E"/>
-              </a:solidFill>
-              <a:latin typeface="Calibri"/>
-            </a:endParaRPr>
           </a:p>
         </p:txBody>
       </p:sp>
@@ -7696,12 +7322,6 @@
               </a:rPr>
               <a:t> 3.891</a:t>
             </a:r>
-            <a:endParaRPr sz="1100" b="0" i="0">
-              <a:solidFill>
-                <a:srgbClr val="1A1A2E"/>
-              </a:solidFill>
-              <a:latin typeface="Calibri"/>
-            </a:endParaRPr>
           </a:p>
         </p:txBody>
       </p:sp>
@@ -7737,12 +7357,6 @@
               </a:rPr>
               <a:t>—</a:t>
             </a:r>
-            <a:endParaRPr sz="1100" b="0" i="0">
-              <a:solidFill>
-                <a:srgbClr val="1A1A2E"/>
-              </a:solidFill>
-              <a:latin typeface="Calibri"/>
-            </a:endParaRPr>
           </a:p>
         </p:txBody>
       </p:sp>
@@ -7786,6 +7400,7 @@
           <a:lstStyle/>
           <a:p>
             <a:pPr algn="ctr"/>
+            <a:endParaRPr/>
           </a:p>
         </p:txBody>
       </p:sp>
@@ -7821,12 +7436,6 @@
               </a:rPr>
               <a:t>Controls (velocity, VIX, ΔlnN*)</a:t>
             </a:r>
-            <a:endParaRPr sz="1100" b="0" i="0">
-              <a:solidFill>
-                <a:srgbClr val="1A1A2E"/>
-              </a:solidFill>
-              <a:latin typeface="Calibri"/>
-            </a:endParaRPr>
           </a:p>
         </p:txBody>
       </p:sp>
@@ -7862,12 +7471,6 @@
               </a:rPr>
               <a:t>included</a:t>
             </a:r>
-            <a:endParaRPr sz="1100" b="0" i="0">
-              <a:solidFill>
-                <a:srgbClr val="1A1A2E"/>
-              </a:solidFill>
-              <a:latin typeface="Calibri"/>
-            </a:endParaRPr>
           </a:p>
         </p:txBody>
       </p:sp>
@@ -7894,6 +7497,7 @@
           <a:lstStyle/>
           <a:p>
             <a:pPr algn="ctr"/>
+            <a:endParaRPr/>
           </a:p>
         </p:txBody>
       </p:sp>
@@ -7929,25 +7533,67 @@
               </a:rPr>
               <a:t>** p &lt; 0.05   — = not significant at conventional levels   HAC Newey–West SE (3 lags)</a:t>
             </a:r>
-            <a:endParaRPr sz="900" b="0" i="1">
-              <a:solidFill>
-                <a:srgbClr val="555566"/>
-              </a:solidFill>
-              <a:latin typeface="Calibri"/>
-            </a:endParaRPr>
-          </a:p>
-        </p:txBody>
-      </p:sp>
-      <p:sp>
-        <p:nvSpPr>
-          <p:cNvPr id="39" name="TextBox 38"/>
+          </a:p>
+        </p:txBody>
+      </p:sp>
+      <p:sp>
+        <p:nvSpPr>
+          <p:cNvPr id="40" name="오각형[P] 39"/>
+          <p:cNvSpPr/>
+          <p:nvPr/>
+        </p:nvSpPr>
+        <p:spPr>
+          <a:xfrm>
+            <a:off x="9756648" y="4645152"/>
+            <a:ext cx="2340864" cy="1042416"/>
+          </a:xfrm>
+          <a:prstGeom prst="homePlate">
+            <a:avLst/>
+          </a:prstGeom>
+        </p:spPr>
+        <p:style>
+          <a:lnRef idx="1">
+            <a:schemeClr val="accent1"/>
+          </a:lnRef>
+          <a:fillRef idx="3">
+            <a:schemeClr val="accent1"/>
+          </a:fillRef>
+          <a:effectRef idx="2">
+            <a:schemeClr val="accent1"/>
+          </a:effectRef>
+          <a:fontRef idx="minor">
+            <a:schemeClr val="lt1"/>
+          </a:fontRef>
+        </p:style>
+        <p:txBody>
+          <a:bodyPr rtlCol="0" anchor="ctr"/>
+          <a:lstStyle/>
+          <a:p>
+            <a:pPr algn="ctr"/>
+            <a:r>
+              <a:rPr kumimoji="1" lang="en-US" altLang="ko-KR" dirty="0"/>
+              <a:t>Not significant enough</a:t>
+            </a:r>
+            <a:endParaRPr kumimoji="1" lang="ko-KR" altLang="en-US" dirty="0"/>
+          </a:p>
+        </p:txBody>
+      </p:sp>
+      <p:sp>
+        <p:nvSpPr>
+          <p:cNvPr id="43" name="TextBox 42">
+            <a:extLst>
+              <a:ext uri="{FF2B5EF4-FFF2-40B4-BE49-F238E27FC236}">
+                <a16:creationId xmlns:a16="http://schemas.microsoft.com/office/drawing/2014/main" id="{DADE3A8D-7C39-155F-5B65-4E8E18E41C72}"/>
+              </a:ext>
+            </a:extLst>
+          </p:cNvPr>
           <p:cNvSpPr txBox="1"/>
           <p:nvPr/>
         </p:nvSpPr>
         <p:spPr>
           <a:xfrm>
-            <a:off x="11288486" y="206829"/>
-            <a:ext cx="718457" cy="369332"/>
+            <a:off x="9939130" y="206829"/>
+            <a:ext cx="2067814" cy="369332"/>
           </a:xfrm>
           <a:prstGeom prst="rect">
             <a:avLst/>
@@ -7966,55 +7612,13 @@
                   <a:schemeClr val="bg1"/>
                 </a:solidFill>
               </a:rPr>
-              <a:t>Mimi</a:t>
+              <a:t>Mimi Page 10/15</a:t>
             </a:r>
             <a:endParaRPr kumimoji="1" lang="ko-KR" altLang="en-US" dirty="0">
               <a:solidFill>
                 <a:schemeClr val="bg1"/>
               </a:solidFill>
             </a:endParaRPr>
-          </a:p>
-        </p:txBody>
-      </p:sp>
-      <p:sp>
-        <p:nvSpPr>
-          <p:cNvPr id="40" name="오각형[P] 39"/>
-          <p:cNvSpPr/>
-          <p:nvPr/>
-        </p:nvSpPr>
-        <p:spPr>
-          <a:xfrm>
-            <a:off x="9756648" y="4645152"/>
-            <a:ext cx="2340864" cy="1042416"/>
-          </a:xfrm>
-          <a:prstGeom prst="homePlate">
-            <a:avLst/>
-          </a:prstGeom>
-        </p:spPr>
-        <p:style>
-          <a:lnRef idx="1">
-            <a:schemeClr val="accent1"/>
-          </a:lnRef>
-          <a:fillRef idx="3">
-            <a:schemeClr val="accent1"/>
-          </a:fillRef>
-          <a:effectRef idx="2">
-            <a:schemeClr val="accent1"/>
-          </a:effectRef>
-          <a:fontRef idx="minor">
-            <a:schemeClr val="lt1"/>
-          </a:fontRef>
-        </p:style>
-        <p:txBody>
-          <a:bodyPr rtlCol="0" anchor="ctr"/>
-          <a:lstStyle/>
-          <a:p>
-            <a:pPr algn="ctr"/>
-            <a:r>
-              <a:rPr kumimoji="1" lang="en-US" altLang="ko-KR" dirty="0"/>
-              <a:t>Not significant enough</a:t>
-            </a:r>
-            <a:endParaRPr kumimoji="1" lang="ko-KR" altLang="en-US" dirty="0"/>
           </a:p>
         </p:txBody>
       </p:sp>
@@ -8083,6 +7687,7 @@
           <a:lstStyle/>
           <a:p>
             <a:pPr algn="ctr"/>
+            <a:endParaRPr/>
           </a:p>
         </p:txBody>
       </p:sp>
@@ -8126,6 +7731,7 @@
           <a:lstStyle/>
           <a:p>
             <a:pPr algn="ctr"/>
+            <a:endParaRPr/>
           </a:p>
         </p:txBody>
       </p:sp>
@@ -8161,12 +7767,6 @@
               </a:rPr>
               <a:t>Result 1: When Data Quality Improves, the Picture Sharpens</a:t>
             </a:r>
-            <a:endParaRPr sz="2600" b="0" i="0">
-              <a:solidFill>
-                <a:srgbClr val="FFFFFF"/>
-              </a:solidFill>
-              <a:latin typeface="Calibri"/>
-            </a:endParaRPr>
           </a:p>
         </p:txBody>
       </p:sp>
@@ -8202,12 +7802,6 @@
               </a:rPr>
               <a:t>10</a:t>
             </a:r>
-            <a:endParaRPr sz="1300" b="0" i="0">
-              <a:solidFill>
-                <a:srgbClr val="555566"/>
-              </a:solidFill>
-              <a:latin typeface="Calibri"/>
-            </a:endParaRPr>
           </a:p>
         </p:txBody>
       </p:sp>
@@ -8251,6 +7845,7 @@
           <a:lstStyle/>
           <a:p>
             <a:pPr algn="ctr"/>
+            <a:endParaRPr/>
           </a:p>
         </p:txBody>
       </p:sp>
@@ -8304,12 +7899,6 @@
               </a:rPr>
               <a:t> and L) were not individually significant at our full sample of 51 months. This is a power problem — not a theory problem. Reserve attestations only became comprehensive after 2023.</a:t>
             </a:r>
-            <a:endParaRPr sz="1400" b="0" i="1" dirty="0">
-              <a:solidFill>
-                <a:srgbClr val="1A1A2E"/>
-              </a:solidFill>
-              <a:latin typeface="Calibri"/>
-            </a:endParaRPr>
           </a:p>
         </p:txBody>
       </p:sp>
@@ -8345,12 +7934,6 @@
               </a:rPr>
               <a:t>When we restrict to January 2023 – March 2026  (N = 39 months, best attestation coverage):</a:t>
             </a:r>
-            <a:endParaRPr sz="1500" b="1" i="0" dirty="0">
-              <a:solidFill>
-                <a:srgbClr val="1B3A72"/>
-              </a:solidFill>
-              <a:latin typeface="Calibri"/>
-            </a:endParaRPr>
           </a:p>
         </p:txBody>
       </p:sp>
@@ -8394,6 +7977,7 @@
           <a:lstStyle/>
           <a:p>
             <a:pPr algn="ctr"/>
+            <a:endParaRPr/>
           </a:p>
         </p:txBody>
       </p:sp>
@@ -8429,12 +8013,6 @@
               </a:rPr>
               <a:t>Supply channel</a:t>
             </a:r>
-            <a:endParaRPr sz="1400" b="1" i="0">
-              <a:solidFill>
-                <a:srgbClr val="AAC4E8"/>
-              </a:solidFill>
-              <a:latin typeface="Calibri"/>
-            </a:endParaRPr>
           </a:p>
         </p:txBody>
       </p:sp>
@@ -8470,12 +8048,6 @@
               </a:rPr>
               <a:t>β₁  =  −8.14</a:t>
             </a:r>
-            <a:endParaRPr sz="3000" b="1" i="0">
-              <a:solidFill>
-                <a:srgbClr val="FFFFFF"/>
-              </a:solidFill>
-              <a:latin typeface="Calibri"/>
-            </a:endParaRPr>
           </a:p>
         </p:txBody>
       </p:sp>
@@ -8511,12 +8083,6 @@
               </a:rPr>
               <a:t>***</a:t>
             </a:r>
-            <a:endParaRPr sz="1800" b="1" i="0">
-              <a:solidFill>
-                <a:srgbClr val="FFD700"/>
-              </a:solidFill>
-              <a:latin typeface="Calibri"/>
-            </a:endParaRPr>
           </a:p>
         </p:txBody>
       </p:sp>
@@ -8553,12 +8119,6 @@
               <a:t>Even stronger supply effect in recent data.
 Confirmed at the 1% level.</a:t>
             </a:r>
-            <a:endParaRPr sz="1300" b="0" i="0" dirty="0">
-              <a:solidFill>
-                <a:srgbClr val="AAC4E8"/>
-              </a:solidFill>
-              <a:latin typeface="Calibri"/>
-            </a:endParaRPr>
           </a:p>
         </p:txBody>
       </p:sp>
@@ -8602,6 +8162,7 @@
           <a:lstStyle/>
           <a:p>
             <a:pPr algn="ctr"/>
+            <a:endParaRPr/>
           </a:p>
         </p:txBody>
       </p:sp>
@@ -8637,12 +8198,6 @@
               </a:rPr>
               <a:t>Buffer interaction</a:t>
             </a:r>
-            <a:endParaRPr sz="1400" b="1" i="0">
-              <a:solidFill>
-                <a:srgbClr val="AAC4E8"/>
-              </a:solidFill>
-              <a:latin typeface="Calibri"/>
-            </a:endParaRPr>
           </a:p>
         </p:txBody>
       </p:sp>
@@ -8711,11 +8266,6 @@
               </a:rPr>
               <a:t>L = −8.14 + 49.17 × L</a:t>
             </a:r>
-            <a:endParaRPr lang="en-US" altLang="ko-KR" dirty="0">
-              <a:solidFill>
-                <a:schemeClr val="bg1"/>
-              </a:solidFill>
-            </a:endParaRPr>
           </a:p>
         </p:txBody>
       </p:sp>
@@ -8751,12 +8301,6 @@
               </a:rPr>
               <a:t>***  (p = 0.004)</a:t>
             </a:r>
-            <a:endParaRPr sz="1800" b="1" i="0" dirty="0">
-              <a:solidFill>
-                <a:srgbClr val="FFD700"/>
-              </a:solidFill>
-              <a:latin typeface="Calibri"/>
-            </a:endParaRPr>
           </a:p>
         </p:txBody>
       </p:sp>
@@ -8822,11 +8366,6 @@
               </a:rPr>
               <a:t> → strong compression, issuers are actively buying T-bills</a:t>
             </a:r>
-            <a:endParaRPr lang="en-US" altLang="ko-KR" dirty="0">
-              <a:solidFill>
-                <a:schemeClr val="bg1"/>
-              </a:solidFill>
-            </a:endParaRPr>
           </a:p>
           <a:p>
             <a:r>
@@ -8869,11 +8408,6 @@
               </a:rPr>
               <a:t> → effect nearly disappears, issuers have enough cash and don't need to move T-bill markets</a:t>
             </a:r>
-            <a:endParaRPr lang="en-US" altLang="ko-KR" dirty="0">
-              <a:solidFill>
-                <a:schemeClr val="bg1"/>
-              </a:solidFill>
-            </a:endParaRPr>
           </a:p>
           <a:p>
             <a:pPr algn="l"/>
@@ -8896,12 +8430,6 @@
               <a:t>Higher liquid buffer dampens the spread compression.
 The fragility mechanism is confirmed.</a:t>
             </a:r>
-            <a:endParaRPr sz="1300" b="0" i="0" dirty="0">
-              <a:solidFill>
-                <a:schemeClr val="bg1"/>
-              </a:solidFill>
-              <a:latin typeface="Calibri"/>
-            </a:endParaRPr>
           </a:p>
         </p:txBody>
       </p:sp>
@@ -8945,6 +8473,7 @@
           <a:lstStyle/>
           <a:p>
             <a:pPr algn="ctr"/>
+            <a:endParaRPr/>
           </a:p>
         </p:txBody>
       </p:sp>
@@ -8980,25 +8509,25 @@
               </a:rPr>
               <a:t>Both channels confirmed in recent data. The mechanism is real — our full sample just needs more months to reach significance.</a:t>
             </a:r>
-            <a:endParaRPr sz="2400" b="1" i="0" dirty="0">
-              <a:solidFill>
-                <a:srgbClr val="FFFFFF"/>
-              </a:solidFill>
-              <a:latin typeface="Calibri"/>
-            </a:endParaRPr>
-          </a:p>
-        </p:txBody>
-      </p:sp>
-      <p:sp>
-        <p:nvSpPr>
-          <p:cNvPr id="21" name="TextBox 20"/>
+          </a:p>
+        </p:txBody>
+      </p:sp>
+      <p:sp>
+        <p:nvSpPr>
+          <p:cNvPr id="24" name="TextBox 23">
+            <a:extLst>
+              <a:ext uri="{FF2B5EF4-FFF2-40B4-BE49-F238E27FC236}">
+                <a16:creationId xmlns:a16="http://schemas.microsoft.com/office/drawing/2014/main" id="{BA07A517-E0B4-B96D-4936-97A04A330EFC}"/>
+              </a:ext>
+            </a:extLst>
+          </p:cNvPr>
           <p:cNvSpPr txBox="1"/>
           <p:nvPr/>
         </p:nvSpPr>
         <p:spPr>
           <a:xfrm>
-            <a:off x="11288486" y="206829"/>
-            <a:ext cx="718457" cy="369332"/>
+            <a:off x="9939130" y="206829"/>
+            <a:ext cx="2067814" cy="369332"/>
           </a:xfrm>
           <a:prstGeom prst="rect">
             <a:avLst/>
@@ -9017,7 +8546,7 @@
                   <a:schemeClr val="bg1"/>
                 </a:solidFill>
               </a:rPr>
-              <a:t>Mimi</a:t>
+              <a:t>Mimi Page 11/15</a:t>
             </a:r>
             <a:endParaRPr kumimoji="1" lang="ko-KR" altLang="en-US" dirty="0">
               <a:solidFill>
@@ -9140,6 +8669,7 @@
           <a:lstStyle/>
           <a:p>
             <a:pPr algn="ctr"/>
+            <a:endParaRPr/>
           </a:p>
         </p:txBody>
       </p:sp>
@@ -9175,53 +8705,6 @@
               </a:rPr>
               <a:t>Result 2: Is There a Safety Threshold?</a:t>
             </a:r>
-            <a:endParaRPr sz="2600" b="0" i="0">
-              <a:solidFill>
-                <a:srgbClr val="FFFFFF"/>
-              </a:solidFill>
-              <a:latin typeface="Calibri"/>
-            </a:endParaRPr>
-          </a:p>
-        </p:txBody>
-      </p:sp>
-      <p:sp>
-        <p:nvSpPr>
-          <p:cNvPr id="5" name="TextBox 4"/>
-          <p:cNvSpPr txBox="1"/>
-          <p:nvPr/>
-        </p:nvSpPr>
-        <p:spPr>
-          <a:xfrm>
-            <a:off x="11686032" y="6473952"/>
-            <a:ext cx="411480" cy="320040"/>
-          </a:xfrm>
-          <a:prstGeom prst="rect">
-            <a:avLst/>
-          </a:prstGeom>
-          <a:noFill/>
-        </p:spPr>
-        <p:txBody>
-          <a:bodyPr wrap="square">
-            <a:spAutoFit/>
-          </a:bodyPr>
-          <a:lstStyle/>
-          <a:p>
-            <a:pPr algn="r"/>
-            <a:r>
-              <a:rPr sz="1300" b="0" i="0">
-                <a:solidFill>
-                  <a:srgbClr val="555566"/>
-                </a:solidFill>
-                <a:latin typeface="Calibri"/>
-              </a:rPr>
-              <a:t>11</a:t>
-            </a:r>
-            <a:endParaRPr sz="1300" b="0" i="0">
-              <a:solidFill>
-                <a:srgbClr val="555566"/>
-              </a:solidFill>
-              <a:latin typeface="Calibri"/>
-            </a:endParaRPr>
           </a:p>
         </p:txBody>
       </p:sp>
@@ -9234,7 +8717,7 @@
           <p:nvPr/>
         </p:nvPicPr>
         <p:blipFill>
-          <a:blip r:embed="rId1"/>
+          <a:blip r:embed="rId3"/>
           <a:stretch>
             <a:fillRect/>
           </a:stretch>
@@ -9289,6 +8772,7 @@
           <a:lstStyle/>
           <a:p>
             <a:pPr algn="ctr"/>
+            <a:endParaRPr/>
           </a:p>
         </p:txBody>
       </p:sp>
@@ -9324,12 +8808,6 @@
               </a:rPr>
               <a:t>q*  =  13%</a:t>
             </a:r>
-            <a:endParaRPr sz="4000" b="1" i="0">
-              <a:solidFill>
-                <a:srgbClr val="FFFFFF"/>
-              </a:solidFill>
-              <a:latin typeface="Calibri"/>
-            </a:endParaRPr>
           </a:p>
         </p:txBody>
       </p:sp>
@@ -9365,12 +8843,6 @@
               </a:rPr>
               <a:t>of supply held as liquid cash</a:t>
             </a:r>
-            <a:endParaRPr sz="1400" b="0" i="1">
-              <a:solidFill>
-                <a:srgbClr val="AAC4E8"/>
-              </a:solidFill>
-              <a:latin typeface="Calibri"/>
-            </a:endParaRPr>
           </a:p>
         </p:txBody>
       </p:sp>
@@ -9414,6 +8886,7 @@
           <a:lstStyle/>
           <a:p>
             <a:pPr algn="ctr"/>
+            <a:endParaRPr/>
           </a:p>
         </p:txBody>
       </p:sp>
@@ -9449,12 +8922,6 @@
               </a:rPr>
               <a:t>What this means:</a:t>
             </a:r>
-            <a:endParaRPr sz="1400" b="1" i="0" dirty="0">
-              <a:solidFill>
-                <a:srgbClr val="1B3A72"/>
-              </a:solidFill>
-              <a:latin typeface="Calibri"/>
-            </a:endParaRPr>
           </a:p>
         </p:txBody>
       </p:sp>
@@ -9490,6 +8957,111 @@
               </a:rPr>
               <a:t>Using Hansen (2000) threshold regression, we find a tipping point at 13% liquid cash reserves.
 Below this level — where most of our data falls — issuers don't have enough cash to absorb redemptions without selling T-bills.</a:t>
+            </a:r>
+          </a:p>
+        </p:txBody>
+      </p:sp>
+      <p:sp>
+        <p:nvSpPr>
+          <p:cNvPr id="13" name="TextBox 12"/>
+          <p:cNvSpPr txBox="1"/>
+          <p:nvPr/>
+        </p:nvSpPr>
+        <p:spPr>
+          <a:xfrm>
+            <a:off x="2931795" y="4678198"/>
+            <a:ext cx="6400800" cy="246221"/>
+          </a:xfrm>
+          <a:prstGeom prst="rect">
+            <a:avLst/>
+          </a:prstGeom>
+          <a:noFill/>
+        </p:spPr>
+        <p:txBody>
+          <a:bodyPr wrap="square">
+            <a:spAutoFit/>
+          </a:bodyPr>
+          <a:lstStyle/>
+          <a:p>
+            <a:pPr algn="l"/>
+            <a:r>
+              <a:rPr sz="1000" b="0" i="1" dirty="0">
+                <a:solidFill>
+                  <a:srgbClr val="555566"/>
+                </a:solidFill>
+                <a:latin typeface="Calibri"/>
+              </a:rPr>
+              <a:t> Lower SSR = better model fit at that threshold value</a:t>
+            </a:r>
+          </a:p>
+        </p:txBody>
+      </p:sp>
+      <p:sp>
+        <p:nvSpPr>
+          <p:cNvPr id="14" name="TextBox 13"/>
+          <p:cNvSpPr txBox="1"/>
+          <p:nvPr/>
+        </p:nvSpPr>
+        <p:spPr>
+          <a:xfrm>
+            <a:off x="320040" y="6400800"/>
+            <a:ext cx="11521440" cy="292608"/>
+          </a:xfrm>
+          <a:prstGeom prst="rect">
+            <a:avLst/>
+          </a:prstGeom>
+          <a:noFill/>
+        </p:spPr>
+        <p:txBody>
+          <a:bodyPr wrap="square">
+            <a:spAutoFit/>
+          </a:bodyPr>
+          <a:lstStyle/>
+          <a:p>
+            <a:pPr algn="ctr"/>
+            <a:r>
+              <a:rPr sz="1100" b="0" i="1" dirty="0">
+                <a:solidFill>
+                  <a:srgbClr val="555566"/>
+                </a:solidFill>
+                <a:latin typeface="Calibri"/>
+              </a:rPr>
+              <a:t>Bootstrap p = 0.260  (suggestive — the direction is clear; significance grows as data accumulates past 2026)</a:t>
+            </a:r>
+          </a:p>
+        </p:txBody>
+      </p:sp>
+      <p:sp>
+        <p:nvSpPr>
+          <p:cNvPr id="16" name="TextBox 15"/>
+          <p:cNvSpPr txBox="1"/>
+          <p:nvPr/>
+        </p:nvSpPr>
+        <p:spPr>
+          <a:xfrm>
+            <a:off x="320040" y="1440898"/>
+            <a:ext cx="4663440" cy="292388"/>
+          </a:xfrm>
+          <a:prstGeom prst="rect">
+            <a:avLst/>
+          </a:prstGeom>
+          <a:noFill/>
+        </p:spPr>
+        <p:txBody>
+          <a:bodyPr wrap="square">
+            <a:spAutoFit/>
+          </a:bodyPr>
+          <a:lstStyle/>
+          <a:p>
+            <a:pPr algn="l"/>
+            <a:r>
+              <a:rPr lang="en-US" sz="1300" b="0" i="0" dirty="0">
+                <a:solidFill>
+                  <a:srgbClr val="1A1A2E"/>
+                </a:solidFill>
+                <a:latin typeface="Calibri"/>
+              </a:rPr>
+              <a:t>SSR : Sum of Squared Residuals </a:t>
             </a:r>
             <a:endParaRPr sz="1300" b="0" i="0" dirty="0">
               <a:solidFill>
@@ -9502,96 +9074,62 @@
       </p:sp>
       <p:sp>
         <p:nvSpPr>
-          <p:cNvPr id="13" name="TextBox 12"/>
+          <p:cNvPr id="18" name="위쪽 화살표[U] 17"/>
+          <p:cNvSpPr/>
+          <p:nvPr/>
+        </p:nvSpPr>
+        <p:spPr>
+          <a:xfrm>
+            <a:off x="5193665" y="5097563"/>
+            <a:ext cx="1527175" cy="846037"/>
+          </a:xfrm>
+          <a:prstGeom prst="upArrow">
+            <a:avLst/>
+          </a:prstGeom>
+        </p:spPr>
+        <p:style>
+          <a:lnRef idx="1">
+            <a:schemeClr val="accent1"/>
+          </a:lnRef>
+          <a:fillRef idx="3">
+            <a:schemeClr val="accent1"/>
+          </a:fillRef>
+          <a:effectRef idx="2">
+            <a:schemeClr val="accent1"/>
+          </a:effectRef>
+          <a:fontRef idx="minor">
+            <a:schemeClr val="lt1"/>
+          </a:fontRef>
+        </p:style>
+        <p:txBody>
+          <a:bodyPr rtlCol="0" anchor="ctr"/>
+          <a:lstStyle/>
+          <a:p>
+            <a:pPr algn="ctr"/>
+            <a:r>
+              <a:rPr kumimoji="1" lang="en-US" altLang="ko-KR" dirty="0"/>
+              <a:t>13%</a:t>
+            </a:r>
+            <a:endParaRPr kumimoji="1" lang="ko-KR" altLang="en-US" dirty="0"/>
+          </a:p>
+        </p:txBody>
+      </p:sp>
+      <p:sp>
+        <p:nvSpPr>
+          <p:cNvPr id="20" name="TextBox 19">
+            <a:extLst>
+              <a:ext uri="{FF2B5EF4-FFF2-40B4-BE49-F238E27FC236}">
+                <a16:creationId xmlns:a16="http://schemas.microsoft.com/office/drawing/2014/main" id="{98527E45-E9E5-05FA-9333-C948EA50D280}"/>
+              </a:ext>
+            </a:extLst>
+          </p:cNvPr>
           <p:cNvSpPr txBox="1"/>
           <p:nvPr/>
         </p:nvSpPr>
         <p:spPr>
           <a:xfrm>
-            <a:off x="2931795" y="4678198"/>
-            <a:ext cx="6400800" cy="246221"/>
-          </a:xfrm>
-          <a:prstGeom prst="rect">
-            <a:avLst/>
-          </a:prstGeom>
-          <a:noFill/>
-        </p:spPr>
-        <p:txBody>
-          <a:bodyPr wrap="square">
-            <a:spAutoFit/>
-          </a:bodyPr>
-          <a:lstStyle/>
-          <a:p>
-            <a:pPr algn="l"/>
-            <a:r>
-              <a:rPr sz="1000" b="0" i="1" dirty="0">
-                <a:solidFill>
-                  <a:srgbClr val="555566"/>
-                </a:solidFill>
-                <a:latin typeface="Calibri"/>
-              </a:rPr>
-              <a:t> Lower SSR = better model fit at that threshold value</a:t>
-            </a:r>
-            <a:endParaRPr sz="1000" b="0" i="1" dirty="0">
-              <a:solidFill>
-                <a:srgbClr val="555566"/>
-              </a:solidFill>
-              <a:latin typeface="Calibri"/>
-            </a:endParaRPr>
-          </a:p>
-        </p:txBody>
-      </p:sp>
-      <p:sp>
-        <p:nvSpPr>
-          <p:cNvPr id="14" name="TextBox 13"/>
-          <p:cNvSpPr txBox="1"/>
-          <p:nvPr/>
-        </p:nvSpPr>
-        <p:spPr>
-          <a:xfrm>
-            <a:off x="320040" y="6400800"/>
-            <a:ext cx="11521440" cy="292608"/>
-          </a:xfrm>
-          <a:prstGeom prst="rect">
-            <a:avLst/>
-          </a:prstGeom>
-          <a:noFill/>
-        </p:spPr>
-        <p:txBody>
-          <a:bodyPr wrap="square">
-            <a:spAutoFit/>
-          </a:bodyPr>
-          <a:lstStyle/>
-          <a:p>
-            <a:pPr algn="ctr"/>
-            <a:r>
-              <a:rPr sz="1100" b="0" i="1" dirty="0">
-                <a:solidFill>
-                  <a:srgbClr val="555566"/>
-                </a:solidFill>
-                <a:latin typeface="Calibri"/>
-              </a:rPr>
-              <a:t>Bootstrap p = 0.260  (suggestive — the direction is clear; significance grows as data accumulates past 2026)</a:t>
-            </a:r>
-            <a:endParaRPr sz="1100" b="0" i="1" dirty="0">
-              <a:solidFill>
-                <a:srgbClr val="555566"/>
-              </a:solidFill>
-              <a:latin typeface="Calibri"/>
-            </a:endParaRPr>
-          </a:p>
-        </p:txBody>
-      </p:sp>
-      <p:sp>
-        <p:nvSpPr>
-          <p:cNvPr id="15" name="TextBox 14"/>
-          <p:cNvSpPr txBox="1"/>
-          <p:nvPr/>
-        </p:nvSpPr>
-        <p:spPr>
-          <a:xfrm>
-            <a:off x="11288486" y="206829"/>
-            <a:ext cx="718457" cy="369332"/>
+            <a:off x="10237304" y="206829"/>
+            <a:ext cx="1769640" cy="369332"/>
           </a:xfrm>
           <a:prstGeom prst="rect">
             <a:avLst/>
@@ -9610,96 +9148,13 @@
                   <a:schemeClr val="bg1"/>
                 </a:solidFill>
               </a:rPr>
-              <a:t>Sara</a:t>
+              <a:t>Sara Page12/15</a:t>
             </a:r>
             <a:endParaRPr kumimoji="1" lang="ko-KR" altLang="en-US" dirty="0">
               <a:solidFill>
                 <a:schemeClr val="bg1"/>
               </a:solidFill>
             </a:endParaRPr>
-          </a:p>
-        </p:txBody>
-      </p:sp>
-      <p:sp>
-        <p:nvSpPr>
-          <p:cNvPr id="16" name="TextBox 15"/>
-          <p:cNvSpPr txBox="1"/>
-          <p:nvPr/>
-        </p:nvSpPr>
-        <p:spPr>
-          <a:xfrm>
-            <a:off x="320040" y="1440898"/>
-            <a:ext cx="4663440" cy="292388"/>
-          </a:xfrm>
-          <a:prstGeom prst="rect">
-            <a:avLst/>
-          </a:prstGeom>
-          <a:noFill/>
-        </p:spPr>
-        <p:txBody>
-          <a:bodyPr wrap="square">
-            <a:spAutoFit/>
-          </a:bodyPr>
-          <a:lstStyle/>
-          <a:p>
-            <a:pPr algn="l"/>
-            <a:r>
-              <a:rPr lang="en-US" sz="1300" b="0" i="0" dirty="0">
-                <a:solidFill>
-                  <a:srgbClr val="1A1A2E"/>
-                </a:solidFill>
-                <a:latin typeface="Calibri"/>
-              </a:rPr>
-              <a:t>SSR : Sum of Squared Residuals </a:t>
-            </a:r>
-            <a:endParaRPr sz="1300" b="0" i="0" dirty="0">
-              <a:solidFill>
-                <a:srgbClr val="1A1A2E"/>
-              </a:solidFill>
-              <a:latin typeface="Calibri"/>
-            </a:endParaRPr>
-          </a:p>
-        </p:txBody>
-      </p:sp>
-      <p:sp>
-        <p:nvSpPr>
-          <p:cNvPr id="18" name="위쪽 화살표[U] 17"/>
-          <p:cNvSpPr/>
-          <p:nvPr/>
-        </p:nvSpPr>
-        <p:spPr>
-          <a:xfrm>
-            <a:off x="5193665" y="5097563"/>
-            <a:ext cx="1527175" cy="846037"/>
-          </a:xfrm>
-          <a:prstGeom prst="upArrow">
-            <a:avLst/>
-          </a:prstGeom>
-        </p:spPr>
-        <p:style>
-          <a:lnRef idx="1">
-            <a:schemeClr val="accent1"/>
-          </a:lnRef>
-          <a:fillRef idx="3">
-            <a:schemeClr val="accent1"/>
-          </a:fillRef>
-          <a:effectRef idx="2">
-            <a:schemeClr val="accent1"/>
-          </a:effectRef>
-          <a:fontRef idx="minor">
-            <a:schemeClr val="lt1"/>
-          </a:fontRef>
-        </p:style>
-        <p:txBody>
-          <a:bodyPr rtlCol="0" anchor="ctr"/>
-          <a:lstStyle/>
-          <a:p>
-            <a:pPr algn="ctr"/>
-            <a:r>
-              <a:rPr kumimoji="1" lang="en-US" altLang="ko-KR" dirty="0"/>
-              <a:t>13%</a:t>
-            </a:r>
-            <a:endParaRPr kumimoji="1" lang="ko-KR" altLang="en-US" dirty="0"/>
           </a:p>
         </p:txBody>
       </p:sp>
@@ -9768,6 +9223,7 @@
           <a:lstStyle/>
           <a:p>
             <a:pPr algn="ctr"/>
+            <a:endParaRPr/>
           </a:p>
         </p:txBody>
       </p:sp>
@@ -9811,6 +9267,7 @@
           <a:lstStyle/>
           <a:p>
             <a:pPr algn="ctr"/>
+            <a:endParaRPr/>
           </a:p>
         </p:txBody>
       </p:sp>
@@ -9846,12 +9303,6 @@
               </a:rPr>
               <a:t>Below vs. Above the Threshold: Two Different Worlds</a:t>
             </a:r>
-            <a:endParaRPr sz="2600" b="0" i="0" dirty="0">
-              <a:solidFill>
-                <a:srgbClr val="FFFFFF"/>
-              </a:solidFill>
-              <a:latin typeface="Calibri"/>
-            </a:endParaRPr>
           </a:p>
         </p:txBody>
       </p:sp>
@@ -9887,12 +9338,6 @@
               </a:rPr>
               <a:t>12</a:t>
             </a:r>
-            <a:endParaRPr sz="1300" b="0" i="0">
-              <a:solidFill>
-                <a:srgbClr val="555566"/>
-              </a:solidFill>
-              <a:latin typeface="Calibri"/>
-            </a:endParaRPr>
           </a:p>
         </p:txBody>
       </p:sp>
@@ -9928,12 +9373,6 @@
               </a:rPr>
               <a:t>Splitting our 51 months at q* = 13% reveals a striking difference in how stablecoin growth affects Treasury markets:</a:t>
             </a:r>
-            <a:endParaRPr sz="1400" b="0" i="1" dirty="0">
-              <a:solidFill>
-                <a:srgbClr val="555566"/>
-              </a:solidFill>
-              <a:latin typeface="Calibri"/>
-            </a:endParaRPr>
           </a:p>
         </p:txBody>
       </p:sp>
@@ -9977,6 +9416,7 @@
           <a:lstStyle/>
           <a:p>
             <a:pPr algn="ctr"/>
+            <a:endParaRPr/>
           </a:p>
         </p:txBody>
       </p:sp>
@@ -10020,6 +9460,7 @@
           <a:lstStyle/>
           <a:p>
             <a:pPr algn="ctr"/>
+            <a:endParaRPr/>
           </a:p>
         </p:txBody>
       </p:sp>
@@ -10055,12 +9496,6 @@
               </a:rPr>
               <a:t>BELOW  13%  LIQUID BUFFER</a:t>
             </a:r>
-            <a:endParaRPr sz="1400" b="1" i="0">
-              <a:solidFill>
-                <a:srgbClr val="FFFFFF"/>
-              </a:solidFill>
-              <a:latin typeface="Calibri"/>
-            </a:endParaRPr>
           </a:p>
         </p:txBody>
       </p:sp>
@@ -10096,12 +9531,6 @@
               </a:rPr>
               <a:t>38 out of 51 months</a:t>
             </a:r>
-            <a:endParaRPr sz="1300" b="0" i="1">
-              <a:solidFill>
-                <a:srgbClr val="555566"/>
-              </a:solidFill>
-              <a:latin typeface="Calibri"/>
-            </a:endParaRPr>
           </a:p>
         </p:txBody>
       </p:sp>
@@ -10137,12 +9566,6 @@
               </a:rPr>
               <a:t>β  =  −6.97</a:t>
             </a:r>
-            <a:endParaRPr sz="4200" b="1" i="0" dirty="0">
-              <a:solidFill>
-                <a:srgbClr val="C0392B"/>
-              </a:solidFill>
-              <a:latin typeface="Calibri"/>
-            </a:endParaRPr>
           </a:p>
         </p:txBody>
       </p:sp>
@@ -10225,6 +9648,7 @@
           <a:lstStyle/>
           <a:p>
             <a:pPr algn="ctr"/>
+            <a:endParaRPr/>
           </a:p>
         </p:txBody>
       </p:sp>
@@ -10268,6 +9692,7 @@
           <a:lstStyle/>
           <a:p>
             <a:pPr algn="ctr"/>
+            <a:endParaRPr/>
           </a:p>
         </p:txBody>
       </p:sp>
@@ -10303,12 +9728,6 @@
               </a:rPr>
               <a:t>ABOVE  13%  LIQUID BUFFER</a:t>
             </a:r>
-            <a:endParaRPr sz="1400" b="1" i="0">
-              <a:solidFill>
-                <a:srgbClr val="FFFFFF"/>
-              </a:solidFill>
-              <a:latin typeface="Calibri"/>
-            </a:endParaRPr>
           </a:p>
         </p:txBody>
       </p:sp>
@@ -10344,12 +9763,6 @@
               </a:rPr>
               <a:t>13 out of 51 months</a:t>
             </a:r>
-            <a:endParaRPr sz="1300" b="0" i="1">
-              <a:solidFill>
-                <a:srgbClr val="555566"/>
-              </a:solidFill>
-              <a:latin typeface="Calibri"/>
-            </a:endParaRPr>
           </a:p>
         </p:txBody>
       </p:sp>
@@ -10385,12 +9798,6 @@
               </a:rPr>
               <a:t>β  =  +1.26</a:t>
             </a:r>
-            <a:endParaRPr sz="4200" b="1" i="0" dirty="0">
-              <a:solidFill>
-                <a:srgbClr val="1A7A4A"/>
-              </a:solidFill>
-              <a:latin typeface="Calibri"/>
-            </a:endParaRPr>
           </a:p>
         </p:txBody>
       </p:sp>
@@ -10473,6 +9880,7 @@
           <a:lstStyle/>
           <a:p>
             <a:pPr algn="ctr"/>
+            <a:endParaRPr/>
           </a:p>
         </p:txBody>
       </p:sp>
@@ -10526,25 +9934,25 @@
               </a:rPr>
               <a:t> Treasury markets from one that disrupts them.</a:t>
             </a:r>
-            <a:endParaRPr sz="2400" b="1" i="0" dirty="0">
-              <a:solidFill>
-                <a:srgbClr val="FFFFFF"/>
-              </a:solidFill>
-              <a:latin typeface="Calibri"/>
-            </a:endParaRPr>
-          </a:p>
-        </p:txBody>
-      </p:sp>
-      <p:sp>
-        <p:nvSpPr>
-          <p:cNvPr id="21" name="TextBox 20"/>
+          </a:p>
+        </p:txBody>
+      </p:sp>
+      <p:sp>
+        <p:nvSpPr>
+          <p:cNvPr id="24" name="TextBox 23">
+            <a:extLst>
+              <a:ext uri="{FF2B5EF4-FFF2-40B4-BE49-F238E27FC236}">
+                <a16:creationId xmlns:a16="http://schemas.microsoft.com/office/drawing/2014/main" id="{F9D832A5-7171-4B55-9846-DC18A3C77AD8}"/>
+              </a:ext>
+            </a:extLst>
+          </p:cNvPr>
           <p:cNvSpPr txBox="1"/>
           <p:nvPr/>
         </p:nvSpPr>
         <p:spPr>
           <a:xfrm>
-            <a:off x="11288486" y="206829"/>
-            <a:ext cx="718457" cy="369332"/>
+            <a:off x="10118035" y="206829"/>
+            <a:ext cx="1888909" cy="369332"/>
           </a:xfrm>
           <a:prstGeom prst="rect">
             <a:avLst/>
@@ -10563,7 +9971,7 @@
                   <a:schemeClr val="bg1"/>
                 </a:solidFill>
               </a:rPr>
-              <a:t>Sara</a:t>
+              <a:t>Sara Page13/15</a:t>
             </a:r>
             <a:endParaRPr kumimoji="1" lang="ko-KR" altLang="en-US" dirty="0">
               <a:solidFill>
@@ -10638,6 +10046,7 @@
           <a:lstStyle/>
           <a:p>
             <a:pPr algn="ctr"/>
+            <a:endParaRPr/>
           </a:p>
         </p:txBody>
       </p:sp>
@@ -10678,94 +10087,6 @@
                 <a:srgbClr val="FFFFFF"/>
               </a:solidFill>
               <a:latin typeface="Calibri"/>
-            </a:endParaRPr>
-          </a:p>
-        </p:txBody>
-      </p:sp>
-      <p:sp>
-        <p:nvSpPr>
-          <p:cNvPr id="5" name="TextBox 4"/>
-          <p:cNvSpPr txBox="1"/>
-          <p:nvPr/>
-        </p:nvSpPr>
-        <p:spPr>
-          <a:xfrm>
-            <a:off x="11686032" y="6473952"/>
-            <a:ext cx="411480" cy="292388"/>
-          </a:xfrm>
-          <a:prstGeom prst="rect">
-            <a:avLst/>
-          </a:prstGeom>
-          <a:noFill/>
-        </p:spPr>
-        <p:txBody>
-          <a:bodyPr wrap="square">
-            <a:spAutoFit/>
-          </a:bodyPr>
-          <a:lstStyle/>
-          <a:p>
-            <a:pPr algn="r"/>
-            <a:r>
-              <a:rPr sz="1300" b="0" i="0" dirty="0">
-                <a:solidFill>
-                  <a:srgbClr val="555566"/>
-                </a:solidFill>
-                <a:latin typeface="Calibri"/>
-              </a:rPr>
-              <a:t>1</a:t>
-            </a:r>
-            <a:r>
-              <a:rPr lang="en-US" sz="1300" b="0" i="0" dirty="0">
-                <a:solidFill>
-                  <a:srgbClr val="555566"/>
-                </a:solidFill>
-                <a:latin typeface="Calibri"/>
-              </a:rPr>
-              <a:t>3</a:t>
-            </a:r>
-            <a:endParaRPr sz="1300" b="0" i="0" dirty="0">
-              <a:solidFill>
-                <a:srgbClr val="555566"/>
-              </a:solidFill>
-              <a:latin typeface="Calibri"/>
-            </a:endParaRPr>
-          </a:p>
-        </p:txBody>
-      </p:sp>
-      <p:sp>
-        <p:nvSpPr>
-          <p:cNvPr id="15" name="TextBox 14"/>
-          <p:cNvSpPr txBox="1"/>
-          <p:nvPr/>
-        </p:nvSpPr>
-        <p:spPr>
-          <a:xfrm>
-            <a:off x="11288486" y="206829"/>
-            <a:ext cx="718457" cy="369332"/>
-          </a:xfrm>
-          <a:prstGeom prst="rect">
-            <a:avLst/>
-          </a:prstGeom>
-          <a:noFill/>
-        </p:spPr>
-        <p:txBody>
-          <a:bodyPr wrap="square" rtlCol="0">
-            <a:spAutoFit/>
-          </a:bodyPr>
-          <a:lstStyle/>
-          <a:p>
-            <a:r>
-              <a:rPr kumimoji="1" lang="en-US" altLang="ko-KR" dirty="0">
-                <a:solidFill>
-                  <a:schemeClr val="bg1"/>
-                </a:solidFill>
-              </a:rPr>
-              <a:t>Sara</a:t>
-            </a:r>
-            <a:endParaRPr kumimoji="1" lang="ko-KR" altLang="en-US" dirty="0">
-              <a:solidFill>
-                <a:schemeClr val="bg1"/>
-              </a:solidFill>
             </a:endParaRPr>
           </a:p>
         </p:txBody>
@@ -10829,6 +10150,117 @@
               </a:rPr>
               <a:t>Moving from monthly trends to daily "quasi-experimental" causal identification.</a:t>
             </a:r>
+          </a:p>
+          <a:p>
+            <a:pPr marL="742950" lvl="1" indent="-285750" algn="l">
+              <a:buFont typeface="Arial" panose="020B0704020202020204" pitchFamily="34" charset="0"/>
+              <a:buChar char="•"/>
+            </a:pPr>
+            <a:r>
+              <a:rPr lang="en-US" altLang="ko-KR" b="0" i="0" dirty="0">
+                <a:solidFill>
+                  <a:srgbClr val="303030"/>
+                </a:solidFill>
+                <a:effectLst/>
+                <a:latin typeface="Google Sans Text"/>
+              </a:rPr>
+              <a:t>Analyzing three major stress episodes: LUNA/UST, the USDT partial </a:t>
+            </a:r>
+            <a:r>
+              <a:rPr lang="en-US" altLang="ko-KR" b="0" i="0" dirty="0" err="1">
+                <a:solidFill>
+                  <a:srgbClr val="303030"/>
+                </a:solidFill>
+                <a:effectLst/>
+                <a:latin typeface="Google Sans Text"/>
+              </a:rPr>
+              <a:t>depeg</a:t>
+            </a:r>
+            <a:r>
+              <a:rPr lang="en-US" altLang="ko-KR" b="0" i="0" dirty="0">
+                <a:solidFill>
+                  <a:srgbClr val="303030"/>
+                </a:solidFill>
+                <a:effectLst/>
+                <a:latin typeface="Google Sans Text"/>
+              </a:rPr>
+              <a:t>, and the USDC/SVB failure.</a:t>
+            </a:r>
+          </a:p>
+          <a:p>
+            <a:pPr marL="742950" lvl="1" indent="-285750" algn="l">
+              <a:buFont typeface="Arial" panose="020B0704020202020204" pitchFamily="34" charset="0"/>
+              <a:buChar char="•"/>
+            </a:pPr>
+            <a:r>
+              <a:rPr lang="en-US" altLang="ko-KR" b="0" i="0" dirty="0">
+                <a:solidFill>
+                  <a:srgbClr val="303030"/>
+                </a:solidFill>
+                <a:effectLst/>
+                <a:latin typeface="Google Sans Text"/>
+              </a:rPr>
+              <a:t>Proving how the </a:t>
+            </a:r>
+            <a:r>
+              <a:rPr lang="en-US" altLang="ko-KR" b="1" i="0" dirty="0">
+                <a:solidFill>
+                  <a:srgbClr val="303030"/>
+                </a:solidFill>
+                <a:effectLst/>
+                <a:latin typeface="Google Sans Text"/>
+              </a:rPr>
+              <a:t>buffer size</a:t>
+            </a:r>
+            <a:r>
+              <a:rPr lang="en-US" altLang="ko-KR" b="0" i="0" dirty="0">
+                <a:solidFill>
+                  <a:srgbClr val="303030"/>
+                </a:solidFill>
+                <a:effectLst/>
+                <a:latin typeface="Google Sans Text"/>
+              </a:rPr>
+              <a:t> determines if a crisis causes a "sovereign-linked liquidity shock" or a "flight-to-safety".</a:t>
+            </a:r>
+          </a:p>
+        </p:txBody>
+      </p:sp>
+      <p:sp>
+        <p:nvSpPr>
+          <p:cNvPr id="20" name="TextBox 19"/>
+          <p:cNvSpPr txBox="1"/>
+          <p:nvPr/>
+        </p:nvSpPr>
+        <p:spPr>
+          <a:xfrm>
+            <a:off x="274320" y="4060308"/>
+            <a:ext cx="6144126" cy="1754326"/>
+          </a:xfrm>
+          <a:prstGeom prst="rect">
+            <a:avLst/>
+          </a:prstGeom>
+          <a:noFill/>
+        </p:spPr>
+        <p:txBody>
+          <a:bodyPr wrap="square">
+            <a:spAutoFit/>
+          </a:bodyPr>
+          <a:lstStyle/>
+          <a:p>
+            <a:pPr algn="l">
+              <a:buFont typeface="Arial" panose="020B0704020202020204" pitchFamily="34" charset="0"/>
+              <a:buChar char="•"/>
+            </a:pPr>
+            <a:r>
+              <a:rPr lang="en-US" altLang="ko-KR" b="1" i="0" dirty="0">
+                <a:solidFill>
+                  <a:srgbClr val="303030"/>
+                </a:solidFill>
+                <a:effectLst/>
+                <a:latin typeface="Google Sans Text"/>
+              </a:rPr>
+              <a:t>Robustness: "Data Sharpening" Post-2023</a:t>
+            </a:r>
             <a:endParaRPr lang="en-US" altLang="ko-KR" b="0" i="0" dirty="0">
               <a:solidFill>
                 <a:srgbClr val="303030"/>
@@ -10850,18 +10282,75 @@
                 <a:effectLst/>
                 <a:latin typeface="Google Sans Text"/>
               </a:rPr>
-              <a:t>Analyzing three major stress episodes: LUNA/UST, the USDT partial </a:t>
-            </a:r>
-            <a:r>
-              <a:rPr lang="en-US" altLang="ko-KR" b="0" i="0" dirty="0" err="1">
+              <a:t>Testing a more recent sub-sample (N=39) where reporting and attestations are more transparent.</a:t>
+            </a:r>
+          </a:p>
+          <a:p>
+            <a:pPr marL="742950" lvl="1" indent="-285750" algn="l">
+              <a:buFont typeface="Arial" panose="020B0704020202020204" pitchFamily="34" charset="0"/>
+              <a:buChar char="•"/>
+            </a:pPr>
+            <a:r>
+              <a:rPr lang="en-US" altLang="ko-KR" b="0" i="0" dirty="0">
                 <a:solidFill>
                   <a:srgbClr val="303030"/>
                 </a:solidFill>
                 <a:effectLst/>
                 <a:latin typeface="Google Sans Text"/>
               </a:rPr>
-              <a:t>depeg</a:t>
-            </a:r>
+              <a:t>Showing how the relationship between reserves and market spreads becomes even more statistically significant as the market matures.</a:t>
+            </a:r>
+          </a:p>
+        </p:txBody>
+      </p:sp>
+      <p:sp>
+        <p:nvSpPr>
+          <p:cNvPr id="22" name="TextBox 21"/>
+          <p:cNvSpPr txBox="1"/>
+          <p:nvPr/>
+        </p:nvSpPr>
+        <p:spPr>
+          <a:xfrm>
+            <a:off x="6094412" y="1308625"/>
+            <a:ext cx="6144126" cy="2031325"/>
+          </a:xfrm>
+          <a:prstGeom prst="rect">
+            <a:avLst/>
+          </a:prstGeom>
+          <a:noFill/>
+        </p:spPr>
+        <p:txBody>
+          <a:bodyPr wrap="square">
+            <a:spAutoFit/>
+          </a:bodyPr>
+          <a:lstStyle/>
+          <a:p>
+            <a:pPr>
+              <a:buFont typeface="Arial" panose="020B0704020202020204" pitchFamily="34" charset="0"/>
+              <a:buChar char="•"/>
+            </a:pPr>
+            <a:r>
+              <a:rPr lang="en-US" altLang="ko-KR" b="1" dirty="0"/>
+              <a:t>Policy Recommendation: The "13% Liquid Reserve Rule”</a:t>
+            </a:r>
+          </a:p>
+          <a:p>
+            <a:pPr lvl="1">
+              <a:buFont typeface="Arial" panose="020B0704020202020204" pitchFamily="34" charset="0"/>
+              <a:buChar char="•"/>
+            </a:pPr>
+            <a:r>
+              <a:rPr lang="en-US" altLang="ko-KR" dirty="0">
+                <a:effectLst/>
+              </a:rPr>
+              <a:t>Translating the threshold regression into a concrete regulatory requirement.</a:t>
+            </a:r>
+          </a:p>
+          <a:p>
+            <a:pPr lvl="1">
+              <a:buFont typeface="Arial" panose="020B0704020202020204" pitchFamily="34" charset="0"/>
+              <a:buChar char="•"/>
+            </a:pPr>
             <a:r>
               <a:rPr lang="en-US" altLang="ko-KR" b="0" i="0" dirty="0">
                 <a:solidFill>
@@ -10870,7 +10359,78 @@
                 <a:effectLst/>
                 <a:latin typeface="Google Sans Text"/>
               </a:rPr>
-              <a:t>, and the USDC/SVB failure.</a:t>
+              <a:t>Proposing a </a:t>
+            </a:r>
+            <a:r>
+              <a:rPr lang="en-US" altLang="ko-KR" b="1" i="0" dirty="0">
+                <a:solidFill>
+                  <a:srgbClr val="303030"/>
+                </a:solidFill>
+                <a:effectLst/>
+                <a:latin typeface="Google Sans Text"/>
+              </a:rPr>
+              <a:t>minimum 13% liquid buffer</a:t>
+            </a:r>
+            <a:r>
+              <a:rPr lang="en-US" altLang="ko-KR" b="0" i="0" dirty="0">
+                <a:solidFill>
+                  <a:srgbClr val="303030"/>
+                </a:solidFill>
+                <a:effectLst/>
+                <a:latin typeface="Google Sans Text"/>
+              </a:rPr>
+              <a:t> (cash/near-cash) to prevent private stablecoin runs from spilling into public Treasury markets</a:t>
+            </a:r>
+            <a:br>
+              <a:rPr lang="en-US" altLang="ko-KR" b="0" i="0" dirty="0">
+                <a:solidFill>
+                  <a:srgbClr val="303030"/>
+                </a:solidFill>
+                <a:effectLst/>
+                <a:latin typeface="Google Sans Text"/>
+              </a:rPr>
+            </a:br>
+            <a:endParaRPr lang="en-US" altLang="ko-KR" dirty="0">
+              <a:effectLst/>
+            </a:endParaRPr>
+          </a:p>
+        </p:txBody>
+      </p:sp>
+      <p:sp>
+        <p:nvSpPr>
+          <p:cNvPr id="24" name="TextBox 23"/>
+          <p:cNvSpPr txBox="1"/>
+          <p:nvPr/>
+        </p:nvSpPr>
+        <p:spPr>
+          <a:xfrm>
+            <a:off x="6208294" y="4174503"/>
+            <a:ext cx="6192252" cy="923330"/>
+          </a:xfrm>
+          <a:prstGeom prst="rect">
+            <a:avLst/>
+          </a:prstGeom>
+          <a:noFill/>
+        </p:spPr>
+        <p:txBody>
+          <a:bodyPr wrap="square">
+            <a:spAutoFit/>
+          </a:bodyPr>
+          <a:lstStyle/>
+          <a:p>
+            <a:pPr algn="l">
+              <a:buFont typeface="Arial" panose="020B0704020202020204" pitchFamily="34" charset="0"/>
+              <a:buChar char="•"/>
+            </a:pPr>
+            <a:r>
+              <a:rPr lang="en-US" altLang="ko-KR" b="1" i="0" dirty="0">
+                <a:solidFill>
+                  <a:srgbClr val="303030"/>
+                </a:solidFill>
+                <a:effectLst/>
+                <a:latin typeface="Google Sans Text"/>
+              </a:rPr>
+              <a:t>Conclusion: Navigating the New Triffin Dilemma</a:t>
             </a:r>
             <a:endParaRPr lang="en-US" altLang="ko-KR" b="0" i="0" dirty="0">
               <a:solidFill>
@@ -10893,48 +10453,27 @@
                 <a:effectLst/>
                 <a:latin typeface="Google Sans Text"/>
               </a:rPr>
-              <a:t>Proving how the </a:t>
-            </a:r>
-            <a:r>
-              <a:rPr lang="en-US" altLang="ko-KR" b="1" i="0" dirty="0">
-                <a:solidFill>
-                  <a:srgbClr val="303030"/>
-                </a:solidFill>
-                <a:effectLst/>
-                <a:latin typeface="Google Sans Text"/>
-              </a:rPr>
-              <a:t>buffer size</a:t>
-            </a:r>
-            <a:r>
-              <a:rPr lang="en-US" altLang="ko-KR" b="0" i="0" dirty="0">
-                <a:solidFill>
-                  <a:srgbClr val="303030"/>
-                </a:solidFill>
-                <a:effectLst/>
-                <a:latin typeface="Google Sans Text"/>
-              </a:rPr>
-              <a:t> determines if a crisis causes a "sovereign-linked liquidity shock" or a "flight-to-safety".</a:t>
-            </a:r>
-            <a:endParaRPr lang="en-US" altLang="ko-KR" b="0" i="0" dirty="0">
-              <a:solidFill>
-                <a:srgbClr val="303030"/>
-              </a:solidFill>
-              <a:effectLst/>
-              <a:latin typeface="Google Sans Text"/>
-            </a:endParaRPr>
-          </a:p>
-        </p:txBody>
-      </p:sp>
-      <p:sp>
-        <p:nvSpPr>
-          <p:cNvPr id="20" name="TextBox 19"/>
+              <a:t>Final synthesis of how stablecoins both support and threaten the U.S. "exorbitant privilege".</a:t>
+            </a:r>
+          </a:p>
+        </p:txBody>
+      </p:sp>
+      <p:sp>
+        <p:nvSpPr>
+          <p:cNvPr id="7" name="TextBox 6">
+            <a:extLst>
+              <a:ext uri="{FF2B5EF4-FFF2-40B4-BE49-F238E27FC236}">
+                <a16:creationId xmlns:a16="http://schemas.microsoft.com/office/drawing/2014/main" id="{C76420C3-7C26-9C1B-21E0-4E99EC845830}"/>
+              </a:ext>
+            </a:extLst>
+          </p:cNvPr>
           <p:cNvSpPr txBox="1"/>
           <p:nvPr/>
         </p:nvSpPr>
         <p:spPr>
           <a:xfrm>
-            <a:off x="274320" y="4060308"/>
-            <a:ext cx="6144126" cy="1754326"/>
+            <a:off x="10177670" y="206829"/>
+            <a:ext cx="1829274" cy="369332"/>
           </a:xfrm>
           <a:prstGeom prst="rect">
             <a:avLst/>
@@ -10942,243 +10481,23 @@
           <a:noFill/>
         </p:spPr>
         <p:txBody>
-          <a:bodyPr wrap="square">
+          <a:bodyPr wrap="square" rtlCol="0">
             <a:spAutoFit/>
           </a:bodyPr>
           <a:lstStyle/>
           <a:p>
-            <a:pPr algn="l">
-              <a:buFont typeface="Arial" panose="020B0704020202020204" pitchFamily="34" charset="0"/>
-              <a:buChar char="•"/>
-            </a:pPr>
-            <a:r>
-              <a:rPr lang="en-US" altLang="ko-KR" b="1" i="0" dirty="0">
-                <a:solidFill>
-                  <a:srgbClr val="303030"/>
-                </a:solidFill>
-                <a:effectLst/>
-                <a:latin typeface="Google Sans Text"/>
-              </a:rPr>
-              <a:t>Robustness: "Data Sharpening" Post-2023</a:t>
-            </a:r>
-            <a:endParaRPr lang="en-US" altLang="ko-KR" b="0" i="0" dirty="0">
+            <a:r>
+              <a:rPr kumimoji="1" lang="en-US" altLang="ko-KR" dirty="0">
+                <a:solidFill>
+                  <a:schemeClr val="bg1"/>
+                </a:solidFill>
+              </a:rPr>
+              <a:t>Sara Page14/15</a:t>
+            </a:r>
+            <a:endParaRPr kumimoji="1" lang="ko-KR" altLang="en-US" dirty="0">
               <a:solidFill>
-                <a:srgbClr val="303030"/>
+                <a:schemeClr val="bg1"/>
               </a:solidFill>
-              <a:effectLst/>
-              <a:latin typeface="Google Sans Text"/>
-            </a:endParaRPr>
-          </a:p>
-          <a:p>
-            <a:pPr marL="742950" lvl="1" indent="-285750" algn="l">
-              <a:buFont typeface="Arial" panose="020B0704020202020204" pitchFamily="34" charset="0"/>
-              <a:buChar char="•"/>
-            </a:pPr>
-            <a:r>
-              <a:rPr lang="en-US" altLang="ko-KR" b="0" i="0" dirty="0">
-                <a:solidFill>
-                  <a:srgbClr val="303030"/>
-                </a:solidFill>
-                <a:effectLst/>
-                <a:latin typeface="Google Sans Text"/>
-              </a:rPr>
-              <a:t>Testing a more recent sub-sample (N=39) where reporting and attestations are more transparent.</a:t>
-            </a:r>
-            <a:endParaRPr lang="en-US" altLang="ko-KR" b="0" i="0" dirty="0">
-              <a:solidFill>
-                <a:srgbClr val="303030"/>
-              </a:solidFill>
-              <a:effectLst/>
-              <a:latin typeface="Google Sans Text"/>
-            </a:endParaRPr>
-          </a:p>
-          <a:p>
-            <a:pPr marL="742950" lvl="1" indent="-285750" algn="l">
-              <a:buFont typeface="Arial" panose="020B0704020202020204" pitchFamily="34" charset="0"/>
-              <a:buChar char="•"/>
-            </a:pPr>
-            <a:r>
-              <a:rPr lang="en-US" altLang="ko-KR" b="0" i="0" dirty="0">
-                <a:solidFill>
-                  <a:srgbClr val="303030"/>
-                </a:solidFill>
-                <a:effectLst/>
-                <a:latin typeface="Google Sans Text"/>
-              </a:rPr>
-              <a:t>Showing how the relationship between reserves and market spreads becomes even more statistically significant as the market matures.</a:t>
-            </a:r>
-            <a:endParaRPr lang="en-US" altLang="ko-KR" b="0" i="0" dirty="0">
-              <a:solidFill>
-                <a:srgbClr val="303030"/>
-              </a:solidFill>
-              <a:effectLst/>
-              <a:latin typeface="Google Sans Text"/>
-            </a:endParaRPr>
-          </a:p>
-        </p:txBody>
-      </p:sp>
-      <p:sp>
-        <p:nvSpPr>
-          <p:cNvPr id="22" name="TextBox 21"/>
-          <p:cNvSpPr txBox="1"/>
-          <p:nvPr/>
-        </p:nvSpPr>
-        <p:spPr>
-          <a:xfrm>
-            <a:off x="6094412" y="1308625"/>
-            <a:ext cx="6144126" cy="2031325"/>
-          </a:xfrm>
-          <a:prstGeom prst="rect">
-            <a:avLst/>
-          </a:prstGeom>
-          <a:noFill/>
-        </p:spPr>
-        <p:txBody>
-          <a:bodyPr wrap="square">
-            <a:spAutoFit/>
-          </a:bodyPr>
-          <a:lstStyle/>
-          <a:p>
-            <a:pPr>
-              <a:buFont typeface="Arial" panose="020B0704020202020204" pitchFamily="34" charset="0"/>
-              <a:buChar char="•"/>
-            </a:pPr>
-            <a:r>
-              <a:rPr lang="en-US" altLang="ko-KR" b="1" dirty="0"/>
-              <a:t>Policy Recommendation: The "13% Liquid Reserve Rule”</a:t>
-            </a:r>
-            <a:endParaRPr lang="en-US" altLang="ko-KR" b="1" dirty="0"/>
-          </a:p>
-          <a:p>
-            <a:pPr lvl="1">
-              <a:buFont typeface="Arial" panose="020B0704020202020204" pitchFamily="34" charset="0"/>
-              <a:buChar char="•"/>
-            </a:pPr>
-            <a:r>
-              <a:rPr lang="en-US" altLang="ko-KR" dirty="0">
-                <a:effectLst/>
-              </a:rPr>
-              <a:t>Translating the threshold regression into a concrete regulatory requirement.</a:t>
-            </a:r>
-            <a:endParaRPr lang="en-US" altLang="ko-KR" dirty="0">
-              <a:effectLst/>
-            </a:endParaRPr>
-          </a:p>
-          <a:p>
-            <a:pPr lvl="1">
-              <a:buFont typeface="Arial" panose="020B0704020202020204" pitchFamily="34" charset="0"/>
-              <a:buChar char="•"/>
-            </a:pPr>
-            <a:r>
-              <a:rPr lang="en-US" altLang="ko-KR" b="0" i="0" dirty="0">
-                <a:solidFill>
-                  <a:srgbClr val="303030"/>
-                </a:solidFill>
-                <a:effectLst/>
-                <a:latin typeface="Google Sans Text"/>
-              </a:rPr>
-              <a:t>Proposing a </a:t>
-            </a:r>
-            <a:r>
-              <a:rPr lang="en-US" altLang="ko-KR" b="1" i="0" dirty="0">
-                <a:solidFill>
-                  <a:srgbClr val="303030"/>
-                </a:solidFill>
-                <a:effectLst/>
-                <a:latin typeface="Google Sans Text"/>
-              </a:rPr>
-              <a:t>minimum 13% liquid buffer</a:t>
-            </a:r>
-            <a:r>
-              <a:rPr lang="en-US" altLang="ko-KR" b="0" i="0" dirty="0">
-                <a:solidFill>
-                  <a:srgbClr val="303030"/>
-                </a:solidFill>
-                <a:effectLst/>
-                <a:latin typeface="Google Sans Text"/>
-              </a:rPr>
-              <a:t> (cash/near-cash) to prevent private stablecoin runs from spilling into public Treasury markets</a:t>
-            </a:r>
-            <a:br>
-              <a:rPr lang="en-US" altLang="ko-KR" b="0" i="0" dirty="0">
-                <a:solidFill>
-                  <a:srgbClr val="303030"/>
-                </a:solidFill>
-                <a:effectLst/>
-                <a:latin typeface="Google Sans Text"/>
-              </a:rPr>
-            </a:br>
-            <a:endParaRPr lang="en-US" altLang="ko-KR" dirty="0">
-              <a:effectLst/>
-            </a:endParaRPr>
-          </a:p>
-        </p:txBody>
-      </p:sp>
-      <p:sp>
-        <p:nvSpPr>
-          <p:cNvPr id="24" name="TextBox 23"/>
-          <p:cNvSpPr txBox="1"/>
-          <p:nvPr/>
-        </p:nvSpPr>
-        <p:spPr>
-          <a:xfrm>
-            <a:off x="6208294" y="4174503"/>
-            <a:ext cx="6192252" cy="923330"/>
-          </a:xfrm>
-          <a:prstGeom prst="rect">
-            <a:avLst/>
-          </a:prstGeom>
-          <a:noFill/>
-        </p:spPr>
-        <p:txBody>
-          <a:bodyPr wrap="square">
-            <a:spAutoFit/>
-          </a:bodyPr>
-          <a:lstStyle/>
-          <a:p>
-            <a:pPr algn="l">
-              <a:buFont typeface="Arial" panose="020B0704020202020204" pitchFamily="34" charset="0"/>
-              <a:buChar char="•"/>
-            </a:pPr>
-            <a:r>
-              <a:rPr lang="en-US" altLang="ko-KR" b="1" i="0" dirty="0">
-                <a:solidFill>
-                  <a:srgbClr val="303030"/>
-                </a:solidFill>
-                <a:effectLst/>
-                <a:latin typeface="Google Sans Text"/>
-              </a:rPr>
-              <a:t>Conclusion: Navigating the New Triffin Dilemma</a:t>
-            </a:r>
-            <a:endParaRPr lang="en-US" altLang="ko-KR" b="0" i="0" dirty="0">
-              <a:solidFill>
-                <a:srgbClr val="303030"/>
-              </a:solidFill>
-              <a:effectLst/>
-              <a:latin typeface="Google Sans Text"/>
-            </a:endParaRPr>
-          </a:p>
-          <a:p>
-            <a:pPr marL="742950" lvl="1" indent="-285750" algn="l">
-              <a:buFont typeface="Arial" panose="020B0704020202020204" pitchFamily="34" charset="0"/>
-              <a:buChar char="•"/>
-            </a:pPr>
-            <a:r>
-              <a:rPr lang="en-US" altLang="ko-KR" b="0" i="0" dirty="0">
-                <a:solidFill>
-                  <a:srgbClr val="303030"/>
-                </a:solidFill>
-                <a:effectLst/>
-                <a:latin typeface="Google Sans Text"/>
-              </a:rPr>
-              <a:t>Final synthesis of how stablecoins both support and threaten the U.S. "exorbitant privilege".</a:t>
-            </a:r>
-            <a:endParaRPr lang="en-US" altLang="ko-KR" b="0" i="0" dirty="0">
-              <a:solidFill>
-                <a:srgbClr val="303030"/>
-              </a:solidFill>
-              <a:effectLst/>
-              <a:latin typeface="Google Sans Text"/>
             </a:endParaRPr>
           </a:p>
         </p:txBody>
@@ -11225,14 +10544,14 @@
           <p:nvPr/>
         </p:nvPicPr>
         <p:blipFill>
-          <a:blip r:embed="rId1">
+          <a:blip r:embed="rId3">
             <a:lum bright="70000" contrast="-70000"/>
             <a:extLst>
               <a:ext uri="{BEBA8EAE-BF5A-486C-A8C5-ECC9F3942E4B}">
                 <a14:imgProps xmlns:a14="http://schemas.microsoft.com/office/drawing/2010/main">
-                  <a14:imgLayer r:embed="rId2">
+                  <a14:imgLayer r:embed="rId4">
                     <a14:imgEffect>
-                      <a14:artisticPhotocopy trans="30000" detail="2"/>
+                      <a14:artisticPhotocopy detail="2"/>
                     </a14:imgEffect>
                   </a14:imgLayer>
                 </a14:imgProps>
@@ -11265,7 +10584,7 @@
           <p:nvPr/>
         </p:nvPicPr>
         <p:blipFill>
-          <a:blip r:embed="rId3">
+          <a:blip r:embed="rId5">
             <a:extLst>
               <a:ext uri="{28A0092B-C50C-407E-A947-70E740481C1C}">
                 <a14:useLocalDpi xmlns:a14="http://schemas.microsoft.com/office/drawing/2010/main" val="0"/>
@@ -11342,13 +10661,6 @@
               </a:rPr>
               <a:t>THANK YOU</a:t>
             </a:r>
-            <a:endParaRPr lang="en-US" altLang="ko-KR" sz="2400" dirty="0">
-              <a:solidFill>
-                <a:prstClr val="white"/>
-              </a:solidFill>
-              <a:latin typeface="Hiragino Kaku Gothic Std W8" panose="020B0800000000000000" pitchFamily="34" charset="-128"/>
-              <a:ea typeface="Hiragino Kaku Gothic Std W8" panose="020B0800000000000000" pitchFamily="34" charset="-128"/>
-            </a:endParaRPr>
           </a:p>
           <a:p>
             <a:pPr algn="ctr" defTabSz="914400" latinLnBrk="1">
@@ -11394,11 +10706,6 @@
               </a:rPr>
               <a:t>Yonsei GSIS 2026-1 </a:t>
             </a:r>
-            <a:endParaRPr lang="en-US" altLang="ko-KR" sz="1800" b="1" dirty="0">
-              <a:solidFill>
-                <a:schemeClr val="bg1"/>
-              </a:solidFill>
-            </a:endParaRPr>
           </a:p>
           <a:p>
             <a:r>
@@ -11497,6 +10804,7 @@
           <a:lstStyle/>
           <a:p>
             <a:pPr algn="ctr"/>
+            <a:endParaRPr dirty="0"/>
           </a:p>
         </p:txBody>
       </p:sp>
@@ -11540,6 +10848,7 @@
           <a:lstStyle/>
           <a:p>
             <a:pPr algn="ctr"/>
+            <a:endParaRPr/>
           </a:p>
         </p:txBody>
       </p:sp>
@@ -11575,53 +10884,6 @@
               </a:rPr>
               <a:t>Roadmap</a:t>
             </a:r>
-            <a:endParaRPr sz="2600" b="0" i="0">
-              <a:solidFill>
-                <a:srgbClr val="FFFFFF"/>
-              </a:solidFill>
-              <a:latin typeface="Calibri"/>
-            </a:endParaRPr>
-          </a:p>
-        </p:txBody>
-      </p:sp>
-      <p:sp>
-        <p:nvSpPr>
-          <p:cNvPr id="5" name="TextBox 4"/>
-          <p:cNvSpPr txBox="1"/>
-          <p:nvPr/>
-        </p:nvSpPr>
-        <p:spPr>
-          <a:xfrm>
-            <a:off x="11686032" y="6473952"/>
-            <a:ext cx="411480" cy="320040"/>
-          </a:xfrm>
-          <a:prstGeom prst="rect">
-            <a:avLst/>
-          </a:prstGeom>
-          <a:noFill/>
-        </p:spPr>
-        <p:txBody>
-          <a:bodyPr wrap="square">
-            <a:spAutoFit/>
-          </a:bodyPr>
-          <a:lstStyle/>
-          <a:p>
-            <a:pPr algn="r"/>
-            <a:r>
-              <a:rPr sz="1300" b="0" i="0">
-                <a:solidFill>
-                  <a:srgbClr val="555566"/>
-                </a:solidFill>
-                <a:latin typeface="Calibri"/>
-              </a:rPr>
-              <a:t>2</a:t>
-            </a:r>
-            <a:endParaRPr sz="1300" b="0" i="0">
-              <a:solidFill>
-                <a:srgbClr val="555566"/>
-              </a:solidFill>
-              <a:latin typeface="Calibri"/>
-            </a:endParaRPr>
           </a:p>
         </p:txBody>
       </p:sp>
@@ -11673,12 +10935,6 @@
               </a:rPr>
               <a:t>❖  Motivation — why stablecoins matter for sovereign debt</a:t>
             </a:r>
-            <a:endParaRPr sz="2000" b="0" i="0" dirty="0">
-              <a:solidFill>
-                <a:srgbClr val="1A1A2E"/>
-              </a:solidFill>
-              <a:latin typeface="Calibri"/>
-            </a:endParaRPr>
           </a:p>
           <a:p>
             <a:pPr algn="l">
@@ -11695,12 +10951,6 @@
               </a:rPr>
               <a:t>❖  The New Triffin Dilemma — our core argument</a:t>
             </a:r>
-            <a:endParaRPr sz="2000" b="0" i="0" dirty="0">
-              <a:solidFill>
-                <a:srgbClr val="1A1A2E"/>
-              </a:solidFill>
-              <a:latin typeface="Calibri"/>
-            </a:endParaRPr>
           </a:p>
           <a:p>
             <a:pPr algn="l">
@@ -11717,12 +10967,6 @@
               </a:rPr>
               <a:t>❖  Theoretical extension of Maggiori (2017)</a:t>
             </a:r>
-            <a:endParaRPr sz="2000" b="0" i="0" dirty="0">
-              <a:solidFill>
-                <a:srgbClr val="1A1A2E"/>
-              </a:solidFill>
-              <a:latin typeface="Calibri"/>
-            </a:endParaRPr>
           </a:p>
           <a:p>
             <a:pPr algn="l">
@@ -11739,12 +10983,6 @@
               </a:rPr>
               <a:t>❖  Data &amp; Methodology</a:t>
             </a:r>
-            <a:endParaRPr sz="2000" b="0" i="0" dirty="0">
-              <a:solidFill>
-                <a:srgbClr val="1A1A2E"/>
-              </a:solidFill>
-              <a:latin typeface="Calibri"/>
-            </a:endParaRPr>
           </a:p>
           <a:p>
             <a:pPr algn="l">
@@ -11761,12 +10999,6 @@
               </a:rPr>
               <a:t>❖  Result 1 — Privilege amplification regression</a:t>
             </a:r>
-            <a:endParaRPr sz="2000" b="0" i="0" dirty="0">
-              <a:solidFill>
-                <a:srgbClr val="1A1A2E"/>
-              </a:solidFill>
-              <a:latin typeface="Calibri"/>
-            </a:endParaRPr>
           </a:p>
           <a:p>
             <a:pPr algn="l">
@@ -11840,12 +11072,6 @@
               </a:rPr>
               <a:t>❖  Result 3 — Buffer-conditioned event study</a:t>
             </a:r>
-            <a:endParaRPr sz="2000" b="0" i="0" dirty="0">
-              <a:solidFill>
-                <a:srgbClr val="1A1A2E"/>
-              </a:solidFill>
-              <a:latin typeface="Calibri"/>
-            </a:endParaRPr>
           </a:p>
           <a:p>
             <a:pPr algn="l">
@@ -11862,12 +11088,6 @@
               </a:rPr>
               <a:t>❖  Conclusion &amp; Policy implications</a:t>
             </a:r>
-            <a:endParaRPr sz="2000" b="0" i="0" dirty="0">
-              <a:solidFill>
-                <a:srgbClr val="1A1A2E"/>
-              </a:solidFill>
-              <a:latin typeface="Calibri"/>
-            </a:endParaRPr>
           </a:p>
         </p:txBody>
       </p:sp>
@@ -11879,8 +11099,8 @@
         </p:nvSpPr>
         <p:spPr>
           <a:xfrm>
-            <a:off x="11288486" y="206829"/>
-            <a:ext cx="718457" cy="369332"/>
+            <a:off x="10436088" y="206829"/>
+            <a:ext cx="1570856" cy="369332"/>
           </a:xfrm>
           <a:prstGeom prst="rect">
             <a:avLst/>
@@ -11899,7 +11119,7 @@
                   <a:schemeClr val="bg1"/>
                 </a:solidFill>
               </a:rPr>
-              <a:t>Sara</a:t>
+              <a:t>Sara Page2/15</a:t>
             </a:r>
             <a:endParaRPr kumimoji="1" lang="ko-KR" altLang="en-US" dirty="0">
               <a:solidFill>
@@ -11974,6 +11194,7 @@
           <a:lstStyle/>
           <a:p>
             <a:pPr algn="ctr"/>
+            <a:endParaRPr/>
           </a:p>
         </p:txBody>
       </p:sp>
@@ -12017,6 +11238,7 @@
           <a:lstStyle/>
           <a:p>
             <a:pPr algn="ctr"/>
+            <a:endParaRPr/>
           </a:p>
         </p:txBody>
       </p:sp>
@@ -12052,12 +11274,6 @@
               </a:rPr>
               <a:t>Motivation: Stablecoins as Treasury Buyers</a:t>
             </a:r>
-            <a:endParaRPr sz="2600" b="0" i="0">
-              <a:solidFill>
-                <a:srgbClr val="FFFFFF"/>
-              </a:solidFill>
-              <a:latin typeface="Calibri"/>
-            </a:endParaRPr>
           </a:p>
         </p:txBody>
       </p:sp>
@@ -12093,12 +11309,6 @@
               </a:rPr>
               <a:t>3</a:t>
             </a:r>
-            <a:endParaRPr sz="1300" b="0" i="0">
-              <a:solidFill>
-                <a:srgbClr val="555566"/>
-              </a:solidFill>
-              <a:latin typeface="Calibri"/>
-            </a:endParaRPr>
           </a:p>
         </p:txBody>
       </p:sp>
@@ -12129,6 +11339,7 @@
                 <a:spcPts val="0"/>
               </a:spcBef>
             </a:pPr>
+            <a:endParaRPr/>
           </a:p>
           <a:p>
             <a:pPr algn="l">
@@ -12145,12 +11356,6 @@
               </a:rPr>
               <a:t>Key Market Trends</a:t>
             </a:r>
-            <a:endParaRPr sz="1800" b="1" i="0">
-              <a:solidFill>
-                <a:srgbClr val="1B3A72"/>
-              </a:solidFill>
-              <a:latin typeface="Calibri"/>
-            </a:endParaRPr>
           </a:p>
           <a:p>
             <a:pPr algn="l">
@@ -12167,12 +11372,6 @@
               </a:rPr>
               <a:t>❖  Growth: Combined market cap surged from under $50bn (2021) to over $300bn (2026)</a:t>
             </a:r>
-            <a:endParaRPr sz="1700" b="0" i="0">
-              <a:solidFill>
-                <a:srgbClr val="1A1A2E"/>
-              </a:solidFill>
-              <a:latin typeface="Calibri"/>
-            </a:endParaRPr>
           </a:p>
           <a:p>
             <a:pPr algn="l">
@@ -12189,12 +11388,6 @@
               </a:rPr>
               <a:t>❖  Usage: 30%+ of on-chain crypto transactions involve stablecoins</a:t>
             </a:r>
-            <a:endParaRPr sz="1700" b="0" i="0">
-              <a:solidFill>
-                <a:srgbClr val="1A1A2E"/>
-              </a:solidFill>
-              <a:latin typeface="Calibri"/>
-            </a:endParaRPr>
           </a:p>
           <a:p>
             <a:pPr algn="l">
@@ -12211,12 +11404,6 @@
               </a:rPr>
               <a:t>❖  Regulation: US, EU, Japan, and Hong Kong each finalising reserve legislation</a:t>
             </a:r>
-            <a:endParaRPr sz="1700" b="0" i="0">
-              <a:solidFill>
-                <a:srgbClr val="1A1A2E"/>
-              </a:solidFill>
-              <a:latin typeface="Calibri"/>
-            </a:endParaRPr>
           </a:p>
           <a:p>
             <a:pPr algn="l">
@@ -12233,12 +11420,6 @@
               </a:rPr>
               <a:t>❖  Scale: Tether alone holds $127bn in US Treasuries (Q2 2025) — comparable to mid-sized sovereigns</a:t>
             </a:r>
-            <a:endParaRPr sz="1700" b="0" i="0">
-              <a:solidFill>
-                <a:srgbClr val="1A1A2E"/>
-              </a:solidFill>
-              <a:latin typeface="Calibri"/>
-            </a:endParaRPr>
           </a:p>
           <a:p>
             <a:pPr algn="l">
@@ -12255,12 +11436,6 @@
               </a:rPr>
               <a:t>❖  Projection: $1–2 trillion ecosystem within this decade</a:t>
             </a:r>
-            <a:endParaRPr sz="1700" b="0" i="0">
-              <a:solidFill>
-                <a:srgbClr val="1A1A2E"/>
-              </a:solidFill>
-              <a:latin typeface="Calibri"/>
-            </a:endParaRPr>
           </a:p>
         </p:txBody>
       </p:sp>
@@ -12304,6 +11479,7 @@
           <a:lstStyle/>
           <a:p>
             <a:pPr algn="ctr"/>
+            <a:endParaRPr/>
           </a:p>
         </p:txBody>
       </p:sp>
@@ -12339,12 +11515,6 @@
               </a:rPr>
               <a:t>$300bn+</a:t>
             </a:r>
-            <a:endParaRPr sz="2800" b="1" i="0">
-              <a:solidFill>
-                <a:srgbClr val="FFFFFF"/>
-              </a:solidFill>
-              <a:latin typeface="Calibri"/>
-            </a:endParaRPr>
           </a:p>
         </p:txBody>
       </p:sp>
@@ -12380,12 +11550,6 @@
               </a:rPr>
               <a:t>Total USD-pegged supply (2026)</a:t>
             </a:r>
-            <a:endParaRPr sz="1200" b="0" i="1">
-              <a:solidFill>
-                <a:srgbClr val="AAC4E8"/>
-              </a:solidFill>
-              <a:latin typeface="Calibri"/>
-            </a:endParaRPr>
           </a:p>
         </p:txBody>
       </p:sp>
@@ -12429,6 +11593,7 @@
           <a:lstStyle/>
           <a:p>
             <a:pPr algn="ctr"/>
+            <a:endParaRPr/>
           </a:p>
         </p:txBody>
       </p:sp>
@@ -12464,12 +11629,6 @@
               </a:rPr>
               <a:t>$127bn</a:t>
             </a:r>
-            <a:endParaRPr sz="2800" b="1" i="0">
-              <a:solidFill>
-                <a:srgbClr val="FFFFFF"/>
-              </a:solidFill>
-              <a:latin typeface="Calibri"/>
-            </a:endParaRPr>
           </a:p>
         </p:txBody>
       </p:sp>
@@ -12505,12 +11664,6 @@
               </a:rPr>
               <a:t>Tether T-bill holdings (Q2 2025)</a:t>
             </a:r>
-            <a:endParaRPr sz="1200" b="0" i="1">
-              <a:solidFill>
-                <a:srgbClr val="AAC4E8"/>
-              </a:solidFill>
-              <a:latin typeface="Calibri"/>
-            </a:endParaRPr>
           </a:p>
         </p:txBody>
       </p:sp>
@@ -12554,6 +11707,7 @@
           <a:lstStyle/>
           <a:p>
             <a:pPr algn="ctr"/>
+            <a:endParaRPr/>
           </a:p>
         </p:txBody>
       </p:sp>
@@ -12589,12 +11743,6 @@
               </a:rPr>
               <a:t>$1–2 tn</a:t>
             </a:r>
-            <a:endParaRPr sz="2800" b="1" i="0">
-              <a:solidFill>
-                <a:srgbClr val="FFFFFF"/>
-              </a:solidFill>
-              <a:latin typeface="Calibri"/>
-            </a:endParaRPr>
           </a:p>
         </p:txBody>
       </p:sp>
@@ -12630,12 +11778,6 @@
               </a:rPr>
               <a:t>Projected ecosystem size</a:t>
             </a:r>
-            <a:endParaRPr sz="1200" b="0" i="1">
-              <a:solidFill>
-                <a:srgbClr val="AAC4E8"/>
-              </a:solidFill>
-              <a:latin typeface="Calibri"/>
-            </a:endParaRPr>
           </a:p>
         </p:txBody>
       </p:sp>
@@ -12679,6 +11821,7 @@
           <a:lstStyle/>
           <a:p>
             <a:pPr algn="ctr"/>
+            <a:endParaRPr/>
           </a:p>
         </p:txBody>
       </p:sp>
@@ -12714,12 +11857,6 @@
               </a:rPr>
               <a:t>4</a:t>
             </a:r>
-            <a:endParaRPr sz="2800" b="1" i="0">
-              <a:solidFill>
-                <a:srgbClr val="FFFFFF"/>
-              </a:solidFill>
-              <a:latin typeface="Calibri"/>
-            </a:endParaRPr>
           </a:p>
         </p:txBody>
       </p:sp>
@@ -12755,12 +11892,6 @@
               </a:rPr>
               <a:t>Jurisdictions finalising legislation</a:t>
             </a:r>
-            <a:endParaRPr sz="1200" b="0" i="1">
-              <a:solidFill>
-                <a:srgbClr val="AAC4E8"/>
-              </a:solidFill>
-              <a:latin typeface="Calibri"/>
-            </a:endParaRPr>
           </a:p>
         </p:txBody>
       </p:sp>
@@ -12804,6 +11935,7 @@
           <a:lstStyle/>
           <a:p>
             <a:pPr algn="ctr"/>
+            <a:endParaRPr/>
           </a:p>
         </p:txBody>
       </p:sp>
@@ -12839,25 +11971,25 @@
               </a:rPr>
               <a:t>The same structural role that deepens US safe-asset demand also embeds a fragility that can rapidly reverse it.</a:t>
             </a:r>
-            <a:endParaRPr sz="1800" b="1" i="0">
-              <a:solidFill>
-                <a:srgbClr val="FFFFFF"/>
-              </a:solidFill>
-              <a:latin typeface="Calibri"/>
-            </a:endParaRPr>
-          </a:p>
-        </p:txBody>
-      </p:sp>
-      <p:sp>
-        <p:nvSpPr>
-          <p:cNvPr id="21" name="TextBox 20"/>
+          </a:p>
+        </p:txBody>
+      </p:sp>
+      <p:sp>
+        <p:nvSpPr>
+          <p:cNvPr id="25" name="TextBox 24">
+            <a:extLst>
+              <a:ext uri="{FF2B5EF4-FFF2-40B4-BE49-F238E27FC236}">
+                <a16:creationId xmlns:a16="http://schemas.microsoft.com/office/drawing/2014/main" id="{98B60600-ACF2-822B-9D24-5C0779E01E38}"/>
+              </a:ext>
+            </a:extLst>
+          </p:cNvPr>
           <p:cNvSpPr txBox="1"/>
           <p:nvPr/>
         </p:nvSpPr>
         <p:spPr>
           <a:xfrm>
-            <a:off x="11288486" y="206829"/>
-            <a:ext cx="718457" cy="369332"/>
+            <a:off x="10436088" y="206829"/>
+            <a:ext cx="1570856" cy="369332"/>
           </a:xfrm>
           <a:prstGeom prst="rect">
             <a:avLst/>
@@ -12876,7 +12008,7 @@
                   <a:schemeClr val="bg1"/>
                 </a:solidFill>
               </a:rPr>
-              <a:t>Sara</a:t>
+              <a:t>Sara Page3/15</a:t>
             </a:r>
             <a:endParaRPr kumimoji="1" lang="ko-KR" altLang="en-US" dirty="0">
               <a:solidFill>
@@ -12951,6 +12083,7 @@
           <a:lstStyle/>
           <a:p>
             <a:pPr algn="ctr"/>
+            <a:endParaRPr/>
           </a:p>
         </p:txBody>
       </p:sp>
@@ -12994,6 +12127,7 @@
           <a:lstStyle/>
           <a:p>
             <a:pPr algn="ctr"/>
+            <a:endParaRPr/>
           </a:p>
         </p:txBody>
       </p:sp>
@@ -13029,53 +12163,6 @@
               </a:rPr>
               <a:t>The New Triffin Dilemma</a:t>
             </a:r>
-            <a:endParaRPr sz="2600" b="0" i="0">
-              <a:solidFill>
-                <a:srgbClr val="FFFFFF"/>
-              </a:solidFill>
-              <a:latin typeface="Calibri"/>
-            </a:endParaRPr>
-          </a:p>
-        </p:txBody>
-      </p:sp>
-      <p:sp>
-        <p:nvSpPr>
-          <p:cNvPr id="5" name="TextBox 4"/>
-          <p:cNvSpPr txBox="1"/>
-          <p:nvPr/>
-        </p:nvSpPr>
-        <p:spPr>
-          <a:xfrm>
-            <a:off x="11686032" y="6473952"/>
-            <a:ext cx="411480" cy="320040"/>
-          </a:xfrm>
-          <a:prstGeom prst="rect">
-            <a:avLst/>
-          </a:prstGeom>
-          <a:noFill/>
-        </p:spPr>
-        <p:txBody>
-          <a:bodyPr wrap="square">
-            <a:spAutoFit/>
-          </a:bodyPr>
-          <a:lstStyle/>
-          <a:p>
-            <a:pPr algn="r"/>
-            <a:r>
-              <a:rPr sz="1300" b="0" i="0">
-                <a:solidFill>
-                  <a:srgbClr val="555566"/>
-                </a:solidFill>
-                <a:latin typeface="Calibri"/>
-              </a:rPr>
-              <a:t>4</a:t>
-            </a:r>
-            <a:endParaRPr sz="1300" b="0" i="0">
-              <a:solidFill>
-                <a:srgbClr val="555566"/>
-              </a:solidFill>
-              <a:latin typeface="Calibri"/>
-            </a:endParaRPr>
           </a:p>
         </p:txBody>
       </p:sp>
@@ -13119,6 +12206,7 @@
           <a:lstStyle/>
           <a:p>
             <a:pPr algn="ctr"/>
+            <a:endParaRPr/>
           </a:p>
         </p:txBody>
       </p:sp>
@@ -13150,7 +12238,7 @@
               </a:spcBef>
             </a:pPr>
             <a:r>
-              <a:rPr lang="en-US" altLang="en-US" sz="1900" b="0" i="1">
+              <a:rPr lang="en-US" altLang="en-US" sz="1900" b="0" i="1" dirty="0">
                 <a:solidFill>
                   <a:srgbClr val="1A1A2E"/>
                 </a:solidFill>
@@ -13158,12 +12246,6 @@
               </a:rPr>
               <a:t> A reserve currency country must supply sufficient safe assets to meet global demand — but this requires running structural current account deficits that progressively undermine confidence in the currency itself. The system depends on the very condition that makes it unsustainable.</a:t>
             </a:r>
-            <a:endParaRPr lang="en-US" altLang="en-US" sz="1900" b="0" i="1">
-              <a:solidFill>
-                <a:srgbClr val="1A1A2E"/>
-              </a:solidFill>
-              <a:latin typeface="Calibri"/>
-            </a:endParaRPr>
           </a:p>
         </p:txBody>
       </p:sp>
@@ -13199,12 +12281,6 @@
               </a:rPr>
               <a:t>Our analogue for stablecoin issuers:</a:t>
             </a:r>
-            <a:endParaRPr sz="1700" b="1" i="0">
-              <a:solidFill>
-                <a:srgbClr val="1B3A72"/>
-              </a:solidFill>
-              <a:latin typeface="Calibri"/>
-            </a:endParaRPr>
           </a:p>
         </p:txBody>
       </p:sp>
@@ -13248,6 +12324,7 @@
           <a:lstStyle/>
           <a:p>
             <a:pPr algn="ctr"/>
+            <a:endParaRPr/>
           </a:p>
         </p:txBody>
       </p:sp>
@@ -13283,12 +12360,6 @@
               </a:rPr>
               <a:t>Normal times ✅</a:t>
             </a:r>
-            <a:endParaRPr sz="1400" b="1" i="0">
-              <a:solidFill>
-                <a:srgbClr val="FFFFFF"/>
-              </a:solidFill>
-              <a:latin typeface="Calibri"/>
-            </a:endParaRPr>
           </a:p>
         </p:txBody>
       </p:sp>
@@ -13332,6 +12403,7 @@
           <a:lstStyle/>
           <a:p>
             <a:pPr algn="ctr"/>
+            <a:endParaRPr/>
           </a:p>
         </p:txBody>
       </p:sp>
@@ -13464,12 +12536,6 @@
               </a:rPr>
               <a:t>•	Exorbitant privilege amplified via private intermediation channel</a:t>
             </a:r>
-            <a:endParaRPr lang="en-US" altLang="en-US" sz="1200" b="0" i="0">
-              <a:solidFill>
-                <a:srgbClr val="1A1A2E"/>
-              </a:solidFill>
-              <a:latin typeface="Calibri"/>
-            </a:endParaRPr>
           </a:p>
         </p:txBody>
       </p:sp>
@@ -13513,6 +12579,7 @@
           <a:lstStyle/>
           <a:p>
             <a:pPr algn="ctr"/>
+            <a:endParaRPr/>
           </a:p>
         </p:txBody>
       </p:sp>
@@ -13548,12 +12615,6 @@
               </a:rPr>
               <a:t>Run scenario ❌</a:t>
             </a:r>
-            <a:endParaRPr sz="1400" b="1" i="0">
-              <a:solidFill>
-                <a:srgbClr val="FFFFFF"/>
-              </a:solidFill>
-              <a:latin typeface="Calibri"/>
-            </a:endParaRPr>
           </a:p>
         </p:txBody>
       </p:sp>
@@ -13597,6 +12658,7 @@
           <a:lstStyle/>
           <a:p>
             <a:pPr algn="ctr"/>
+            <a:endParaRPr/>
           </a:p>
         </p:txBody>
       </p:sp>
@@ -13726,25 +12788,60 @@
               </a:rPr>
               <a:t>•       Self-fulfilling dynamic: fear validates liquidation, crisis propagates</a:t>
             </a:r>
-            <a:endParaRPr lang="en-US" altLang="en-US" sz="1300" b="0" i="0">
-              <a:solidFill>
-                <a:srgbClr val="1A1A2E"/>
-              </a:solidFill>
-              <a:latin typeface="Calibri"/>
-            </a:endParaRPr>
-          </a:p>
-        </p:txBody>
-      </p:sp>
-      <p:sp>
-        <p:nvSpPr>
-          <p:cNvPr id="23" name="TextBox 22"/>
+          </a:p>
+        </p:txBody>
+      </p:sp>
+      <p:sp>
+        <p:nvSpPr>
+          <p:cNvPr id="24" name="TextBox 7"/>
           <p:cNvSpPr txBox="1"/>
           <p:nvPr/>
         </p:nvSpPr>
         <p:spPr>
           <a:xfrm>
-            <a:off x="11064240" y="206829"/>
-            <a:ext cx="942703" cy="369332"/>
+            <a:off x="358140" y="1019809"/>
+            <a:ext cx="11430000" cy="352425"/>
+          </a:xfrm>
+          <a:prstGeom prst="rect">
+            <a:avLst/>
+          </a:prstGeom>
+          <a:noFill/>
+        </p:spPr>
+        <p:txBody>
+          <a:bodyPr wrap="square">
+            <a:spAutoFit/>
+          </a:bodyPr>
+          <a:lstStyle/>
+          <a:p>
+            <a:pPr algn="l"/>
+            <a:r>
+              <a:rPr lang="en-US" sz="1700" b="1" i="0">
+                <a:solidFill>
+                  <a:srgbClr val="1B3A72"/>
+                </a:solidFill>
+                <a:latin typeface="Calibri"/>
+              </a:rPr>
+              <a:t>Triffin Dilemma (1960)</a:t>
+            </a:r>
+          </a:p>
+        </p:txBody>
+      </p:sp>
+      <p:sp>
+        <p:nvSpPr>
+          <p:cNvPr id="20" name="TextBox 19">
+            <a:extLst>
+              <a:ext uri="{FF2B5EF4-FFF2-40B4-BE49-F238E27FC236}">
+                <a16:creationId xmlns:a16="http://schemas.microsoft.com/office/drawing/2014/main" id="{F7ACDD58-2C7A-D97A-5A27-1C94FB368101}"/>
+              </a:ext>
+            </a:extLst>
+          </p:cNvPr>
+          <p:cNvSpPr txBox="1"/>
+          <p:nvPr/>
+        </p:nvSpPr>
+        <p:spPr>
+          <a:xfrm>
+            <a:off x="9939130" y="206829"/>
+            <a:ext cx="2067814" cy="369332"/>
           </a:xfrm>
           <a:prstGeom prst="rect">
             <a:avLst/>
@@ -13763,53 +12860,12 @@
                   <a:schemeClr val="bg1"/>
                 </a:solidFill>
               </a:rPr>
-              <a:t>Oybek</a:t>
+              <a:t>Oybek Page4/15</a:t>
             </a:r>
             <a:endParaRPr kumimoji="1" lang="ko-KR" altLang="en-US" dirty="0">
               <a:solidFill>
                 <a:schemeClr val="bg1"/>
               </a:solidFill>
-            </a:endParaRPr>
-          </a:p>
-        </p:txBody>
-      </p:sp>
-      <p:sp>
-        <p:nvSpPr>
-          <p:cNvPr id="24" name="TextBox 7"/>
-          <p:cNvSpPr txBox="1"/>
-          <p:nvPr/>
-        </p:nvSpPr>
-        <p:spPr>
-          <a:xfrm>
-            <a:off x="358140" y="1019809"/>
-            <a:ext cx="11430000" cy="352425"/>
-          </a:xfrm>
-          <a:prstGeom prst="rect">
-            <a:avLst/>
-          </a:prstGeom>
-          <a:noFill/>
-        </p:spPr>
-        <p:txBody>
-          <a:bodyPr wrap="square">
-            <a:spAutoFit/>
-          </a:bodyPr>
-          <a:lstStyle/>
-          <a:p>
-            <a:pPr algn="l"/>
-            <a:r>
-              <a:rPr lang="en-US" sz="1700" b="1" i="0">
-                <a:solidFill>
-                  <a:srgbClr val="1B3A72"/>
-                </a:solidFill>
-                <a:latin typeface="Calibri"/>
-              </a:rPr>
-              <a:t>Triffin Dilemma (1960)</a:t>
-            </a:r>
-            <a:endParaRPr lang="en-US" sz="1700" b="1" i="0">
-              <a:solidFill>
-                <a:srgbClr val="1B3A72"/>
-              </a:solidFill>
-              <a:latin typeface="Calibri"/>
             </a:endParaRPr>
           </a:p>
         </p:txBody>
@@ -13879,6 +12935,7 @@
           <a:lstStyle/>
           <a:p>
             <a:pPr algn="ctr"/>
+            <a:endParaRPr/>
           </a:p>
         </p:txBody>
       </p:sp>
@@ -13922,6 +12979,7 @@
           <a:lstStyle/>
           <a:p>
             <a:pPr algn="ctr"/>
+            <a:endParaRPr/>
           </a:p>
         </p:txBody>
       </p:sp>
@@ -13957,12 +13015,6 @@
               </a:rPr>
               <a:t>The New Triffin Dilemma</a:t>
             </a:r>
-            <a:endParaRPr sz="2600" b="0" i="0">
-              <a:solidFill>
-                <a:srgbClr val="FFFFFF"/>
-              </a:solidFill>
-              <a:latin typeface="Calibri"/>
-            </a:endParaRPr>
           </a:p>
         </p:txBody>
       </p:sp>
@@ -13998,12 +13050,6 @@
               </a:rPr>
               <a:t>4</a:t>
             </a:r>
-            <a:endParaRPr sz="1300" b="0" i="0">
-              <a:solidFill>
-                <a:srgbClr val="555566"/>
-              </a:solidFill>
-              <a:latin typeface="Calibri"/>
-            </a:endParaRPr>
           </a:p>
         </p:txBody>
       </p:sp>
@@ -14047,6 +13093,7 @@
           <a:lstStyle/>
           <a:p>
             <a:pPr algn="ctr"/>
+            <a:endParaRPr/>
           </a:p>
         </p:txBody>
       </p:sp>
@@ -14128,12 +13175,6 @@
               </a:rPr>
               <a:t>Our analogue for stablecoin issuers:</a:t>
             </a:r>
-            <a:endParaRPr sz="1700" b="1" i="0">
-              <a:solidFill>
-                <a:srgbClr val="1B3A72"/>
-              </a:solidFill>
-              <a:latin typeface="Calibri"/>
-            </a:endParaRPr>
           </a:p>
         </p:txBody>
       </p:sp>
@@ -14177,6 +13218,7 @@
           <a:lstStyle/>
           <a:p>
             <a:pPr algn="ctr"/>
+            <a:endParaRPr/>
           </a:p>
         </p:txBody>
       </p:sp>
@@ -14212,12 +13254,6 @@
               </a:rPr>
               <a:t>Normal times ✅</a:t>
             </a:r>
-            <a:endParaRPr sz="1400" b="1" i="0">
-              <a:solidFill>
-                <a:srgbClr val="FFFFFF"/>
-              </a:solidFill>
-              <a:latin typeface="Calibri"/>
-            </a:endParaRPr>
           </a:p>
         </p:txBody>
       </p:sp>
@@ -14261,6 +13297,7 @@
           <a:lstStyle/>
           <a:p>
             <a:pPr algn="ctr"/>
+            <a:endParaRPr/>
           </a:p>
         </p:txBody>
       </p:sp>
@@ -14351,12 +13388,6 @@
               </a:rPr>
               <a:t>•	Exorbitant privilege amplified via private intermediation channel</a:t>
             </a:r>
-            <a:endParaRPr lang="en-US" altLang="en-US" sz="1200" b="0" i="0">
-              <a:solidFill>
-                <a:srgbClr val="1A1A2E"/>
-              </a:solidFill>
-              <a:latin typeface="Calibri"/>
-            </a:endParaRPr>
           </a:p>
         </p:txBody>
       </p:sp>
@@ -14400,6 +13431,7 @@
           <a:lstStyle/>
           <a:p>
             <a:pPr algn="ctr"/>
+            <a:endParaRPr/>
           </a:p>
         </p:txBody>
       </p:sp>
@@ -14435,12 +13467,6 @@
               </a:rPr>
               <a:t>Run scenario ❌</a:t>
             </a:r>
-            <a:endParaRPr sz="1400" b="1" i="0">
-              <a:solidFill>
-                <a:srgbClr val="FFFFFF"/>
-              </a:solidFill>
-              <a:latin typeface="Calibri"/>
-            </a:endParaRPr>
           </a:p>
         </p:txBody>
       </p:sp>
@@ -14484,6 +13510,7 @@
           <a:lstStyle/>
           <a:p>
             <a:pPr algn="ctr"/>
+            <a:endParaRPr/>
           </a:p>
         </p:txBody>
       </p:sp>
@@ -14523,12 +13550,6 @@
               </a:rPr>
               <a:t>•       Redemption shock → programmatic T-bill liquidation</a:t>
             </a:r>
-            <a:endParaRPr lang="en-US" altLang="en-US" sz="1300" b="0" i="0">
-              <a:solidFill>
-                <a:srgbClr val="1A1A2E"/>
-              </a:solidFill>
-              <a:latin typeface="Calibri"/>
-            </a:endParaRPr>
           </a:p>
           <a:p>
             <a:pPr>
@@ -14545,12 +13566,6 @@
               </a:rPr>
               <a:t>•       Treasury yields spike above OIS — spread reversal</a:t>
             </a:r>
-            <a:endParaRPr lang="en-US" altLang="en-US" sz="1300" b="0" i="0">
-              <a:solidFill>
-                <a:srgbClr val="1A1A2E"/>
-              </a:solidFill>
-              <a:latin typeface="Calibri"/>
-            </a:endParaRPr>
           </a:p>
           <a:p>
             <a:pPr>
@@ -14567,12 +13582,6 @@
               </a:rPr>
               <a:t>•       Sovereign-linked liquidity shock transmitted to debt markets</a:t>
             </a:r>
-            <a:endParaRPr lang="en-US" altLang="en-US" sz="1300" b="0" i="0">
-              <a:solidFill>
-                <a:srgbClr val="1A1A2E"/>
-              </a:solidFill>
-              <a:latin typeface="Calibri"/>
-            </a:endParaRPr>
           </a:p>
           <a:p>
             <a:pPr>
@@ -14589,12 +13598,6 @@
               </a:rPr>
               <a:t>•       Self-fulfilling dynamic: fear validates liquidation, crisis propagates</a:t>
             </a:r>
-            <a:endParaRPr lang="en-US" altLang="en-US" sz="1300" b="0" i="0">
-              <a:solidFill>
-                <a:srgbClr val="1A1A2E"/>
-              </a:solidFill>
-              <a:latin typeface="Calibri"/>
-            </a:endParaRPr>
           </a:p>
         </p:txBody>
       </p:sp>
@@ -14638,6 +13641,7 @@
           <a:lstStyle/>
           <a:p>
             <a:pPr algn="ctr"/>
+            <a:endParaRPr/>
           </a:p>
         </p:txBody>
       </p:sp>
@@ -14691,50 +13695,6 @@
               </a:rPr>
               <a:t>We separate θ (why stablecoins help the US) from L (what prevents a crisis)</a:t>
             </a:r>
-            <a:endParaRPr lang="en-US" altLang="en-US" sz="1800" b="1" i="0">
-              <a:solidFill>
-                <a:srgbClr val="FFFFFF"/>
-              </a:solidFill>
-              <a:latin typeface="Calibri"/>
-            </a:endParaRPr>
-          </a:p>
-        </p:txBody>
-      </p:sp>
-      <p:sp>
-        <p:nvSpPr>
-          <p:cNvPr id="23" name="TextBox 22"/>
-          <p:cNvSpPr txBox="1"/>
-          <p:nvPr/>
-        </p:nvSpPr>
-        <p:spPr>
-          <a:xfrm>
-            <a:off x="11064240" y="206829"/>
-            <a:ext cx="942703" cy="369332"/>
-          </a:xfrm>
-          <a:prstGeom prst="rect">
-            <a:avLst/>
-          </a:prstGeom>
-          <a:noFill/>
-        </p:spPr>
-        <p:txBody>
-          <a:bodyPr wrap="square" rtlCol="0">
-            <a:spAutoFit/>
-          </a:bodyPr>
-          <a:lstStyle/>
-          <a:p>
-            <a:r>
-              <a:rPr kumimoji="1" lang="en-US" altLang="ko-KR" dirty="0">
-                <a:solidFill>
-                  <a:schemeClr val="bg1"/>
-                </a:solidFill>
-              </a:rPr>
-              <a:t>Oybek</a:t>
-            </a:r>
-            <a:endParaRPr kumimoji="1" lang="ko-KR" altLang="en-US" dirty="0">
-              <a:solidFill>
-                <a:schemeClr val="bg1"/>
-              </a:solidFill>
-            </a:endParaRPr>
           </a:p>
         </p:txBody>
       </p:sp>
@@ -14778,6 +13738,7 @@
           <a:lstStyle/>
           <a:p>
             <a:pPr algn="ctr"/>
+            <a:endParaRPr/>
           </a:p>
         </p:txBody>
       </p:sp>
@@ -14821,6 +13782,7 @@
           <a:lstStyle/>
           <a:p>
             <a:pPr algn="ctr"/>
+            <a:endParaRPr/>
           </a:p>
         </p:txBody>
       </p:sp>
@@ -14856,12 +13818,6 @@
               </a:rPr>
               <a:t>What determines outcome</a:t>
             </a:r>
-            <a:endParaRPr sz="1400" b="1" i="0">
-              <a:solidFill>
-                <a:srgbClr val="FFFFFF"/>
-              </a:solidFill>
-              <a:latin typeface="Calibri"/>
-            </a:endParaRPr>
           </a:p>
         </p:txBody>
       </p:sp>
@@ -14999,6 +13955,50 @@
                 <a:srgbClr val="1A1A2E"/>
               </a:solidFill>
               <a:latin typeface="Calibri"/>
+            </a:endParaRPr>
+          </a:p>
+        </p:txBody>
+      </p:sp>
+      <p:sp>
+        <p:nvSpPr>
+          <p:cNvPr id="27" name="TextBox 26">
+            <a:extLst>
+              <a:ext uri="{FF2B5EF4-FFF2-40B4-BE49-F238E27FC236}">
+                <a16:creationId xmlns:a16="http://schemas.microsoft.com/office/drawing/2014/main" id="{6798EF31-F29C-8F32-E0A6-DD856D9C4B62}"/>
+              </a:ext>
+            </a:extLst>
+          </p:cNvPr>
+          <p:cNvSpPr txBox="1"/>
+          <p:nvPr/>
+        </p:nvSpPr>
+        <p:spPr>
+          <a:xfrm>
+            <a:off x="9939130" y="206829"/>
+            <a:ext cx="2067814" cy="369332"/>
+          </a:xfrm>
+          <a:prstGeom prst="rect">
+            <a:avLst/>
+          </a:prstGeom>
+          <a:noFill/>
+        </p:spPr>
+        <p:txBody>
+          <a:bodyPr wrap="square" rtlCol="0">
+            <a:spAutoFit/>
+          </a:bodyPr>
+          <a:lstStyle/>
+          <a:p>
+            <a:r>
+              <a:rPr kumimoji="1" lang="en-US" altLang="ko-KR" dirty="0">
+                <a:solidFill>
+                  <a:schemeClr val="bg1"/>
+                </a:solidFill>
+              </a:rPr>
+              <a:t>Oybek Page5/15</a:t>
+            </a:r>
+            <a:endParaRPr kumimoji="1" lang="ko-KR" altLang="en-US" dirty="0">
+              <a:solidFill>
+                <a:schemeClr val="bg1"/>
+              </a:solidFill>
             </a:endParaRPr>
           </a:p>
         </p:txBody>
@@ -15068,6 +14068,7 @@
           <a:lstStyle/>
           <a:p>
             <a:pPr algn="ctr"/>
+            <a:endParaRPr/>
           </a:p>
         </p:txBody>
       </p:sp>
@@ -15111,6 +14112,7 @@
           <a:lstStyle/>
           <a:p>
             <a:pPr algn="ctr"/>
+            <a:endParaRPr/>
           </a:p>
         </p:txBody>
       </p:sp>
@@ -15146,12 +14148,6 @@
               </a:rPr>
               <a:t>Theoretical Extension: Maggiori (2017)</a:t>
             </a:r>
-            <a:endParaRPr sz="2600" b="0" i="0">
-              <a:solidFill>
-                <a:srgbClr val="FFFFFF"/>
-              </a:solidFill>
-              <a:latin typeface="Calibri"/>
-            </a:endParaRPr>
           </a:p>
         </p:txBody>
       </p:sp>
@@ -15187,12 +14183,6 @@
               </a:rPr>
               <a:t>5</a:t>
             </a:r>
-            <a:endParaRPr sz="1300" b="0" i="0">
-              <a:solidFill>
-                <a:srgbClr val="555566"/>
-              </a:solidFill>
-              <a:latin typeface="Calibri"/>
-            </a:endParaRPr>
           </a:p>
         </p:txBody>
       </p:sp>
@@ -15236,6 +14226,7 @@
           <a:lstStyle/>
           <a:p>
             <a:pPr algn="ctr"/>
+            <a:endParaRPr/>
           </a:p>
         </p:txBody>
       </p:sp>
@@ -15266,6 +14257,7 @@
                 <a:spcPts val="0"/>
               </a:spcBef>
             </a:pPr>
+            <a:endParaRPr dirty="0"/>
           </a:p>
           <a:p>
             <a:pPr algn="l">
@@ -15274,7 +14266,7 @@
               </a:spcBef>
             </a:pPr>
             <a:r>
-              <a:rPr sz="1400" b="1" i="0">
+              <a:rPr sz="1400" b="1" i="0" dirty="0">
                 <a:solidFill>
                   <a:srgbClr val="1B3A72"/>
                 </a:solidFill>
@@ -15282,12 +14274,6 @@
               </a:rPr>
               <a:t>Maggiori (2017) original:</a:t>
             </a:r>
-            <a:endParaRPr sz="1400" b="1" i="0">
-              <a:solidFill>
-                <a:srgbClr val="1B3A72"/>
-              </a:solidFill>
-              <a:latin typeface="Calibri"/>
-            </a:endParaRPr>
           </a:p>
           <a:p>
             <a:pPr algn="l">
@@ -15296,38 +14282,68 @@
               </a:spcBef>
             </a:pPr>
             <a:r>
-              <a:rPr sz="1300" b="0" i="0">
+              <a:rPr sz="1300" b="0" i="0" dirty="0">
                 <a:solidFill>
                   <a:srgbClr val="1A1A2E"/>
                 </a:solidFill>
                 <a:latin typeface="Calibri"/>
               </a:rPr>
-              <a:t>Safe-asset demand driven by Ω* </a:t>
-            </a:r>
-            <a:r>
-              <a:rPr lang="en-US" altLang="en-US" sz="1300" b="0" i="0">
+              <a:t>Safe-asset demand driven by </a:t>
+            </a:r>
+            <a:r>
+              <a:rPr sz="1300" b="0" i="0" dirty="0" err="1">
                 <a:solidFill>
                   <a:srgbClr val="1A1A2E"/>
                 </a:solidFill>
                 <a:latin typeface="Calibri"/>
               </a:rPr>
-              <a:t>— the countercyclical marginal value of RoW financial net worth</a:t>
-            </a:r>
-            <a:r>
-              <a:rPr sz="1300" b="0" i="0">
+              <a:t>Ω</a:t>
+            </a:r>
+            <a:r>
+              <a:rPr sz="1300" b="0" i="0" dirty="0">
                 <a:solidFill>
                   <a:srgbClr val="1A1A2E"/>
                 </a:solidFill>
                 <a:latin typeface="Calibri"/>
               </a:rPr>
+              <a:t>* </a:t>
+            </a:r>
+            <a:r>
+              <a:rPr lang="en-US" altLang="en-US" sz="1300" b="0" i="0" dirty="0">
+                <a:solidFill>
+                  <a:srgbClr val="1A1A2E"/>
+                </a:solidFill>
+                <a:latin typeface="Calibri"/>
+              </a:rPr>
+              <a:t>— the countercyclical marginal value of </a:t>
+            </a:r>
+            <a:r>
+              <a:rPr lang="en-US" altLang="en-US" sz="1300" b="0" i="0" dirty="0" err="1">
+                <a:solidFill>
+                  <a:srgbClr val="1A1A2E"/>
+                </a:solidFill>
+                <a:latin typeface="Calibri"/>
+              </a:rPr>
+              <a:t>RoW</a:t>
+            </a:r>
+            <a:r>
+              <a:rPr lang="en-US" altLang="en-US" sz="1300" b="0" i="0" dirty="0">
+                <a:solidFill>
+                  <a:srgbClr val="1A1A2E"/>
+                </a:solidFill>
+                <a:latin typeface="Calibri"/>
+              </a:rPr>
+              <a:t> financial net worth</a:t>
+            </a:r>
+            <a:r>
+              <a:rPr sz="1300" b="0" i="0" dirty="0">
+                <a:solidFill>
+                  <a:srgbClr val="1A1A2E"/>
+                </a:solidFill>
+                <a:latin typeface="Calibri"/>
+              </a:rPr>
               <a:t>.</a:t>
             </a:r>
-            <a:endParaRPr sz="1300" b="0" i="0">
-              <a:solidFill>
-                <a:srgbClr val="1A1A2E"/>
-              </a:solidFill>
-              <a:latin typeface="Calibri"/>
-            </a:endParaRPr>
           </a:p>
           <a:p>
             <a:pPr algn="l">
@@ -15336,7 +14352,7 @@
               </a:spcBef>
             </a:pPr>
             <a:r>
-              <a:rPr sz="800" b="0" i="0">
+              <a:rPr sz="800" b="0" i="0" dirty="0">
                 <a:solidFill>
                   <a:srgbClr val="1A1A2E"/>
                 </a:solidFill>
@@ -15344,12 +14360,6 @@
               </a:rPr>
               <a:t> </a:t>
             </a:r>
-            <a:endParaRPr sz="800" b="0" i="0">
-              <a:solidFill>
-                <a:srgbClr val="1A1A2E"/>
-              </a:solidFill>
-              <a:latin typeface="Calibri"/>
-            </a:endParaRPr>
           </a:p>
           <a:p>
             <a:pPr algn="l">
@@ -15358,7 +14368,7 @@
               </a:spcBef>
             </a:pPr>
             <a:r>
-              <a:rPr sz="1400" b="1" i="0">
+              <a:rPr sz="1400" b="1" i="0" dirty="0">
                 <a:solidFill>
                   <a:srgbClr val="1B3A72"/>
                 </a:solidFill>
@@ -15367,7 +14377,7 @@
               <a:t>Our extension add</a:t>
             </a:r>
             <a:r>
-              <a:rPr lang="en-US" sz="1400" b="1" i="0">
+              <a:rPr lang="en-US" sz="1400" b="1" i="0" dirty="0">
                 <a:solidFill>
                   <a:srgbClr val="1B3A72"/>
                 </a:solidFill>
@@ -15376,29 +14386,32 @@
               <a:t>s </a:t>
             </a:r>
             <a:r>
-              <a:rPr sz="1400" b="1" i="0">
+              <a:rPr sz="1400" b="1" i="0" dirty="0">
                 <a:solidFill>
                   <a:srgbClr val="1B3A72"/>
                 </a:solidFill>
                 <a:latin typeface="Calibri"/>
               </a:rPr>
-              <a:t>S, θ, and </a:t>
-            </a:r>
-            <a:r>
-              <a:rPr sz="1400" b="1" i="0">
+              <a:t>S, </a:t>
+            </a:r>
+            <a:r>
+              <a:rPr sz="1400" b="1" i="0" dirty="0" err="1">
                 <a:solidFill>
                   <a:srgbClr val="1B3A72"/>
                 </a:solidFill>
                 <a:latin typeface="Calibri"/>
               </a:rPr>
-              <a:t>L:</a:t>
-            </a:r>
-            <a:endParaRPr sz="1400" b="1" i="0">
-              <a:solidFill>
-                <a:srgbClr val="1B3A72"/>
-              </a:solidFill>
-              <a:latin typeface="Calibri"/>
-            </a:endParaRPr>
+              <a:t>θ</a:t>
+            </a:r>
+            <a:r>
+              <a:rPr sz="1400" b="1" i="0" dirty="0">
+                <a:solidFill>
+                  <a:srgbClr val="1B3A72"/>
+                </a:solidFill>
+                <a:latin typeface="Calibri"/>
+              </a:rPr>
+              <a:t>, and L:</a:t>
+            </a:r>
           </a:p>
           <a:p>
             <a:pPr algn="l">
@@ -15407,20 +14420,86 @@
               </a:spcBef>
             </a:pPr>
             <a:r>
-              <a:rPr sz="1300" b="0" i="1">
+              <a:rPr sz="1300" b="0" i="1" dirty="0">
                 <a:solidFill>
                   <a:srgbClr val="1A1A2E"/>
                 </a:solidFill>
                 <a:latin typeface="Calibri"/>
               </a:rPr>
-              <a:t>D*(Ñ*, S, θ, L)  =  D*precautionary(Ñ*)  +  D*stablecoin(S, θ)  +  D*buffer(L)</a:t>
-            </a:r>
-            <a:endParaRPr sz="1300" b="0" i="1">
-              <a:solidFill>
-                <a:srgbClr val="1A1A2E"/>
-              </a:solidFill>
-              <a:latin typeface="Calibri"/>
-            </a:endParaRPr>
+              <a:t>D*(</a:t>
+            </a:r>
+            <a:r>
+              <a:rPr sz="1300" b="0" i="1" dirty="0" err="1">
+                <a:solidFill>
+                  <a:srgbClr val="1A1A2E"/>
+                </a:solidFill>
+                <a:latin typeface="Calibri"/>
+              </a:rPr>
+              <a:t>Ñ</a:t>
+            </a:r>
+            <a:r>
+              <a:rPr sz="1300" b="0" i="1" dirty="0">
+                <a:solidFill>
+                  <a:srgbClr val="1A1A2E"/>
+                </a:solidFill>
+                <a:latin typeface="Calibri"/>
+              </a:rPr>
+              <a:t>*, S, </a:t>
+            </a:r>
+            <a:r>
+              <a:rPr sz="1300" b="0" i="1" dirty="0" err="1">
+                <a:solidFill>
+                  <a:srgbClr val="1A1A2E"/>
+                </a:solidFill>
+                <a:latin typeface="Calibri"/>
+              </a:rPr>
+              <a:t>θ</a:t>
+            </a:r>
+            <a:r>
+              <a:rPr sz="1300" b="0" i="1" dirty="0">
+                <a:solidFill>
+                  <a:srgbClr val="1A1A2E"/>
+                </a:solidFill>
+                <a:latin typeface="Calibri"/>
+              </a:rPr>
+              <a:t>, L)  =  D*precautionary(</a:t>
+            </a:r>
+            <a:r>
+              <a:rPr sz="1300" b="0" i="1" dirty="0" err="1">
+                <a:solidFill>
+                  <a:srgbClr val="1A1A2E"/>
+                </a:solidFill>
+                <a:latin typeface="Calibri"/>
+              </a:rPr>
+              <a:t>Ñ</a:t>
+            </a:r>
+            <a:r>
+              <a:rPr sz="1300" b="0" i="1" dirty="0">
+                <a:solidFill>
+                  <a:srgbClr val="1A1A2E"/>
+                </a:solidFill>
+                <a:latin typeface="Calibri"/>
+              </a:rPr>
+              <a:t>*)  +  D*stablecoin(S, </a:t>
+            </a:r>
+            <a:r>
+              <a:rPr sz="1300" b="0" i="1" dirty="0" err="1">
+                <a:solidFill>
+                  <a:srgbClr val="1A1A2E"/>
+                </a:solidFill>
+                <a:latin typeface="Calibri"/>
+              </a:rPr>
+              <a:t>θ</a:t>
+            </a:r>
+            <a:r>
+              <a:rPr sz="1300" b="0" i="1" dirty="0">
+                <a:solidFill>
+                  <a:srgbClr val="1A1A2E"/>
+                </a:solidFill>
+                <a:latin typeface="Calibri"/>
+              </a:rPr>
+              <a:t>)  +  D*buffer(L)</a:t>
+            </a:r>
           </a:p>
           <a:p>
             <a:pPr algn="l">
@@ -15429,7 +14508,7 @@
               </a:spcBef>
             </a:pPr>
             <a:r>
-              <a:rPr sz="800" b="0" i="0">
+              <a:rPr sz="800" b="0" i="0" dirty="0">
                 <a:solidFill>
                   <a:srgbClr val="1A1A2E"/>
                 </a:solidFill>
@@ -15437,12 +14516,6 @@
               </a:rPr>
               <a:t> </a:t>
             </a:r>
-            <a:endParaRPr sz="800" b="0" i="0">
-              <a:solidFill>
-                <a:srgbClr val="1A1A2E"/>
-              </a:solidFill>
-              <a:latin typeface="Calibri"/>
-            </a:endParaRPr>
           </a:p>
           <a:p>
             <a:pPr algn="l">
@@ -15451,7 +14524,7 @@
               </a:spcBef>
             </a:pPr>
             <a:r>
-              <a:rPr lang="en-US" altLang="en-US" sz="1400" b="1" i="0">
+              <a:rPr lang="en-US" altLang="en-US" sz="1400" b="1" i="0" dirty="0">
                 <a:solidFill>
                   <a:srgbClr val="1B3A72"/>
                 </a:solidFill>
@@ -15460,7 +14533,7 @@
               <a:t>Safe-asset demand now has three components:</a:t>
             </a:r>
             <a:br>
-              <a:rPr lang="en-US" altLang="en-US" sz="1400" b="1" i="0">
+              <a:rPr lang="en-US" altLang="en-US" sz="1400" b="1" i="0" dirty="0">
                 <a:solidFill>
                   <a:srgbClr val="1B3A72"/>
                 </a:solidFill>
@@ -15468,7 +14541,7 @@
               </a:rPr>
             </a:br>
             <a:br>
-              <a:rPr lang="en-US" altLang="en-US" sz="1400" b="1" i="0">
+              <a:rPr lang="en-US" altLang="en-US" sz="1400" b="1" i="0" dirty="0">
                 <a:solidFill>
                   <a:srgbClr val="1B3A72"/>
                 </a:solidFill>
@@ -15476,7 +14549,7 @@
               </a:rPr>
             </a:br>
             <a:r>
-              <a:rPr lang="en-US" altLang="en-US" sz="1300" b="0" i="0">
+              <a:rPr lang="en-US" altLang="en-US" sz="1300" b="0" i="0" dirty="0">
                 <a:solidFill>
                   <a:schemeClr val="tx1"/>
                 </a:solidFill>
@@ -15485,7 +14558,7 @@
               <a:t>• D*precautionary — Maggiori’s original term, driven by global wealth</a:t>
             </a:r>
             <a:br>
-              <a:rPr lang="en-US" altLang="en-US" sz="1300" b="0" i="0">
+              <a:rPr lang="en-US" altLang="en-US" sz="1300" b="0" i="0" dirty="0">
                 <a:solidFill>
                   <a:schemeClr val="tx1"/>
                 </a:solidFill>
@@ -15493,7 +14566,7 @@
               </a:rPr>
             </a:br>
             <a:br>
-              <a:rPr lang="en-US" altLang="en-US" sz="1300" b="0" i="0">
+              <a:rPr lang="en-US" altLang="en-US" sz="1300" b="0" i="0" dirty="0">
                 <a:solidFill>
                   <a:schemeClr val="tx1"/>
                 </a:solidFill>
@@ -15501,7 +14574,7 @@
               </a:rPr>
             </a:br>
             <a:r>
-              <a:rPr lang="en-US" altLang="en-US" sz="1300" b="0" i="0">
+              <a:rPr lang="en-US" altLang="en-US" sz="1300" b="0" i="0" dirty="0">
                 <a:solidFill>
                   <a:schemeClr val="tx1"/>
                 </a:solidFill>
@@ -15509,12 +14582,6 @@
               </a:rPr>
               <a:t>• D*stablecoin — new structural demand via mechanical T-bill acquisition</a:t>
             </a:r>
-            <a:endParaRPr lang="en-US" altLang="en-US" sz="1300" b="0" i="0">
-              <a:solidFill>
-                <a:schemeClr val="tx1"/>
-              </a:solidFill>
-              <a:latin typeface="Calibri"/>
-            </a:endParaRPr>
           </a:p>
           <a:p>
             <a:pPr algn="l">
@@ -15523,7 +14590,7 @@
               </a:spcBef>
             </a:pPr>
             <a:br>
-              <a:rPr lang="en-US" altLang="en-US" sz="1300" b="0" i="0">
+              <a:rPr lang="en-US" altLang="en-US" sz="1300" b="0" i="0" dirty="0">
                 <a:solidFill>
                   <a:schemeClr val="tx1"/>
                 </a:solidFill>
@@ -15531,7 +14598,7 @@
               </a:rPr>
             </a:br>
             <a:r>
-              <a:rPr lang="en-US" altLang="en-US" sz="1300" b="0" i="0">
+              <a:rPr lang="en-US" altLang="en-US" sz="1300" b="0" i="0" dirty="0">
                 <a:solidFill>
                   <a:schemeClr val="tx1"/>
                 </a:solidFill>
@@ -15539,12 +14606,6 @@
               </a:rPr>
               <a:t>• D*buffer — additional demand from excess reserve holdings above minimum</a:t>
             </a:r>
-            <a:endParaRPr lang="en-US" altLang="en-US" sz="1300" b="0" i="0">
-              <a:solidFill>
-                <a:schemeClr val="tx1"/>
-              </a:solidFill>
-              <a:latin typeface="Calibri"/>
-            </a:endParaRPr>
           </a:p>
         </p:txBody>
       </p:sp>
@@ -15588,6 +14649,7 @@
           <a:lstStyle/>
           <a:p>
             <a:pPr algn="ctr"/>
+            <a:endParaRPr/>
           </a:p>
         </p:txBody>
       </p:sp>
@@ -15623,12 +14685,6 @@
               </a:rPr>
               <a:t>Main Estimating Equation</a:t>
             </a:r>
-            <a:endParaRPr sz="1500" b="1" i="0">
-              <a:solidFill>
-                <a:srgbClr val="FFFFFF"/>
-              </a:solidFill>
-              <a:latin typeface="Calibri"/>
-            </a:endParaRPr>
           </a:p>
         </p:txBody>
       </p:sp>
@@ -15667,12 +14723,6 @@
            + β₅·Vₜ + β₆·VIXₜ
            + β₇·ΔlnN*ₜ + εₜ</a:t>
             </a:r>
-            <a:endParaRPr sz="1400" b="0" i="0">
-              <a:solidFill>
-                <a:srgbClr val="FFFFFF"/>
-              </a:solidFill>
-              <a:latin typeface="Courier New" panose="02070609020205020404"/>
-            </a:endParaRPr>
           </a:p>
         </p:txBody>
       </p:sp>
@@ -15703,6 +14753,7 @@
                 <a:spcPts val="0"/>
               </a:spcBef>
             </a:pPr>
+            <a:endParaRPr/>
           </a:p>
           <a:p>
             <a:pPr algn="l">
@@ -15719,12 +14770,6 @@
               </a:rPr>
               <a:t>Predicted signs:</a:t>
             </a:r>
-            <a:endParaRPr sz="1500" b="1" i="0">
-              <a:solidFill>
-                <a:srgbClr val="AAC4E8"/>
-              </a:solidFill>
-              <a:latin typeface="Calibri"/>
-            </a:endParaRPr>
           </a:p>
           <a:p>
             <a:pPr algn="l">
@@ -15741,12 +14786,6 @@
               </a:rPr>
               <a:t>❖  β₁ &lt; 0: ΔlnS compresses spreads (privilege amplification)</a:t>
             </a:r>
-            <a:endParaRPr sz="1500" b="0" i="0">
-              <a:solidFill>
-                <a:srgbClr val="FFFFFF"/>
-              </a:solidFill>
-              <a:latin typeface="Calibri"/>
-            </a:endParaRPr>
           </a:p>
           <a:p>
             <a:pPr algn="l">
@@ -15763,12 +14802,6 @@
               </a:rPr>
               <a:t>❖  β₂ &gt; 0: Higher T-bill exposure θ amplifies demand</a:t>
             </a:r>
-            <a:endParaRPr sz="1500" b="0" i="0">
-              <a:solidFill>
-                <a:srgbClr val="FFFFFF"/>
-              </a:solidFill>
-              <a:latin typeface="Calibri"/>
-            </a:endParaRPr>
           </a:p>
           <a:p>
             <a:pPr algn="l">
@@ -15808,44 +14841,6 @@
           </a:p>
         </p:txBody>
       </p:sp>
-      <p:sp>
-        <p:nvSpPr>
-          <p:cNvPr id="12" name="TextBox 11"/>
-          <p:cNvSpPr txBox="1"/>
-          <p:nvPr/>
-        </p:nvSpPr>
-        <p:spPr>
-          <a:xfrm>
-            <a:off x="11064240" y="206829"/>
-            <a:ext cx="942703" cy="369332"/>
-          </a:xfrm>
-          <a:prstGeom prst="rect">
-            <a:avLst/>
-          </a:prstGeom>
-          <a:noFill/>
-        </p:spPr>
-        <p:txBody>
-          <a:bodyPr wrap="square" rtlCol="0">
-            <a:spAutoFit/>
-          </a:bodyPr>
-          <a:lstStyle/>
-          <a:p>
-            <a:r>
-              <a:rPr kumimoji="1" lang="en-US" altLang="ko-KR" dirty="0">
-                <a:solidFill>
-                  <a:schemeClr val="bg1"/>
-                </a:solidFill>
-              </a:rPr>
-              <a:t>Oybek</a:t>
-            </a:r>
-            <a:endParaRPr kumimoji="1" lang="ko-KR" altLang="en-US" dirty="0">
-              <a:solidFill>
-                <a:schemeClr val="bg1"/>
-              </a:solidFill>
-            </a:endParaRPr>
-          </a:p>
-        </p:txBody>
-      </p:sp>
       <p:pic>
         <p:nvPicPr>
           <p:cNvPr id="13" name="Picture 12"/>
@@ -15855,7 +14850,7 @@
           <p:nvPr/>
         </p:nvPicPr>
         <p:blipFill>
-          <a:blip r:embed="rId1"/>
+          <a:blip r:embed="rId3"/>
           <a:stretch>
             <a:fillRect/>
           </a:stretch>
@@ -15910,6 +14905,7 @@
           <a:lstStyle/>
           <a:p>
             <a:pPr algn="ctr"/>
+            <a:endParaRPr/>
           </a:p>
         </p:txBody>
       </p:sp>
@@ -15945,11 +14941,49 @@
               </a:rPr>
               <a:t>The buffer L introduces a non-linear threshold — the key theoretical departure from Maggiori’s original model.</a:t>
             </a:r>
-            <a:endParaRPr lang="en-US" altLang="en-US" sz="1800" b="1" i="0">
+          </a:p>
+        </p:txBody>
+      </p:sp>
+      <p:sp>
+        <p:nvSpPr>
+          <p:cNvPr id="17" name="TextBox 16">
+            <a:extLst>
+              <a:ext uri="{FF2B5EF4-FFF2-40B4-BE49-F238E27FC236}">
+                <a16:creationId xmlns:a16="http://schemas.microsoft.com/office/drawing/2014/main" id="{57109801-D11E-6CF5-ABBF-CDE4784B4444}"/>
+              </a:ext>
+            </a:extLst>
+          </p:cNvPr>
+          <p:cNvSpPr txBox="1"/>
+          <p:nvPr/>
+        </p:nvSpPr>
+        <p:spPr>
+          <a:xfrm>
+            <a:off x="9939130" y="206829"/>
+            <a:ext cx="2067814" cy="369332"/>
+          </a:xfrm>
+          <a:prstGeom prst="rect">
+            <a:avLst/>
+          </a:prstGeom>
+          <a:noFill/>
+        </p:spPr>
+        <p:txBody>
+          <a:bodyPr wrap="square" rtlCol="0">
+            <a:spAutoFit/>
+          </a:bodyPr>
+          <a:lstStyle/>
+          <a:p>
+            <a:r>
+              <a:rPr kumimoji="1" lang="en-US" altLang="ko-KR" dirty="0">
+                <a:solidFill>
+                  <a:schemeClr val="bg1"/>
+                </a:solidFill>
+              </a:rPr>
+              <a:t>Oybek Page6/15</a:t>
+            </a:r>
+            <a:endParaRPr kumimoji="1" lang="ko-KR" altLang="en-US" dirty="0">
               <a:solidFill>
-                <a:srgbClr val="FFFFFF"/>
+                <a:schemeClr val="bg1"/>
               </a:solidFill>
-              <a:latin typeface="Calibri"/>
             </a:endParaRPr>
           </a:p>
         </p:txBody>
@@ -16019,6 +15053,7 @@
           <a:lstStyle/>
           <a:p>
             <a:pPr algn="ctr"/>
+            <a:endParaRPr/>
           </a:p>
         </p:txBody>
       </p:sp>
@@ -16062,6 +15097,7 @@
           <a:lstStyle/>
           <a:p>
             <a:pPr algn="ctr"/>
+            <a:endParaRPr/>
           </a:p>
         </p:txBody>
       </p:sp>
@@ -16097,53 +15133,6 @@
               </a:rPr>
               <a:t>Data &amp; Sample</a:t>
             </a:r>
-            <a:endParaRPr sz="2600" b="0" i="0">
-              <a:solidFill>
-                <a:srgbClr val="FFFFFF"/>
-              </a:solidFill>
-              <a:latin typeface="Calibri"/>
-            </a:endParaRPr>
-          </a:p>
-        </p:txBody>
-      </p:sp>
-      <p:sp>
-        <p:nvSpPr>
-          <p:cNvPr id="5" name="TextBox 4"/>
-          <p:cNvSpPr txBox="1"/>
-          <p:nvPr/>
-        </p:nvSpPr>
-        <p:spPr>
-          <a:xfrm>
-            <a:off x="11686032" y="6473952"/>
-            <a:ext cx="411480" cy="320040"/>
-          </a:xfrm>
-          <a:prstGeom prst="rect">
-            <a:avLst/>
-          </a:prstGeom>
-          <a:noFill/>
-        </p:spPr>
-        <p:txBody>
-          <a:bodyPr wrap="square">
-            <a:spAutoFit/>
-          </a:bodyPr>
-          <a:lstStyle/>
-          <a:p>
-            <a:pPr algn="r"/>
-            <a:r>
-              <a:rPr sz="1300" b="0" i="0">
-                <a:solidFill>
-                  <a:srgbClr val="555566"/>
-                </a:solidFill>
-                <a:latin typeface="Calibri"/>
-              </a:rPr>
-              <a:t>6</a:t>
-            </a:r>
-            <a:endParaRPr sz="1300" b="0" i="0">
-              <a:solidFill>
-                <a:srgbClr val="555566"/>
-              </a:solidFill>
-              <a:latin typeface="Calibri"/>
-            </a:endParaRPr>
           </a:p>
         </p:txBody>
       </p:sp>
@@ -16187,6 +15176,7 @@
           <a:lstStyle/>
           <a:p>
             <a:pPr algn="ctr"/>
+            <a:endParaRPr/>
           </a:p>
         </p:txBody>
       </p:sp>
@@ -16222,12 +15212,6 @@
               </a:rPr>
               <a:t>Variable</a:t>
             </a:r>
-            <a:endParaRPr sz="1300" b="1" i="0">
-              <a:solidFill>
-                <a:srgbClr val="FFFFFF"/>
-              </a:solidFill>
-              <a:latin typeface="Calibri"/>
-            </a:endParaRPr>
           </a:p>
         </p:txBody>
       </p:sp>
@@ -16263,12 +15247,6 @@
               </a:rPr>
               <a:t>Definition</a:t>
             </a:r>
-            <a:endParaRPr sz="1300" b="1" i="0">
-              <a:solidFill>
-                <a:srgbClr val="FFFFFF"/>
-              </a:solidFill>
-              <a:latin typeface="Calibri"/>
-            </a:endParaRPr>
           </a:p>
         </p:txBody>
       </p:sp>
@@ -16304,12 +15282,6 @@
               </a:rPr>
               <a:t>Source</a:t>
             </a:r>
-            <a:endParaRPr sz="1300" b="1" i="0">
-              <a:solidFill>
-                <a:srgbClr val="FFFFFF"/>
-              </a:solidFill>
-              <a:latin typeface="Calibri"/>
-            </a:endParaRPr>
           </a:p>
         </p:txBody>
       </p:sp>
@@ -16345,12 +15317,6 @@
               </a:rPr>
               <a:t>Frequency</a:t>
             </a:r>
-            <a:endParaRPr sz="1300" b="1" i="0">
-              <a:solidFill>
-                <a:srgbClr val="FFFFFF"/>
-              </a:solidFill>
-              <a:latin typeface="Calibri"/>
-            </a:endParaRPr>
           </a:p>
         </p:txBody>
       </p:sp>
@@ -16394,6 +15360,7 @@
           <a:lstStyle/>
           <a:p>
             <a:pPr algn="ctr"/>
+            <a:endParaRPr/>
           </a:p>
         </p:txBody>
       </p:sp>
@@ -16429,12 +15396,6 @@
               </a:rPr>
               <a:t>OIS–Treasury Spread</a:t>
             </a:r>
-            <a:endParaRPr sz="1200" b="0" i="0">
-              <a:solidFill>
-                <a:srgbClr val="1A1A2E"/>
-              </a:solidFill>
-              <a:latin typeface="Calibri"/>
-            </a:endParaRPr>
           </a:p>
         </p:txBody>
       </p:sp>
@@ -16470,12 +15431,6 @@
               </a:rPr>
               <a:t>DTB3 − SOFR90DAYAVG</a:t>
             </a:r>
-            <a:endParaRPr sz="1200" b="0" i="0">
-              <a:solidFill>
-                <a:srgbClr val="1A1A2E"/>
-              </a:solidFill>
-              <a:latin typeface="Calibri"/>
-            </a:endParaRPr>
           </a:p>
         </p:txBody>
       </p:sp>
@@ -16511,12 +15466,6 @@
               </a:rPr>
               <a:t>FRED (direct CSV, no API key)</a:t>
             </a:r>
-            <a:endParaRPr sz="1200" b="0" i="0">
-              <a:solidFill>
-                <a:srgbClr val="1A1A2E"/>
-              </a:solidFill>
-              <a:latin typeface="Calibri"/>
-            </a:endParaRPr>
           </a:p>
         </p:txBody>
       </p:sp>
@@ -16552,12 +15501,6 @@
               </a:rPr>
               <a:t>Daily → Monthly</a:t>
             </a:r>
-            <a:endParaRPr sz="1200" b="0" i="0">
-              <a:solidFill>
-                <a:srgbClr val="1A1A2E"/>
-              </a:solidFill>
-              <a:latin typeface="Calibri"/>
-            </a:endParaRPr>
           </a:p>
         </p:txBody>
       </p:sp>
@@ -16601,6 +15544,7 @@
           <a:lstStyle/>
           <a:p>
             <a:pPr algn="ctr"/>
+            <a:endParaRPr/>
           </a:p>
         </p:txBody>
       </p:sp>
@@ -16636,12 +15580,6 @@
               </a:rPr>
               <a:t>Stablecoin Supply S</a:t>
             </a:r>
-            <a:endParaRPr sz="1200" b="0" i="0">
-              <a:solidFill>
-                <a:srgbClr val="1A1A2E"/>
-              </a:solidFill>
-              <a:latin typeface="Calibri"/>
-            </a:endParaRPr>
           </a:p>
         </p:txBody>
       </p:sp>
@@ -16677,12 +15615,6 @@
               </a:rPr>
               <a:t>USDT + USDC market cap</a:t>
             </a:r>
-            <a:endParaRPr sz="1200" b="0" i="0">
-              <a:solidFill>
-                <a:srgbClr val="1A1A2E"/>
-              </a:solidFill>
-              <a:latin typeface="Calibri"/>
-            </a:endParaRPr>
           </a:p>
         </p:txBody>
       </p:sp>
@@ -16710,20 +15642,23 @@
           <a:p>
             <a:pPr algn="l"/>
             <a:r>
-              <a:rPr sz="1200" b="0" i="0">
+              <a:rPr sz="1200" b="0" i="0" dirty="0" err="1">
                 <a:solidFill>
                   <a:srgbClr val="1A1A2E"/>
                 </a:solidFill>
                 <a:latin typeface="Calibri"/>
               </a:rPr>
-              <a:t>DeFiLlama stablecoins API (free)</a:t>
-            </a:r>
-            <a:endParaRPr sz="1200" b="0" i="0">
-              <a:solidFill>
-                <a:srgbClr val="1A1A2E"/>
-              </a:solidFill>
-              <a:latin typeface="Calibri"/>
-            </a:endParaRPr>
+              <a:t>DeFiLlama</a:t>
+            </a:r>
+            <a:r>
+              <a:rPr sz="1200" b="0" i="0" dirty="0">
+                <a:solidFill>
+                  <a:srgbClr val="1A1A2E"/>
+                </a:solidFill>
+                <a:latin typeface="Calibri"/>
+              </a:rPr>
+              <a:t> stablecoins API (free)</a:t>
+            </a:r>
           </a:p>
         </p:txBody>
       </p:sp>
@@ -16759,12 +15694,6 @@
               </a:rPr>
               <a:t>Daily → Monthly</a:t>
             </a:r>
-            <a:endParaRPr sz="1200" b="0" i="0">
-              <a:solidFill>
-                <a:srgbClr val="1A1A2E"/>
-              </a:solidFill>
-              <a:latin typeface="Calibri"/>
-            </a:endParaRPr>
           </a:p>
         </p:txBody>
       </p:sp>
@@ -16808,6 +15737,7 @@
           <a:lstStyle/>
           <a:p>
             <a:pPr algn="ctr"/>
+            <a:endParaRPr/>
           </a:p>
         </p:txBody>
       </p:sp>
@@ -16843,12 +15773,6 @@
               </a:rPr>
               <a:t>θ  (Treasury Exposure)</a:t>
             </a:r>
-            <a:endParaRPr sz="1200" b="0" i="0">
-              <a:solidFill>
-                <a:srgbClr val="1A1A2E"/>
-              </a:solidFill>
-              <a:latin typeface="Calibri"/>
-            </a:endParaRPr>
           </a:p>
         </p:txBody>
       </p:sp>
@@ -16884,12 +15808,6 @@
               </a:rPr>
               <a:t>T-bill holdings / supply</a:t>
             </a:r>
-            <a:endParaRPr sz="1200" b="0" i="0">
-              <a:solidFill>
-                <a:srgbClr val="1A1A2E"/>
-              </a:solidFill>
-              <a:latin typeface="Calibri"/>
-            </a:endParaRPr>
           </a:p>
         </p:txBody>
       </p:sp>
@@ -16925,12 +15843,6 @@
               </a:rPr>
               <a:t>Tether/BDO + Circle/Deloitte attestations</a:t>
             </a:r>
-            <a:endParaRPr sz="1200" b="0" i="0">
-              <a:solidFill>
-                <a:srgbClr val="1A1A2E"/>
-              </a:solidFill>
-              <a:latin typeface="Calibri"/>
-            </a:endParaRPr>
           </a:p>
         </p:txBody>
       </p:sp>
@@ -16966,12 +15878,6 @@
               </a:rPr>
               <a:t>Quarterly/Monthly</a:t>
             </a:r>
-            <a:endParaRPr sz="1200" b="0" i="0">
-              <a:solidFill>
-                <a:srgbClr val="1A1A2E"/>
-              </a:solidFill>
-              <a:latin typeface="Calibri"/>
-            </a:endParaRPr>
           </a:p>
         </p:txBody>
       </p:sp>
@@ -17015,6 +15921,7 @@
           <a:lstStyle/>
           <a:p>
             <a:pPr algn="ctr"/>
+            <a:endParaRPr/>
           </a:p>
         </p:txBody>
       </p:sp>
@@ -17050,12 +15957,6 @@
               </a:rPr>
               <a:t>L  (Liquid Buffer)</a:t>
             </a:r>
-            <a:endParaRPr sz="1200" b="0" i="0">
-              <a:solidFill>
-                <a:srgbClr val="1A1A2E"/>
-              </a:solidFill>
-              <a:latin typeface="Calibri"/>
-            </a:endParaRPr>
           </a:p>
         </p:txBody>
       </p:sp>
@@ -17091,12 +15992,6 @@
               </a:rPr>
               <a:t>Cash reserves / supply</a:t>
             </a:r>
-            <a:endParaRPr sz="1200" b="0" i="0">
-              <a:solidFill>
-                <a:srgbClr val="1A1A2E"/>
-              </a:solidFill>
-              <a:latin typeface="Calibri"/>
-            </a:endParaRPr>
           </a:p>
         </p:txBody>
       </p:sp>
@@ -17132,12 +16027,6 @@
               </a:rPr>
               <a:t>Tether/BDO + Circle/Deloitte attestations</a:t>
             </a:r>
-            <a:endParaRPr sz="1200" b="0" i="0">
-              <a:solidFill>
-                <a:srgbClr val="1A1A2E"/>
-              </a:solidFill>
-              <a:latin typeface="Calibri"/>
-            </a:endParaRPr>
           </a:p>
         </p:txBody>
       </p:sp>
@@ -17173,12 +16062,6 @@
               </a:rPr>
               <a:t>Quarterly/Monthly</a:t>
             </a:r>
-            <a:endParaRPr sz="1200" b="0" i="0">
-              <a:solidFill>
-                <a:srgbClr val="1A1A2E"/>
-              </a:solidFill>
-              <a:latin typeface="Calibri"/>
-            </a:endParaRPr>
           </a:p>
         </p:txBody>
       </p:sp>
@@ -17222,6 +16105,7 @@
           <a:lstStyle/>
           <a:p>
             <a:pPr algn="ctr"/>
+            <a:endParaRPr/>
           </a:p>
         </p:txBody>
       </p:sp>
@@ -17257,12 +16141,6 @@
               </a:rPr>
               <a:t>Velocity V</a:t>
             </a:r>
-            <a:endParaRPr sz="1200" b="0" i="0">
-              <a:solidFill>
-                <a:srgbClr val="1A1A2E"/>
-              </a:solidFill>
-              <a:latin typeface="Calibri"/>
-            </a:endParaRPr>
           </a:p>
         </p:txBody>
       </p:sp>
@@ -17298,12 +16176,6 @@
               </a:rPr>
               <a:t>7-day rolling SD of ΔlnS</a:t>
             </a:r>
-            <a:endParaRPr sz="1200" b="0" i="0">
-              <a:solidFill>
-                <a:srgbClr val="1A1A2E"/>
-              </a:solidFill>
-              <a:latin typeface="Calibri"/>
-            </a:endParaRPr>
           </a:p>
         </p:txBody>
       </p:sp>
@@ -17339,12 +16211,6 @@
               </a:rPr>
               <a:t>Computed from DeFiLlama</a:t>
             </a:r>
-            <a:endParaRPr sz="1200" b="0" i="0">
-              <a:solidFill>
-                <a:srgbClr val="1A1A2E"/>
-              </a:solidFill>
-              <a:latin typeface="Calibri"/>
-            </a:endParaRPr>
           </a:p>
         </p:txBody>
       </p:sp>
@@ -17380,12 +16246,6 @@
               </a:rPr>
               <a:t>Daily → Monthly</a:t>
             </a:r>
-            <a:endParaRPr sz="1200" b="0" i="0">
-              <a:solidFill>
-                <a:srgbClr val="1A1A2E"/>
-              </a:solidFill>
-              <a:latin typeface="Calibri"/>
-            </a:endParaRPr>
           </a:p>
         </p:txBody>
       </p:sp>
@@ -17429,6 +16289,7 @@
           <a:lstStyle/>
           <a:p>
             <a:pPr algn="ctr"/>
+            <a:endParaRPr/>
           </a:p>
         </p:txBody>
       </p:sp>
@@ -17464,12 +16325,6 @@
               </a:rPr>
               <a:t>VIX</a:t>
             </a:r>
-            <a:endParaRPr sz="1200" b="0" i="0">
-              <a:solidFill>
-                <a:srgbClr val="1A1A2E"/>
-              </a:solidFill>
-              <a:latin typeface="Calibri"/>
-            </a:endParaRPr>
           </a:p>
         </p:txBody>
       </p:sp>
@@ -17505,12 +16360,6 @@
               </a:rPr>
               <a:t>CBOE VIX index</a:t>
             </a:r>
-            <a:endParaRPr sz="1200" b="0" i="0">
-              <a:solidFill>
-                <a:srgbClr val="1A1A2E"/>
-              </a:solidFill>
-              <a:latin typeface="Calibri"/>
-            </a:endParaRPr>
           </a:p>
         </p:txBody>
       </p:sp>
@@ -17546,12 +16395,6 @@
               </a:rPr>
               <a:t>FRED</a:t>
             </a:r>
-            <a:endParaRPr sz="1200" b="0" i="0">
-              <a:solidFill>
-                <a:srgbClr val="1A1A2E"/>
-              </a:solidFill>
-              <a:latin typeface="Calibri"/>
-            </a:endParaRPr>
           </a:p>
         </p:txBody>
       </p:sp>
@@ -17587,12 +16430,6 @@
               </a:rPr>
               <a:t>Daily → Monthly</a:t>
             </a:r>
-            <a:endParaRPr sz="1200" b="0" i="0">
-              <a:solidFill>
-                <a:srgbClr val="1A1A2E"/>
-              </a:solidFill>
-              <a:latin typeface="Calibri"/>
-            </a:endParaRPr>
           </a:p>
         </p:txBody>
       </p:sp>
@@ -17636,6 +16473,7 @@
           <a:lstStyle/>
           <a:p>
             <a:pPr algn="ctr"/>
+            <a:endParaRPr/>
           </a:p>
         </p:txBody>
       </p:sp>
@@ -17671,12 +16509,6 @@
               </a:rPr>
               <a:t>ΔlnN* (RoW equity)</a:t>
             </a:r>
-            <a:endParaRPr sz="1200" b="0" i="0">
-              <a:solidFill>
-                <a:srgbClr val="1A1A2E"/>
-              </a:solidFill>
-              <a:latin typeface="Calibri"/>
-            </a:endParaRPr>
           </a:p>
         </p:txBody>
       </p:sp>
@@ -17712,12 +16544,6 @@
               </a:rPr>
               <a:t>ACWX ETF log-return</a:t>
             </a:r>
-            <a:endParaRPr sz="1200" b="0" i="0">
-              <a:solidFill>
-                <a:srgbClr val="1A1A2E"/>
-              </a:solidFill>
-              <a:latin typeface="Calibri"/>
-            </a:endParaRPr>
           </a:p>
         </p:txBody>
       </p:sp>
@@ -17753,12 +16579,6 @@
               </a:rPr>
               <a:t>Yahoo Finance</a:t>
             </a:r>
-            <a:endParaRPr sz="1200" b="0" i="0">
-              <a:solidFill>
-                <a:srgbClr val="1A1A2E"/>
-              </a:solidFill>
-              <a:latin typeface="Calibri"/>
-            </a:endParaRPr>
           </a:p>
         </p:txBody>
       </p:sp>
@@ -17794,12 +16614,6 @@
               </a:rPr>
               <a:t>Daily → Monthly</a:t>
             </a:r>
-            <a:endParaRPr sz="1200" b="0" i="0">
-              <a:solidFill>
-                <a:srgbClr val="1A1A2E"/>
-              </a:solidFill>
-              <a:latin typeface="Calibri"/>
-            </a:endParaRPr>
           </a:p>
         </p:txBody>
       </p:sp>
@@ -17835,66 +16649,25 @@
               </a:rPr>
               <a:t>Sample: January 2022 – March 2026  |  N = 51 monthly observations  |  θ and L sourced from Tether/BDO and Circle/Deloitte reserve attestations</a:t>
             </a:r>
-            <a:endParaRPr sz="1100" b="0" i="1">
-              <a:solidFill>
-                <a:srgbClr val="555566"/>
-              </a:solidFill>
-              <a:latin typeface="Calibri"/>
-            </a:endParaRPr>
-          </a:p>
-        </p:txBody>
-      </p:sp>
-      <p:sp>
-        <p:nvSpPr>
-          <p:cNvPr id="47" name="TextBox 46"/>
+          </a:p>
+        </p:txBody>
+      </p:sp>
+      <p:sp>
+        <p:nvSpPr>
+          <p:cNvPr id="51" name="TextBox 50">
+            <a:extLst>
+              <a:ext uri="{FF2B5EF4-FFF2-40B4-BE49-F238E27FC236}">
+                <a16:creationId xmlns:a16="http://schemas.microsoft.com/office/drawing/2014/main" id="{0ECD33AA-9FCD-AC05-5BE3-D21176123E1A}"/>
+              </a:ext>
+            </a:extLst>
+          </p:cNvPr>
           <p:cNvSpPr txBox="1"/>
           <p:nvPr/>
         </p:nvSpPr>
         <p:spPr>
           <a:xfrm>
-            <a:off x="11686032" y="6473952"/>
-            <a:ext cx="411480" cy="320040"/>
-          </a:xfrm>
-          <a:prstGeom prst="rect">
-            <a:avLst/>
-          </a:prstGeom>
-          <a:noFill/>
-        </p:spPr>
-        <p:txBody>
-          <a:bodyPr wrap="square">
-            <a:spAutoFit/>
-          </a:bodyPr>
-          <a:lstStyle/>
-          <a:p>
-            <a:pPr algn="r"/>
-            <a:r>
-              <a:rPr sz="1300" b="0" i="0">
-                <a:solidFill>
-                  <a:srgbClr val="555566"/>
-                </a:solidFill>
-                <a:latin typeface="Calibri"/>
-              </a:rPr>
-              <a:t>6</a:t>
-            </a:r>
-            <a:endParaRPr sz="1300" b="0" i="0">
-              <a:solidFill>
-                <a:srgbClr val="555566"/>
-              </a:solidFill>
-              <a:latin typeface="Calibri"/>
-            </a:endParaRPr>
-          </a:p>
-        </p:txBody>
-      </p:sp>
-      <p:sp>
-        <p:nvSpPr>
-          <p:cNvPr id="48" name="TextBox 47"/>
-          <p:cNvSpPr txBox="1"/>
-          <p:nvPr/>
-        </p:nvSpPr>
-        <p:spPr>
-          <a:xfrm>
-            <a:off x="11064240" y="206829"/>
-            <a:ext cx="942703" cy="369332"/>
+            <a:off x="9939130" y="206829"/>
+            <a:ext cx="2067814" cy="369332"/>
           </a:xfrm>
           <a:prstGeom prst="rect">
             <a:avLst/>
@@ -17913,7 +16686,7 @@
                   <a:schemeClr val="bg1"/>
                 </a:solidFill>
               </a:rPr>
-              <a:t>Oybek</a:t>
+              <a:t>Oybek Page7/15</a:t>
             </a:r>
             <a:endParaRPr kumimoji="1" lang="ko-KR" altLang="en-US" dirty="0">
               <a:solidFill>
@@ -18032,6 +16805,7 @@
           <a:lstStyle/>
           <a:p>
             <a:pPr algn="ctr"/>
+            <a:endParaRPr/>
           </a:p>
         </p:txBody>
       </p:sp>
@@ -18067,53 +16841,6 @@
               </a:rPr>
               <a:t>Key Variables: January 2022 – March 2026</a:t>
             </a:r>
-            <a:endParaRPr sz="2600" b="0" i="0">
-              <a:solidFill>
-                <a:srgbClr val="FFFFFF"/>
-              </a:solidFill>
-              <a:latin typeface="Calibri"/>
-            </a:endParaRPr>
-          </a:p>
-        </p:txBody>
-      </p:sp>
-      <p:sp>
-        <p:nvSpPr>
-          <p:cNvPr id="5" name="TextBox 4"/>
-          <p:cNvSpPr txBox="1"/>
-          <p:nvPr/>
-        </p:nvSpPr>
-        <p:spPr>
-          <a:xfrm>
-            <a:off x="11686032" y="6473952"/>
-            <a:ext cx="411480" cy="320040"/>
-          </a:xfrm>
-          <a:prstGeom prst="rect">
-            <a:avLst/>
-          </a:prstGeom>
-          <a:noFill/>
-        </p:spPr>
-        <p:txBody>
-          <a:bodyPr wrap="square">
-            <a:spAutoFit/>
-          </a:bodyPr>
-          <a:lstStyle/>
-          <a:p>
-            <a:pPr algn="r"/>
-            <a:r>
-              <a:rPr sz="1300" b="0" i="0">
-                <a:solidFill>
-                  <a:srgbClr val="555566"/>
-                </a:solidFill>
-                <a:latin typeface="Calibri"/>
-              </a:rPr>
-              <a:t>7</a:t>
-            </a:r>
-            <a:endParaRPr sz="1300" b="0" i="0">
-              <a:solidFill>
-                <a:srgbClr val="555566"/>
-              </a:solidFill>
-              <a:latin typeface="Calibri"/>
-            </a:endParaRPr>
           </a:p>
         </p:txBody>
       </p:sp>
@@ -18126,7 +16853,7 @@
           <p:nvPr/>
         </p:nvPicPr>
         <p:blipFill>
-          <a:blip r:embed="rId1"/>
+          <a:blip r:embed="rId3"/>
           <a:stretch>
             <a:fillRect/>
           </a:stretch>
@@ -18208,6 +16935,33 @@
               </a:rPr>
               <a:t>.</a:t>
             </a:r>
+          </a:p>
+          <a:p>
+            <a:pPr>
+              <a:spcBef>
+                <a:spcPts val="900"/>
+              </a:spcBef>
+            </a:pPr>
+            <a:r>
+              <a:rPr lang="en-US" altLang="ko-KR" sz="1600" dirty="0"/>
+              <a:t>T-bill (DTB3) is a </a:t>
+            </a:r>
+            <a:r>
+              <a:rPr lang="en-US" altLang="ko-KR" sz="1600" b="1" dirty="0"/>
+              <a:t>3-month U.S. government bond</a:t>
+            </a:r>
+            <a:r>
+              <a:rPr lang="en-US" altLang="ko-KR" sz="1600" dirty="0"/>
+              <a:t>. </a:t>
+            </a:r>
+            <a:r>
+              <a:rPr lang="en-US" altLang="ko-KR" sz="1600" b="1" dirty="0"/>
+              <a:t>Secured Overnight Financing Rate </a:t>
+            </a:r>
+            <a:r>
+              <a:rPr lang="en-US" altLang="ko-KR" sz="1600" dirty="0"/>
+              <a:t>is the rate banks charge for one night. </a:t>
+            </a:r>
             <a:endParaRPr lang="en-US" sz="1600" b="0" i="0" dirty="0">
               <a:solidFill>
                 <a:srgbClr val="1A1A2E"/>
@@ -18222,39 +16976,6 @@
               </a:spcBef>
             </a:pPr>
             <a:r>
-              <a:rPr lang="en-US" altLang="ko-KR" sz="1600" dirty="0"/>
-              <a:t>T-bill (DTB3) is a </a:t>
-            </a:r>
-            <a:r>
-              <a:rPr lang="en-US" altLang="ko-KR" sz="1600" b="1" dirty="0"/>
-              <a:t>3-month U.S. government bond</a:t>
-            </a:r>
-            <a:r>
-              <a:rPr lang="en-US" altLang="ko-KR" sz="1600" dirty="0"/>
-              <a:t>. </a:t>
-            </a:r>
-            <a:r>
-              <a:rPr lang="en-US" altLang="ko-KR" sz="1600" b="1" dirty="0"/>
-              <a:t>Secured Overnight Financing Rate </a:t>
-            </a:r>
-            <a:r>
-              <a:rPr lang="en-US" altLang="ko-KR" sz="1600" dirty="0"/>
-              <a:t>is the rate banks charge for one night. </a:t>
-            </a:r>
-            <a:endParaRPr lang="en-US" sz="1600" b="0" i="0" dirty="0">
-              <a:solidFill>
-                <a:srgbClr val="1A1A2E"/>
-              </a:solidFill>
-              <a:latin typeface="Calibri"/>
-            </a:endParaRPr>
-          </a:p>
-          <a:p>
-            <a:pPr>
-              <a:spcBef>
-                <a:spcPts val="900"/>
-              </a:spcBef>
-            </a:pPr>
-            <a:r>
               <a:rPr lang="en-US" altLang="ko-KR" sz="1600" dirty="0">
                 <a:solidFill>
                   <a:srgbClr val="1A1A2E"/>
@@ -18262,11 +16983,6 @@
               </a:rPr>
               <a:t>❖  Red vertical lines = stress events we study</a:t>
             </a:r>
-            <a:endParaRPr lang="en-US" altLang="ko-KR" sz="1600" dirty="0">
-              <a:solidFill>
-                <a:srgbClr val="1A1A2E"/>
-              </a:solidFill>
-            </a:endParaRPr>
           </a:p>
           <a:p>
             <a:pPr algn="l">
@@ -18357,12 +17073,6 @@
               </a:rPr>
               <a:t>❖  C: Liquid buffer L — dangerously thin in 2022, recovering since 2023</a:t>
             </a:r>
-            <a:endParaRPr sz="1600" b="0" i="0" dirty="0">
-              <a:solidFill>
-                <a:srgbClr val="1A1A2E"/>
-              </a:solidFill>
-              <a:latin typeface="Calibri"/>
-            </a:endParaRPr>
           </a:p>
           <a:p>
             <a:pPr algn="l">
@@ -18379,50 +17089,6 @@
               </a:rPr>
               <a:t>❖  Red dashed line = our estimated safety threshold (13%)</a:t>
             </a:r>
-            <a:endParaRPr sz="1600" b="0" i="0" dirty="0">
-              <a:solidFill>
-                <a:srgbClr val="1A1A2E"/>
-              </a:solidFill>
-              <a:latin typeface="Calibri"/>
-            </a:endParaRPr>
-          </a:p>
-        </p:txBody>
-      </p:sp>
-      <p:sp>
-        <p:nvSpPr>
-          <p:cNvPr id="8" name="TextBox 7"/>
-          <p:cNvSpPr txBox="1"/>
-          <p:nvPr/>
-        </p:nvSpPr>
-        <p:spPr>
-          <a:xfrm>
-            <a:off x="11288486" y="206829"/>
-            <a:ext cx="718457" cy="369332"/>
-          </a:xfrm>
-          <a:prstGeom prst="rect">
-            <a:avLst/>
-          </a:prstGeom>
-          <a:noFill/>
-        </p:spPr>
-        <p:txBody>
-          <a:bodyPr wrap="square" rtlCol="0">
-            <a:spAutoFit/>
-          </a:bodyPr>
-          <a:lstStyle/>
-          <a:p>
-            <a:r>
-              <a:rPr kumimoji="1" lang="en-US" altLang="ko-KR" dirty="0">
-                <a:solidFill>
-                  <a:schemeClr val="bg1"/>
-                </a:solidFill>
-              </a:rPr>
-              <a:t>Mimi</a:t>
-            </a:r>
-            <a:endParaRPr kumimoji="1" lang="ko-KR" altLang="en-US" dirty="0">
-              <a:solidFill>
-                <a:schemeClr val="bg1"/>
-              </a:solidFill>
-            </a:endParaRPr>
           </a:p>
         </p:txBody>
       </p:sp>
@@ -18582,6 +17248,50 @@
           <a:p>
             <a:pPr algn="ctr"/>
             <a:endParaRPr kumimoji="1" lang="ko-KR" altLang="en-US"/>
+          </a:p>
+        </p:txBody>
+      </p:sp>
+      <p:sp>
+        <p:nvSpPr>
+          <p:cNvPr id="14" name="TextBox 13">
+            <a:extLst>
+              <a:ext uri="{FF2B5EF4-FFF2-40B4-BE49-F238E27FC236}">
+                <a16:creationId xmlns:a16="http://schemas.microsoft.com/office/drawing/2014/main" id="{B846C20A-A273-A8A6-F48D-FDA9473737EB}"/>
+              </a:ext>
+            </a:extLst>
+          </p:cNvPr>
+          <p:cNvSpPr txBox="1"/>
+          <p:nvPr/>
+        </p:nvSpPr>
+        <p:spPr>
+          <a:xfrm>
+            <a:off x="9939130" y="206829"/>
+            <a:ext cx="2067814" cy="369332"/>
+          </a:xfrm>
+          <a:prstGeom prst="rect">
+            <a:avLst/>
+          </a:prstGeom>
+          <a:noFill/>
+        </p:spPr>
+        <p:txBody>
+          <a:bodyPr wrap="square" rtlCol="0">
+            <a:spAutoFit/>
+          </a:bodyPr>
+          <a:lstStyle/>
+          <a:p>
+            <a:r>
+              <a:rPr kumimoji="1" lang="en-US" altLang="ko-KR" dirty="0">
+                <a:solidFill>
+                  <a:schemeClr val="bg1"/>
+                </a:solidFill>
+              </a:rPr>
+              <a:t>Mimi Page 8/15</a:t>
+            </a:r>
+            <a:endParaRPr kumimoji="1" lang="ko-KR" altLang="en-US" dirty="0">
+              <a:solidFill>
+                <a:schemeClr val="bg1"/>
+              </a:solidFill>
+            </a:endParaRPr>
           </a:p>
         </p:txBody>
       </p:sp>
@@ -18650,6 +17360,7 @@
           <a:lstStyle/>
           <a:p>
             <a:pPr algn="ctr"/>
+            <a:endParaRPr/>
           </a:p>
         </p:txBody>
       </p:sp>
@@ -18693,6 +17404,7 @@
           <a:lstStyle/>
           <a:p>
             <a:pPr algn="ctr"/>
+            <a:endParaRPr/>
           </a:p>
         </p:txBody>
       </p:sp>
@@ -18728,12 +17440,6 @@
               </a:rPr>
               <a:t>What the Data Shows Us</a:t>
             </a:r>
-            <a:endParaRPr sz="2600" b="0" i="0">
-              <a:solidFill>
-                <a:srgbClr val="FFFFFF"/>
-              </a:solidFill>
-              <a:latin typeface="Calibri"/>
-            </a:endParaRPr>
           </a:p>
         </p:txBody>
       </p:sp>
@@ -18791,6 +17497,7 @@
             <a:lstStyle/>
             <a:p>
               <a:pPr algn="ctr"/>
+              <a:endParaRPr/>
             </a:p>
           </p:txBody>
         </p:sp>
@@ -18826,12 +17533,6 @@
                 </a:rPr>
                 <a:t>MORE SUPPLY  →  LOWER SPREAD</a:t>
               </a:r>
-              <a:endParaRPr sz="1500" b="1" i="0">
-                <a:solidFill>
-                  <a:srgbClr val="FFFFFF"/>
-                </a:solidFill>
-                <a:latin typeface="Calibri"/>
-              </a:endParaRPr>
             </a:p>
           </p:txBody>
         </p:sp>
@@ -18875,6 +17576,7 @@
             <a:lstStyle/>
             <a:p>
               <a:pPr algn="ctr"/>
+              <a:endParaRPr/>
             </a:p>
           </p:txBody>
         </p:sp>
@@ -18910,12 +17612,6 @@
                 </a:rPr>
                 <a:t>As USDT and USDC supply grew, the gap between Treasury yields and overnight rates compressed. Stablecoin issuers were buying U.S. T-bills to back their tokens — deepening demand for safe assets.</a:t>
               </a:r>
-              <a:endParaRPr b="0" i="0" dirty="0">
-                <a:solidFill>
-                  <a:srgbClr val="1A1A2E"/>
-                </a:solidFill>
-                <a:latin typeface="Calibri"/>
-              </a:endParaRPr>
             </a:p>
           </p:txBody>
         </p:sp>
@@ -18974,6 +17670,7 @@
             <a:lstStyle/>
             <a:p>
               <a:pPr algn="ctr"/>
+              <a:endParaRPr/>
             </a:p>
           </p:txBody>
         </p:sp>
@@ -19009,12 +17706,6 @@
                 </a:rPr>
                 <a:t>CRISIS  →  SPREAD SPIKES</a:t>
               </a:r>
-              <a:endParaRPr sz="1500" b="1" i="0">
-                <a:solidFill>
-                  <a:srgbClr val="FFFFFF"/>
-                </a:solidFill>
-                <a:latin typeface="Calibri"/>
-              </a:endParaRPr>
             </a:p>
           </p:txBody>
         </p:sp>
@@ -19058,6 +17749,7 @@
             <a:lstStyle/>
             <a:p>
               <a:pPr algn="ctr"/>
+              <a:endParaRPr/>
             </a:p>
           </p:txBody>
         </p:sp>
@@ -19093,12 +17785,6 @@
                 </a:rPr>
                 <a:t>During the LUNA/UST collapse (May 2022), spreads spiked as issuers were forced to liquidate T-bill holdings to meet redemptions. The privilege reversed — exactly what our theory predicts.</a:t>
               </a:r>
-              <a:endParaRPr b="0" i="0" dirty="0">
-                <a:solidFill>
-                  <a:srgbClr val="1A1A2E"/>
-                </a:solidFill>
-                <a:latin typeface="Calibri"/>
-              </a:endParaRPr>
             </a:p>
           </p:txBody>
         </p:sp>
@@ -19112,52 +17798,11 @@
         <p:grpSpPr>
           <a:xfrm>
             <a:off x="365760" y="4572000"/>
-            <a:ext cx="11731752" cy="2221992"/>
+            <a:ext cx="11430000" cy="1709928"/>
             <a:chOff x="365760" y="4572000"/>
-            <a:chExt cx="11731752" cy="2221992"/>
+            <a:chExt cx="11430000" cy="1709928"/>
           </a:xfrm>
         </p:grpSpPr>
-        <p:sp>
-          <p:nvSpPr>
-            <p:cNvPr id="5" name="TextBox 4"/>
-            <p:cNvSpPr txBox="1"/>
-            <p:nvPr/>
-          </p:nvSpPr>
-          <p:spPr>
-            <a:xfrm>
-              <a:off x="11686032" y="6473952"/>
-              <a:ext cx="411480" cy="320040"/>
-            </a:xfrm>
-            <a:prstGeom prst="rect">
-              <a:avLst/>
-            </a:prstGeom>
-            <a:noFill/>
-          </p:spPr>
-          <p:txBody>
-            <a:bodyPr wrap="square">
-              <a:spAutoFit/>
-            </a:bodyPr>
-            <a:lstStyle/>
-            <a:p>
-              <a:pPr algn="r"/>
-              <a:r>
-                <a:rPr sz="1300" b="0" i="0">
-                  <a:solidFill>
-                    <a:srgbClr val="555566"/>
-                  </a:solidFill>
-                  <a:latin typeface="Calibri"/>
-                </a:rPr>
-                <a:t>8</a:t>
-              </a:r>
-              <a:endParaRPr sz="1300" b="0" i="0">
-                <a:solidFill>
-                  <a:srgbClr val="555566"/>
-                </a:solidFill>
-                <a:latin typeface="Calibri"/>
-              </a:endParaRPr>
-            </a:p>
-          </p:txBody>
-        </p:sp>
         <p:sp>
           <p:nvSpPr>
             <p:cNvPr id="14" name="Rectangle 13"/>
@@ -19198,6 +17843,7 @@
             <a:lstStyle/>
             <a:p>
               <a:pPr algn="ctr"/>
+              <a:endParaRPr/>
             </a:p>
           </p:txBody>
         </p:sp>
@@ -19233,12 +17879,6 @@
                 </a:rPr>
                 <a:t>BUFFER WAS THIN WHEN IT MATTERED MOST</a:t>
               </a:r>
-              <a:endParaRPr sz="1500" b="1" i="0" dirty="0">
-                <a:solidFill>
-                  <a:srgbClr val="FFFFFF"/>
-                </a:solidFill>
-                <a:latin typeface="Calibri"/>
-              </a:endParaRPr>
             </a:p>
           </p:txBody>
         </p:sp>
@@ -19282,6 +17922,7 @@
             <a:lstStyle/>
             <a:p>
               <a:pPr algn="ctr"/>
+              <a:endParaRPr/>
             </a:p>
           </p:txBody>
         </p:sp>
@@ -19317,26 +17958,26 @@
                 </a:rPr>
                 <a:t>In 2022, liquid cash reserves sat below our estimated 13% safety threshold. Issuers had to sell T-bills instead of using cash — amplifying the shock.</a:t>
               </a:r>
-              <a:endParaRPr b="0" i="0" dirty="0">
-                <a:solidFill>
-                  <a:srgbClr val="1A1A2E"/>
-                </a:solidFill>
-                <a:latin typeface="Calibri"/>
-              </a:endParaRPr>
             </a:p>
           </p:txBody>
         </p:sp>
       </p:grpSp>
       <p:sp>
         <p:nvSpPr>
-          <p:cNvPr id="18" name="TextBox 17"/>
+          <p:cNvPr id="24" name="TextBox 23">
+            <a:extLst>
+              <a:ext uri="{FF2B5EF4-FFF2-40B4-BE49-F238E27FC236}">
+                <a16:creationId xmlns:a16="http://schemas.microsoft.com/office/drawing/2014/main" id="{6547E5EE-039F-4F81-6F72-2229EA8586B1}"/>
+              </a:ext>
+            </a:extLst>
+          </p:cNvPr>
           <p:cNvSpPr txBox="1"/>
           <p:nvPr/>
         </p:nvSpPr>
         <p:spPr>
           <a:xfrm>
-            <a:off x="11288486" y="206829"/>
-            <a:ext cx="718457" cy="369332"/>
+            <a:off x="9939130" y="206829"/>
+            <a:ext cx="2067814" cy="369332"/>
           </a:xfrm>
           <a:prstGeom prst="rect">
             <a:avLst/>
@@ -19355,7 +17996,7 @@
                   <a:schemeClr val="bg1"/>
                 </a:solidFill>
               </a:rPr>
-              <a:t>Mimi</a:t>
+              <a:t>Mimi Page 9/15</a:t>
             </a:r>
             <a:endParaRPr kumimoji="1" lang="ko-KR" altLang="en-US" dirty="0">
               <a:solidFill>
@@ -19854,6 +18495,7 @@
       </a:style>
     </a:lnDef>
   </a:objectDefaults>
+  <a:extraClrSchemeLst/>
   <a:extLst>
     <a:ext uri="{05A4C25C-085E-4340-85A3-A5531E510DB2}">
       <thm15:themeFamily xmlns:thm15="http://schemas.microsoft.com/office/thememl/2012/main" name="Office Theme" id="{62F939B6-93AF-4DB8-9C6B-D6C7DFDC589F}" vid="{4A3C46E8-61CC-4603-A589-7422A47A8E4A}"/>
@@ -20134,6 +18776,7 @@
       </a:style>
     </a:lnDef>
   </a:objectDefaults>
+  <a:extraClrSchemeLst/>
   <a:extLst>
     <a:ext uri="{05A4C25C-085E-4340-85A3-A5531E510DB2}">
       <thm15:themeFamily xmlns:thm15="http://schemas.microsoft.com/office/thememl/2012/main" name="Office Theme" id="{62F939B6-93AF-4DB8-9C6B-D6C7DFDC589F}" vid="{4A3C46E8-61CC-4603-A589-7422A47A8E4A}"/>

--- a/FINAL_0512_Stablecoin_Exorbitant_Privilege.pptx
+++ b/FINAL_0512_Stablecoin_Exorbitant_Privilege.pptx
@@ -5,24 +5,24 @@
     <p:sldMasterId id="2147483648" r:id="rId1"/>
   </p:sldMasterIdLst>
   <p:notesMasterIdLst>
-    <p:notesMasterId r:id="rId17"/>
+    <p:notesMasterId r:id="rId4"/>
   </p:notesMasterIdLst>
   <p:sldIdLst>
-    <p:sldId id="271" r:id="rId2"/>
-    <p:sldId id="257" r:id="rId3"/>
-    <p:sldId id="258" r:id="rId4"/>
-    <p:sldId id="275" r:id="rId5"/>
-    <p:sldId id="276" r:id="rId6"/>
-    <p:sldId id="260" r:id="rId7"/>
-    <p:sldId id="261" r:id="rId8"/>
-    <p:sldId id="262" r:id="rId9"/>
-    <p:sldId id="263" r:id="rId10"/>
-    <p:sldId id="264" r:id="rId11"/>
-    <p:sldId id="265" r:id="rId12"/>
-    <p:sldId id="266" r:id="rId13"/>
-    <p:sldId id="267" r:id="rId14"/>
-    <p:sldId id="273" r:id="rId15"/>
-    <p:sldId id="272" r:id="rId16"/>
+    <p:sldId id="271" r:id="rId3"/>
+    <p:sldId id="257" r:id="rId5"/>
+    <p:sldId id="258" r:id="rId6"/>
+    <p:sldId id="275" r:id="rId7"/>
+    <p:sldId id="276" r:id="rId8"/>
+    <p:sldId id="260" r:id="rId9"/>
+    <p:sldId id="261" r:id="rId10"/>
+    <p:sldId id="262" r:id="rId11"/>
+    <p:sldId id="263" r:id="rId12"/>
+    <p:sldId id="264" r:id="rId13"/>
+    <p:sldId id="265" r:id="rId14"/>
+    <p:sldId id="266" r:id="rId15"/>
+    <p:sldId id="267" r:id="rId16"/>
+    <p:sldId id="273" r:id="rId17"/>
+    <p:sldId id="272" r:id="rId18"/>
   </p:sldIdLst>
   <p:sldSz cx="12188825" cy="6858000"/>
   <p:notesSz cx="6858000" cy="9144000"/>
@@ -124,7 +124,7 @@
   <p:extLst>
     <p:ext uri="{EFAFB233-063F-42B5-8137-9DF3F51BA10A}">
       <p15:sldGuideLst xmlns:p15="http://schemas.microsoft.com/office/powerpoint/2012/main">
-        <p15:guide id="1" orient="horz" pos="2119" userDrawn="1">
+        <p15:guide id="1" orient="horz" pos="2160" userDrawn="1">
           <p15:clr>
             <a:srgbClr val="A4A3A4"/>
           </p15:clr>
@@ -222,7 +222,6 @@
           <a:p>
             <a:fld id="{83EC6BE1-A4B7-974B-915D-03C1CF773469}" type="datetimeFigureOut">
               <a:rPr kumimoji="1" lang="ko-KR" altLang="en-US" smtClean="0"/>
-              <a:t>2026. 5. 11.</a:t>
             </a:fld>
             <a:endParaRPr kumimoji="1" lang="ko-KR" altLang="en-US"/>
           </a:p>
@@ -289,6 +288,7 @@
               <a:rPr kumimoji="1" lang="ko-KR" altLang="en-US"/>
               <a:t>마스터 텍스트 스타일을 편집하려면 클릭</a:t>
             </a:r>
+            <a:endParaRPr kumimoji="1" lang="ko-KR" altLang="en-US"/>
           </a:p>
           <a:p>
             <a:pPr lvl="1"/>
@@ -296,6 +296,7 @@
               <a:rPr kumimoji="1" lang="ko-KR" altLang="en-US"/>
               <a:t>두 번째 수준</a:t>
             </a:r>
+            <a:endParaRPr kumimoji="1" lang="ko-KR" altLang="en-US"/>
           </a:p>
           <a:p>
             <a:pPr lvl="2"/>
@@ -303,6 +304,7 @@
               <a:rPr kumimoji="1" lang="ko-KR" altLang="en-US"/>
               <a:t>세 번째 수준</a:t>
             </a:r>
+            <a:endParaRPr kumimoji="1" lang="ko-KR" altLang="en-US"/>
           </a:p>
           <a:p>
             <a:pPr lvl="3"/>
@@ -310,6 +312,7 @@
               <a:rPr kumimoji="1" lang="ko-KR" altLang="en-US"/>
               <a:t>네 번째 수준</a:t>
             </a:r>
+            <a:endParaRPr kumimoji="1" lang="ko-KR" altLang="en-US"/>
           </a:p>
           <a:p>
             <a:pPr lvl="4"/>
@@ -317,6 +320,7 @@
               <a:rPr kumimoji="1" lang="ko-KR" altLang="en-US"/>
               <a:t>다섯 번째 수준</a:t>
             </a:r>
+            <a:endParaRPr kumimoji="1" lang="ko-KR" altLang="en-US"/>
           </a:p>
         </p:txBody>
       </p:sp>
@@ -380,7 +384,6 @@
           <a:p>
             <a:fld id="{8AF3784E-D73A-6545-9F12-21649F82E67D}" type="slidenum">
               <a:rPr kumimoji="1" lang="ko-KR" altLang="en-US" smtClean="0"/>
-              <a:t>‹#›</a:t>
             </a:fld>
             <a:endParaRPr kumimoji="1" lang="ko-KR" altLang="en-US"/>
           </a:p>
@@ -585,7 +588,6 @@
           <a:p>
             <a:fld id="{5D514313-3BDE-834F-BE4B-14A4F858B1F2}" type="slidenum">
               <a:rPr kumimoji="1" lang="ko-KR" altLang="en-US" smtClean="0"/>
-              <a:t>1</a:t>
             </a:fld>
             <a:endParaRPr kumimoji="1" lang="ko-KR" altLang="en-US"/>
           </a:p>
@@ -655,6 +657,15 @@
               </a:rPr>
               <a:t>"To estimate this equation, we used OLS — ordinary least squares — which finds the line that best fits our 51 months of data. </a:t>
             </a:r>
+            <a:endParaRPr lang="en-US" altLang="ko-KR" sz="1200" i="1" kern="1200" dirty="0">
+              <a:solidFill>
+                <a:schemeClr val="tx1"/>
+              </a:solidFill>
+              <a:effectLst/>
+              <a:latin typeface="+mn-lt"/>
+              <a:ea typeface="+mn-ea"/>
+              <a:cs typeface="+mn-cs"/>
+            </a:endParaRPr>
           </a:p>
           <a:p>
             <a:r>
@@ -669,8 +680,6 @@
               </a:rPr>
               <a:t>Our first result confirms Hypothesis 1. The coefficient on stablecoin supply growth — beta-one — is negative 6.02, and it is statistically significant at the 5% level. </a:t>
             </a:r>
-          </a:p>
-          <a:p>
             <a:endParaRPr lang="en-US" altLang="ko-KR" sz="1200" kern="1200" dirty="0">
               <a:solidFill>
                 <a:schemeClr val="tx1"/>
@@ -682,6 +691,17 @@
             </a:endParaRPr>
           </a:p>
           <a:p>
+            <a:endParaRPr lang="en-US" altLang="ko-KR" sz="1200" kern="1200" dirty="0">
+              <a:solidFill>
+                <a:schemeClr val="tx1"/>
+              </a:solidFill>
+              <a:effectLst/>
+              <a:latin typeface="+mn-lt"/>
+              <a:ea typeface="+mn-ea"/>
+              <a:cs typeface="+mn-cs"/>
+            </a:endParaRPr>
+          </a:p>
+          <a:p>
             <a:r>
               <a:rPr lang="en-US" altLang="ko-KR" sz="1200" kern="1200" dirty="0">
                 <a:solidFill>
@@ -694,6 +714,15 @@
               </a:rPr>
               <a:t>Looking at the table, you'll notice that the buffer variables — theta, L, and the interaction term — are not individually significant at this sample size of 51 months. So why wasn’t it significant?</a:t>
             </a:r>
+            <a:endParaRPr lang="en-US" altLang="ko-KR" sz="1200" kern="1200" dirty="0">
+              <a:solidFill>
+                <a:schemeClr val="tx1"/>
+              </a:solidFill>
+              <a:effectLst/>
+              <a:latin typeface="+mn-lt"/>
+              <a:ea typeface="+mn-ea"/>
+              <a:cs typeface="+mn-cs"/>
+            </a:endParaRPr>
           </a:p>
         </p:txBody>
       </p:sp>
@@ -714,7 +743,6 @@
           <a:p>
             <a:fld id="{8AF3784E-D73A-6545-9F12-21649F82E67D}" type="slidenum">
               <a:rPr kumimoji="1" lang="ko-KR" altLang="en-US" smtClean="0"/>
-              <a:t>10</a:t>
             </a:fld>
             <a:endParaRPr kumimoji="1" lang="ko-KR" altLang="en-US"/>
           </a:p>
@@ -824,6 +852,15 @@
               </a:rPr>
               <a:t>. Tether and Circle only started publishing detailed, frequent reserve breakdowns after 2023. Before that, the cash reserves figures were either missing, infrequent, or less precise. </a:t>
             </a:r>
+            <a:endParaRPr lang="en-US" altLang="ko-KR" sz="1200" kern="1200" dirty="0">
+              <a:solidFill>
+                <a:schemeClr val="tx1"/>
+              </a:solidFill>
+              <a:effectLst/>
+              <a:latin typeface="+mn-lt"/>
+              <a:ea typeface="+mn-ea"/>
+              <a:cs typeface="+mn-cs"/>
+            </a:endParaRPr>
           </a:p>
           <a:p>
             <a:pPr marL="0" marR="0" lvl="0" indent="0" algn="l" defTabSz="914400" rtl="0" eaLnBrk="1" fontAlgn="auto" latinLnBrk="1" hangingPunct="1">
@@ -941,7 +978,6 @@
           <a:p>
             <a:fld id="{8AF3784E-D73A-6545-9F12-21649F82E67D}" type="slidenum">
               <a:rPr kumimoji="1" lang="ko-KR" altLang="en-US" smtClean="0"/>
-              <a:t>11</a:t>
             </a:fld>
             <a:endParaRPr kumimoji="1" lang="ko-KR" altLang="en-US"/>
           </a:p>
@@ -1047,6 +1083,15 @@
               </a:rPr>
               <a:t>. </a:t>
             </a:r>
+            <a:endParaRPr lang="en-US" altLang="ko-KR" sz="1200" kern="1200" dirty="0">
+              <a:solidFill>
+                <a:schemeClr val="tx1"/>
+              </a:solidFill>
+              <a:effectLst/>
+              <a:latin typeface="+mn-lt"/>
+              <a:ea typeface="+mn-ea"/>
+              <a:cs typeface="+mn-cs"/>
+            </a:endParaRPr>
           </a:p>
           <a:p>
             <a:r>
@@ -1085,6 +1130,15 @@
               </a:rPr>
               <a:t> </a:t>
             </a:r>
+            <a:endParaRPr lang="en-US" altLang="ko-KR" sz="1200" kern="1200" dirty="0">
+              <a:solidFill>
+                <a:schemeClr val="tx1"/>
+              </a:solidFill>
+              <a:effectLst/>
+              <a:latin typeface="+mn-lt"/>
+              <a:ea typeface="+mn-ea"/>
+              <a:cs typeface="+mn-cs"/>
+            </a:endParaRPr>
           </a:p>
           <a:p>
             <a:r>
@@ -1215,7 +1269,6 @@
           <a:p>
             <a:fld id="{8AF3784E-D73A-6545-9F12-21649F82E67D}" type="slidenum">
               <a:rPr kumimoji="1" lang="ko-KR" altLang="en-US" smtClean="0"/>
-              <a:t>12</a:t>
             </a:fld>
             <a:endParaRPr kumimoji="1" lang="ko-KR" altLang="en-US"/>
           </a:p>
@@ -1357,6 +1410,15 @@
               </a:rPr>
               <a:t>?</a:t>
             </a:r>
+            <a:endParaRPr lang="en-US" altLang="ko-KR" sz="1200" b="0" i="0" kern="1200" dirty="0">
+              <a:solidFill>
+                <a:schemeClr val="tx1"/>
+              </a:solidFill>
+              <a:effectLst/>
+              <a:latin typeface="+mn-lt"/>
+              <a:ea typeface="+mn-ea"/>
+              <a:cs typeface="+mn-cs"/>
+            </a:endParaRPr>
           </a:p>
           <a:p>
             <a:r>
@@ -1455,6 +1517,15 @@
               </a:rPr>
               <a:t>. They are completely dependent on the T-bill market for everything.</a:t>
             </a:r>
+            <a:endParaRPr lang="en-US" altLang="ko-KR" sz="1200" b="0" i="0" kern="1200" dirty="0">
+              <a:solidFill>
+                <a:schemeClr val="tx1"/>
+              </a:solidFill>
+              <a:effectLst/>
+              <a:latin typeface="+mn-lt"/>
+              <a:ea typeface="+mn-ea"/>
+              <a:cs typeface="+mn-cs"/>
+            </a:endParaRPr>
           </a:p>
           <a:p>
             <a:r>
@@ -1529,6 +1600,15 @@
               </a:rPr>
               <a:t>. The T-bill market is undisturbed. The compression effect disappears. </a:t>
             </a:r>
+            <a:endParaRPr lang="en-US" altLang="ko-KR" sz="1200" b="0" i="0" kern="1200" dirty="0">
+              <a:solidFill>
+                <a:schemeClr val="tx1"/>
+              </a:solidFill>
+              <a:effectLst/>
+              <a:latin typeface="+mn-lt"/>
+              <a:ea typeface="+mn-ea"/>
+              <a:cs typeface="+mn-cs"/>
+            </a:endParaRPr>
           </a:p>
           <a:p>
             <a:br>
@@ -1558,7 +1638,6 @@
           <a:p>
             <a:fld id="{8AF3784E-D73A-6545-9F12-21649F82E67D}" type="slidenum">
               <a:rPr kumimoji="1" lang="ko-KR" altLang="en-US" smtClean="0"/>
-              <a:t>13</a:t>
             </a:fld>
             <a:endParaRPr kumimoji="1" lang="ko-KR" altLang="en-US"/>
           </a:p>
@@ -1655,6 +1734,7 @@
               <a:rPr lang="en-US" altLang="ko-KR" dirty="0"/>
               <a:t>—validating the 'New Triffin Dilemma'. However, when the buffer is high, we see the opposite: a 'flight-to-safety' that actually stabilizes the market.</a:t>
             </a:r>
+            <a:endParaRPr lang="en-US" altLang="ko-KR" dirty="0"/>
           </a:p>
           <a:p>
             <a:r>
@@ -1669,12 +1749,14 @@
               <a:rPr lang="en-US" altLang="ko-KR" dirty="0"/>
               <a:t> Based on our mathematical threshold, we’ve identified a specific number that regulators can use. We’ll explain why requiring stablecoin issuers to keep at least 13% of their reserves in pure cash—not just T-bills—is the key to making sure a crypto crisis never turns into a U.S. government debt crisis.</a:t>
             </a:r>
+            <a:endParaRPr lang="en-US" altLang="ko-KR" dirty="0"/>
           </a:p>
           <a:p>
             <a:r>
               <a:rPr lang="en-US" altLang="ko-KR" dirty="0"/>
               <a:t>See you next week for the causal proof and the policy solutions!"</a:t>
             </a:r>
+            <a:endParaRPr lang="en-US" altLang="ko-KR" dirty="0"/>
           </a:p>
           <a:p>
             <a:endParaRPr kumimoji="1" lang="ko-KR" altLang="en-US" dirty="0"/>
@@ -1698,7 +1780,6 @@
           <a:p>
             <a:fld id="{8AF3784E-D73A-6545-9F12-21649F82E67D}" type="slidenum">
               <a:rPr kumimoji="1" lang="ko-KR" altLang="en-US" smtClean="0"/>
-              <a:t>14</a:t>
             </a:fld>
             <a:endParaRPr kumimoji="1" lang="ko-KR" altLang="en-US"/>
           </a:p>
@@ -1781,7 +1862,6 @@
           <a:p>
             <a:fld id="{5D514313-3BDE-834F-BE4B-14A4F858B1F2}" type="slidenum">
               <a:rPr kumimoji="1" lang="ko-KR" altLang="en-US" smtClean="0"/>
-              <a:t>15</a:t>
             </a:fld>
             <a:endParaRPr kumimoji="1" lang="ko-KR" altLang="en-US"/>
           </a:p>
@@ -1851,6 +1931,15 @@
               </a:rPr>
               <a:t>"Here's our roadmap for today. We'll start with motivation — why stablecoins matter for sovereign debt markets. Then we'll introduce our core argument, which we call the New Triffin Dilemma. From there we move to the theoretical model, our data, and then two empirical results: the privilege amplification regression and the reserve adequacy threshold. The third result — the buffer-conditioned event study — and our policy conclusions will come next week."</a:t>
             </a:r>
+            <a:endParaRPr lang="en-US" altLang="ko-KR" sz="1200" b="0" i="0" kern="1200" dirty="0">
+              <a:solidFill>
+                <a:schemeClr val="tx1"/>
+              </a:solidFill>
+              <a:effectLst/>
+              <a:latin typeface="+mn-lt"/>
+              <a:ea typeface="+mn-ea"/>
+              <a:cs typeface="+mn-cs"/>
+            </a:endParaRPr>
           </a:p>
           <a:p>
             <a:br>
@@ -1877,7 +1966,6 @@
           <a:p>
             <a:fld id="{8AF3784E-D73A-6545-9F12-21649F82E67D}" type="slidenum">
               <a:rPr kumimoji="1" lang="ko-KR" altLang="en-US" smtClean="0"/>
-              <a:t>2</a:t>
             </a:fld>
             <a:endParaRPr kumimoji="1" lang="ko-KR" altLang="en-US"/>
           </a:p>
@@ -1947,6 +2035,15 @@
               </a:rPr>
               <a:t>"Why should a course on international finance care about stablecoins? The scale alone makes them impossible to ignore. The combined market cap of USD-pegged stablecoins has gone from under fifty billion in 2021 to over three hundred billion in 2026. Tether alone holds a hundred and twenty-seven billion dollars in U.S. Treasury bills — comparable to the foreign reserves of a mid-sized sovereign nation. Four major jurisdictions are right now writing legislation to regulate their reserve requirements. And projections put this ecosystem at one to two trillion dollars within the decade. These are not niche crypto instruments anymore — they are Treasury buyers operating at scale, and that has consequences for the U.S. safe-asset market."</a:t>
             </a:r>
+            <a:endParaRPr lang="en-US" altLang="ko-KR" sz="1200" b="0" i="0" kern="1200" dirty="0">
+              <a:solidFill>
+                <a:schemeClr val="tx1"/>
+              </a:solidFill>
+              <a:effectLst/>
+              <a:latin typeface="+mn-lt"/>
+              <a:ea typeface="+mn-ea"/>
+              <a:cs typeface="+mn-cs"/>
+            </a:endParaRPr>
           </a:p>
           <a:p>
             <a:br>
@@ -1973,7 +2070,6 @@
           <a:p>
             <a:fld id="{8AF3784E-D73A-6545-9F12-21649F82E67D}" type="slidenum">
               <a:rPr kumimoji="1" lang="ko-KR" altLang="en-US" smtClean="0"/>
-              <a:t>3</a:t>
             </a:fld>
             <a:endParaRPr kumimoji="1" lang="ko-KR" altLang="en-US"/>
           </a:p>
@@ -2064,7 +2160,6 @@
           <a:p>
             <a:fld id="{8AF3784E-D73A-6545-9F12-21649F82E67D}" type="slidenum">
               <a:rPr kumimoji="1" lang="ko-KR" altLang="en-US" smtClean="0"/>
-              <a:t>4</a:t>
             </a:fld>
             <a:endParaRPr kumimoji="1" lang="ko-KR" altLang="en-US"/>
           </a:p>
@@ -2155,7 +2250,6 @@
           <a:p>
             <a:fld id="{8AF3784E-D73A-6545-9F12-21649F82E67D}" type="slidenum">
               <a:rPr kumimoji="1" lang="ko-KR" altLang="en-US" smtClean="0"/>
-              <a:t>5</a:t>
             </a:fld>
             <a:endParaRPr kumimoji="1" lang="ko-KR" altLang="en-US"/>
           </a:p>
@@ -2246,7 +2340,6 @@
           <a:p>
             <a:fld id="{8AF3784E-D73A-6545-9F12-21649F82E67D}" type="slidenum">
               <a:rPr kumimoji="1" lang="ko-KR" altLang="en-US" smtClean="0"/>
-              <a:t>6</a:t>
             </a:fld>
             <a:endParaRPr kumimoji="1" lang="ko-KR" altLang="en-US"/>
           </a:p>
@@ -2361,7 +2454,6 @@
           <a:p>
             <a:fld id="{8AF3784E-D73A-6545-9F12-21649F82E67D}" type="slidenum">
               <a:rPr kumimoji="1" lang="ko-KR" altLang="en-US" smtClean="0"/>
-              <a:t>7</a:t>
             </a:fld>
             <a:endParaRPr kumimoji="1" lang="ko-KR" altLang="en-US"/>
           </a:p>
@@ -2431,8 +2523,6 @@
               </a:rPr>
               <a:t>"Now let me walk you through what the data actually looks like. </a:t>
             </a:r>
-          </a:p>
-          <a:p>
             <a:endParaRPr lang="en-US" altLang="ko-KR" sz="1200" b="0" i="0" kern="1200" dirty="0">
               <a:solidFill>
                 <a:schemeClr val="tx1"/>
@@ -2444,6 +2534,17 @@
             </a:endParaRPr>
           </a:p>
           <a:p>
+            <a:endParaRPr lang="en-US" altLang="ko-KR" sz="1200" b="0" i="0" kern="1200" dirty="0">
+              <a:solidFill>
+                <a:schemeClr val="tx1"/>
+              </a:solidFill>
+              <a:effectLst/>
+              <a:latin typeface="+mn-lt"/>
+              <a:ea typeface="+mn-ea"/>
+              <a:cs typeface="+mn-cs"/>
+            </a:endParaRPr>
+          </a:p>
+          <a:p>
             <a:r>
               <a:rPr lang="en-US" altLang="ko-KR" sz="1200" kern="1200" dirty="0">
                 <a:solidFill>
@@ -2480,6 +2581,15 @@
               </a:rPr>
               <a:t>.</a:t>
             </a:r>
+            <a:endParaRPr lang="en-US" altLang="ko-KR" sz="1200" kern="1200" dirty="0">
+              <a:solidFill>
+                <a:schemeClr val="tx1"/>
+              </a:solidFill>
+              <a:effectLst/>
+              <a:latin typeface="+mn-lt"/>
+              <a:ea typeface="+mn-ea"/>
+              <a:cs typeface="+mn-cs"/>
+            </a:endParaRPr>
           </a:p>
           <a:p>
             <a:r>
@@ -2530,6 +2640,15 @@
               </a:rPr>
               <a:t>.</a:t>
             </a:r>
+            <a:endParaRPr lang="en-US" altLang="ko-KR" sz="1200" kern="1200" dirty="0">
+              <a:solidFill>
+                <a:schemeClr val="tx1"/>
+              </a:solidFill>
+              <a:effectLst/>
+              <a:latin typeface="+mn-lt"/>
+              <a:ea typeface="+mn-ea"/>
+              <a:cs typeface="+mn-cs"/>
+            </a:endParaRPr>
           </a:p>
           <a:p>
             <a:r>
@@ -2544,6 +2663,15 @@
               </a:rPr>
               <a:t>In a normal world with no stablecoins, these two rates should be roughly equal — both risk-free, both short-term. The spread should hover near zero.</a:t>
             </a:r>
+            <a:endParaRPr lang="en-US" altLang="ko-KR" sz="1200" kern="1200" dirty="0">
+              <a:solidFill>
+                <a:schemeClr val="tx1"/>
+              </a:solidFill>
+              <a:effectLst/>
+              <a:latin typeface="+mn-lt"/>
+              <a:ea typeface="+mn-ea"/>
+              <a:cs typeface="+mn-cs"/>
+            </a:endParaRPr>
           </a:p>
           <a:p>
             <a:r>
@@ -2654,6 +2782,15 @@
               </a:rPr>
               <a:t> (goes positive).</a:t>
             </a:r>
+            <a:endParaRPr lang="en-US" altLang="ko-KR" sz="1200" kern="1200" dirty="0">
+              <a:solidFill>
+                <a:schemeClr val="tx1"/>
+              </a:solidFill>
+              <a:effectLst/>
+              <a:latin typeface="+mn-lt"/>
+              <a:ea typeface="+mn-ea"/>
+              <a:cs typeface="+mn-cs"/>
+            </a:endParaRPr>
           </a:p>
           <a:p>
             <a:br>
@@ -2690,6 +2827,15 @@
               </a:rPr>
               <a:t>B: middle panel shows the combined supply of USDT and USDC — it grew from around a hundred billion to over two hundred billion over this period. </a:t>
             </a:r>
+            <a:endParaRPr lang="en-US" altLang="ko-KR" sz="1200" kern="1200" dirty="0">
+              <a:solidFill>
+                <a:schemeClr val="tx1"/>
+              </a:solidFill>
+              <a:effectLst/>
+              <a:latin typeface="+mn-lt"/>
+              <a:ea typeface="+mn-ea"/>
+              <a:cs typeface="+mn-cs"/>
+            </a:endParaRPr>
           </a:p>
           <a:p>
             <a:br>
@@ -2857,7 +3003,6 @@
           <a:p>
             <a:fld id="{8AF3784E-D73A-6545-9F12-21649F82E67D}" type="slidenum">
               <a:rPr kumimoji="1" lang="ko-KR" altLang="en-US" smtClean="0"/>
-              <a:t>8</a:t>
             </a:fld>
             <a:endParaRPr kumimoji="1" lang="ko-KR" altLang="en-US"/>
           </a:p>
@@ -2927,8 +3072,6 @@
               </a:rPr>
               <a:t>"Before we get to the numbers, let me translate what we just saw into plain terms.</a:t>
             </a:r>
-          </a:p>
-          <a:p>
             <a:endParaRPr lang="en-US" altLang="ko-KR" sz="1200" b="0" i="0" kern="1200" dirty="0">
               <a:solidFill>
                 <a:schemeClr val="tx1"/>
@@ -2940,6 +3083,17 @@
             </a:endParaRPr>
           </a:p>
           <a:p>
+            <a:endParaRPr lang="en-US" altLang="ko-KR" sz="1200" b="0" i="0" kern="1200" dirty="0">
+              <a:solidFill>
+                <a:schemeClr val="tx1"/>
+              </a:solidFill>
+              <a:effectLst/>
+              <a:latin typeface="+mn-lt"/>
+              <a:ea typeface="+mn-ea"/>
+              <a:cs typeface="+mn-cs"/>
+            </a:endParaRPr>
+          </a:p>
+          <a:p>
             <a:r>
               <a:rPr lang="en-US" altLang="ko-KR" sz="1200" b="0" i="0" kern="1200" dirty="0">
                 <a:solidFill>
@@ -2952,8 +3106,6 @@
               </a:rPr>
               <a:t>First: more supply means lower spreads. As Tether and Circle grew, they bought more T-bills to back their tokens. More T-bill buying pushes Treasury yields down relative to overnight rates — that's the spread compressing. </a:t>
             </a:r>
-          </a:p>
-          <a:p>
             <a:endParaRPr lang="en-US" altLang="ko-KR" sz="1200" b="0" i="0" kern="1200" dirty="0">
               <a:solidFill>
                 <a:schemeClr val="tx1"/>
@@ -2965,6 +3117,17 @@
             </a:endParaRPr>
           </a:p>
           <a:p>
+            <a:endParaRPr lang="en-US" altLang="ko-KR" sz="1200" b="0" i="0" kern="1200" dirty="0">
+              <a:solidFill>
+                <a:schemeClr val="tx1"/>
+              </a:solidFill>
+              <a:effectLst/>
+              <a:latin typeface="+mn-lt"/>
+              <a:ea typeface="+mn-ea"/>
+              <a:cs typeface="+mn-cs"/>
+            </a:endParaRPr>
+          </a:p>
+          <a:p>
             <a:r>
               <a:rPr lang="en-US" altLang="ko-KR" sz="1200" b="0" i="0" kern="1200" dirty="0">
                 <a:solidFill>
@@ -2977,8 +3140,6 @@
               </a:rPr>
               <a:t>Second: when a crisis hits, spreads spike. During the LUNA collapse in May 2022, issuers were forced to sell T-bills to pay back redemptions. That sudden selling pushed yields up — the privilege reversed. </a:t>
             </a:r>
-          </a:p>
-          <a:p>
             <a:endParaRPr lang="en-US" altLang="ko-KR" sz="1200" b="0" i="0" kern="1200" dirty="0">
               <a:solidFill>
                 <a:schemeClr val="tx1"/>
@@ -2990,6 +3151,17 @@
             </a:endParaRPr>
           </a:p>
           <a:p>
+            <a:endParaRPr lang="en-US" altLang="ko-KR" sz="1200" b="0" i="0" kern="1200" dirty="0">
+              <a:solidFill>
+                <a:schemeClr val="tx1"/>
+              </a:solidFill>
+              <a:effectLst/>
+              <a:latin typeface="+mn-lt"/>
+              <a:ea typeface="+mn-ea"/>
+              <a:cs typeface="+mn-cs"/>
+            </a:endParaRPr>
+          </a:p>
+          <a:p>
             <a:r>
               <a:rPr lang="en-US" altLang="ko-KR" sz="1200" b="0" i="0" kern="1200" dirty="0">
                 <a:solidFill>
@@ -3002,6 +3174,15 @@
               </a:rPr>
               <a:t>Third: the buffer was dangerously thin exactly when it mattered most. In 2022, liquid cash reserves were near zero. Issuers had no cushion. They had to sell assets into a falling market. These three patterns together are what our regressions test."</a:t>
             </a:r>
+            <a:endParaRPr lang="en-US" altLang="ko-KR" sz="1200" b="0" i="0" kern="1200" dirty="0">
+              <a:solidFill>
+                <a:schemeClr val="tx1"/>
+              </a:solidFill>
+              <a:effectLst/>
+              <a:latin typeface="+mn-lt"/>
+              <a:ea typeface="+mn-ea"/>
+              <a:cs typeface="+mn-cs"/>
+            </a:endParaRPr>
           </a:p>
           <a:p>
             <a:br>
@@ -3028,7 +3209,6 @@
           <a:p>
             <a:fld id="{8AF3784E-D73A-6545-9F12-21649F82E67D}" type="slidenum">
               <a:rPr kumimoji="1" lang="ko-KR" altLang="en-US" smtClean="0"/>
-              <a:t>9</a:t>
             </a:fld>
             <a:endParaRPr kumimoji="1" lang="ko-KR" altLang="en-US"/>
           </a:p>
@@ -3083,6 +3263,7 @@
               <a:rPr lang="en-US"/>
               <a:t>Click to edit Master title style</a:t>
             </a:r>
+            <a:endParaRPr lang="en-US"/>
           </a:p>
         </p:txBody>
       </p:sp>
@@ -3201,6 +3382,7 @@
               <a:rPr lang="en-US"/>
               <a:t>Click to edit Master subtitle style</a:t>
             </a:r>
+            <a:endParaRPr lang="en-US"/>
           </a:p>
         </p:txBody>
       </p:sp>
@@ -3221,7 +3403,6 @@
           <a:p>
             <a:fld id="{A1C20BC9-927F-2446-AECF-AD03478862A8}" type="datetime1">
               <a:rPr lang="ko-KR" altLang="en-US" smtClean="0"/>
-              <a:t>2026. 5. 11.</a:t>
             </a:fld>
             <a:endParaRPr lang="en-US"/>
           </a:p>
@@ -3263,7 +3444,6 @@
           <a:p>
             <a:fld id="{C1FF6DA9-008F-8B48-92A6-B652298478BF}" type="slidenum">
               <a:rPr lang="en-US" smtClean="0"/>
-              <a:t>‹#›</a:t>
             </a:fld>
             <a:endParaRPr lang="en-US"/>
           </a:p>
@@ -3313,6 +3493,7 @@
               <a:rPr lang="en-US"/>
               <a:t>Click to edit Master title style</a:t>
             </a:r>
+            <a:endParaRPr lang="en-US"/>
           </a:p>
         </p:txBody>
       </p:sp>
@@ -3336,6 +3517,7 @@
               <a:rPr lang="en-US"/>
               <a:t>Click to edit Master text styles</a:t>
             </a:r>
+            <a:endParaRPr lang="en-US"/>
           </a:p>
           <a:p>
             <a:pPr lvl="1"/>
@@ -3343,6 +3525,7 @@
               <a:rPr lang="en-US"/>
               <a:t>Second level</a:t>
             </a:r>
+            <a:endParaRPr lang="en-US"/>
           </a:p>
           <a:p>
             <a:pPr lvl="2"/>
@@ -3350,6 +3533,7 @@
               <a:rPr lang="en-US"/>
               <a:t>Third level</a:t>
             </a:r>
+            <a:endParaRPr lang="en-US"/>
           </a:p>
           <a:p>
             <a:pPr lvl="3"/>
@@ -3357,6 +3541,7 @@
               <a:rPr lang="en-US"/>
               <a:t>Fourth level</a:t>
             </a:r>
+            <a:endParaRPr lang="en-US"/>
           </a:p>
           <a:p>
             <a:pPr lvl="4"/>
@@ -3364,6 +3549,7 @@
               <a:rPr lang="en-US"/>
               <a:t>Fifth level</a:t>
             </a:r>
+            <a:endParaRPr lang="en-US"/>
           </a:p>
         </p:txBody>
       </p:sp>
@@ -3384,7 +3570,6 @@
           <a:p>
             <a:fld id="{C6249789-0936-6140-A27E-880DD3FC8288}" type="datetime1">
               <a:rPr lang="ko-KR" altLang="en-US" smtClean="0"/>
-              <a:t>2026. 5. 11.</a:t>
             </a:fld>
             <a:endParaRPr lang="en-US"/>
           </a:p>
@@ -3426,7 +3611,6 @@
           <a:p>
             <a:fld id="{C1FF6DA9-008F-8B48-92A6-B652298478BF}" type="slidenum">
               <a:rPr lang="en-US" smtClean="0"/>
-              <a:t>‹#›</a:t>
             </a:fld>
             <a:endParaRPr lang="en-US"/>
           </a:p>
@@ -3481,6 +3665,7 @@
               <a:rPr lang="en-US"/>
               <a:t>Click to edit Master title style</a:t>
             </a:r>
+            <a:endParaRPr lang="en-US"/>
           </a:p>
         </p:txBody>
       </p:sp>
@@ -3509,6 +3694,7 @@
               <a:rPr lang="en-US"/>
               <a:t>Click to edit Master text styles</a:t>
             </a:r>
+            <a:endParaRPr lang="en-US"/>
           </a:p>
           <a:p>
             <a:pPr lvl="1"/>
@@ -3516,6 +3702,7 @@
               <a:rPr lang="en-US"/>
               <a:t>Second level</a:t>
             </a:r>
+            <a:endParaRPr lang="en-US"/>
           </a:p>
           <a:p>
             <a:pPr lvl="2"/>
@@ -3523,6 +3710,7 @@
               <a:rPr lang="en-US"/>
               <a:t>Third level</a:t>
             </a:r>
+            <a:endParaRPr lang="en-US"/>
           </a:p>
           <a:p>
             <a:pPr lvl="3"/>
@@ -3530,6 +3718,7 @@
               <a:rPr lang="en-US"/>
               <a:t>Fourth level</a:t>
             </a:r>
+            <a:endParaRPr lang="en-US"/>
           </a:p>
           <a:p>
             <a:pPr lvl="4"/>
@@ -3537,6 +3726,7 @@
               <a:rPr lang="en-US"/>
               <a:t>Fifth level</a:t>
             </a:r>
+            <a:endParaRPr lang="en-US"/>
           </a:p>
         </p:txBody>
       </p:sp>
@@ -3557,7 +3747,6 @@
           <a:p>
             <a:fld id="{2EEA7C15-8000-344F-B602-B2D07D350112}" type="datetime1">
               <a:rPr lang="ko-KR" altLang="en-US" smtClean="0"/>
-              <a:t>2026. 5. 11.</a:t>
             </a:fld>
             <a:endParaRPr lang="en-US"/>
           </a:p>
@@ -3599,7 +3788,6 @@
           <a:p>
             <a:fld id="{C1FF6DA9-008F-8B48-92A6-B652298478BF}" type="slidenum">
               <a:rPr lang="en-US" smtClean="0"/>
-              <a:t>‹#›</a:t>
             </a:fld>
             <a:endParaRPr lang="en-US"/>
           </a:p>
@@ -3649,6 +3837,7 @@
               <a:rPr lang="en-US"/>
               <a:t>Click to edit Master title style</a:t>
             </a:r>
+            <a:endParaRPr lang="en-US"/>
           </a:p>
         </p:txBody>
       </p:sp>
@@ -3672,6 +3861,7 @@
               <a:rPr lang="en-US"/>
               <a:t>Click to edit Master text styles</a:t>
             </a:r>
+            <a:endParaRPr lang="en-US"/>
           </a:p>
           <a:p>
             <a:pPr lvl="1"/>
@@ -3679,6 +3869,7 @@
               <a:rPr lang="en-US"/>
               <a:t>Second level</a:t>
             </a:r>
+            <a:endParaRPr lang="en-US"/>
           </a:p>
           <a:p>
             <a:pPr lvl="2"/>
@@ -3686,6 +3877,7 @@
               <a:rPr lang="en-US"/>
               <a:t>Third level</a:t>
             </a:r>
+            <a:endParaRPr lang="en-US"/>
           </a:p>
           <a:p>
             <a:pPr lvl="3"/>
@@ -3693,6 +3885,7 @@
               <a:rPr lang="en-US"/>
               <a:t>Fourth level</a:t>
             </a:r>
+            <a:endParaRPr lang="en-US"/>
           </a:p>
           <a:p>
             <a:pPr lvl="4"/>
@@ -3700,6 +3893,7 @@
               <a:rPr lang="en-US"/>
               <a:t>Fifth level</a:t>
             </a:r>
+            <a:endParaRPr lang="en-US"/>
           </a:p>
         </p:txBody>
       </p:sp>
@@ -3720,7 +3914,6 @@
           <a:p>
             <a:fld id="{59EB9A13-99E8-C946-8422-525720E95D70}" type="datetime1">
               <a:rPr lang="ko-KR" altLang="en-US" smtClean="0"/>
-              <a:t>2026. 5. 11.</a:t>
             </a:fld>
             <a:endParaRPr lang="en-US"/>
           </a:p>
@@ -3762,7 +3955,6 @@
           <a:p>
             <a:fld id="{C1FF6DA9-008F-8B48-92A6-B652298478BF}" type="slidenum">
               <a:rPr lang="en-US" smtClean="0"/>
-              <a:t>‹#›</a:t>
             </a:fld>
             <a:endParaRPr lang="en-US"/>
           </a:p>
@@ -3821,6 +4013,7 @@
               <a:rPr lang="en-US"/>
               <a:t>Click to edit Master title style</a:t>
             </a:r>
+            <a:endParaRPr lang="en-US"/>
           </a:p>
         </p:txBody>
       </p:sp>
@@ -3940,6 +4133,7 @@
               <a:rPr lang="en-US"/>
               <a:t>Click to edit Master text styles</a:t>
             </a:r>
+            <a:endParaRPr lang="en-US"/>
           </a:p>
         </p:txBody>
       </p:sp>
@@ -3960,7 +4154,6 @@
           <a:p>
             <a:fld id="{8D0CDB8A-853B-5741-A8F8-E6BEBA996F73}" type="datetime1">
               <a:rPr lang="ko-KR" altLang="en-US" smtClean="0"/>
-              <a:t>2026. 5. 11.</a:t>
             </a:fld>
             <a:endParaRPr lang="en-US"/>
           </a:p>
@@ -4002,7 +4195,6 @@
           <a:p>
             <a:fld id="{C1FF6DA9-008F-8B48-92A6-B652298478BF}" type="slidenum">
               <a:rPr lang="en-US" smtClean="0"/>
-              <a:t>‹#›</a:t>
             </a:fld>
             <a:endParaRPr lang="en-US"/>
           </a:p>
@@ -4052,6 +4244,7 @@
               <a:rPr lang="en-US"/>
               <a:t>Click to edit Master title style</a:t>
             </a:r>
+            <a:endParaRPr lang="en-US"/>
           </a:p>
         </p:txBody>
       </p:sp>
@@ -4108,6 +4301,7 @@
               <a:rPr lang="en-US"/>
               <a:t>Click to edit Master text styles</a:t>
             </a:r>
+            <a:endParaRPr lang="en-US"/>
           </a:p>
           <a:p>
             <a:pPr lvl="1"/>
@@ -4115,6 +4309,7 @@
               <a:rPr lang="en-US"/>
               <a:t>Second level</a:t>
             </a:r>
+            <a:endParaRPr lang="en-US"/>
           </a:p>
           <a:p>
             <a:pPr lvl="2"/>
@@ -4122,6 +4317,7 @@
               <a:rPr lang="en-US"/>
               <a:t>Third level</a:t>
             </a:r>
+            <a:endParaRPr lang="en-US"/>
           </a:p>
           <a:p>
             <a:pPr lvl="3"/>
@@ -4129,6 +4325,7 @@
               <a:rPr lang="en-US"/>
               <a:t>Fourth level</a:t>
             </a:r>
+            <a:endParaRPr lang="en-US"/>
           </a:p>
           <a:p>
             <a:pPr lvl="4"/>
@@ -4136,6 +4333,7 @@
               <a:rPr lang="en-US"/>
               <a:t>Fifth level</a:t>
             </a:r>
+            <a:endParaRPr lang="en-US"/>
           </a:p>
         </p:txBody>
       </p:sp>
@@ -4192,6 +4390,7 @@
               <a:rPr lang="en-US"/>
               <a:t>Click to edit Master text styles</a:t>
             </a:r>
+            <a:endParaRPr lang="en-US"/>
           </a:p>
           <a:p>
             <a:pPr lvl="1"/>
@@ -4199,6 +4398,7 @@
               <a:rPr lang="en-US"/>
               <a:t>Second level</a:t>
             </a:r>
+            <a:endParaRPr lang="en-US"/>
           </a:p>
           <a:p>
             <a:pPr lvl="2"/>
@@ -4206,6 +4406,7 @@
               <a:rPr lang="en-US"/>
               <a:t>Third level</a:t>
             </a:r>
+            <a:endParaRPr lang="en-US"/>
           </a:p>
           <a:p>
             <a:pPr lvl="3"/>
@@ -4213,6 +4414,7 @@
               <a:rPr lang="en-US"/>
               <a:t>Fourth level</a:t>
             </a:r>
+            <a:endParaRPr lang="en-US"/>
           </a:p>
           <a:p>
             <a:pPr lvl="4"/>
@@ -4220,6 +4422,7 @@
               <a:rPr lang="en-US"/>
               <a:t>Fifth level</a:t>
             </a:r>
+            <a:endParaRPr lang="en-US"/>
           </a:p>
         </p:txBody>
       </p:sp>
@@ -4240,7 +4443,6 @@
           <a:p>
             <a:fld id="{1F728279-CA28-1D46-8FD5-CDFF7ECB90D0}" type="datetime1">
               <a:rPr lang="ko-KR" altLang="en-US" smtClean="0"/>
-              <a:t>2026. 5. 11.</a:t>
             </a:fld>
             <a:endParaRPr lang="en-US"/>
           </a:p>
@@ -4282,7 +4484,6 @@
           <a:p>
             <a:fld id="{C1FF6DA9-008F-8B48-92A6-B652298478BF}" type="slidenum">
               <a:rPr lang="en-US" smtClean="0"/>
-              <a:t>‹#›</a:t>
             </a:fld>
             <a:endParaRPr lang="en-US"/>
           </a:p>
@@ -4336,6 +4537,7 @@
               <a:rPr lang="en-US"/>
               <a:t>Click to edit Master title style</a:t>
             </a:r>
+            <a:endParaRPr lang="en-US"/>
           </a:p>
         </p:txBody>
       </p:sp>
@@ -4401,6 +4603,7 @@
               <a:rPr lang="en-US"/>
               <a:t>Click to edit Master text styles</a:t>
             </a:r>
+            <a:endParaRPr lang="en-US"/>
           </a:p>
         </p:txBody>
       </p:sp>
@@ -4457,6 +4660,7 @@
               <a:rPr lang="en-US"/>
               <a:t>Click to edit Master text styles</a:t>
             </a:r>
+            <a:endParaRPr lang="en-US"/>
           </a:p>
           <a:p>
             <a:pPr lvl="1"/>
@@ -4464,6 +4668,7 @@
               <a:rPr lang="en-US"/>
               <a:t>Second level</a:t>
             </a:r>
+            <a:endParaRPr lang="en-US"/>
           </a:p>
           <a:p>
             <a:pPr lvl="2"/>
@@ -4471,6 +4676,7 @@
               <a:rPr lang="en-US"/>
               <a:t>Third level</a:t>
             </a:r>
+            <a:endParaRPr lang="en-US"/>
           </a:p>
           <a:p>
             <a:pPr lvl="3"/>
@@ -4478,6 +4684,7 @@
               <a:rPr lang="en-US"/>
               <a:t>Fourth level</a:t>
             </a:r>
+            <a:endParaRPr lang="en-US"/>
           </a:p>
           <a:p>
             <a:pPr lvl="4"/>
@@ -4485,6 +4692,7 @@
               <a:rPr lang="en-US"/>
               <a:t>Fifth level</a:t>
             </a:r>
+            <a:endParaRPr lang="en-US"/>
           </a:p>
         </p:txBody>
       </p:sp>
@@ -4550,6 +4758,7 @@
               <a:rPr lang="en-US"/>
               <a:t>Click to edit Master text styles</a:t>
             </a:r>
+            <a:endParaRPr lang="en-US"/>
           </a:p>
         </p:txBody>
       </p:sp>
@@ -4606,6 +4815,7 @@
               <a:rPr lang="en-US"/>
               <a:t>Click to edit Master text styles</a:t>
             </a:r>
+            <a:endParaRPr lang="en-US"/>
           </a:p>
           <a:p>
             <a:pPr lvl="1"/>
@@ -4613,6 +4823,7 @@
               <a:rPr lang="en-US"/>
               <a:t>Second level</a:t>
             </a:r>
+            <a:endParaRPr lang="en-US"/>
           </a:p>
           <a:p>
             <a:pPr lvl="2"/>
@@ -4620,6 +4831,7 @@
               <a:rPr lang="en-US"/>
               <a:t>Third level</a:t>
             </a:r>
+            <a:endParaRPr lang="en-US"/>
           </a:p>
           <a:p>
             <a:pPr lvl="3"/>
@@ -4627,6 +4839,7 @@
               <a:rPr lang="en-US"/>
               <a:t>Fourth level</a:t>
             </a:r>
+            <a:endParaRPr lang="en-US"/>
           </a:p>
           <a:p>
             <a:pPr lvl="4"/>
@@ -4634,6 +4847,7 @@
               <a:rPr lang="en-US"/>
               <a:t>Fifth level</a:t>
             </a:r>
+            <a:endParaRPr lang="en-US"/>
           </a:p>
         </p:txBody>
       </p:sp>
@@ -4654,7 +4868,6 @@
           <a:p>
             <a:fld id="{985D133D-FD79-3A46-B04D-862544638E9C}" type="datetime1">
               <a:rPr lang="ko-KR" altLang="en-US" smtClean="0"/>
-              <a:t>2026. 5. 11.</a:t>
             </a:fld>
             <a:endParaRPr lang="en-US"/>
           </a:p>
@@ -4696,7 +4909,6 @@
           <a:p>
             <a:fld id="{C1FF6DA9-008F-8B48-92A6-B652298478BF}" type="slidenum">
               <a:rPr lang="en-US" smtClean="0"/>
-              <a:t>‹#›</a:t>
             </a:fld>
             <a:endParaRPr lang="en-US"/>
           </a:p>
@@ -4746,6 +4958,7 @@
               <a:rPr lang="en-US"/>
               <a:t>Click to edit Master title style</a:t>
             </a:r>
+            <a:endParaRPr lang="en-US"/>
           </a:p>
         </p:txBody>
       </p:sp>
@@ -4766,7 +4979,6 @@
           <a:p>
             <a:fld id="{5407E052-61D9-C94D-A482-A8E176EE8505}" type="datetime1">
               <a:rPr lang="ko-KR" altLang="en-US" smtClean="0"/>
-              <a:t>2026. 5. 11.</a:t>
             </a:fld>
             <a:endParaRPr lang="en-US"/>
           </a:p>
@@ -4808,7 +5020,6 @@
           <a:p>
             <a:fld id="{C1FF6DA9-008F-8B48-92A6-B652298478BF}" type="slidenum">
               <a:rPr lang="en-US" smtClean="0"/>
-              <a:t>‹#›</a:t>
             </a:fld>
             <a:endParaRPr lang="en-US"/>
           </a:p>
@@ -4856,7 +5067,6 @@
           <a:p>
             <a:fld id="{188ED6F0-C5A3-C147-B913-05FB2436882F}" type="datetime1">
               <a:rPr lang="ko-KR" altLang="en-US" smtClean="0"/>
-              <a:t>2026. 5. 11.</a:t>
             </a:fld>
             <a:endParaRPr lang="en-US"/>
           </a:p>
@@ -4898,7 +5108,6 @@
           <a:p>
             <a:fld id="{C1FF6DA9-008F-8B48-92A6-B652298478BF}" type="slidenum">
               <a:rPr lang="en-US" smtClean="0"/>
-              <a:t>‹#›</a:t>
             </a:fld>
             <a:endParaRPr lang="en-US"/>
           </a:p>
@@ -4957,6 +5166,7 @@
               <a:rPr lang="en-US"/>
               <a:t>Click to edit Master title style</a:t>
             </a:r>
+            <a:endParaRPr lang="en-US"/>
           </a:p>
         </p:txBody>
       </p:sp>
@@ -5013,6 +5223,7 @@
               <a:rPr lang="en-US"/>
               <a:t>Click to edit Master text styles</a:t>
             </a:r>
+            <a:endParaRPr lang="en-US"/>
           </a:p>
           <a:p>
             <a:pPr lvl="1"/>
@@ -5020,6 +5231,7 @@
               <a:rPr lang="en-US"/>
               <a:t>Second level</a:t>
             </a:r>
+            <a:endParaRPr lang="en-US"/>
           </a:p>
           <a:p>
             <a:pPr lvl="2"/>
@@ -5027,6 +5239,7 @@
               <a:rPr lang="en-US"/>
               <a:t>Third level</a:t>
             </a:r>
+            <a:endParaRPr lang="en-US"/>
           </a:p>
           <a:p>
             <a:pPr lvl="3"/>
@@ -5034,6 +5247,7 @@
               <a:rPr lang="en-US"/>
               <a:t>Fourth level</a:t>
             </a:r>
+            <a:endParaRPr lang="en-US"/>
           </a:p>
           <a:p>
             <a:pPr lvl="4"/>
@@ -5041,6 +5255,7 @@
               <a:rPr lang="en-US"/>
               <a:t>Fifth level</a:t>
             </a:r>
+            <a:endParaRPr lang="en-US"/>
           </a:p>
         </p:txBody>
       </p:sp>
@@ -5106,6 +5321,7 @@
               <a:rPr lang="en-US"/>
               <a:t>Click to edit Master text styles</a:t>
             </a:r>
+            <a:endParaRPr lang="en-US"/>
           </a:p>
         </p:txBody>
       </p:sp>
@@ -5126,7 +5342,6 @@
           <a:p>
             <a:fld id="{384C738C-69A7-E546-A7AB-BA1A924CC786}" type="datetime1">
               <a:rPr lang="ko-KR" altLang="en-US" smtClean="0"/>
-              <a:t>2026. 5. 11.</a:t>
             </a:fld>
             <a:endParaRPr lang="en-US"/>
           </a:p>
@@ -5168,7 +5383,6 @@
           <a:p>
             <a:fld id="{C1FF6DA9-008F-8B48-92A6-B652298478BF}" type="slidenum">
               <a:rPr lang="en-US" smtClean="0"/>
-              <a:t>‹#›</a:t>
             </a:fld>
             <a:endParaRPr lang="en-US"/>
           </a:p>
@@ -5227,6 +5441,7 @@
               <a:rPr lang="en-US"/>
               <a:t>Click to edit Master title style</a:t>
             </a:r>
+            <a:endParaRPr lang="en-US"/>
           </a:p>
         </p:txBody>
       </p:sp>
@@ -5353,6 +5568,7 @@
               <a:rPr lang="en-US"/>
               <a:t>Click to edit Master text styles</a:t>
             </a:r>
+            <a:endParaRPr lang="en-US"/>
           </a:p>
         </p:txBody>
       </p:sp>
@@ -5373,7 +5589,6 @@
           <a:p>
             <a:fld id="{EACC9D5A-263E-3C4A-980D-8614F39CB45A}" type="datetime1">
               <a:rPr lang="ko-KR" altLang="en-US" smtClean="0"/>
-              <a:t>2026. 5. 11.</a:t>
             </a:fld>
             <a:endParaRPr lang="en-US"/>
           </a:p>
@@ -5415,7 +5630,6 @@
           <a:p>
             <a:fld id="{C1FF6DA9-008F-8B48-92A6-B652298478BF}" type="slidenum">
               <a:rPr lang="en-US" smtClean="0"/>
-              <a:t>‹#›</a:t>
             </a:fld>
             <a:endParaRPr lang="en-US"/>
           </a:p>
@@ -5480,6 +5694,7 @@
               <a:rPr lang="en-US"/>
               <a:t>Click to edit Master title style</a:t>
             </a:r>
+            <a:endParaRPr lang="en-US"/>
           </a:p>
         </p:txBody>
       </p:sp>
@@ -5513,6 +5728,7 @@
               <a:rPr lang="en-US"/>
               <a:t>Click to edit Master text styles</a:t>
             </a:r>
+            <a:endParaRPr lang="en-US"/>
           </a:p>
           <a:p>
             <a:pPr lvl="1"/>
@@ -5520,6 +5736,7 @@
               <a:rPr lang="en-US"/>
               <a:t>Second level</a:t>
             </a:r>
+            <a:endParaRPr lang="en-US"/>
           </a:p>
           <a:p>
             <a:pPr lvl="2"/>
@@ -5527,6 +5744,7 @@
               <a:rPr lang="en-US"/>
               <a:t>Third level</a:t>
             </a:r>
+            <a:endParaRPr lang="en-US"/>
           </a:p>
           <a:p>
             <a:pPr lvl="3"/>
@@ -5534,6 +5752,7 @@
               <a:rPr lang="en-US"/>
               <a:t>Fourth level</a:t>
             </a:r>
+            <a:endParaRPr lang="en-US"/>
           </a:p>
           <a:p>
             <a:pPr lvl="4"/>
@@ -5541,6 +5760,7 @@
               <a:rPr lang="en-US"/>
               <a:t>Fifth level</a:t>
             </a:r>
+            <a:endParaRPr lang="en-US"/>
           </a:p>
         </p:txBody>
       </p:sp>
@@ -5579,7 +5799,6 @@
           <a:p>
             <a:fld id="{8FF2B9D6-7B72-8E44-8AB8-D2FC2E171B08}" type="datetime1">
               <a:rPr lang="ko-KR" altLang="en-US" smtClean="0"/>
-              <a:t>2026. 5. 11.</a:t>
             </a:fld>
             <a:endParaRPr lang="en-US"/>
           </a:p>
@@ -5657,7 +5876,6 @@
           <a:p>
             <a:fld id="{C1FF6DA9-008F-8B48-92A6-B652298478BF}" type="slidenum">
               <a:rPr lang="en-US" smtClean="0"/>
-              <a:t>‹#›</a:t>
             </a:fld>
             <a:endParaRPr lang="en-US"/>
           </a:p>
@@ -5967,14 +6185,14 @@
           <p:nvPr/>
         </p:nvPicPr>
         <p:blipFill>
-          <a:blip r:embed="rId3">
+          <a:blip r:embed="rId1">
             <a:lum bright="70000" contrast="-70000"/>
             <a:extLst>
               <a:ext uri="{BEBA8EAE-BF5A-486C-A8C5-ECC9F3942E4B}">
                 <a14:imgProps xmlns:a14="http://schemas.microsoft.com/office/drawing/2010/main">
-                  <a14:imgLayer r:embed="rId4">
+                  <a14:imgLayer r:embed="rId2">
                     <a14:imgEffect>
-                      <a14:artisticPhotocopy detail="2"/>
+                      <a14:artisticPhotocopy trans="30000" detail="2"/>
                     </a14:imgEffect>
                   </a14:imgLayer>
                 </a14:imgProps>
@@ -6054,6 +6272,13 @@
               </a:rPr>
               <a:t>STABLECOINS AND THE EXORBITANT PRIVILEGE</a:t>
             </a:r>
+            <a:endParaRPr lang="en-US" altLang="ko-KR" sz="2400" dirty="0">
+              <a:solidFill>
+                <a:prstClr val="white"/>
+              </a:solidFill>
+              <a:latin typeface="Hiragino Kaku Gothic Std W8" panose="020B0800000000000000" pitchFamily="34" charset="-128"/>
+              <a:ea typeface="Hiragino Kaku Gothic Std W8" panose="020B0800000000000000" pitchFamily="34" charset="-128"/>
+            </a:endParaRPr>
           </a:p>
           <a:p>
             <a:pPr algn="ctr" defTabSz="914400" latinLnBrk="1">
@@ -6099,6 +6324,11 @@
               </a:rPr>
               <a:t>Yonsei GSIS 2026-1 </a:t>
             </a:r>
+            <a:endParaRPr lang="en-US" altLang="ko-KR" sz="1800" b="1" dirty="0">
+              <a:solidFill>
+                <a:schemeClr val="bg1"/>
+              </a:solidFill>
+            </a:endParaRPr>
           </a:p>
           <a:p>
             <a:r>
@@ -6197,7 +6427,6 @@
           <a:lstStyle/>
           <a:p>
             <a:pPr algn="ctr"/>
-            <a:endParaRPr/>
           </a:p>
         </p:txBody>
       </p:sp>
@@ -6241,7 +6470,6 @@
           <a:lstStyle/>
           <a:p>
             <a:pPr algn="ctr"/>
-            <a:endParaRPr/>
           </a:p>
         </p:txBody>
       </p:sp>
@@ -6277,6 +6505,12 @@
               </a:rPr>
               <a:t>Result 1: Stablecoin Growth Compresses Treasury Spreads</a:t>
             </a:r>
+            <a:endParaRPr sz="2600" b="0" i="0">
+              <a:solidFill>
+                <a:srgbClr val="FFFFFF"/>
+              </a:solidFill>
+              <a:latin typeface="Calibri"/>
+            </a:endParaRPr>
           </a:p>
         </p:txBody>
       </p:sp>
@@ -6320,7 +6554,6 @@
           <a:lstStyle/>
           <a:p>
             <a:pPr algn="ctr"/>
-            <a:endParaRPr/>
           </a:p>
         </p:txBody>
       </p:sp>
@@ -6356,6 +6589,12 @@
               </a:rPr>
               <a:t>H1  CONFIRMED    —   statistically significant at the 5% level</a:t>
             </a:r>
+            <a:endParaRPr sz="1600" b="1" i="0" dirty="0">
+              <a:solidFill>
+                <a:srgbClr val="FFFFFF"/>
+              </a:solidFill>
+              <a:latin typeface="Calibri"/>
+            </a:endParaRPr>
           </a:p>
         </p:txBody>
       </p:sp>
@@ -6399,7 +6638,6 @@
           <a:lstStyle/>
           <a:p>
             <a:pPr algn="ctr"/>
-            <a:endParaRPr/>
           </a:p>
         </p:txBody>
       </p:sp>
@@ -6435,6 +6673,12 @@
               </a:rPr>
               <a:t>β₁ = −6.02**</a:t>
             </a:r>
+            <a:endParaRPr sz="4400" b="1" i="0">
+              <a:solidFill>
+                <a:srgbClr val="FFFFFF"/>
+              </a:solidFill>
+              <a:latin typeface="Calibri"/>
+            </a:endParaRPr>
           </a:p>
         </p:txBody>
       </p:sp>
@@ -6470,6 +6714,12 @@
               </a:rPr>
               <a:t>N = 51 months  |  R² = 0.50</a:t>
             </a:r>
+            <a:endParaRPr sz="1300" b="0" i="1">
+              <a:solidFill>
+                <a:srgbClr val="AAC4E8"/>
+              </a:solidFill>
+              <a:latin typeface="Calibri"/>
+            </a:endParaRPr>
           </a:p>
         </p:txBody>
       </p:sp>
@@ -6513,7 +6763,6 @@
           <a:lstStyle/>
           <a:p>
             <a:pPr algn="ctr"/>
-            <a:endParaRPr/>
           </a:p>
         </p:txBody>
       </p:sp>
@@ -6549,6 +6798,12 @@
               </a:rPr>
               <a:t>What this means in plain terms:</a:t>
             </a:r>
+            <a:endParaRPr sz="1400" b="1" i="0" dirty="0">
+              <a:solidFill>
+                <a:srgbClr val="1B3A72"/>
+              </a:solidFill>
+              <a:latin typeface="Calibri"/>
+            </a:endParaRPr>
           </a:p>
         </p:txBody>
       </p:sp>
@@ -6603,6 +6858,12 @@
               <a:t>
 When Tether and Circle expand, they buy more U.S. T-bills — pushing Treasury yields down relative to overnight rates. This is the exorbitant privilege being amplified.</a:t>
             </a:r>
+            <a:endParaRPr sz="1300" b="0" i="0" dirty="0">
+              <a:solidFill>
+                <a:srgbClr val="1A1A2E"/>
+              </a:solidFill>
+              <a:latin typeface="Calibri"/>
+            </a:endParaRPr>
           </a:p>
         </p:txBody>
       </p:sp>
@@ -6646,7 +6907,6 @@
           <a:lstStyle/>
           <a:p>
             <a:pPr algn="ctr"/>
-            <a:endParaRPr/>
           </a:p>
         </p:txBody>
       </p:sp>
@@ -6682,6 +6942,12 @@
               </a:rPr>
               <a:t>Variable</a:t>
             </a:r>
+            <a:endParaRPr sz="1100" b="1" i="0">
+              <a:solidFill>
+                <a:srgbClr val="FFFFFF"/>
+              </a:solidFill>
+              <a:latin typeface="Calibri"/>
+            </a:endParaRPr>
           </a:p>
         </p:txBody>
       </p:sp>
@@ -6717,6 +6983,12 @@
               </a:rPr>
               <a:t>Coefficient</a:t>
             </a:r>
+            <a:endParaRPr sz="1100" b="1" i="0">
+              <a:solidFill>
+                <a:srgbClr val="FFFFFF"/>
+              </a:solidFill>
+              <a:latin typeface="Calibri"/>
+            </a:endParaRPr>
           </a:p>
         </p:txBody>
       </p:sp>
@@ -6752,6 +7024,12 @@
               </a:rPr>
               <a:t>Sig.</a:t>
             </a:r>
+            <a:endParaRPr sz="1100" b="1" i="0">
+              <a:solidFill>
+                <a:srgbClr val="FFFFFF"/>
+              </a:solidFill>
+              <a:latin typeface="Calibri"/>
+            </a:endParaRPr>
           </a:p>
         </p:txBody>
       </p:sp>
@@ -6795,7 +7073,6 @@
           <a:lstStyle/>
           <a:p>
             <a:pPr algn="ctr"/>
-            <a:endParaRPr/>
           </a:p>
         </p:txBody>
       </p:sp>
@@ -6831,6 +7108,12 @@
               </a:rPr>
               <a:t>ΔlnS  (stablecoin supply growth)</a:t>
             </a:r>
+            <a:endParaRPr sz="1100" b="1" i="0">
+              <a:solidFill>
+                <a:srgbClr val="1A1A2E"/>
+              </a:solidFill>
+              <a:latin typeface="Calibri"/>
+            </a:endParaRPr>
           </a:p>
         </p:txBody>
       </p:sp>
@@ -6866,6 +7149,12 @@
               </a:rPr>
               <a:t>−6.017</a:t>
             </a:r>
+            <a:endParaRPr sz="1100" b="1" i="0">
+              <a:solidFill>
+                <a:srgbClr val="1A1A2E"/>
+              </a:solidFill>
+              <a:latin typeface="Calibri"/>
+            </a:endParaRPr>
           </a:p>
         </p:txBody>
       </p:sp>
@@ -6901,6 +7190,12 @@
               </a:rPr>
               <a:t>**</a:t>
             </a:r>
+            <a:endParaRPr sz="1100" b="1" i="0">
+              <a:solidFill>
+                <a:srgbClr val="1A1A2E"/>
+              </a:solidFill>
+              <a:latin typeface="Calibri"/>
+            </a:endParaRPr>
           </a:p>
         </p:txBody>
       </p:sp>
@@ -6944,7 +7239,6 @@
           <a:lstStyle/>
           <a:p>
             <a:pPr algn="ctr"/>
-            <a:endParaRPr/>
           </a:p>
         </p:txBody>
       </p:sp>
@@ -6989,6 +7283,12 @@
               </a:rPr>
               <a:t>  (Treasury Exposure)</a:t>
             </a:r>
+            <a:endParaRPr sz="1100" b="0" i="0" dirty="0">
+              <a:solidFill>
+                <a:srgbClr val="1A1A2E"/>
+              </a:solidFill>
+              <a:latin typeface="Calibri"/>
+            </a:endParaRPr>
           </a:p>
         </p:txBody>
       </p:sp>
@@ -7024,6 +7324,12 @@
               </a:rPr>
               <a:t> 0.100</a:t>
             </a:r>
+            <a:endParaRPr sz="1100" b="0" i="0">
+              <a:solidFill>
+                <a:srgbClr val="1A1A2E"/>
+              </a:solidFill>
+              <a:latin typeface="Calibri"/>
+            </a:endParaRPr>
           </a:p>
         </p:txBody>
       </p:sp>
@@ -7059,6 +7365,12 @@
               </a:rPr>
               <a:t>—</a:t>
             </a:r>
+            <a:endParaRPr sz="1100" b="0" i="0">
+              <a:solidFill>
+                <a:srgbClr val="1A1A2E"/>
+              </a:solidFill>
+              <a:latin typeface="Calibri"/>
+            </a:endParaRPr>
           </a:p>
         </p:txBody>
       </p:sp>
@@ -7102,7 +7414,6 @@
           <a:lstStyle/>
           <a:p>
             <a:pPr algn="ctr"/>
-            <a:endParaRPr/>
           </a:p>
         </p:txBody>
       </p:sp>
@@ -7138,6 +7449,12 @@
               </a:rPr>
               <a:t>L  (Liquid Buffer)</a:t>
             </a:r>
+            <a:endParaRPr sz="1100" b="0" i="0">
+              <a:solidFill>
+                <a:srgbClr val="1A1A2E"/>
+              </a:solidFill>
+              <a:latin typeface="Calibri"/>
+            </a:endParaRPr>
           </a:p>
         </p:txBody>
       </p:sp>
@@ -7173,6 +7490,12 @@
               </a:rPr>
               <a:t> 1.034</a:t>
             </a:r>
+            <a:endParaRPr sz="1100" b="0" i="0">
+              <a:solidFill>
+                <a:srgbClr val="1A1A2E"/>
+              </a:solidFill>
+              <a:latin typeface="Calibri"/>
+            </a:endParaRPr>
           </a:p>
         </p:txBody>
       </p:sp>
@@ -7208,6 +7531,12 @@
               </a:rPr>
               <a:t>—</a:t>
             </a:r>
+            <a:endParaRPr sz="1100" b="0" i="0">
+              <a:solidFill>
+                <a:srgbClr val="1A1A2E"/>
+              </a:solidFill>
+              <a:latin typeface="Calibri"/>
+            </a:endParaRPr>
           </a:p>
         </p:txBody>
       </p:sp>
@@ -7251,7 +7580,6 @@
           <a:lstStyle/>
           <a:p>
             <a:pPr algn="ctr"/>
-            <a:endParaRPr/>
           </a:p>
         </p:txBody>
       </p:sp>
@@ -7287,6 +7615,12 @@
               </a:rPr>
               <a:t>L × ΔlnS  (buffer interaction)</a:t>
             </a:r>
+            <a:endParaRPr sz="1100" b="0" i="0">
+              <a:solidFill>
+                <a:srgbClr val="1A1A2E"/>
+              </a:solidFill>
+              <a:latin typeface="Calibri"/>
+            </a:endParaRPr>
           </a:p>
         </p:txBody>
       </p:sp>
@@ -7322,6 +7656,12 @@
               </a:rPr>
               <a:t> 3.891</a:t>
             </a:r>
+            <a:endParaRPr sz="1100" b="0" i="0">
+              <a:solidFill>
+                <a:srgbClr val="1A1A2E"/>
+              </a:solidFill>
+              <a:latin typeface="Calibri"/>
+            </a:endParaRPr>
           </a:p>
         </p:txBody>
       </p:sp>
@@ -7357,6 +7697,12 @@
               </a:rPr>
               <a:t>—</a:t>
             </a:r>
+            <a:endParaRPr sz="1100" b="0" i="0">
+              <a:solidFill>
+                <a:srgbClr val="1A1A2E"/>
+              </a:solidFill>
+              <a:latin typeface="Calibri"/>
+            </a:endParaRPr>
           </a:p>
         </p:txBody>
       </p:sp>
@@ -7400,7 +7746,6 @@
           <a:lstStyle/>
           <a:p>
             <a:pPr algn="ctr"/>
-            <a:endParaRPr/>
           </a:p>
         </p:txBody>
       </p:sp>
@@ -7436,6 +7781,12 @@
               </a:rPr>
               <a:t>Controls (velocity, VIX, ΔlnN*)</a:t>
             </a:r>
+            <a:endParaRPr sz="1100" b="0" i="0">
+              <a:solidFill>
+                <a:srgbClr val="1A1A2E"/>
+              </a:solidFill>
+              <a:latin typeface="Calibri"/>
+            </a:endParaRPr>
           </a:p>
         </p:txBody>
       </p:sp>
@@ -7471,6 +7822,12 @@
               </a:rPr>
               <a:t>included</a:t>
             </a:r>
+            <a:endParaRPr sz="1100" b="0" i="0">
+              <a:solidFill>
+                <a:srgbClr val="1A1A2E"/>
+              </a:solidFill>
+              <a:latin typeface="Calibri"/>
+            </a:endParaRPr>
           </a:p>
         </p:txBody>
       </p:sp>
@@ -7497,7 +7854,6 @@
           <a:lstStyle/>
           <a:p>
             <a:pPr algn="ctr"/>
-            <a:endParaRPr/>
           </a:p>
         </p:txBody>
       </p:sp>
@@ -7533,6 +7889,12 @@
               </a:rPr>
               <a:t>** p &lt; 0.05   — = not significant at conventional levels   HAC Newey–West SE (3 lags)</a:t>
             </a:r>
+            <a:endParaRPr sz="900" b="0" i="1">
+              <a:solidFill>
+                <a:srgbClr val="555566"/>
+              </a:solidFill>
+              <a:latin typeface="Calibri"/>
+            </a:endParaRPr>
           </a:p>
         </p:txBody>
       </p:sp>
@@ -7580,13 +7942,7 @@
       </p:sp>
       <p:sp>
         <p:nvSpPr>
-          <p:cNvPr id="43" name="TextBox 42">
-            <a:extLst>
-              <a:ext uri="{FF2B5EF4-FFF2-40B4-BE49-F238E27FC236}">
-                <a16:creationId xmlns:a16="http://schemas.microsoft.com/office/drawing/2014/main" id="{DADE3A8D-7C39-155F-5B65-4E8E18E41C72}"/>
-              </a:ext>
-            </a:extLst>
-          </p:cNvPr>
+          <p:cNvPr id="43" name="TextBox 42"/>
           <p:cNvSpPr txBox="1"/>
           <p:nvPr/>
         </p:nvSpPr>
@@ -7687,7 +8043,6 @@
           <a:lstStyle/>
           <a:p>
             <a:pPr algn="ctr"/>
-            <a:endParaRPr/>
           </a:p>
         </p:txBody>
       </p:sp>
@@ -7731,7 +8086,6 @@
           <a:lstStyle/>
           <a:p>
             <a:pPr algn="ctr"/>
-            <a:endParaRPr/>
           </a:p>
         </p:txBody>
       </p:sp>
@@ -7767,6 +8121,12 @@
               </a:rPr>
               <a:t>Result 1: When Data Quality Improves, the Picture Sharpens</a:t>
             </a:r>
+            <a:endParaRPr sz="2600" b="0" i="0">
+              <a:solidFill>
+                <a:srgbClr val="FFFFFF"/>
+              </a:solidFill>
+              <a:latin typeface="Calibri"/>
+            </a:endParaRPr>
           </a:p>
         </p:txBody>
       </p:sp>
@@ -7802,6 +8162,12 @@
               </a:rPr>
               <a:t>10</a:t>
             </a:r>
+            <a:endParaRPr sz="1300" b="0" i="0">
+              <a:solidFill>
+                <a:srgbClr val="555566"/>
+              </a:solidFill>
+              <a:latin typeface="Calibri"/>
+            </a:endParaRPr>
           </a:p>
         </p:txBody>
       </p:sp>
@@ -7845,7 +8211,6 @@
           <a:lstStyle/>
           <a:p>
             <a:pPr algn="ctr"/>
-            <a:endParaRPr/>
           </a:p>
         </p:txBody>
       </p:sp>
@@ -7899,6 +8264,12 @@
               </a:rPr>
               <a:t> and L) were not individually significant at our full sample of 51 months. This is a power problem — not a theory problem. Reserve attestations only became comprehensive after 2023.</a:t>
             </a:r>
+            <a:endParaRPr sz="1400" b="0" i="1" dirty="0">
+              <a:solidFill>
+                <a:srgbClr val="1A1A2E"/>
+              </a:solidFill>
+              <a:latin typeface="Calibri"/>
+            </a:endParaRPr>
           </a:p>
         </p:txBody>
       </p:sp>
@@ -7934,6 +8305,12 @@
               </a:rPr>
               <a:t>When we restrict to January 2023 – March 2026  (N = 39 months, best attestation coverage):</a:t>
             </a:r>
+            <a:endParaRPr sz="1500" b="1" i="0" dirty="0">
+              <a:solidFill>
+                <a:srgbClr val="1B3A72"/>
+              </a:solidFill>
+              <a:latin typeface="Calibri"/>
+            </a:endParaRPr>
           </a:p>
         </p:txBody>
       </p:sp>
@@ -7977,7 +8354,6 @@
           <a:lstStyle/>
           <a:p>
             <a:pPr algn="ctr"/>
-            <a:endParaRPr/>
           </a:p>
         </p:txBody>
       </p:sp>
@@ -8013,6 +8389,12 @@
               </a:rPr>
               <a:t>Supply channel</a:t>
             </a:r>
+            <a:endParaRPr sz="1400" b="1" i="0">
+              <a:solidFill>
+                <a:srgbClr val="AAC4E8"/>
+              </a:solidFill>
+              <a:latin typeface="Calibri"/>
+            </a:endParaRPr>
           </a:p>
         </p:txBody>
       </p:sp>
@@ -8048,6 +8430,12 @@
               </a:rPr>
               <a:t>β₁  =  −8.14</a:t>
             </a:r>
+            <a:endParaRPr sz="3000" b="1" i="0">
+              <a:solidFill>
+                <a:srgbClr val="FFFFFF"/>
+              </a:solidFill>
+              <a:latin typeface="Calibri"/>
+            </a:endParaRPr>
           </a:p>
         </p:txBody>
       </p:sp>
@@ -8083,6 +8471,12 @@
               </a:rPr>
               <a:t>***</a:t>
             </a:r>
+            <a:endParaRPr sz="1800" b="1" i="0">
+              <a:solidFill>
+                <a:srgbClr val="FFD700"/>
+              </a:solidFill>
+              <a:latin typeface="Calibri"/>
+            </a:endParaRPr>
           </a:p>
         </p:txBody>
       </p:sp>
@@ -8119,6 +8513,12 @@
               <a:t>Even stronger supply effect in recent data.
 Confirmed at the 1% level.</a:t>
             </a:r>
+            <a:endParaRPr sz="1300" b="0" i="0" dirty="0">
+              <a:solidFill>
+                <a:srgbClr val="AAC4E8"/>
+              </a:solidFill>
+              <a:latin typeface="Calibri"/>
+            </a:endParaRPr>
           </a:p>
         </p:txBody>
       </p:sp>
@@ -8162,7 +8562,6 @@
           <a:lstStyle/>
           <a:p>
             <a:pPr algn="ctr"/>
-            <a:endParaRPr/>
           </a:p>
         </p:txBody>
       </p:sp>
@@ -8198,6 +8597,12 @@
               </a:rPr>
               <a:t>Buffer interaction</a:t>
             </a:r>
+            <a:endParaRPr sz="1400" b="1" i="0">
+              <a:solidFill>
+                <a:srgbClr val="AAC4E8"/>
+              </a:solidFill>
+              <a:latin typeface="Calibri"/>
+            </a:endParaRPr>
           </a:p>
         </p:txBody>
       </p:sp>
@@ -8266,6 +8671,11 @@
               </a:rPr>
               <a:t>L = −8.14 + 49.17 × L</a:t>
             </a:r>
+            <a:endParaRPr lang="en-US" altLang="ko-KR" dirty="0">
+              <a:solidFill>
+                <a:schemeClr val="bg1"/>
+              </a:solidFill>
+            </a:endParaRPr>
           </a:p>
         </p:txBody>
       </p:sp>
@@ -8301,6 +8711,12 @@
               </a:rPr>
               <a:t>***  (p = 0.004)</a:t>
             </a:r>
+            <a:endParaRPr sz="1800" b="1" i="0" dirty="0">
+              <a:solidFill>
+                <a:srgbClr val="FFD700"/>
+              </a:solidFill>
+              <a:latin typeface="Calibri"/>
+            </a:endParaRPr>
           </a:p>
         </p:txBody>
       </p:sp>
@@ -8366,6 +8782,11 @@
               </a:rPr>
               <a:t> → strong compression, issuers are actively buying T-bills</a:t>
             </a:r>
+            <a:endParaRPr lang="en-US" altLang="ko-KR" dirty="0">
+              <a:solidFill>
+                <a:schemeClr val="bg1"/>
+              </a:solidFill>
+            </a:endParaRPr>
           </a:p>
           <a:p>
             <a:r>
@@ -8408,6 +8829,11 @@
               </a:rPr>
               <a:t> → effect nearly disappears, issuers have enough cash and don't need to move T-bill markets</a:t>
             </a:r>
+            <a:endParaRPr lang="en-US" altLang="ko-KR" dirty="0">
+              <a:solidFill>
+                <a:schemeClr val="bg1"/>
+              </a:solidFill>
+            </a:endParaRPr>
           </a:p>
           <a:p>
             <a:pPr algn="l"/>
@@ -8430,6 +8856,12 @@
               <a:t>Higher liquid buffer dampens the spread compression.
 The fragility mechanism is confirmed.</a:t>
             </a:r>
+            <a:endParaRPr sz="1300" b="0" i="0" dirty="0">
+              <a:solidFill>
+                <a:schemeClr val="bg1"/>
+              </a:solidFill>
+              <a:latin typeface="Calibri"/>
+            </a:endParaRPr>
           </a:p>
         </p:txBody>
       </p:sp>
@@ -8473,7 +8905,6 @@
           <a:lstStyle/>
           <a:p>
             <a:pPr algn="ctr"/>
-            <a:endParaRPr/>
           </a:p>
         </p:txBody>
       </p:sp>
@@ -8509,18 +8940,18 @@
               </a:rPr>
               <a:t>Both channels confirmed in recent data. The mechanism is real — our full sample just needs more months to reach significance.</a:t>
             </a:r>
-          </a:p>
-        </p:txBody>
-      </p:sp>
-      <p:sp>
-        <p:nvSpPr>
-          <p:cNvPr id="24" name="TextBox 23">
-            <a:extLst>
-              <a:ext uri="{FF2B5EF4-FFF2-40B4-BE49-F238E27FC236}">
-                <a16:creationId xmlns:a16="http://schemas.microsoft.com/office/drawing/2014/main" id="{BA07A517-E0B4-B96D-4936-97A04A330EFC}"/>
-              </a:ext>
-            </a:extLst>
-          </p:cNvPr>
+            <a:endParaRPr sz="2400" b="1" i="0" dirty="0">
+              <a:solidFill>
+                <a:srgbClr val="FFFFFF"/>
+              </a:solidFill>
+              <a:latin typeface="Calibri"/>
+            </a:endParaRPr>
+          </a:p>
+        </p:txBody>
+      </p:sp>
+      <p:sp>
+        <p:nvSpPr>
+          <p:cNvPr id="24" name="TextBox 23"/>
           <p:cNvSpPr txBox="1"/>
           <p:nvPr/>
         </p:nvSpPr>
@@ -8669,7 +9100,6 @@
           <a:lstStyle/>
           <a:p>
             <a:pPr algn="ctr"/>
-            <a:endParaRPr/>
           </a:p>
         </p:txBody>
       </p:sp>
@@ -8705,6 +9135,12 @@
               </a:rPr>
               <a:t>Result 2: Is There a Safety Threshold?</a:t>
             </a:r>
+            <a:endParaRPr sz="2600" b="0" i="0">
+              <a:solidFill>
+                <a:srgbClr val="FFFFFF"/>
+              </a:solidFill>
+              <a:latin typeface="Calibri"/>
+            </a:endParaRPr>
           </a:p>
         </p:txBody>
       </p:sp>
@@ -8717,7 +9153,7 @@
           <p:nvPr/>
         </p:nvPicPr>
         <p:blipFill>
-          <a:blip r:embed="rId3"/>
+          <a:blip r:embed="rId1"/>
           <a:stretch>
             <a:fillRect/>
           </a:stretch>
@@ -8772,7 +9208,6 @@
           <a:lstStyle/>
           <a:p>
             <a:pPr algn="ctr"/>
-            <a:endParaRPr/>
           </a:p>
         </p:txBody>
       </p:sp>
@@ -8808,6 +9243,12 @@
               </a:rPr>
               <a:t>q*  =  13%</a:t>
             </a:r>
+            <a:endParaRPr sz="4000" b="1" i="0">
+              <a:solidFill>
+                <a:srgbClr val="FFFFFF"/>
+              </a:solidFill>
+              <a:latin typeface="Calibri"/>
+            </a:endParaRPr>
           </a:p>
         </p:txBody>
       </p:sp>
@@ -8843,6 +9284,12 @@
               </a:rPr>
               <a:t>of supply held as liquid cash</a:t>
             </a:r>
+            <a:endParaRPr sz="1400" b="0" i="1">
+              <a:solidFill>
+                <a:srgbClr val="AAC4E8"/>
+              </a:solidFill>
+              <a:latin typeface="Calibri"/>
+            </a:endParaRPr>
           </a:p>
         </p:txBody>
       </p:sp>
@@ -8886,7 +9333,6 @@
           <a:lstStyle/>
           <a:p>
             <a:pPr algn="ctr"/>
-            <a:endParaRPr/>
           </a:p>
         </p:txBody>
       </p:sp>
@@ -8922,6 +9368,12 @@
               </a:rPr>
               <a:t>What this means:</a:t>
             </a:r>
+            <a:endParaRPr sz="1400" b="1" i="0" dirty="0">
+              <a:solidFill>
+                <a:srgbClr val="1B3A72"/>
+              </a:solidFill>
+              <a:latin typeface="Calibri"/>
+            </a:endParaRPr>
           </a:p>
         </p:txBody>
       </p:sp>
@@ -8958,6 +9410,12 @@
               <a:t>Using Hansen (2000) threshold regression, we find a tipping point at 13% liquid cash reserves.
 Below this level — where most of our data falls — issuers don't have enough cash to absorb redemptions without selling T-bills.</a:t>
             </a:r>
+            <a:endParaRPr sz="1300" b="0" i="0" dirty="0">
+              <a:solidFill>
+                <a:srgbClr val="1A1A2E"/>
+              </a:solidFill>
+              <a:latin typeface="Calibri"/>
+            </a:endParaRPr>
           </a:p>
         </p:txBody>
       </p:sp>
@@ -8993,6 +9451,12 @@
               </a:rPr>
               <a:t> Lower SSR = better model fit at that threshold value</a:t>
             </a:r>
+            <a:endParaRPr sz="1000" b="0" i="1" dirty="0">
+              <a:solidFill>
+                <a:srgbClr val="555566"/>
+              </a:solidFill>
+              <a:latin typeface="Calibri"/>
+            </a:endParaRPr>
           </a:p>
         </p:txBody>
       </p:sp>
@@ -9028,6 +9492,12 @@
               </a:rPr>
               <a:t>Bootstrap p = 0.260  (suggestive — the direction is clear; significance grows as data accumulates past 2026)</a:t>
             </a:r>
+            <a:endParaRPr sz="1100" b="0" i="1" dirty="0">
+              <a:solidFill>
+                <a:srgbClr val="555566"/>
+              </a:solidFill>
+              <a:latin typeface="Calibri"/>
+            </a:endParaRPr>
           </a:p>
         </p:txBody>
       </p:sp>
@@ -9116,13 +9586,7 @@
       </p:sp>
       <p:sp>
         <p:nvSpPr>
-          <p:cNvPr id="20" name="TextBox 19">
-            <a:extLst>
-              <a:ext uri="{FF2B5EF4-FFF2-40B4-BE49-F238E27FC236}">
-                <a16:creationId xmlns:a16="http://schemas.microsoft.com/office/drawing/2014/main" id="{98527E45-E9E5-05FA-9333-C948EA50D280}"/>
-              </a:ext>
-            </a:extLst>
-          </p:cNvPr>
+          <p:cNvPr id="20" name="TextBox 19"/>
           <p:cNvSpPr txBox="1"/>
           <p:nvPr/>
         </p:nvSpPr>
@@ -9223,7 +9687,6 @@
           <a:lstStyle/>
           <a:p>
             <a:pPr algn="ctr"/>
-            <a:endParaRPr/>
           </a:p>
         </p:txBody>
       </p:sp>
@@ -9267,7 +9730,6 @@
           <a:lstStyle/>
           <a:p>
             <a:pPr algn="ctr"/>
-            <a:endParaRPr/>
           </a:p>
         </p:txBody>
       </p:sp>
@@ -9303,6 +9765,12 @@
               </a:rPr>
               <a:t>Below vs. Above the Threshold: Two Different Worlds</a:t>
             </a:r>
+            <a:endParaRPr sz="2600" b="0" i="0" dirty="0">
+              <a:solidFill>
+                <a:srgbClr val="FFFFFF"/>
+              </a:solidFill>
+              <a:latin typeface="Calibri"/>
+            </a:endParaRPr>
           </a:p>
         </p:txBody>
       </p:sp>
@@ -9338,6 +9806,12 @@
               </a:rPr>
               <a:t>12</a:t>
             </a:r>
+            <a:endParaRPr sz="1300" b="0" i="0">
+              <a:solidFill>
+                <a:srgbClr val="555566"/>
+              </a:solidFill>
+              <a:latin typeface="Calibri"/>
+            </a:endParaRPr>
           </a:p>
         </p:txBody>
       </p:sp>
@@ -9373,6 +9847,12 @@
               </a:rPr>
               <a:t>Splitting our 51 months at q* = 13% reveals a striking difference in how stablecoin growth affects Treasury markets:</a:t>
             </a:r>
+            <a:endParaRPr sz="1400" b="0" i="1" dirty="0">
+              <a:solidFill>
+                <a:srgbClr val="555566"/>
+              </a:solidFill>
+              <a:latin typeface="Calibri"/>
+            </a:endParaRPr>
           </a:p>
         </p:txBody>
       </p:sp>
@@ -9416,7 +9896,6 @@
           <a:lstStyle/>
           <a:p>
             <a:pPr algn="ctr"/>
-            <a:endParaRPr/>
           </a:p>
         </p:txBody>
       </p:sp>
@@ -9460,7 +9939,6 @@
           <a:lstStyle/>
           <a:p>
             <a:pPr algn="ctr"/>
-            <a:endParaRPr/>
           </a:p>
         </p:txBody>
       </p:sp>
@@ -9496,6 +9974,12 @@
               </a:rPr>
               <a:t>BELOW  13%  LIQUID BUFFER</a:t>
             </a:r>
+            <a:endParaRPr sz="1400" b="1" i="0">
+              <a:solidFill>
+                <a:srgbClr val="FFFFFF"/>
+              </a:solidFill>
+              <a:latin typeface="Calibri"/>
+            </a:endParaRPr>
           </a:p>
         </p:txBody>
       </p:sp>
@@ -9531,6 +10015,12 @@
               </a:rPr>
               <a:t>38 out of 51 months</a:t>
             </a:r>
+            <a:endParaRPr sz="1300" b="0" i="1">
+              <a:solidFill>
+                <a:srgbClr val="555566"/>
+              </a:solidFill>
+              <a:latin typeface="Calibri"/>
+            </a:endParaRPr>
           </a:p>
         </p:txBody>
       </p:sp>
@@ -9566,6 +10056,12 @@
               </a:rPr>
               <a:t>β  =  −6.97</a:t>
             </a:r>
+            <a:endParaRPr sz="4200" b="1" i="0" dirty="0">
+              <a:solidFill>
+                <a:srgbClr val="C0392B"/>
+              </a:solidFill>
+              <a:latin typeface="Calibri"/>
+            </a:endParaRPr>
           </a:p>
         </p:txBody>
       </p:sp>
@@ -9648,7 +10144,6 @@
           <a:lstStyle/>
           <a:p>
             <a:pPr algn="ctr"/>
-            <a:endParaRPr/>
           </a:p>
         </p:txBody>
       </p:sp>
@@ -9692,7 +10187,6 @@
           <a:lstStyle/>
           <a:p>
             <a:pPr algn="ctr"/>
-            <a:endParaRPr/>
           </a:p>
         </p:txBody>
       </p:sp>
@@ -9728,6 +10222,12 @@
               </a:rPr>
               <a:t>ABOVE  13%  LIQUID BUFFER</a:t>
             </a:r>
+            <a:endParaRPr sz="1400" b="1" i="0">
+              <a:solidFill>
+                <a:srgbClr val="FFFFFF"/>
+              </a:solidFill>
+              <a:latin typeface="Calibri"/>
+            </a:endParaRPr>
           </a:p>
         </p:txBody>
       </p:sp>
@@ -9763,6 +10263,12 @@
               </a:rPr>
               <a:t>13 out of 51 months</a:t>
             </a:r>
+            <a:endParaRPr sz="1300" b="0" i="1">
+              <a:solidFill>
+                <a:srgbClr val="555566"/>
+              </a:solidFill>
+              <a:latin typeface="Calibri"/>
+            </a:endParaRPr>
           </a:p>
         </p:txBody>
       </p:sp>
@@ -9798,6 +10304,12 @@
               </a:rPr>
               <a:t>β  =  +1.26</a:t>
             </a:r>
+            <a:endParaRPr sz="4200" b="1" i="0" dirty="0">
+              <a:solidFill>
+                <a:srgbClr val="1A7A4A"/>
+              </a:solidFill>
+              <a:latin typeface="Calibri"/>
+            </a:endParaRPr>
           </a:p>
         </p:txBody>
       </p:sp>
@@ -9880,7 +10392,6 @@
           <a:lstStyle/>
           <a:p>
             <a:pPr algn="ctr"/>
-            <a:endParaRPr/>
           </a:p>
         </p:txBody>
       </p:sp>
@@ -9934,18 +10445,18 @@
               </a:rPr>
               <a:t> Treasury markets from one that disrupts them.</a:t>
             </a:r>
-          </a:p>
-        </p:txBody>
-      </p:sp>
-      <p:sp>
-        <p:nvSpPr>
-          <p:cNvPr id="24" name="TextBox 23">
-            <a:extLst>
-              <a:ext uri="{FF2B5EF4-FFF2-40B4-BE49-F238E27FC236}">
-                <a16:creationId xmlns:a16="http://schemas.microsoft.com/office/drawing/2014/main" id="{F9D832A5-7171-4B55-9846-DC18A3C77AD8}"/>
-              </a:ext>
-            </a:extLst>
-          </p:cNvPr>
+            <a:endParaRPr sz="2400" b="1" i="0" dirty="0">
+              <a:solidFill>
+                <a:srgbClr val="FFFFFF"/>
+              </a:solidFill>
+              <a:latin typeface="Calibri"/>
+            </a:endParaRPr>
+          </a:p>
+        </p:txBody>
+      </p:sp>
+      <p:sp>
+        <p:nvSpPr>
+          <p:cNvPr id="24" name="TextBox 23"/>
           <p:cNvSpPr txBox="1"/>
           <p:nvPr/>
         </p:nvSpPr>
@@ -10046,7 +10557,6 @@
           <a:lstStyle/>
           <a:p>
             <a:pPr algn="ctr"/>
-            <a:endParaRPr/>
           </a:p>
         </p:txBody>
       </p:sp>
@@ -10150,6 +10660,13 @@
               </a:rPr>
               <a:t>Moving from monthly trends to daily "quasi-experimental" causal identification.</a:t>
             </a:r>
+            <a:endParaRPr lang="en-US" altLang="ko-KR" b="0" i="0" dirty="0">
+              <a:solidFill>
+                <a:srgbClr val="303030"/>
+              </a:solidFill>
+              <a:effectLst/>
+              <a:latin typeface="Google Sans Text"/>
+            </a:endParaRPr>
           </a:p>
           <a:p>
             <a:pPr marL="742950" lvl="1" indent="-285750" algn="l">
@@ -10186,6 +10703,13 @@
               </a:rPr>
               <a:t>, and the USDC/SVB failure.</a:t>
             </a:r>
+            <a:endParaRPr lang="en-US" altLang="ko-KR" b="0" i="0" dirty="0">
+              <a:solidFill>
+                <a:srgbClr val="303030"/>
+              </a:solidFill>
+              <a:effectLst/>
+              <a:latin typeface="Google Sans Text"/>
+            </a:endParaRPr>
           </a:p>
           <a:p>
             <a:pPr marL="742950" lvl="1" indent="-285750" algn="l">
@@ -10222,6 +10746,13 @@
               </a:rPr>
               <a:t> determines if a crisis causes a "sovereign-linked liquidity shock" or a "flight-to-safety".</a:t>
             </a:r>
+            <a:endParaRPr lang="en-US" altLang="ko-KR" b="0" i="0" dirty="0">
+              <a:solidFill>
+                <a:srgbClr val="303030"/>
+              </a:solidFill>
+              <a:effectLst/>
+              <a:latin typeface="Google Sans Text"/>
+            </a:endParaRPr>
           </a:p>
         </p:txBody>
       </p:sp>
@@ -10284,6 +10815,13 @@
               </a:rPr>
               <a:t>Testing a more recent sub-sample (N=39) where reporting and attestations are more transparent.</a:t>
             </a:r>
+            <a:endParaRPr lang="en-US" altLang="ko-KR" b="0" i="0" dirty="0">
+              <a:solidFill>
+                <a:srgbClr val="303030"/>
+              </a:solidFill>
+              <a:effectLst/>
+              <a:latin typeface="Google Sans Text"/>
+            </a:endParaRPr>
           </a:p>
           <a:p>
             <a:pPr marL="742950" lvl="1" indent="-285750" algn="l">
@@ -10300,6 +10838,13 @@
               </a:rPr>
               <a:t>Showing how the relationship between reserves and market spreads becomes even more statistically significant as the market matures.</a:t>
             </a:r>
+            <a:endParaRPr lang="en-US" altLang="ko-KR" b="0" i="0" dirty="0">
+              <a:solidFill>
+                <a:srgbClr val="303030"/>
+              </a:solidFill>
+              <a:effectLst/>
+              <a:latin typeface="Google Sans Text"/>
+            </a:endParaRPr>
           </a:p>
         </p:txBody>
       </p:sp>
@@ -10333,6 +10878,7 @@
               <a:rPr lang="en-US" altLang="ko-KR" b="1" dirty="0"/>
               <a:t>Policy Recommendation: The "13% Liquid Reserve Rule”</a:t>
             </a:r>
+            <a:endParaRPr lang="en-US" altLang="ko-KR" b="1" dirty="0"/>
           </a:p>
           <a:p>
             <a:pPr lvl="1">
@@ -10345,6 +10891,9 @@
               </a:rPr>
               <a:t>Translating the threshold regression into a concrete regulatory requirement.</a:t>
             </a:r>
+            <a:endParaRPr lang="en-US" altLang="ko-KR" dirty="0">
+              <a:effectLst/>
+            </a:endParaRPr>
           </a:p>
           <a:p>
             <a:pPr lvl="1">
@@ -10455,18 +11004,19 @@
               </a:rPr>
               <a:t>Final synthesis of how stablecoins both support and threaten the U.S. "exorbitant privilege".</a:t>
             </a:r>
-          </a:p>
-        </p:txBody>
-      </p:sp>
-      <p:sp>
-        <p:nvSpPr>
-          <p:cNvPr id="7" name="TextBox 6">
-            <a:extLst>
-              <a:ext uri="{FF2B5EF4-FFF2-40B4-BE49-F238E27FC236}">
-                <a16:creationId xmlns:a16="http://schemas.microsoft.com/office/drawing/2014/main" id="{C76420C3-7C26-9C1B-21E0-4E99EC845830}"/>
-              </a:ext>
-            </a:extLst>
-          </p:cNvPr>
+            <a:endParaRPr lang="en-US" altLang="ko-KR" b="0" i="0" dirty="0">
+              <a:solidFill>
+                <a:srgbClr val="303030"/>
+              </a:solidFill>
+              <a:effectLst/>
+              <a:latin typeface="Google Sans Text"/>
+            </a:endParaRPr>
+          </a:p>
+        </p:txBody>
+      </p:sp>
+      <p:sp>
+        <p:nvSpPr>
+          <p:cNvPr id="7" name="TextBox 6"/>
           <p:cNvSpPr txBox="1"/>
           <p:nvPr/>
         </p:nvSpPr>
@@ -10544,14 +11094,14 @@
           <p:nvPr/>
         </p:nvPicPr>
         <p:blipFill>
-          <a:blip r:embed="rId3">
+          <a:blip r:embed="rId1">
             <a:lum bright="70000" contrast="-70000"/>
             <a:extLst>
               <a:ext uri="{BEBA8EAE-BF5A-486C-A8C5-ECC9F3942E4B}">
                 <a14:imgProps xmlns:a14="http://schemas.microsoft.com/office/drawing/2010/main">
-                  <a14:imgLayer r:embed="rId4">
+                  <a14:imgLayer r:embed="rId2">
                     <a14:imgEffect>
-                      <a14:artisticPhotocopy detail="2"/>
+                      <a14:artisticPhotocopy trans="30000" detail="2"/>
                     </a14:imgEffect>
                   </a14:imgLayer>
                 </a14:imgProps>
@@ -10575,36 +11125,6 @@
           </a:prstGeom>
         </p:spPr>
       </p:pic>
-      <p:pic>
-        <p:nvPicPr>
-          <p:cNvPr id="4" name="그림 3"/>
-          <p:cNvPicPr>
-            <a:picLocks noChangeAspect="1"/>
-          </p:cNvPicPr>
-          <p:nvPr/>
-        </p:nvPicPr>
-        <p:blipFill>
-          <a:blip r:embed="rId5">
-            <a:extLst>
-              <a:ext uri="{28A0092B-C50C-407E-A947-70E740481C1C}">
-                <a14:useLocalDpi xmlns:a14="http://schemas.microsoft.com/office/drawing/2010/main" val="0"/>
-              </a:ext>
-            </a:extLst>
-          </a:blip>
-          <a:stretch>
-            <a:fillRect/>
-          </a:stretch>
-        </p:blipFill>
-        <p:spPr>
-          <a:xfrm>
-            <a:off x="440427" y="5009673"/>
-            <a:ext cx="1554891" cy="1554891"/>
-          </a:xfrm>
-          <a:prstGeom prst="rect">
-            <a:avLst/>
-          </a:prstGeom>
-        </p:spPr>
-      </p:pic>
       <p:sp>
         <p:nvSpPr>
           <p:cNvPr id="6" name="직사각형 5"/>
@@ -10661,6 +11181,13 @@
               </a:rPr>
               <a:t>THANK YOU</a:t>
             </a:r>
+            <a:endParaRPr lang="en-US" altLang="ko-KR" sz="2400" dirty="0">
+              <a:solidFill>
+                <a:prstClr val="white"/>
+              </a:solidFill>
+              <a:latin typeface="Hiragino Kaku Gothic Std W8" panose="020B0800000000000000" pitchFamily="34" charset="-128"/>
+              <a:ea typeface="Hiragino Kaku Gothic Std W8" panose="020B0800000000000000" pitchFamily="34" charset="-128"/>
+            </a:endParaRPr>
           </a:p>
           <a:p>
             <a:pPr algn="ctr" defTabSz="914400" latinLnBrk="1">
@@ -10706,6 +11233,11 @@
               </a:rPr>
               <a:t>Yonsei GSIS 2026-1 </a:t>
             </a:r>
+            <a:endParaRPr lang="en-US" altLang="ko-KR" sz="1800" b="1" dirty="0">
+              <a:solidFill>
+                <a:schemeClr val="bg1"/>
+              </a:solidFill>
+            </a:endParaRPr>
           </a:p>
           <a:p>
             <a:r>
@@ -10848,7 +11380,6 @@
           <a:lstStyle/>
           <a:p>
             <a:pPr algn="ctr"/>
-            <a:endParaRPr/>
           </a:p>
         </p:txBody>
       </p:sp>
@@ -10884,6 +11415,12 @@
               </a:rPr>
               <a:t>Roadmap</a:t>
             </a:r>
+            <a:endParaRPr sz="2600" b="0" i="0">
+              <a:solidFill>
+                <a:srgbClr val="FFFFFF"/>
+              </a:solidFill>
+              <a:latin typeface="Calibri"/>
+            </a:endParaRPr>
           </a:p>
         </p:txBody>
       </p:sp>
@@ -10935,6 +11472,12 @@
               </a:rPr>
               <a:t>❖  Motivation — why stablecoins matter for sovereign debt</a:t>
             </a:r>
+            <a:endParaRPr sz="2000" b="0" i="0" dirty="0">
+              <a:solidFill>
+                <a:srgbClr val="1A1A2E"/>
+              </a:solidFill>
+              <a:latin typeface="Calibri"/>
+            </a:endParaRPr>
           </a:p>
           <a:p>
             <a:pPr algn="l">
@@ -10951,6 +11494,12 @@
               </a:rPr>
               <a:t>❖  The New Triffin Dilemma — our core argument</a:t>
             </a:r>
+            <a:endParaRPr sz="2000" b="0" i="0" dirty="0">
+              <a:solidFill>
+                <a:srgbClr val="1A1A2E"/>
+              </a:solidFill>
+              <a:latin typeface="Calibri"/>
+            </a:endParaRPr>
           </a:p>
           <a:p>
             <a:pPr algn="l">
@@ -10967,6 +11516,12 @@
               </a:rPr>
               <a:t>❖  Theoretical extension of Maggiori (2017)</a:t>
             </a:r>
+            <a:endParaRPr sz="2000" b="0" i="0" dirty="0">
+              <a:solidFill>
+                <a:srgbClr val="1A1A2E"/>
+              </a:solidFill>
+              <a:latin typeface="Calibri"/>
+            </a:endParaRPr>
           </a:p>
           <a:p>
             <a:pPr algn="l">
@@ -10983,6 +11538,12 @@
               </a:rPr>
               <a:t>❖  Data &amp; Methodology</a:t>
             </a:r>
+            <a:endParaRPr sz="2000" b="0" i="0" dirty="0">
+              <a:solidFill>
+                <a:srgbClr val="1A1A2E"/>
+              </a:solidFill>
+              <a:latin typeface="Calibri"/>
+            </a:endParaRPr>
           </a:p>
           <a:p>
             <a:pPr algn="l">
@@ -10999,6 +11560,12 @@
               </a:rPr>
               <a:t>❖  Result 1 — Privilege amplification regression</a:t>
             </a:r>
+            <a:endParaRPr sz="2000" b="0" i="0" dirty="0">
+              <a:solidFill>
+                <a:srgbClr val="1A1A2E"/>
+              </a:solidFill>
+              <a:latin typeface="Calibri"/>
+            </a:endParaRPr>
           </a:p>
           <a:p>
             <a:pPr algn="l">
@@ -11072,6 +11639,12 @@
               </a:rPr>
               <a:t>❖  Result 3 — Buffer-conditioned event study</a:t>
             </a:r>
+            <a:endParaRPr sz="2000" b="0" i="0" dirty="0">
+              <a:solidFill>
+                <a:srgbClr val="1A1A2E"/>
+              </a:solidFill>
+              <a:latin typeface="Calibri"/>
+            </a:endParaRPr>
           </a:p>
           <a:p>
             <a:pPr algn="l">
@@ -11088,6 +11661,12 @@
               </a:rPr>
               <a:t>❖  Conclusion &amp; Policy implications</a:t>
             </a:r>
+            <a:endParaRPr sz="2000" b="0" i="0" dirty="0">
+              <a:solidFill>
+                <a:srgbClr val="1A1A2E"/>
+              </a:solidFill>
+              <a:latin typeface="Calibri"/>
+            </a:endParaRPr>
           </a:p>
         </p:txBody>
       </p:sp>
@@ -11099,8 +11678,8 @@
         </p:nvSpPr>
         <p:spPr>
           <a:xfrm>
-            <a:off x="10436088" y="206829"/>
-            <a:ext cx="1570856" cy="369332"/>
+            <a:off x="10055225" y="207010"/>
+            <a:ext cx="1951990" cy="368300"/>
           </a:xfrm>
           <a:prstGeom prst="rect">
             <a:avLst/>
@@ -11194,7 +11773,6 @@
           <a:lstStyle/>
           <a:p>
             <a:pPr algn="ctr"/>
-            <a:endParaRPr/>
           </a:p>
         </p:txBody>
       </p:sp>
@@ -11238,7 +11816,6 @@
           <a:lstStyle/>
           <a:p>
             <a:pPr algn="ctr"/>
-            <a:endParaRPr/>
           </a:p>
         </p:txBody>
       </p:sp>
@@ -11274,6 +11851,12 @@
               </a:rPr>
               <a:t>Motivation: Stablecoins as Treasury Buyers</a:t>
             </a:r>
+            <a:endParaRPr sz="2600" b="0" i="0">
+              <a:solidFill>
+                <a:srgbClr val="FFFFFF"/>
+              </a:solidFill>
+              <a:latin typeface="Calibri"/>
+            </a:endParaRPr>
           </a:p>
         </p:txBody>
       </p:sp>
@@ -11309,6 +11892,12 @@
               </a:rPr>
               <a:t>3</a:t>
             </a:r>
+            <a:endParaRPr sz="1300" b="0" i="0">
+              <a:solidFill>
+                <a:srgbClr val="555566"/>
+              </a:solidFill>
+              <a:latin typeface="Calibri"/>
+            </a:endParaRPr>
           </a:p>
         </p:txBody>
       </p:sp>
@@ -11339,7 +11928,6 @@
                 <a:spcPts val="0"/>
               </a:spcBef>
             </a:pPr>
-            <a:endParaRPr/>
           </a:p>
           <a:p>
             <a:pPr algn="l">
@@ -11356,6 +11944,12 @@
               </a:rPr>
               <a:t>Key Market Trends</a:t>
             </a:r>
+            <a:endParaRPr sz="1800" b="1" i="0">
+              <a:solidFill>
+                <a:srgbClr val="1B3A72"/>
+              </a:solidFill>
+              <a:latin typeface="Calibri"/>
+            </a:endParaRPr>
           </a:p>
           <a:p>
             <a:pPr algn="l">
@@ -11372,6 +11966,12 @@
               </a:rPr>
               <a:t>❖  Growth: Combined market cap surged from under $50bn (2021) to over $300bn (2026)</a:t>
             </a:r>
+            <a:endParaRPr sz="1700" b="0" i="0">
+              <a:solidFill>
+                <a:srgbClr val="1A1A2E"/>
+              </a:solidFill>
+              <a:latin typeface="Calibri"/>
+            </a:endParaRPr>
           </a:p>
           <a:p>
             <a:pPr algn="l">
@@ -11388,6 +11988,12 @@
               </a:rPr>
               <a:t>❖  Usage: 30%+ of on-chain crypto transactions involve stablecoins</a:t>
             </a:r>
+            <a:endParaRPr sz="1700" b="0" i="0">
+              <a:solidFill>
+                <a:srgbClr val="1A1A2E"/>
+              </a:solidFill>
+              <a:latin typeface="Calibri"/>
+            </a:endParaRPr>
           </a:p>
           <a:p>
             <a:pPr algn="l">
@@ -11404,6 +12010,12 @@
               </a:rPr>
               <a:t>❖  Regulation: US, EU, Japan, and Hong Kong each finalising reserve legislation</a:t>
             </a:r>
+            <a:endParaRPr sz="1700" b="0" i="0">
+              <a:solidFill>
+                <a:srgbClr val="1A1A2E"/>
+              </a:solidFill>
+              <a:latin typeface="Calibri"/>
+            </a:endParaRPr>
           </a:p>
           <a:p>
             <a:pPr algn="l">
@@ -11420,6 +12032,12 @@
               </a:rPr>
               <a:t>❖  Scale: Tether alone holds $127bn in US Treasuries (Q2 2025) — comparable to mid-sized sovereigns</a:t>
             </a:r>
+            <a:endParaRPr sz="1700" b="0" i="0">
+              <a:solidFill>
+                <a:srgbClr val="1A1A2E"/>
+              </a:solidFill>
+              <a:latin typeface="Calibri"/>
+            </a:endParaRPr>
           </a:p>
           <a:p>
             <a:pPr algn="l">
@@ -11436,6 +12054,12 @@
               </a:rPr>
               <a:t>❖  Projection: $1–2 trillion ecosystem within this decade</a:t>
             </a:r>
+            <a:endParaRPr sz="1700" b="0" i="0">
+              <a:solidFill>
+                <a:srgbClr val="1A1A2E"/>
+              </a:solidFill>
+              <a:latin typeface="Calibri"/>
+            </a:endParaRPr>
           </a:p>
         </p:txBody>
       </p:sp>
@@ -11479,7 +12103,6 @@
           <a:lstStyle/>
           <a:p>
             <a:pPr algn="ctr"/>
-            <a:endParaRPr/>
           </a:p>
         </p:txBody>
       </p:sp>
@@ -11515,6 +12138,12 @@
               </a:rPr>
               <a:t>$300bn+</a:t>
             </a:r>
+            <a:endParaRPr sz="2800" b="1" i="0">
+              <a:solidFill>
+                <a:srgbClr val="FFFFFF"/>
+              </a:solidFill>
+              <a:latin typeface="Calibri"/>
+            </a:endParaRPr>
           </a:p>
         </p:txBody>
       </p:sp>
@@ -11550,6 +12179,12 @@
               </a:rPr>
               <a:t>Total USD-pegged supply (2026)</a:t>
             </a:r>
+            <a:endParaRPr sz="1200" b="0" i="1">
+              <a:solidFill>
+                <a:srgbClr val="AAC4E8"/>
+              </a:solidFill>
+              <a:latin typeface="Calibri"/>
+            </a:endParaRPr>
           </a:p>
         </p:txBody>
       </p:sp>
@@ -11593,7 +12228,6 @@
           <a:lstStyle/>
           <a:p>
             <a:pPr algn="ctr"/>
-            <a:endParaRPr/>
           </a:p>
         </p:txBody>
       </p:sp>
@@ -11629,6 +12263,12 @@
               </a:rPr>
               <a:t>$127bn</a:t>
             </a:r>
+            <a:endParaRPr sz="2800" b="1" i="0">
+              <a:solidFill>
+                <a:srgbClr val="FFFFFF"/>
+              </a:solidFill>
+              <a:latin typeface="Calibri"/>
+            </a:endParaRPr>
           </a:p>
         </p:txBody>
       </p:sp>
@@ -11664,6 +12304,12 @@
               </a:rPr>
               <a:t>Tether T-bill holdings (Q2 2025)</a:t>
             </a:r>
+            <a:endParaRPr sz="1200" b="0" i="1">
+              <a:solidFill>
+                <a:srgbClr val="AAC4E8"/>
+              </a:solidFill>
+              <a:latin typeface="Calibri"/>
+            </a:endParaRPr>
           </a:p>
         </p:txBody>
       </p:sp>
@@ -11707,7 +12353,6 @@
           <a:lstStyle/>
           <a:p>
             <a:pPr algn="ctr"/>
-            <a:endParaRPr/>
           </a:p>
         </p:txBody>
       </p:sp>
@@ -11743,6 +12388,12 @@
               </a:rPr>
               <a:t>$1–2 tn</a:t>
             </a:r>
+            <a:endParaRPr sz="2800" b="1" i="0">
+              <a:solidFill>
+                <a:srgbClr val="FFFFFF"/>
+              </a:solidFill>
+              <a:latin typeface="Calibri"/>
+            </a:endParaRPr>
           </a:p>
         </p:txBody>
       </p:sp>
@@ -11778,6 +12429,12 @@
               </a:rPr>
               <a:t>Projected ecosystem size</a:t>
             </a:r>
+            <a:endParaRPr sz="1200" b="0" i="1">
+              <a:solidFill>
+                <a:srgbClr val="AAC4E8"/>
+              </a:solidFill>
+              <a:latin typeface="Calibri"/>
+            </a:endParaRPr>
           </a:p>
         </p:txBody>
       </p:sp>
@@ -11789,8 +12446,8 @@
         </p:nvSpPr>
         <p:spPr>
           <a:xfrm>
-            <a:off x="6492240" y="4745736"/>
-            <a:ext cx="5303520" cy="1097280"/>
+            <a:off x="6492240" y="4745990"/>
+            <a:ext cx="5303520" cy="862330"/>
           </a:xfrm>
           <a:prstGeom prst="rect">
             <a:avLst/>
@@ -11821,7 +12478,6 @@
           <a:lstStyle/>
           <a:p>
             <a:pPr algn="ctr"/>
-            <a:endParaRPr/>
           </a:p>
         </p:txBody>
       </p:sp>
@@ -11833,7 +12489,7 @@
         </p:nvSpPr>
         <p:spPr>
           <a:xfrm>
-            <a:off x="6583680" y="4818888"/>
+            <a:off x="6583680" y="4714113"/>
             <a:ext cx="5120640" cy="566928"/>
           </a:xfrm>
           <a:prstGeom prst="rect">
@@ -11857,6 +12513,12 @@
               </a:rPr>
               <a:t>4</a:t>
             </a:r>
+            <a:endParaRPr sz="2800" b="1" i="0">
+              <a:solidFill>
+                <a:srgbClr val="FFFFFF"/>
+              </a:solidFill>
+              <a:latin typeface="Calibri"/>
+            </a:endParaRPr>
           </a:p>
         </p:txBody>
       </p:sp>
@@ -11868,7 +12530,7 @@
         </p:nvSpPr>
         <p:spPr>
           <a:xfrm>
-            <a:off x="6583680" y="5404104"/>
+            <a:off x="6583680" y="5327904"/>
             <a:ext cx="5120640" cy="365760"/>
           </a:xfrm>
           <a:prstGeom prst="rect">
@@ -11892,6 +12554,12 @@
               </a:rPr>
               <a:t>Jurisdictions finalising legislation</a:t>
             </a:r>
+            <a:endParaRPr sz="1200" b="0" i="1">
+              <a:solidFill>
+                <a:srgbClr val="AAC4E8"/>
+              </a:solidFill>
+              <a:latin typeface="Calibri"/>
+            </a:endParaRPr>
           </a:p>
         </p:txBody>
       </p:sp>
@@ -11903,7 +12571,7 @@
         </p:nvSpPr>
         <p:spPr>
           <a:xfrm>
-            <a:off x="0" y="5596128"/>
+            <a:off x="0" y="5777103"/>
             <a:ext cx="12188952" cy="1097280"/>
           </a:xfrm>
           <a:prstGeom prst="rect">
@@ -11935,7 +12603,6 @@
           <a:lstStyle/>
           <a:p>
             <a:pPr algn="ctr"/>
-            <a:endParaRPr/>
           </a:p>
         </p:txBody>
       </p:sp>
@@ -11947,7 +12614,7 @@
         </p:nvSpPr>
         <p:spPr>
           <a:xfrm>
-            <a:off x="548640" y="5760720"/>
+            <a:off x="548640" y="5922645"/>
             <a:ext cx="11274552" cy="804672"/>
           </a:xfrm>
           <a:prstGeom prst="rect">
@@ -11971,25 +12638,25 @@
               </a:rPr>
               <a:t>The same structural role that deepens US safe-asset demand also embeds a fragility that can rapidly reverse it.</a:t>
             </a:r>
-          </a:p>
-        </p:txBody>
-      </p:sp>
-      <p:sp>
-        <p:nvSpPr>
-          <p:cNvPr id="25" name="TextBox 24">
-            <a:extLst>
-              <a:ext uri="{FF2B5EF4-FFF2-40B4-BE49-F238E27FC236}">
-                <a16:creationId xmlns:a16="http://schemas.microsoft.com/office/drawing/2014/main" id="{98B60600-ACF2-822B-9D24-5C0779E01E38}"/>
-              </a:ext>
-            </a:extLst>
-          </p:cNvPr>
+            <a:endParaRPr sz="1800" b="1" i="0">
+              <a:solidFill>
+                <a:srgbClr val="FFFFFF"/>
+              </a:solidFill>
+              <a:latin typeface="Calibri"/>
+            </a:endParaRPr>
+          </a:p>
+        </p:txBody>
+      </p:sp>
+      <p:sp>
+        <p:nvSpPr>
+          <p:cNvPr id="25" name="TextBox 24"/>
           <p:cNvSpPr txBox="1"/>
           <p:nvPr/>
         </p:nvSpPr>
         <p:spPr>
           <a:xfrm>
-            <a:off x="10436088" y="206829"/>
-            <a:ext cx="1570856" cy="369332"/>
+            <a:off x="10045065" y="207010"/>
+            <a:ext cx="1962150" cy="368300"/>
           </a:xfrm>
           <a:prstGeom prst="rect">
             <a:avLst/>
@@ -12083,7 +12750,6 @@
           <a:lstStyle/>
           <a:p>
             <a:pPr algn="ctr"/>
-            <a:endParaRPr/>
           </a:p>
         </p:txBody>
       </p:sp>
@@ -12127,7 +12793,6 @@
           <a:lstStyle/>
           <a:p>
             <a:pPr algn="ctr"/>
-            <a:endParaRPr/>
           </a:p>
         </p:txBody>
       </p:sp>
@@ -12140,7 +12805,7 @@
         <p:spPr>
           <a:xfrm>
             <a:off x="274320" y="91440"/>
-            <a:ext cx="10515600" cy="713232"/>
+            <a:ext cx="10515600" cy="491490"/>
           </a:xfrm>
           <a:prstGeom prst="rect">
             <a:avLst/>
@@ -12155,14 +12820,20 @@
           <a:p>
             <a:pPr algn="l"/>
             <a:r>
-              <a:rPr sz="2600" b="0" i="0">
+              <a:rPr lang="en-US" altLang="en-US" sz="2600" b="0" i="0">
                 <a:solidFill>
                   <a:srgbClr val="FFFFFF"/>
                 </a:solidFill>
                 <a:latin typeface="Calibri"/>
               </a:rPr>
-              <a:t>The New Triffin Dilemma</a:t>
-            </a:r>
+              <a:t>Exorbitant Privilege and the Original Triffin Dilemma</a:t>
+            </a:r>
+            <a:endParaRPr lang="en-US" altLang="en-US" sz="2600" b="0" i="0">
+              <a:solidFill>
+                <a:srgbClr val="FFFFFF"/>
+              </a:solidFill>
+              <a:latin typeface="Calibri"/>
+            </a:endParaRPr>
           </a:p>
         </p:txBody>
       </p:sp>
@@ -12174,7 +12845,7 @@
         </p:nvSpPr>
         <p:spPr>
           <a:xfrm>
-            <a:off x="365760" y="1367155"/>
+            <a:off x="365760" y="4917440"/>
             <a:ext cx="11430000" cy="1310640"/>
           </a:xfrm>
           <a:prstGeom prst="rect">
@@ -12206,7 +12877,6 @@
           <a:lstStyle/>
           <a:p>
             <a:pPr algn="ctr"/>
-            <a:endParaRPr/>
           </a:p>
         </p:txBody>
       </p:sp>
@@ -12218,7 +12888,7 @@
         </p:nvSpPr>
         <p:spPr>
           <a:xfrm>
-            <a:off x="502920" y="1377315"/>
+            <a:off x="502920" y="4995545"/>
             <a:ext cx="11155680" cy="1154430"/>
           </a:xfrm>
           <a:prstGeom prst="rect">
@@ -12246,19 +12916,63 @@
               </a:rPr>
               <a:t> A reserve currency country must supply sufficient safe assets to meet global demand — but this requires running structural current account deficits that progressively undermine confidence in the currency itself. The system depends on the very condition that makes it unsustainable.</a:t>
             </a:r>
-          </a:p>
-        </p:txBody>
-      </p:sp>
-      <p:sp>
-        <p:nvSpPr>
-          <p:cNvPr id="8" name="TextBox 7"/>
+            <a:endParaRPr lang="en-US" altLang="en-US" sz="1900" b="0" i="1" dirty="0">
+              <a:solidFill>
+                <a:srgbClr val="1A1A2E"/>
+              </a:solidFill>
+              <a:latin typeface="Calibri"/>
+            </a:endParaRPr>
+          </a:p>
+        </p:txBody>
+      </p:sp>
+      <p:sp>
+        <p:nvSpPr>
+          <p:cNvPr id="20" name="TextBox 19"/>
           <p:cNvSpPr txBox="1"/>
           <p:nvPr/>
         </p:nvSpPr>
         <p:spPr>
           <a:xfrm>
-            <a:off x="365760" y="2875279"/>
-            <a:ext cx="11430000" cy="347472"/>
+            <a:off x="9939130" y="206829"/>
+            <a:ext cx="2067814" cy="369332"/>
+          </a:xfrm>
+          <a:prstGeom prst="rect">
+            <a:avLst/>
+          </a:prstGeom>
+          <a:noFill/>
+        </p:spPr>
+        <p:txBody>
+          <a:bodyPr wrap="square" rtlCol="0">
+            <a:spAutoFit/>
+          </a:bodyPr>
+          <a:lstStyle/>
+          <a:p>
+            <a:r>
+              <a:rPr kumimoji="1" lang="en-US" altLang="ko-KR" dirty="0">
+                <a:solidFill>
+                  <a:schemeClr val="bg1"/>
+                </a:solidFill>
+              </a:rPr>
+              <a:t>Oybek Page4/15</a:t>
+            </a:r>
+            <a:endParaRPr kumimoji="1" lang="ko-KR" altLang="en-US" dirty="0">
+              <a:solidFill>
+                <a:schemeClr val="bg1"/>
+              </a:solidFill>
+            </a:endParaRPr>
+          </a:p>
+        </p:txBody>
+      </p:sp>
+      <p:sp>
+        <p:nvSpPr>
+          <p:cNvPr id="5" name="TextBox 7"/>
+          <p:cNvSpPr txBox="1"/>
+          <p:nvPr/>
+        </p:nvSpPr>
+        <p:spPr>
+          <a:xfrm>
+            <a:off x="355600" y="3061334"/>
+            <a:ext cx="11430000" cy="352425"/>
           </a:xfrm>
           <a:prstGeom prst="rect">
             <a:avLst/>
@@ -12273,33 +12987,39 @@
           <a:p>
             <a:pPr algn="l"/>
             <a:r>
-              <a:rPr sz="1700" b="1" i="0">
+              <a:rPr lang="en-US" sz="1700" b="1" i="0">
                 <a:solidFill>
                   <a:srgbClr val="1B3A72"/>
                 </a:solidFill>
                 <a:latin typeface="Calibri"/>
               </a:rPr>
-              <a:t>Our analogue for stablecoin issuers:</a:t>
-            </a:r>
-          </a:p>
-        </p:txBody>
-      </p:sp>
-      <p:sp>
-        <p:nvSpPr>
-          <p:cNvPr id="9" name="Rectangle 8"/>
+              <a:t>Research Topic</a:t>
+            </a:r>
+            <a:endParaRPr lang="en-US" sz="1700" b="1" i="0">
+              <a:solidFill>
+                <a:srgbClr val="1B3A72"/>
+              </a:solidFill>
+              <a:latin typeface="Calibri"/>
+            </a:endParaRPr>
+          </a:p>
+        </p:txBody>
+      </p:sp>
+      <p:sp>
+        <p:nvSpPr>
+          <p:cNvPr id="17" name="Rectangle 16"/>
           <p:cNvSpPr/>
           <p:nvPr/>
         </p:nvSpPr>
         <p:spPr>
           <a:xfrm>
-            <a:off x="358140" y="3333115"/>
-            <a:ext cx="5363845" cy="384175"/>
+            <a:off x="358140" y="1516380"/>
+            <a:ext cx="11430000" cy="1424940"/>
           </a:xfrm>
           <a:prstGeom prst="rect">
             <a:avLst/>
           </a:prstGeom>
           <a:solidFill>
-            <a:srgbClr val="1A7A4A"/>
+            <a:srgbClr val="F0F4F8"/>
           </a:solidFill>
           <a:ln>
             <a:noFill/>
@@ -12324,20 +13044,19 @@
           <a:lstStyle/>
           <a:p>
             <a:pPr algn="ctr"/>
-            <a:endParaRPr/>
-          </a:p>
-        </p:txBody>
-      </p:sp>
-      <p:sp>
-        <p:nvSpPr>
-          <p:cNvPr id="10" name="TextBox 9"/>
+          </a:p>
+        </p:txBody>
+      </p:sp>
+      <p:sp>
+        <p:nvSpPr>
+          <p:cNvPr id="18" name="TextBox 6"/>
           <p:cNvSpPr txBox="1"/>
           <p:nvPr/>
         </p:nvSpPr>
         <p:spPr>
           <a:xfrm>
-            <a:off x="742315" y="3375025"/>
-            <a:ext cx="5078730" cy="306705"/>
+            <a:off x="502920" y="1708785"/>
+            <a:ext cx="11155680" cy="1154430"/>
           </a:xfrm>
           <a:prstGeom prst="rect">
             <a:avLst/>
@@ -12346,39 +13065,59 @@
         </p:spPr>
         <p:txBody>
           <a:bodyPr wrap="square">
-            <a:spAutoFit/>
+            <a:noAutofit/>
           </a:bodyPr>
           <a:lstStyle/>
           <a:p>
-            <a:pPr algn="ctr"/>
-            <a:r>
-              <a:rPr sz="1400" b="1" i="0">
-                <a:solidFill>
-                  <a:srgbClr val="FFFFFF"/>
-                </a:solidFill>
-                <a:latin typeface="Calibri"/>
-              </a:rPr>
-              <a:t>Normal times ✅</a:t>
-            </a:r>
-          </a:p>
-        </p:txBody>
-      </p:sp>
-      <p:sp>
-        <p:nvSpPr>
-          <p:cNvPr id="11" name="Rectangle 10"/>
+            <a:pPr algn="l">
+              <a:spcBef>
+                <a:spcPts val="0"/>
+              </a:spcBef>
+            </a:pPr>
+            <a:r>
+              <a:rPr lang="en-US" altLang="en-US" sz="1900" b="0" i="1" dirty="0">
+                <a:solidFill>
+                  <a:srgbClr val="1A1A2E"/>
+                </a:solidFill>
+                <a:latin typeface="Calibri"/>
+              </a:rPr>
+              <a:t>Bullet points about </a:t>
+            </a:r>
+            <a:r>
+              <a:rPr lang="en-US" altLang="en-US" sz="1900" b="1" i="1" dirty="0">
+                <a:solidFill>
+                  <a:srgbClr val="1A1A2E"/>
+                </a:solidFill>
+                <a:latin typeface="Calibri"/>
+                <a:sym typeface="+mn-ea"/>
+              </a:rPr>
+              <a:t> Exorbitant Privilege</a:t>
+            </a:r>
+            <a:endParaRPr lang="en-US" altLang="en-US" sz="1900" b="0" i="1" dirty="0">
+              <a:solidFill>
+                <a:srgbClr val="1A1A2E"/>
+              </a:solidFill>
+              <a:latin typeface="Calibri"/>
+            </a:endParaRPr>
+          </a:p>
+        </p:txBody>
+      </p:sp>
+      <p:sp>
+        <p:nvSpPr>
+          <p:cNvPr id="21" name="Rectangle 20"/>
           <p:cNvSpPr/>
           <p:nvPr/>
         </p:nvSpPr>
         <p:spPr>
           <a:xfrm>
-            <a:off x="360045" y="3724910"/>
-            <a:ext cx="5357495" cy="2327275"/>
+            <a:off x="365760" y="3430270"/>
+            <a:ext cx="11430000" cy="816610"/>
           </a:xfrm>
           <a:prstGeom prst="rect">
             <a:avLst/>
           </a:prstGeom>
           <a:solidFill>
-            <a:srgbClr val="E6F4EA"/>
+            <a:srgbClr val="F0F4F8"/>
           </a:solidFill>
           <a:ln>
             <a:noFill/>
@@ -12403,20 +13142,19 @@
           <a:lstStyle/>
           <a:p>
             <a:pPr algn="ctr"/>
-            <a:endParaRPr/>
-          </a:p>
-        </p:txBody>
-      </p:sp>
-      <p:sp>
-        <p:nvSpPr>
-          <p:cNvPr id="12" name="TextBox 11"/>
+          </a:p>
+        </p:txBody>
+      </p:sp>
+      <p:sp>
+        <p:nvSpPr>
+          <p:cNvPr id="22" name="TextBox 6"/>
           <p:cNvSpPr txBox="1"/>
           <p:nvPr/>
         </p:nvSpPr>
         <p:spPr>
           <a:xfrm>
-            <a:off x="492760" y="3827780"/>
-            <a:ext cx="5231130" cy="2121535"/>
+            <a:off x="485140" y="3517900"/>
+            <a:ext cx="11300460" cy="668020"/>
           </a:xfrm>
           <a:prstGeom prst="rect">
             <a:avLst/>
@@ -12429,170 +13167,39 @@
           </a:bodyPr>
           <a:lstStyle/>
           <a:p>
-            <a:pPr>
+            <a:pPr algn="ctr">
               <a:spcBef>
                 <a:spcPts val="0"/>
               </a:spcBef>
             </a:pPr>
-            <a:endParaRPr sz="1200"/>
-          </a:p>
-          <a:p>
-            <a:pPr algn="l">
-              <a:spcBef>
-                <a:spcPts val="600"/>
-              </a:spcBef>
-            </a:pPr>
-            <a:r>
-              <a:rPr lang="en-US" altLang="en-US" sz="1200" b="0" i="0">
+            <a:r>
+              <a:rPr lang="en-US" altLang="en-US" sz="1900" b="1" i="1" dirty="0">
                 <a:solidFill>
                   <a:srgbClr val="1A1A2E"/>
                 </a:solidFill>
                 <a:latin typeface="Calibri"/>
               </a:rPr>
-              <a:t>•	Stablecoin issuance → mechanical T-bill acquisition by issuers</a:t>
-            </a:r>
-            <a:br>
-              <a:rPr lang="en-US" altLang="en-US" sz="1200" b="0" i="0">
-                <a:solidFill>
-                  <a:srgbClr val="1A1A2E"/>
-                </a:solidFill>
-                <a:latin typeface="Calibri"/>
-              </a:rPr>
-            </a:br>
-            <a:endParaRPr lang="en-US" altLang="en-US" sz="1200" b="0" i="0">
+              <a:t>Stablecoins and Exorbitant Privilege: A New Channel for Safe-Asset Demant and Its Systematic Fragility</a:t>
+            </a:r>
+            <a:endParaRPr lang="en-US" altLang="en-US" sz="1900" b="1" i="1" dirty="0">
               <a:solidFill>
                 <a:srgbClr val="1A1A2E"/>
               </a:solidFill>
               <a:latin typeface="Calibri"/>
             </a:endParaRPr>
           </a:p>
-          <a:p>
-            <a:pPr algn="l">
-              <a:spcBef>
-                <a:spcPts val="600"/>
-              </a:spcBef>
-            </a:pPr>
-            <a:r>
-              <a:rPr lang="en-US" altLang="en-US" sz="1200" b="0" i="0">
-                <a:solidFill>
-                  <a:srgbClr val="1A1A2E"/>
-                </a:solidFill>
-                <a:latin typeface="Calibri"/>
-              </a:rPr>
-              <a:t>•	Structural increase in safe-asset demand for US Treasuries</a:t>
-            </a:r>
-            <a:br>
-              <a:rPr lang="en-US" altLang="en-US" sz="1200" b="0" i="0">
-                <a:solidFill>
-                  <a:srgbClr val="1A1A2E"/>
-                </a:solidFill>
-                <a:latin typeface="Calibri"/>
-              </a:rPr>
-            </a:br>
-            <a:br>
-              <a:rPr lang="en-US" altLang="en-US" sz="1200" b="0" i="0">
-                <a:solidFill>
-                  <a:srgbClr val="1A1A2E"/>
-                </a:solidFill>
-                <a:latin typeface="Calibri"/>
-              </a:rPr>
-            </a:br>
-            <a:r>
-              <a:rPr lang="en-US" altLang="en-US" sz="1200" b="0" i="0">
-                <a:solidFill>
-                  <a:srgbClr val="1A1A2E"/>
-                </a:solidFill>
-                <a:latin typeface="Calibri"/>
-              </a:rPr>
-              <a:t>•	OIS–Treasury spread compression: yield falls below SOFR baseline</a:t>
-            </a:r>
-            <a:br>
-              <a:rPr lang="en-US" altLang="en-US" sz="1200" b="0" i="0">
-                <a:solidFill>
-                  <a:srgbClr val="1A1A2E"/>
-                </a:solidFill>
-                <a:latin typeface="Calibri"/>
-              </a:rPr>
-            </a:br>
-            <a:endParaRPr lang="en-US" altLang="en-US" sz="1200" b="0" i="0">
-              <a:solidFill>
-                <a:srgbClr val="1A1A2E"/>
-              </a:solidFill>
-              <a:latin typeface="Calibri"/>
-            </a:endParaRPr>
-          </a:p>
-          <a:p>
-            <a:pPr algn="l">
-              <a:spcBef>
-                <a:spcPts val="600"/>
-              </a:spcBef>
-            </a:pPr>
-            <a:r>
-              <a:rPr lang="en-US" altLang="en-US" sz="1200" b="0" i="0">
-                <a:solidFill>
-                  <a:srgbClr val="1A1A2E"/>
-                </a:solidFill>
-                <a:latin typeface="Calibri"/>
-              </a:rPr>
-              <a:t>•	Exorbitant privilege amplified via private intermediation channel</a:t>
-            </a:r>
-          </a:p>
-        </p:txBody>
-      </p:sp>
-      <p:sp>
-        <p:nvSpPr>
-          <p:cNvPr id="13" name="Rectangle 12"/>
-          <p:cNvSpPr/>
-          <p:nvPr/>
-        </p:nvSpPr>
-        <p:spPr>
-          <a:xfrm>
-            <a:off x="6263005" y="3336290"/>
-            <a:ext cx="5668645" cy="384175"/>
-          </a:xfrm>
-          <a:prstGeom prst="rect">
-            <a:avLst/>
-          </a:prstGeom>
-          <a:solidFill>
-            <a:srgbClr val="C0392B"/>
-          </a:solidFill>
-          <a:ln>
-            <a:noFill/>
-          </a:ln>
-        </p:spPr>
-        <p:style>
-          <a:lnRef idx="1">
-            <a:schemeClr val="accent1"/>
-          </a:lnRef>
-          <a:fillRef idx="3">
-            <a:schemeClr val="accent1"/>
-          </a:fillRef>
-          <a:effectRef idx="2">
-            <a:schemeClr val="accent1"/>
-          </a:effectRef>
-          <a:fontRef idx="minor">
-            <a:schemeClr val="lt1"/>
-          </a:fontRef>
-        </p:style>
-        <p:txBody>
-          <a:bodyPr rtlCol="0" anchor="ctr"/>
-          <a:lstStyle/>
-          <a:p>
-            <a:pPr algn="ctr"/>
-            <a:endParaRPr/>
-          </a:p>
-        </p:txBody>
-      </p:sp>
-      <p:sp>
-        <p:nvSpPr>
-          <p:cNvPr id="14" name="TextBox 13"/>
+        </p:txBody>
+      </p:sp>
+      <p:sp>
+        <p:nvSpPr>
+          <p:cNvPr id="24" name="TextBox 7"/>
           <p:cNvSpPr txBox="1"/>
           <p:nvPr/>
         </p:nvSpPr>
         <p:spPr>
           <a:xfrm>
-            <a:off x="6366510" y="3375025"/>
-            <a:ext cx="5319395" cy="306705"/>
+            <a:off x="358140" y="4485004"/>
+            <a:ext cx="11430000" cy="352425"/>
           </a:xfrm>
           <a:prstGeom prst="rect">
             <a:avLst/>
@@ -12605,201 +13212,34 @@
           </a:bodyPr>
           <a:lstStyle/>
           <a:p>
-            <a:pPr algn="ctr"/>
-            <a:r>
-              <a:rPr sz="1400" b="1" i="0">
-                <a:solidFill>
-                  <a:srgbClr val="FFFFFF"/>
-                </a:solidFill>
-                <a:latin typeface="Calibri"/>
-              </a:rPr>
-              <a:t>Run scenario ❌</a:t>
-            </a:r>
-          </a:p>
-        </p:txBody>
-      </p:sp>
-      <p:sp>
-        <p:nvSpPr>
-          <p:cNvPr id="15" name="Rectangle 14"/>
-          <p:cNvSpPr/>
-          <p:nvPr/>
-        </p:nvSpPr>
-        <p:spPr>
-          <a:xfrm>
-            <a:off x="6274435" y="3711575"/>
-            <a:ext cx="5657215" cy="2340610"/>
-          </a:xfrm>
-          <a:prstGeom prst="rect">
-            <a:avLst/>
-          </a:prstGeom>
-          <a:solidFill>
-            <a:srgbClr val="FCEBE8"/>
-          </a:solidFill>
-          <a:ln>
-            <a:noFill/>
-          </a:ln>
-        </p:spPr>
-        <p:style>
-          <a:lnRef idx="1">
-            <a:schemeClr val="accent1"/>
-          </a:lnRef>
-          <a:fillRef idx="3">
-            <a:schemeClr val="accent1"/>
-          </a:fillRef>
-          <a:effectRef idx="2">
-            <a:schemeClr val="accent1"/>
-          </a:effectRef>
-          <a:fontRef idx="minor">
-            <a:schemeClr val="lt1"/>
-          </a:fontRef>
-        </p:style>
-        <p:txBody>
-          <a:bodyPr rtlCol="0" anchor="ctr"/>
-          <a:lstStyle/>
-          <a:p>
-            <a:pPr algn="ctr"/>
-            <a:endParaRPr/>
-          </a:p>
-        </p:txBody>
-      </p:sp>
-      <p:sp>
-        <p:nvSpPr>
-          <p:cNvPr id="16" name="TextBox 15"/>
+            <a:pPr algn="l"/>
+            <a:r>
+              <a:rPr lang="en-US" sz="1700" b="1" i="0">
+                <a:solidFill>
+                  <a:srgbClr val="1B3A72"/>
+                </a:solidFill>
+                <a:latin typeface="Calibri"/>
+              </a:rPr>
+              <a:t>Triffin Dilemma (1960)</a:t>
+            </a:r>
+            <a:endParaRPr lang="en-US" sz="1700" b="1" i="0">
+              <a:solidFill>
+                <a:srgbClr val="1B3A72"/>
+              </a:solidFill>
+              <a:latin typeface="Calibri"/>
+            </a:endParaRPr>
+          </a:p>
+        </p:txBody>
+      </p:sp>
+      <p:sp>
+        <p:nvSpPr>
+          <p:cNvPr id="23" name="TextBox 7"/>
           <p:cNvSpPr txBox="1"/>
           <p:nvPr/>
         </p:nvSpPr>
         <p:spPr>
           <a:xfrm>
-            <a:off x="6365875" y="3937635"/>
-            <a:ext cx="5429885" cy="2011680"/>
-          </a:xfrm>
-          <a:prstGeom prst="rect">
-            <a:avLst/>
-          </a:prstGeom>
-          <a:noFill/>
-        </p:spPr>
-        <p:txBody>
-          <a:bodyPr wrap="square">
-            <a:noAutofit/>
-          </a:bodyPr>
-          <a:lstStyle/>
-          <a:p>
-            <a:pPr>
-              <a:spcBef>
-                <a:spcPts val="0"/>
-              </a:spcBef>
-            </a:pPr>
-            <a:r>
-              <a:rPr lang="en-US" altLang="en-US" sz="1300" b="0" i="0">
-                <a:solidFill>
-                  <a:srgbClr val="1A1A2E"/>
-                </a:solidFill>
-                <a:latin typeface="Calibri"/>
-              </a:rPr>
-              <a:t>•       Redemption shock → programmatic T-bill liquidation</a:t>
-            </a:r>
-            <a:br>
-              <a:rPr lang="en-US" altLang="en-US" sz="1300" b="0" i="0">
-                <a:solidFill>
-                  <a:srgbClr val="1A1A2E"/>
-                </a:solidFill>
-                <a:latin typeface="Calibri"/>
-              </a:rPr>
-            </a:br>
-            <a:endParaRPr lang="en-US" altLang="en-US" sz="1300" b="0" i="0">
-              <a:solidFill>
-                <a:srgbClr val="1A1A2E"/>
-              </a:solidFill>
-              <a:latin typeface="Calibri"/>
-            </a:endParaRPr>
-          </a:p>
-          <a:p>
-            <a:pPr>
-              <a:spcBef>
-                <a:spcPts val="0"/>
-              </a:spcBef>
-            </a:pPr>
-            <a:r>
-              <a:rPr lang="en-US" altLang="en-US" sz="1300" b="0" i="0">
-                <a:solidFill>
-                  <a:srgbClr val="1A1A2E"/>
-                </a:solidFill>
-                <a:latin typeface="Calibri"/>
-              </a:rPr>
-              <a:t>•       Treasury yields spike above OIS — spread reversal</a:t>
-            </a:r>
-            <a:br>
-              <a:rPr lang="en-US" altLang="en-US" sz="1300" b="0" i="0">
-                <a:solidFill>
-                  <a:srgbClr val="1A1A2E"/>
-                </a:solidFill>
-                <a:latin typeface="Calibri"/>
-              </a:rPr>
-            </a:br>
-            <a:endParaRPr lang="en-US" altLang="en-US" sz="1300" b="0" i="0">
-              <a:solidFill>
-                <a:srgbClr val="1A1A2E"/>
-              </a:solidFill>
-              <a:latin typeface="Calibri"/>
-            </a:endParaRPr>
-          </a:p>
-          <a:p>
-            <a:pPr>
-              <a:spcBef>
-                <a:spcPts val="0"/>
-              </a:spcBef>
-            </a:pPr>
-            <a:r>
-              <a:rPr lang="en-US" altLang="en-US" sz="1300" b="0" i="0">
-                <a:solidFill>
-                  <a:srgbClr val="1A1A2E"/>
-                </a:solidFill>
-                <a:latin typeface="Calibri"/>
-              </a:rPr>
-              <a:t>•       Sovereign-linked liquidity shock transmitted to debt markets</a:t>
-            </a:r>
-            <a:br>
-              <a:rPr lang="en-US" altLang="en-US" sz="1300" b="0" i="0">
-                <a:solidFill>
-                  <a:srgbClr val="1A1A2E"/>
-                </a:solidFill>
-                <a:latin typeface="Calibri"/>
-              </a:rPr>
-            </a:br>
-            <a:endParaRPr lang="en-US" altLang="en-US" sz="1300" b="0" i="0">
-              <a:solidFill>
-                <a:srgbClr val="1A1A2E"/>
-              </a:solidFill>
-              <a:latin typeface="Calibri"/>
-            </a:endParaRPr>
-          </a:p>
-          <a:p>
-            <a:pPr>
-              <a:spcBef>
-                <a:spcPts val="0"/>
-              </a:spcBef>
-            </a:pPr>
-            <a:r>
-              <a:rPr lang="en-US" altLang="en-US" sz="1300" b="0" i="0">
-                <a:solidFill>
-                  <a:srgbClr val="1A1A2E"/>
-                </a:solidFill>
-                <a:latin typeface="Calibri"/>
-              </a:rPr>
-              <a:t>•       Self-fulfilling dynamic: fear validates liquidation, crisis propagates</a:t>
-            </a:r>
-          </a:p>
-        </p:txBody>
-      </p:sp>
-      <p:sp>
-        <p:nvSpPr>
-          <p:cNvPr id="24" name="TextBox 7"/>
-          <p:cNvSpPr txBox="1"/>
-          <p:nvPr/>
-        </p:nvSpPr>
-        <p:spPr>
-          <a:xfrm>
-            <a:off x="358140" y="1019809"/>
+            <a:off x="482600" y="1158239"/>
             <a:ext cx="11430000" cy="352425"/>
           </a:xfrm>
           <a:prstGeom prst="rect">
@@ -12821,51 +13261,13 @@
                 </a:solidFill>
                 <a:latin typeface="Calibri"/>
               </a:rPr>
-              <a:t>Triffin Dilemma (1960)</a:t>
-            </a:r>
-          </a:p>
-        </p:txBody>
-      </p:sp>
-      <p:sp>
-        <p:nvSpPr>
-          <p:cNvPr id="20" name="TextBox 19">
-            <a:extLst>
-              <a:ext uri="{FF2B5EF4-FFF2-40B4-BE49-F238E27FC236}">
-                <a16:creationId xmlns:a16="http://schemas.microsoft.com/office/drawing/2014/main" id="{F7ACDD58-2C7A-D97A-5A27-1C94FB368101}"/>
-              </a:ext>
-            </a:extLst>
-          </p:cNvPr>
-          <p:cNvSpPr txBox="1"/>
-          <p:nvPr/>
-        </p:nvSpPr>
-        <p:spPr>
-          <a:xfrm>
-            <a:off x="9939130" y="206829"/>
-            <a:ext cx="2067814" cy="369332"/>
-          </a:xfrm>
-          <a:prstGeom prst="rect">
-            <a:avLst/>
-          </a:prstGeom>
-          <a:noFill/>
-        </p:spPr>
-        <p:txBody>
-          <a:bodyPr wrap="square" rtlCol="0">
-            <a:spAutoFit/>
-          </a:bodyPr>
-          <a:lstStyle/>
-          <a:p>
-            <a:r>
-              <a:rPr kumimoji="1" lang="en-US" altLang="ko-KR" dirty="0">
-                <a:solidFill>
-                  <a:schemeClr val="bg1"/>
-                </a:solidFill>
-              </a:rPr>
-              <a:t>Oybek Page4/15</a:t>
-            </a:r>
-            <a:endParaRPr kumimoji="1" lang="ko-KR" altLang="en-US" dirty="0">
-              <a:solidFill>
-                <a:schemeClr val="bg1"/>
-              </a:solidFill>
+              <a:t>Research Topic</a:t>
+            </a:r>
+            <a:endParaRPr lang="en-US" sz="1700" b="1" i="0">
+              <a:solidFill>
+                <a:srgbClr val="1B3A72"/>
+              </a:solidFill>
+              <a:latin typeface="Calibri"/>
             </a:endParaRPr>
           </a:p>
         </p:txBody>
@@ -12935,7 +13337,6 @@
           <a:lstStyle/>
           <a:p>
             <a:pPr algn="ctr"/>
-            <a:endParaRPr/>
           </a:p>
         </p:txBody>
       </p:sp>
@@ -12979,7 +13380,6 @@
           <a:lstStyle/>
           <a:p>
             <a:pPr algn="ctr"/>
-            <a:endParaRPr/>
           </a:p>
         </p:txBody>
       </p:sp>
@@ -13015,6 +13415,12 @@
               </a:rPr>
               <a:t>The New Triffin Dilemma</a:t>
             </a:r>
+            <a:endParaRPr sz="2600" b="0" i="0">
+              <a:solidFill>
+                <a:srgbClr val="FFFFFF"/>
+              </a:solidFill>
+              <a:latin typeface="Calibri"/>
+            </a:endParaRPr>
           </a:p>
         </p:txBody>
       </p:sp>
@@ -13050,63 +13456,25 @@
               </a:rPr>
               <a:t>4</a:t>
             </a:r>
-          </a:p>
-        </p:txBody>
-      </p:sp>
-      <p:sp>
-        <p:nvSpPr>
-          <p:cNvPr id="6" name="Rectangle 5"/>
-          <p:cNvSpPr/>
-          <p:nvPr/>
-        </p:nvSpPr>
-        <p:spPr>
-          <a:xfrm>
-            <a:off x="365760" y="960120"/>
-            <a:ext cx="11430000" cy="777240"/>
-          </a:xfrm>
-          <a:prstGeom prst="rect">
-            <a:avLst/>
-          </a:prstGeom>
-          <a:solidFill>
-            <a:srgbClr val="F0F4F8"/>
-          </a:solidFill>
-          <a:ln>
-            <a:noFill/>
-          </a:ln>
-        </p:spPr>
-        <p:style>
-          <a:lnRef idx="1">
-            <a:schemeClr val="accent1"/>
-          </a:lnRef>
-          <a:fillRef idx="3">
-            <a:schemeClr val="accent1"/>
-          </a:fillRef>
-          <a:effectRef idx="2">
-            <a:schemeClr val="accent1"/>
-          </a:effectRef>
-          <a:fontRef idx="minor">
-            <a:schemeClr val="lt1"/>
-          </a:fontRef>
-        </p:style>
-        <p:txBody>
-          <a:bodyPr rtlCol="0" anchor="ctr"/>
-          <a:lstStyle/>
-          <a:p>
-            <a:pPr algn="ctr"/>
-            <a:endParaRPr/>
-          </a:p>
-        </p:txBody>
-      </p:sp>
-      <p:sp>
-        <p:nvSpPr>
-          <p:cNvPr id="7" name="TextBox 6"/>
+            <a:endParaRPr sz="1300" b="0" i="0">
+              <a:solidFill>
+                <a:srgbClr val="555566"/>
+              </a:solidFill>
+              <a:latin typeface="Calibri"/>
+            </a:endParaRPr>
+          </a:p>
+        </p:txBody>
+      </p:sp>
+      <p:sp>
+        <p:nvSpPr>
+          <p:cNvPr id="8" name="TextBox 7"/>
           <p:cNvSpPr txBox="1"/>
           <p:nvPr/>
         </p:nvSpPr>
         <p:spPr>
           <a:xfrm>
-            <a:off x="502920" y="1005840"/>
-            <a:ext cx="11155680" cy="737235"/>
+            <a:off x="447040" y="1024254"/>
+            <a:ext cx="11430000" cy="347472"/>
           </a:xfrm>
           <a:prstGeom prst="rect">
             <a:avLst/>
@@ -13119,62 +13487,22 @@
           </a:bodyPr>
           <a:lstStyle/>
           <a:p>
-            <a:pPr algn="l">
-              <a:spcBef>
-                <a:spcPts val="0"/>
-              </a:spcBef>
-            </a:pPr>
-            <a:r>
-              <a:rPr lang="en-US" altLang="en-US" sz="1400" i="1">
-                <a:solidFill>
-                  <a:srgbClr val="1A1A2E"/>
-                </a:solidFill>
-                <a:latin typeface="Calibri"/>
-                <a:sym typeface="+mn-ea"/>
-              </a:rPr>
-              <a:t> Triffin (1960): A reserve currency country must supply sufficient safe assets to meet global demand — but this requires running structural current account deficits that progressively undermine confidence in the currency itself. The system depends on the very condition that makes it unsustainable.</a:t>
-            </a:r>
-            <a:endParaRPr sz="1400" i="1">
-              <a:solidFill>
-                <a:srgbClr val="1A1A2E"/>
+            <a:pPr algn="l"/>
+            <a:r>
+              <a:rPr sz="1700" b="1" i="0">
+                <a:solidFill>
+                  <a:srgbClr val="1B3A72"/>
+                </a:solidFill>
+                <a:latin typeface="Calibri"/>
+              </a:rPr>
+              <a:t>Our analogue for stablecoin issuers:</a:t>
+            </a:r>
+            <a:endParaRPr sz="1700" b="1" i="0">
+              <a:solidFill>
+                <a:srgbClr val="1B3A72"/>
               </a:solidFill>
               <a:latin typeface="Calibri"/>
             </a:endParaRPr>
-          </a:p>
-        </p:txBody>
-      </p:sp>
-      <p:sp>
-        <p:nvSpPr>
-          <p:cNvPr id="8" name="TextBox 7"/>
-          <p:cNvSpPr txBox="1"/>
-          <p:nvPr/>
-        </p:nvSpPr>
-        <p:spPr>
-          <a:xfrm>
-            <a:off x="457200" y="1874519"/>
-            <a:ext cx="11430000" cy="347472"/>
-          </a:xfrm>
-          <a:prstGeom prst="rect">
-            <a:avLst/>
-          </a:prstGeom>
-          <a:noFill/>
-        </p:spPr>
-        <p:txBody>
-          <a:bodyPr wrap="square">
-            <a:spAutoFit/>
-          </a:bodyPr>
-          <a:lstStyle/>
-          <a:p>
-            <a:pPr algn="l"/>
-            <a:r>
-              <a:rPr sz="1700" b="1" i="0">
-                <a:solidFill>
-                  <a:srgbClr val="1B3A72"/>
-                </a:solidFill>
-                <a:latin typeface="Calibri"/>
-              </a:rPr>
-              <a:t>Our analogue for stablecoin issuers:</a:t>
-            </a:r>
           </a:p>
         </p:txBody>
       </p:sp>
@@ -13186,7 +13514,7 @@
         </p:nvSpPr>
         <p:spPr>
           <a:xfrm>
-            <a:off x="360045" y="2286000"/>
+            <a:off x="365760" y="1353185"/>
             <a:ext cx="5363845" cy="384175"/>
           </a:xfrm>
           <a:prstGeom prst="rect">
@@ -13218,7 +13546,6 @@
           <a:lstStyle/>
           <a:p>
             <a:pPr algn="ctr"/>
-            <a:endParaRPr/>
           </a:p>
         </p:txBody>
       </p:sp>
@@ -13230,7 +13557,7 @@
         </p:nvSpPr>
         <p:spPr>
           <a:xfrm>
-            <a:off x="457200" y="2313305"/>
+            <a:off x="447040" y="1391920"/>
             <a:ext cx="5078730" cy="306705"/>
           </a:xfrm>
           <a:prstGeom prst="rect">
@@ -13254,6 +13581,12 @@
               </a:rPr>
               <a:t>Normal times ✅</a:t>
             </a:r>
+            <a:endParaRPr sz="1400" b="1" i="0">
+              <a:solidFill>
+                <a:srgbClr val="FFFFFF"/>
+              </a:solidFill>
+              <a:latin typeface="Calibri"/>
+            </a:endParaRPr>
           </a:p>
         </p:txBody>
       </p:sp>
@@ -13265,8 +13598,8 @@
         </p:nvSpPr>
         <p:spPr>
           <a:xfrm>
-            <a:off x="365760" y="2674620"/>
-            <a:ext cx="5357495" cy="942975"/>
+            <a:off x="365760" y="1739265"/>
+            <a:ext cx="5357495" cy="1598295"/>
           </a:xfrm>
           <a:prstGeom prst="rect">
             <a:avLst/>
@@ -13297,7 +13630,6 @@
           <a:lstStyle/>
           <a:p>
             <a:pPr algn="ctr"/>
-            <a:endParaRPr/>
           </a:p>
         </p:txBody>
       </p:sp>
@@ -13309,8 +13641,8 @@
         </p:nvSpPr>
         <p:spPr>
           <a:xfrm>
-            <a:off x="447040" y="2724785"/>
-            <a:ext cx="5231130" cy="858520"/>
+            <a:off x="447040" y="1888490"/>
+            <a:ext cx="5231130" cy="1502410"/>
           </a:xfrm>
           <a:prstGeom prst="rect">
             <a:avLst/>
@@ -13345,15 +13677,6 @@
                 <a:latin typeface="Calibri"/>
               </a:rPr>
             </a:br>
-            <a:r>
-              <a:rPr lang="en-US" altLang="en-US" sz="1200" b="0" i="0">
-                <a:solidFill>
-                  <a:srgbClr val="1A1A2E"/>
-                </a:solidFill>
-                <a:latin typeface="Calibri"/>
-              </a:rPr>
-              <a:t>•	Structural increase in safe-asset demand for US Treasuries</a:t>
-            </a:r>
             <a:br>
               <a:rPr lang="en-US" altLang="en-US" sz="1200" b="0" i="0">
                 <a:solidFill>
@@ -13369,7 +13692,7 @@
                 </a:solidFill>
                 <a:latin typeface="Calibri"/>
               </a:rPr>
-              <a:t>•	OIS–Treasury spread compression: yield falls below SOFR baseline</a:t>
+              <a:t>•	Structural increase in safe-asset demand for US Treasuries</a:t>
             </a:r>
             <a:br>
               <a:rPr lang="en-US" altLang="en-US" sz="1200" b="0" i="0">
@@ -13379,15 +13702,54 @@
                 <a:latin typeface="Calibri"/>
               </a:rPr>
             </a:br>
-            <a:r>
+            <a:br>
               <a:rPr lang="en-US" altLang="en-US" sz="1200" b="0" i="0">
                 <a:solidFill>
                   <a:srgbClr val="1A1A2E"/>
                 </a:solidFill>
                 <a:latin typeface="Calibri"/>
               </a:rPr>
+            </a:br>
+            <a:r>
+              <a:rPr lang="en-US" altLang="en-US" sz="1200" b="0" i="0">
+                <a:solidFill>
+                  <a:srgbClr val="1A1A2E"/>
+                </a:solidFill>
+                <a:latin typeface="Calibri"/>
+              </a:rPr>
+              <a:t>•	OIS–Treasury spread compression: yield falls below SOFR baseline</a:t>
+            </a:r>
+            <a:br>
+              <a:rPr lang="en-US" altLang="en-US" sz="1200" b="0" i="0">
+                <a:solidFill>
+                  <a:srgbClr val="1A1A2E"/>
+                </a:solidFill>
+                <a:latin typeface="Calibri"/>
+              </a:rPr>
+            </a:br>
+            <a:br>
+              <a:rPr lang="en-US" altLang="en-US" sz="1200" b="0" i="0">
+                <a:solidFill>
+                  <a:srgbClr val="1A1A2E"/>
+                </a:solidFill>
+                <a:latin typeface="Calibri"/>
+              </a:rPr>
+            </a:br>
+            <a:r>
+              <a:rPr lang="en-US" altLang="en-US" sz="1200" b="0" i="0">
+                <a:solidFill>
+                  <a:srgbClr val="1A1A2E"/>
+                </a:solidFill>
+                <a:latin typeface="Calibri"/>
+              </a:rPr>
               <a:t>•	Exorbitant privilege amplified via private intermediation channel</a:t>
             </a:r>
+            <a:endParaRPr lang="en-US" altLang="en-US" sz="1200" b="0" i="0">
+              <a:solidFill>
+                <a:srgbClr val="1A1A2E"/>
+              </a:solidFill>
+              <a:latin typeface="Calibri"/>
+            </a:endParaRPr>
           </a:p>
         </p:txBody>
       </p:sp>
@@ -13399,8 +13761,8 @@
         </p:nvSpPr>
         <p:spPr>
           <a:xfrm>
-            <a:off x="6274435" y="2265680"/>
-            <a:ext cx="5624195" cy="384175"/>
+            <a:off x="6276975" y="1343025"/>
+            <a:ext cx="5657215" cy="384175"/>
           </a:xfrm>
           <a:prstGeom prst="rect">
             <a:avLst/>
@@ -13431,7 +13793,6 @@
           <a:lstStyle/>
           <a:p>
             <a:pPr algn="ctr"/>
-            <a:endParaRPr/>
           </a:p>
         </p:txBody>
       </p:sp>
@@ -13443,7 +13804,7 @@
         </p:nvSpPr>
         <p:spPr>
           <a:xfrm>
-            <a:off x="6274435" y="2288540"/>
+            <a:off x="6274435" y="1391920"/>
             <a:ext cx="5624830" cy="306705"/>
           </a:xfrm>
           <a:prstGeom prst="rect">
@@ -13467,6 +13828,12 @@
               </a:rPr>
               <a:t>Run scenario ❌</a:t>
             </a:r>
+            <a:endParaRPr sz="1400" b="1" i="0">
+              <a:solidFill>
+                <a:srgbClr val="FFFFFF"/>
+              </a:solidFill>
+              <a:latin typeface="Calibri"/>
+            </a:endParaRPr>
           </a:p>
         </p:txBody>
       </p:sp>
@@ -13478,8 +13845,8 @@
         </p:nvSpPr>
         <p:spPr>
           <a:xfrm>
-            <a:off x="6274435" y="2654935"/>
-            <a:ext cx="5657215" cy="962660"/>
+            <a:off x="6274435" y="1739265"/>
+            <a:ext cx="5657215" cy="1597025"/>
           </a:xfrm>
           <a:prstGeom prst="rect">
             <a:avLst/>
@@ -13510,7 +13877,6 @@
           <a:lstStyle/>
           <a:p>
             <a:pPr algn="ctr"/>
-            <a:endParaRPr/>
           </a:p>
         </p:txBody>
       </p:sp>
@@ -13522,8 +13888,8 @@
         </p:nvSpPr>
         <p:spPr>
           <a:xfrm>
-            <a:off x="6365875" y="2724785"/>
-            <a:ext cx="5429885" cy="920115"/>
+            <a:off x="6365875" y="1767205"/>
+            <a:ext cx="5429885" cy="1597660"/>
           </a:xfrm>
           <a:prstGeom prst="rect">
             <a:avLst/>
@@ -13550,6 +13916,20 @@
               </a:rPr>
               <a:t>•       Redemption shock → programmatic T-bill liquidation</a:t>
             </a:r>
+            <a:br>
+              <a:rPr lang="en-US" altLang="en-US" sz="1300" b="0" i="0">
+                <a:solidFill>
+                  <a:srgbClr val="1A1A2E"/>
+                </a:solidFill>
+                <a:latin typeface="Calibri"/>
+              </a:rPr>
+            </a:br>
+            <a:endParaRPr lang="en-US" altLang="en-US" sz="1300" b="0" i="0">
+              <a:solidFill>
+                <a:srgbClr val="1A1A2E"/>
+              </a:solidFill>
+              <a:latin typeface="Calibri"/>
+            </a:endParaRPr>
           </a:p>
           <a:p>
             <a:pPr>
@@ -13566,6 +13946,12 @@
               </a:rPr>
               <a:t>•       Treasury yields spike above OIS — spread reversal</a:t>
             </a:r>
+            <a:endParaRPr lang="en-US" altLang="en-US" sz="1300" b="0" i="0">
+              <a:solidFill>
+                <a:srgbClr val="1A1A2E"/>
+              </a:solidFill>
+              <a:latin typeface="Calibri"/>
+            </a:endParaRPr>
           </a:p>
           <a:p>
             <a:pPr>
@@ -13573,15 +13959,29 @@
                 <a:spcPts val="0"/>
               </a:spcBef>
             </a:pPr>
-            <a:r>
+            <a:br>
               <a:rPr lang="en-US" altLang="en-US" sz="1300" b="0" i="0">
                 <a:solidFill>
                   <a:srgbClr val="1A1A2E"/>
                 </a:solidFill>
                 <a:latin typeface="Calibri"/>
               </a:rPr>
+            </a:br>
+            <a:r>
+              <a:rPr lang="en-US" altLang="en-US" sz="1300" b="0" i="0">
+                <a:solidFill>
+                  <a:srgbClr val="1A1A2E"/>
+                </a:solidFill>
+                <a:latin typeface="Calibri"/>
+              </a:rPr>
               <a:t>•       Sovereign-linked liquidity shock transmitted to debt markets</a:t>
             </a:r>
+            <a:endParaRPr lang="en-US" altLang="en-US" sz="1300" b="0" i="0">
+              <a:solidFill>
+                <a:srgbClr val="1A1A2E"/>
+              </a:solidFill>
+              <a:latin typeface="Calibri"/>
+            </a:endParaRPr>
           </a:p>
           <a:p>
             <a:pPr>
@@ -13589,15 +13989,29 @@
                 <a:spcPts val="0"/>
               </a:spcBef>
             </a:pPr>
-            <a:r>
+            <a:br>
               <a:rPr lang="en-US" altLang="en-US" sz="1300" b="0" i="0">
                 <a:solidFill>
                   <a:srgbClr val="1A1A2E"/>
                 </a:solidFill>
                 <a:latin typeface="Calibri"/>
               </a:rPr>
+            </a:br>
+            <a:r>
+              <a:rPr lang="en-US" altLang="en-US" sz="1300" b="0" i="0">
+                <a:solidFill>
+                  <a:srgbClr val="1A1A2E"/>
+                </a:solidFill>
+                <a:latin typeface="Calibri"/>
+              </a:rPr>
               <a:t>•       Self-fulfilling dynamic: fear validates liquidation, crisis propagates</a:t>
             </a:r>
+            <a:endParaRPr lang="en-US" altLang="en-US" sz="1300" b="0" i="0">
+              <a:solidFill>
+                <a:srgbClr val="1A1A2E"/>
+              </a:solidFill>
+              <a:latin typeface="Calibri"/>
+            </a:endParaRPr>
           </a:p>
         </p:txBody>
       </p:sp>
@@ -13641,7 +14055,6 @@
           <a:lstStyle/>
           <a:p>
             <a:pPr algn="ctr"/>
-            <a:endParaRPr/>
           </a:p>
         </p:txBody>
       </p:sp>
@@ -13695,6 +14108,12 @@
               </a:rPr>
               <a:t>We separate θ (why stablecoins help the US) from L (what prevents a crisis)</a:t>
             </a:r>
+            <a:endParaRPr lang="en-US" altLang="en-US" sz="1800" b="1" i="0">
+              <a:solidFill>
+                <a:srgbClr val="FFFFFF"/>
+              </a:solidFill>
+              <a:latin typeface="Calibri"/>
+            </a:endParaRPr>
           </a:p>
         </p:txBody>
       </p:sp>
@@ -13706,8 +14125,8 @@
         </p:nvSpPr>
         <p:spPr>
           <a:xfrm>
-            <a:off x="2397125" y="4177030"/>
-            <a:ext cx="6426200" cy="1598930"/>
+            <a:off x="2397125" y="3875405"/>
+            <a:ext cx="6426200" cy="1900555"/>
           </a:xfrm>
           <a:prstGeom prst="rect">
             <a:avLst/>
@@ -13738,7 +14157,6 @@
           <a:lstStyle/>
           <a:p>
             <a:pPr algn="ctr"/>
-            <a:endParaRPr/>
           </a:p>
         </p:txBody>
       </p:sp>
@@ -13750,7 +14168,7 @@
         </p:nvSpPr>
         <p:spPr>
           <a:xfrm>
-            <a:off x="2396490" y="3775710"/>
+            <a:off x="2396490" y="3483610"/>
             <a:ext cx="6426835" cy="384175"/>
           </a:xfrm>
           <a:prstGeom prst="rect">
@@ -13782,7 +14200,6 @@
           <a:lstStyle/>
           <a:p>
             <a:pPr algn="ctr"/>
-            <a:endParaRPr/>
           </a:p>
         </p:txBody>
       </p:sp>
@@ -13794,7 +14211,7 @@
         </p:nvSpPr>
         <p:spPr>
           <a:xfrm>
-            <a:off x="2455545" y="3830320"/>
+            <a:off x="2455545" y="3542030"/>
             <a:ext cx="6230620" cy="306705"/>
           </a:xfrm>
           <a:prstGeom prst="rect">
@@ -13818,6 +14235,12 @@
               </a:rPr>
               <a:t>What determines outcome</a:t>
             </a:r>
+            <a:endParaRPr sz="1400" b="1" i="0">
+              <a:solidFill>
+                <a:srgbClr val="FFFFFF"/>
+              </a:solidFill>
+              <a:latin typeface="Calibri"/>
+            </a:endParaRPr>
           </a:p>
         </p:txBody>
       </p:sp>
@@ -13829,8 +14252,8 @@
         </p:nvSpPr>
         <p:spPr>
           <a:xfrm>
-            <a:off x="2455545" y="4208780"/>
-            <a:ext cx="6078855" cy="1503045"/>
+            <a:off x="2455545" y="3866515"/>
+            <a:ext cx="6078855" cy="1878965"/>
           </a:xfrm>
           <a:prstGeom prst="rect">
             <a:avLst/>
@@ -13942,6 +14365,19 @@
               </a:rPr>
               <a:t>	•	L &lt; L* → forced liquidation, sovereign spread disruption</a:t>
             </a:r>
+            <a:endParaRPr lang="en-US" altLang="en-US" sz="1300" b="0" i="0">
+              <a:solidFill>
+                <a:srgbClr val="1A1A2E"/>
+              </a:solidFill>
+              <a:latin typeface="Calibri"/>
+            </a:endParaRPr>
+          </a:p>
+          <a:p>
+            <a:pPr>
+              <a:spcBef>
+                <a:spcPts val="0"/>
+              </a:spcBef>
+            </a:pPr>
             <a:br>
               <a:rPr lang="en-US" altLang="en-US" sz="1300" b="0" i="0">
                 <a:solidFill>
@@ -13950,6 +14386,74 @@
                 <a:latin typeface="Calibri"/>
               </a:rPr>
             </a:br>
+            <a:r>
+              <a:rPr lang="en-US" altLang="en-US" sz="1300" b="0" i="0">
+                <a:solidFill>
+                  <a:srgbClr val="1A1A2E"/>
+                </a:solidFill>
+                <a:latin typeface="Calibri"/>
+              </a:rPr>
+              <a:t>          </a:t>
+            </a:r>
+            <a:r>
+              <a:rPr sz="1300">
+                <a:solidFill>
+                  <a:srgbClr val="1A1A2E"/>
+                </a:solidFill>
+                <a:latin typeface="Calibri"/>
+                <a:sym typeface="+mn-ea"/>
+              </a:rPr>
+              <a:t>•  </a:t>
+            </a:r>
+            <a:r>
+              <a:rPr lang="en-US" sz="1300">
+                <a:solidFill>
+                  <a:srgbClr val="1A1A2E"/>
+                </a:solidFill>
+                <a:latin typeface="Calibri"/>
+                <a:sym typeface="+mn-ea"/>
+              </a:rPr>
+              <a:t>       </a:t>
+            </a:r>
+            <a:r>
+              <a:rPr sz="1300">
+                <a:solidFill>
+                  <a:srgbClr val="1A1A2E"/>
+                </a:solidFill>
+                <a:latin typeface="Calibri"/>
+                <a:sym typeface="+mn-ea"/>
+              </a:rPr>
+              <a:t>We estimate the threshold L* (Hansen 2000)</a:t>
+            </a:r>
+            <a:endParaRPr sz="1300" b="0" i="0">
+              <a:solidFill>
+                <a:srgbClr val="1A1A2E"/>
+              </a:solidFill>
+              <a:latin typeface="Calibri"/>
+            </a:endParaRPr>
+          </a:p>
+          <a:p>
+            <a:pPr>
+              <a:spcBef>
+                <a:spcPts val="0"/>
+              </a:spcBef>
+            </a:pPr>
+            <a:br>
+              <a:rPr lang="en-US" altLang="en-US" sz="1300" b="0" i="0">
+                <a:solidFill>
+                  <a:srgbClr val="1A1A2E"/>
+                </a:solidFill>
+                <a:latin typeface="Calibri"/>
+              </a:rPr>
+            </a:br>
+            <a:br>
+              <a:rPr lang="en-US" altLang="en-US" sz="1300" b="0" i="0">
+                <a:solidFill>
+                  <a:srgbClr val="1A1A2E"/>
+                </a:solidFill>
+                <a:latin typeface="Calibri"/>
+              </a:rPr>
+            </a:br>
             <a:endParaRPr lang="en-US" altLang="en-US" sz="1300" b="0" i="0">
               <a:solidFill>
                 <a:srgbClr val="1A1A2E"/>
@@ -13961,13 +14465,7 @@
       </p:sp>
       <p:sp>
         <p:nvSpPr>
-          <p:cNvPr id="27" name="TextBox 26">
-            <a:extLst>
-              <a:ext uri="{FF2B5EF4-FFF2-40B4-BE49-F238E27FC236}">
-                <a16:creationId xmlns:a16="http://schemas.microsoft.com/office/drawing/2014/main" id="{6798EF31-F29C-8F32-E0A6-DD856D9C4B62}"/>
-              </a:ext>
-            </a:extLst>
-          </p:cNvPr>
+          <p:cNvPr id="27" name="TextBox 26"/>
           <p:cNvSpPr txBox="1"/>
           <p:nvPr/>
         </p:nvSpPr>
@@ -14068,7 +14566,6 @@
           <a:lstStyle/>
           <a:p>
             <a:pPr algn="ctr"/>
-            <a:endParaRPr/>
           </a:p>
         </p:txBody>
       </p:sp>
@@ -14112,7 +14609,6 @@
           <a:lstStyle/>
           <a:p>
             <a:pPr algn="ctr"/>
-            <a:endParaRPr/>
           </a:p>
         </p:txBody>
       </p:sp>
@@ -14148,6 +14644,12 @@
               </a:rPr>
               <a:t>Theoretical Extension: Maggiori (2017)</a:t>
             </a:r>
+            <a:endParaRPr sz="2600" b="0" i="0">
+              <a:solidFill>
+                <a:srgbClr val="FFFFFF"/>
+              </a:solidFill>
+              <a:latin typeface="Calibri"/>
+            </a:endParaRPr>
           </a:p>
         </p:txBody>
       </p:sp>
@@ -14183,6 +14685,12 @@
               </a:rPr>
               <a:t>5</a:t>
             </a:r>
+            <a:endParaRPr sz="1300" b="0" i="0">
+              <a:solidFill>
+                <a:srgbClr val="555566"/>
+              </a:solidFill>
+              <a:latin typeface="Calibri"/>
+            </a:endParaRPr>
           </a:p>
         </p:txBody>
       </p:sp>
@@ -14226,7 +14734,6 @@
           <a:lstStyle/>
           <a:p>
             <a:pPr algn="ctr"/>
-            <a:endParaRPr/>
           </a:p>
         </p:txBody>
       </p:sp>
@@ -14274,6 +14781,12 @@
               </a:rPr>
               <a:t>Maggiori (2017) original:</a:t>
             </a:r>
+            <a:endParaRPr sz="1400" b="1" i="0" dirty="0">
+              <a:solidFill>
+                <a:srgbClr val="1B3A72"/>
+              </a:solidFill>
+              <a:latin typeface="Calibri"/>
+            </a:endParaRPr>
           </a:p>
           <a:p>
             <a:pPr algn="l">
@@ -14344,6 +14857,12 @@
               </a:rPr>
               <a:t>.</a:t>
             </a:r>
+            <a:endParaRPr sz="1300" b="0" i="0" dirty="0">
+              <a:solidFill>
+                <a:srgbClr val="1A1A2E"/>
+              </a:solidFill>
+              <a:latin typeface="Calibri"/>
+            </a:endParaRPr>
           </a:p>
           <a:p>
             <a:pPr algn="l">
@@ -14360,6 +14879,12 @@
               </a:rPr>
               <a:t> </a:t>
             </a:r>
+            <a:endParaRPr sz="800" b="0" i="0" dirty="0">
+              <a:solidFill>
+                <a:srgbClr val="1A1A2E"/>
+              </a:solidFill>
+              <a:latin typeface="Calibri"/>
+            </a:endParaRPr>
           </a:p>
           <a:p>
             <a:pPr algn="l">
@@ -14412,6 +14937,12 @@
               </a:rPr>
               <a:t>, and L:</a:t>
             </a:r>
+            <a:endParaRPr sz="1400" b="1" i="0" dirty="0">
+              <a:solidFill>
+                <a:srgbClr val="1B3A72"/>
+              </a:solidFill>
+              <a:latin typeface="Calibri"/>
+            </a:endParaRPr>
           </a:p>
           <a:p>
             <a:pPr algn="l">
@@ -14500,6 +15031,12 @@
               </a:rPr>
               <a:t>)  +  D*buffer(L)</a:t>
             </a:r>
+            <a:endParaRPr sz="1300" b="0" i="1" dirty="0">
+              <a:solidFill>
+                <a:srgbClr val="1A1A2E"/>
+              </a:solidFill>
+              <a:latin typeface="Calibri"/>
+            </a:endParaRPr>
           </a:p>
           <a:p>
             <a:pPr algn="l">
@@ -14516,6 +15053,12 @@
               </a:rPr>
               <a:t> </a:t>
             </a:r>
+            <a:endParaRPr sz="800" b="0" i="0" dirty="0">
+              <a:solidFill>
+                <a:srgbClr val="1A1A2E"/>
+              </a:solidFill>
+              <a:latin typeface="Calibri"/>
+            </a:endParaRPr>
           </a:p>
           <a:p>
             <a:pPr algn="l">
@@ -14582,6 +15125,12 @@
               </a:rPr>
               <a:t>• D*stablecoin — new structural demand via mechanical T-bill acquisition</a:t>
             </a:r>
+            <a:endParaRPr lang="en-US" altLang="en-US" sz="1300" b="0" i="0" dirty="0">
+              <a:solidFill>
+                <a:schemeClr val="tx1"/>
+              </a:solidFill>
+              <a:latin typeface="Calibri"/>
+            </a:endParaRPr>
           </a:p>
           <a:p>
             <a:pPr algn="l">
@@ -14606,6 +15155,12 @@
               </a:rPr>
               <a:t>• D*buffer — additional demand from excess reserve holdings above minimum</a:t>
             </a:r>
+            <a:endParaRPr lang="en-US" altLang="en-US" sz="1300" b="0" i="0" dirty="0">
+              <a:solidFill>
+                <a:schemeClr val="tx1"/>
+              </a:solidFill>
+              <a:latin typeface="Calibri"/>
+            </a:endParaRPr>
           </a:p>
         </p:txBody>
       </p:sp>
@@ -14649,7 +15204,6 @@
           <a:lstStyle/>
           <a:p>
             <a:pPr algn="ctr"/>
-            <a:endParaRPr/>
           </a:p>
         </p:txBody>
       </p:sp>
@@ -14685,6 +15239,12 @@
               </a:rPr>
               <a:t>Main Estimating Equation</a:t>
             </a:r>
+            <a:endParaRPr sz="1500" b="1" i="0">
+              <a:solidFill>
+                <a:srgbClr val="FFFFFF"/>
+              </a:solidFill>
+              <a:latin typeface="Calibri"/>
+            </a:endParaRPr>
           </a:p>
         </p:txBody>
       </p:sp>
@@ -14723,6 +15283,12 @@
            + β₅·Vₜ + β₆·VIXₜ
            + β₇·ΔlnN*ₜ + εₜ</a:t>
             </a:r>
+            <a:endParaRPr sz="1400" b="0" i="0">
+              <a:solidFill>
+                <a:srgbClr val="FFFFFF"/>
+              </a:solidFill>
+              <a:latin typeface="Courier New" panose="02070609020205020404"/>
+            </a:endParaRPr>
           </a:p>
         </p:txBody>
       </p:sp>
@@ -14753,7 +15319,6 @@
                 <a:spcPts val="0"/>
               </a:spcBef>
             </a:pPr>
-            <a:endParaRPr/>
           </a:p>
           <a:p>
             <a:pPr algn="l">
@@ -14770,6 +15335,12 @@
               </a:rPr>
               <a:t>Predicted signs:</a:t>
             </a:r>
+            <a:endParaRPr sz="1500" b="1" i="0">
+              <a:solidFill>
+                <a:srgbClr val="AAC4E8"/>
+              </a:solidFill>
+              <a:latin typeface="Calibri"/>
+            </a:endParaRPr>
           </a:p>
           <a:p>
             <a:pPr algn="l">
@@ -14786,6 +15357,12 @@
               </a:rPr>
               <a:t>❖  β₁ &lt; 0: ΔlnS compresses spreads (privilege amplification)</a:t>
             </a:r>
+            <a:endParaRPr sz="1500" b="0" i="0">
+              <a:solidFill>
+                <a:srgbClr val="FFFFFF"/>
+              </a:solidFill>
+              <a:latin typeface="Calibri"/>
+            </a:endParaRPr>
           </a:p>
           <a:p>
             <a:pPr algn="l">
@@ -14802,6 +15379,12 @@
               </a:rPr>
               <a:t>❖  β₂ &gt; 0: Higher T-bill exposure θ amplifies demand</a:t>
             </a:r>
+            <a:endParaRPr sz="1500" b="0" i="0">
+              <a:solidFill>
+                <a:srgbClr val="FFFFFF"/>
+              </a:solidFill>
+              <a:latin typeface="Calibri"/>
+            </a:endParaRPr>
           </a:p>
           <a:p>
             <a:pPr algn="l">
@@ -14850,7 +15433,7 @@
           <p:nvPr/>
         </p:nvPicPr>
         <p:blipFill>
-          <a:blip r:embed="rId3"/>
+          <a:blip r:embed="rId1"/>
           <a:stretch>
             <a:fillRect/>
           </a:stretch>
@@ -14905,7 +15488,6 @@
           <a:lstStyle/>
           <a:p>
             <a:pPr algn="ctr"/>
-            <a:endParaRPr/>
           </a:p>
         </p:txBody>
       </p:sp>
@@ -14941,18 +15523,18 @@
               </a:rPr>
               <a:t>The buffer L introduces a non-linear threshold — the key theoretical departure from Maggiori’s original model.</a:t>
             </a:r>
-          </a:p>
-        </p:txBody>
-      </p:sp>
-      <p:sp>
-        <p:nvSpPr>
-          <p:cNvPr id="17" name="TextBox 16">
-            <a:extLst>
-              <a:ext uri="{FF2B5EF4-FFF2-40B4-BE49-F238E27FC236}">
-                <a16:creationId xmlns:a16="http://schemas.microsoft.com/office/drawing/2014/main" id="{57109801-D11E-6CF5-ABBF-CDE4784B4444}"/>
-              </a:ext>
-            </a:extLst>
-          </p:cNvPr>
+            <a:endParaRPr lang="en-US" altLang="en-US" sz="1800" b="1" i="0">
+              <a:solidFill>
+                <a:srgbClr val="FFFFFF"/>
+              </a:solidFill>
+              <a:latin typeface="Calibri"/>
+            </a:endParaRPr>
+          </a:p>
+        </p:txBody>
+      </p:sp>
+      <p:sp>
+        <p:nvSpPr>
+          <p:cNvPr id="17" name="TextBox 16"/>
           <p:cNvSpPr txBox="1"/>
           <p:nvPr/>
         </p:nvSpPr>
@@ -15053,7 +15635,6 @@
           <a:lstStyle/>
           <a:p>
             <a:pPr algn="ctr"/>
-            <a:endParaRPr/>
           </a:p>
         </p:txBody>
       </p:sp>
@@ -15097,7 +15678,6 @@
           <a:lstStyle/>
           <a:p>
             <a:pPr algn="ctr"/>
-            <a:endParaRPr/>
           </a:p>
         </p:txBody>
       </p:sp>
@@ -15133,6 +15713,12 @@
               </a:rPr>
               <a:t>Data &amp; Sample</a:t>
             </a:r>
+            <a:endParaRPr sz="2600" b="0" i="0">
+              <a:solidFill>
+                <a:srgbClr val="FFFFFF"/>
+              </a:solidFill>
+              <a:latin typeface="Calibri"/>
+            </a:endParaRPr>
           </a:p>
         </p:txBody>
       </p:sp>
@@ -15176,7 +15762,6 @@
           <a:lstStyle/>
           <a:p>
             <a:pPr algn="ctr"/>
-            <a:endParaRPr/>
           </a:p>
         </p:txBody>
       </p:sp>
@@ -15212,6 +15797,12 @@
               </a:rPr>
               <a:t>Variable</a:t>
             </a:r>
+            <a:endParaRPr sz="1300" b="1" i="0">
+              <a:solidFill>
+                <a:srgbClr val="FFFFFF"/>
+              </a:solidFill>
+              <a:latin typeface="Calibri"/>
+            </a:endParaRPr>
           </a:p>
         </p:txBody>
       </p:sp>
@@ -15247,6 +15838,12 @@
               </a:rPr>
               <a:t>Definition</a:t>
             </a:r>
+            <a:endParaRPr sz="1300" b="1" i="0">
+              <a:solidFill>
+                <a:srgbClr val="FFFFFF"/>
+              </a:solidFill>
+              <a:latin typeface="Calibri"/>
+            </a:endParaRPr>
           </a:p>
         </p:txBody>
       </p:sp>
@@ -15282,6 +15879,12 @@
               </a:rPr>
               <a:t>Source</a:t>
             </a:r>
+            <a:endParaRPr sz="1300" b="1" i="0">
+              <a:solidFill>
+                <a:srgbClr val="FFFFFF"/>
+              </a:solidFill>
+              <a:latin typeface="Calibri"/>
+            </a:endParaRPr>
           </a:p>
         </p:txBody>
       </p:sp>
@@ -15317,6 +15920,12 @@
               </a:rPr>
               <a:t>Frequency</a:t>
             </a:r>
+            <a:endParaRPr sz="1300" b="1" i="0">
+              <a:solidFill>
+                <a:srgbClr val="FFFFFF"/>
+              </a:solidFill>
+              <a:latin typeface="Calibri"/>
+            </a:endParaRPr>
           </a:p>
         </p:txBody>
       </p:sp>
@@ -15360,7 +15969,6 @@
           <a:lstStyle/>
           <a:p>
             <a:pPr algn="ctr"/>
-            <a:endParaRPr/>
           </a:p>
         </p:txBody>
       </p:sp>
@@ -15396,6 +16004,12 @@
               </a:rPr>
               <a:t>OIS–Treasury Spread</a:t>
             </a:r>
+            <a:endParaRPr sz="1200" b="0" i="0">
+              <a:solidFill>
+                <a:srgbClr val="1A1A2E"/>
+              </a:solidFill>
+              <a:latin typeface="Calibri"/>
+            </a:endParaRPr>
           </a:p>
         </p:txBody>
       </p:sp>
@@ -15431,6 +16045,12 @@
               </a:rPr>
               <a:t>DTB3 − SOFR90DAYAVG</a:t>
             </a:r>
+            <a:endParaRPr sz="1200" b="0" i="0">
+              <a:solidFill>
+                <a:srgbClr val="1A1A2E"/>
+              </a:solidFill>
+              <a:latin typeface="Calibri"/>
+            </a:endParaRPr>
           </a:p>
         </p:txBody>
       </p:sp>
@@ -15466,6 +16086,12 @@
               </a:rPr>
               <a:t>FRED (direct CSV, no API key)</a:t>
             </a:r>
+            <a:endParaRPr sz="1200" b="0" i="0">
+              <a:solidFill>
+                <a:srgbClr val="1A1A2E"/>
+              </a:solidFill>
+              <a:latin typeface="Calibri"/>
+            </a:endParaRPr>
           </a:p>
         </p:txBody>
       </p:sp>
@@ -15501,6 +16127,12 @@
               </a:rPr>
               <a:t>Daily → Monthly</a:t>
             </a:r>
+            <a:endParaRPr sz="1200" b="0" i="0">
+              <a:solidFill>
+                <a:srgbClr val="1A1A2E"/>
+              </a:solidFill>
+              <a:latin typeface="Calibri"/>
+            </a:endParaRPr>
           </a:p>
         </p:txBody>
       </p:sp>
@@ -15544,7 +16176,6 @@
           <a:lstStyle/>
           <a:p>
             <a:pPr algn="ctr"/>
-            <a:endParaRPr/>
           </a:p>
         </p:txBody>
       </p:sp>
@@ -15580,6 +16211,12 @@
               </a:rPr>
               <a:t>Stablecoin Supply S</a:t>
             </a:r>
+            <a:endParaRPr sz="1200" b="0" i="0">
+              <a:solidFill>
+                <a:srgbClr val="1A1A2E"/>
+              </a:solidFill>
+              <a:latin typeface="Calibri"/>
+            </a:endParaRPr>
           </a:p>
         </p:txBody>
       </p:sp>
@@ -15615,6 +16252,12 @@
               </a:rPr>
               <a:t>USDT + USDC market cap</a:t>
             </a:r>
+            <a:endParaRPr sz="1200" b="0" i="0">
+              <a:solidFill>
+                <a:srgbClr val="1A1A2E"/>
+              </a:solidFill>
+              <a:latin typeface="Calibri"/>
+            </a:endParaRPr>
           </a:p>
         </p:txBody>
       </p:sp>
@@ -15659,6 +16302,12 @@
               </a:rPr>
               <a:t> stablecoins API (free)</a:t>
             </a:r>
+            <a:endParaRPr sz="1200" b="0" i="0" dirty="0">
+              <a:solidFill>
+                <a:srgbClr val="1A1A2E"/>
+              </a:solidFill>
+              <a:latin typeface="Calibri"/>
+            </a:endParaRPr>
           </a:p>
         </p:txBody>
       </p:sp>
@@ -15694,6 +16343,12 @@
               </a:rPr>
               <a:t>Daily → Monthly</a:t>
             </a:r>
+            <a:endParaRPr sz="1200" b="0" i="0">
+              <a:solidFill>
+                <a:srgbClr val="1A1A2E"/>
+              </a:solidFill>
+              <a:latin typeface="Calibri"/>
+            </a:endParaRPr>
           </a:p>
         </p:txBody>
       </p:sp>
@@ -15737,7 +16392,6 @@
           <a:lstStyle/>
           <a:p>
             <a:pPr algn="ctr"/>
-            <a:endParaRPr/>
           </a:p>
         </p:txBody>
       </p:sp>
@@ -15773,6 +16427,12 @@
               </a:rPr>
               <a:t>θ  (Treasury Exposure)</a:t>
             </a:r>
+            <a:endParaRPr sz="1200" b="0" i="0">
+              <a:solidFill>
+                <a:srgbClr val="1A1A2E"/>
+              </a:solidFill>
+              <a:latin typeface="Calibri"/>
+            </a:endParaRPr>
           </a:p>
         </p:txBody>
       </p:sp>
@@ -15808,6 +16468,12 @@
               </a:rPr>
               <a:t>T-bill holdings / supply</a:t>
             </a:r>
+            <a:endParaRPr sz="1200" b="0" i="0">
+              <a:solidFill>
+                <a:srgbClr val="1A1A2E"/>
+              </a:solidFill>
+              <a:latin typeface="Calibri"/>
+            </a:endParaRPr>
           </a:p>
         </p:txBody>
       </p:sp>
@@ -15843,6 +16509,12 @@
               </a:rPr>
               <a:t>Tether/BDO + Circle/Deloitte attestations</a:t>
             </a:r>
+            <a:endParaRPr sz="1200" b="0" i="0">
+              <a:solidFill>
+                <a:srgbClr val="1A1A2E"/>
+              </a:solidFill>
+              <a:latin typeface="Calibri"/>
+            </a:endParaRPr>
           </a:p>
         </p:txBody>
       </p:sp>
@@ -15878,6 +16550,12 @@
               </a:rPr>
               <a:t>Quarterly/Monthly</a:t>
             </a:r>
+            <a:endParaRPr sz="1200" b="0" i="0">
+              <a:solidFill>
+                <a:srgbClr val="1A1A2E"/>
+              </a:solidFill>
+              <a:latin typeface="Calibri"/>
+            </a:endParaRPr>
           </a:p>
         </p:txBody>
       </p:sp>
@@ -15921,7 +16599,6 @@
           <a:lstStyle/>
           <a:p>
             <a:pPr algn="ctr"/>
-            <a:endParaRPr/>
           </a:p>
         </p:txBody>
       </p:sp>
@@ -15957,6 +16634,12 @@
               </a:rPr>
               <a:t>L  (Liquid Buffer)</a:t>
             </a:r>
+            <a:endParaRPr sz="1200" b="0" i="0">
+              <a:solidFill>
+                <a:srgbClr val="1A1A2E"/>
+              </a:solidFill>
+              <a:latin typeface="Calibri"/>
+            </a:endParaRPr>
           </a:p>
         </p:txBody>
       </p:sp>
@@ -15992,6 +16675,12 @@
               </a:rPr>
               <a:t>Cash reserves / supply</a:t>
             </a:r>
+            <a:endParaRPr sz="1200" b="0" i="0">
+              <a:solidFill>
+                <a:srgbClr val="1A1A2E"/>
+              </a:solidFill>
+              <a:latin typeface="Calibri"/>
+            </a:endParaRPr>
           </a:p>
         </p:txBody>
       </p:sp>
@@ -16027,6 +16716,12 @@
               </a:rPr>
               <a:t>Tether/BDO + Circle/Deloitte attestations</a:t>
             </a:r>
+            <a:endParaRPr sz="1200" b="0" i="0">
+              <a:solidFill>
+                <a:srgbClr val="1A1A2E"/>
+              </a:solidFill>
+              <a:latin typeface="Calibri"/>
+            </a:endParaRPr>
           </a:p>
         </p:txBody>
       </p:sp>
@@ -16062,6 +16757,12 @@
               </a:rPr>
               <a:t>Quarterly/Monthly</a:t>
             </a:r>
+            <a:endParaRPr sz="1200" b="0" i="0">
+              <a:solidFill>
+                <a:srgbClr val="1A1A2E"/>
+              </a:solidFill>
+              <a:latin typeface="Calibri"/>
+            </a:endParaRPr>
           </a:p>
         </p:txBody>
       </p:sp>
@@ -16105,7 +16806,6 @@
           <a:lstStyle/>
           <a:p>
             <a:pPr algn="ctr"/>
-            <a:endParaRPr/>
           </a:p>
         </p:txBody>
       </p:sp>
@@ -16141,6 +16841,12 @@
               </a:rPr>
               <a:t>Velocity V</a:t>
             </a:r>
+            <a:endParaRPr sz="1200" b="0" i="0">
+              <a:solidFill>
+                <a:srgbClr val="1A1A2E"/>
+              </a:solidFill>
+              <a:latin typeface="Calibri"/>
+            </a:endParaRPr>
           </a:p>
         </p:txBody>
       </p:sp>
@@ -16176,6 +16882,12 @@
               </a:rPr>
               <a:t>7-day rolling SD of ΔlnS</a:t>
             </a:r>
+            <a:endParaRPr sz="1200" b="0" i="0">
+              <a:solidFill>
+                <a:srgbClr val="1A1A2E"/>
+              </a:solidFill>
+              <a:latin typeface="Calibri"/>
+            </a:endParaRPr>
           </a:p>
         </p:txBody>
       </p:sp>
@@ -16211,6 +16923,12 @@
               </a:rPr>
               <a:t>Computed from DeFiLlama</a:t>
             </a:r>
+            <a:endParaRPr sz="1200" b="0" i="0">
+              <a:solidFill>
+                <a:srgbClr val="1A1A2E"/>
+              </a:solidFill>
+              <a:latin typeface="Calibri"/>
+            </a:endParaRPr>
           </a:p>
         </p:txBody>
       </p:sp>
@@ -16246,6 +16964,12 @@
               </a:rPr>
               <a:t>Daily → Monthly</a:t>
             </a:r>
+            <a:endParaRPr sz="1200" b="0" i="0">
+              <a:solidFill>
+                <a:srgbClr val="1A1A2E"/>
+              </a:solidFill>
+              <a:latin typeface="Calibri"/>
+            </a:endParaRPr>
           </a:p>
         </p:txBody>
       </p:sp>
@@ -16289,7 +17013,6 @@
           <a:lstStyle/>
           <a:p>
             <a:pPr algn="ctr"/>
-            <a:endParaRPr/>
           </a:p>
         </p:txBody>
       </p:sp>
@@ -16325,6 +17048,12 @@
               </a:rPr>
               <a:t>VIX</a:t>
             </a:r>
+            <a:endParaRPr sz="1200" b="0" i="0">
+              <a:solidFill>
+                <a:srgbClr val="1A1A2E"/>
+              </a:solidFill>
+              <a:latin typeface="Calibri"/>
+            </a:endParaRPr>
           </a:p>
         </p:txBody>
       </p:sp>
@@ -16360,6 +17089,12 @@
               </a:rPr>
               <a:t>CBOE VIX index</a:t>
             </a:r>
+            <a:endParaRPr sz="1200" b="0" i="0">
+              <a:solidFill>
+                <a:srgbClr val="1A1A2E"/>
+              </a:solidFill>
+              <a:latin typeface="Calibri"/>
+            </a:endParaRPr>
           </a:p>
         </p:txBody>
       </p:sp>
@@ -16395,6 +17130,12 @@
               </a:rPr>
               <a:t>FRED</a:t>
             </a:r>
+            <a:endParaRPr sz="1200" b="0" i="0">
+              <a:solidFill>
+                <a:srgbClr val="1A1A2E"/>
+              </a:solidFill>
+              <a:latin typeface="Calibri"/>
+            </a:endParaRPr>
           </a:p>
         </p:txBody>
       </p:sp>
@@ -16430,6 +17171,12 @@
               </a:rPr>
               <a:t>Daily → Monthly</a:t>
             </a:r>
+            <a:endParaRPr sz="1200" b="0" i="0">
+              <a:solidFill>
+                <a:srgbClr val="1A1A2E"/>
+              </a:solidFill>
+              <a:latin typeface="Calibri"/>
+            </a:endParaRPr>
           </a:p>
         </p:txBody>
       </p:sp>
@@ -16473,7 +17220,6 @@
           <a:lstStyle/>
           <a:p>
             <a:pPr algn="ctr"/>
-            <a:endParaRPr/>
           </a:p>
         </p:txBody>
       </p:sp>
@@ -16509,6 +17255,12 @@
               </a:rPr>
               <a:t>ΔlnN* (RoW equity)</a:t>
             </a:r>
+            <a:endParaRPr sz="1200" b="0" i="0">
+              <a:solidFill>
+                <a:srgbClr val="1A1A2E"/>
+              </a:solidFill>
+              <a:latin typeface="Calibri"/>
+            </a:endParaRPr>
           </a:p>
         </p:txBody>
       </p:sp>
@@ -16544,6 +17296,12 @@
               </a:rPr>
               <a:t>ACWX ETF log-return</a:t>
             </a:r>
+            <a:endParaRPr sz="1200" b="0" i="0">
+              <a:solidFill>
+                <a:srgbClr val="1A1A2E"/>
+              </a:solidFill>
+              <a:latin typeface="Calibri"/>
+            </a:endParaRPr>
           </a:p>
         </p:txBody>
       </p:sp>
@@ -16579,6 +17337,12 @@
               </a:rPr>
               <a:t>Yahoo Finance</a:t>
             </a:r>
+            <a:endParaRPr sz="1200" b="0" i="0">
+              <a:solidFill>
+                <a:srgbClr val="1A1A2E"/>
+              </a:solidFill>
+              <a:latin typeface="Calibri"/>
+            </a:endParaRPr>
           </a:p>
         </p:txBody>
       </p:sp>
@@ -16614,6 +17378,12 @@
               </a:rPr>
               <a:t>Daily → Monthly</a:t>
             </a:r>
+            <a:endParaRPr sz="1200" b="0" i="0">
+              <a:solidFill>
+                <a:srgbClr val="1A1A2E"/>
+              </a:solidFill>
+              <a:latin typeface="Calibri"/>
+            </a:endParaRPr>
           </a:p>
         </p:txBody>
       </p:sp>
@@ -16649,18 +17419,18 @@
               </a:rPr>
               <a:t>Sample: January 2022 – March 2026  |  N = 51 monthly observations  |  θ and L sourced from Tether/BDO and Circle/Deloitte reserve attestations</a:t>
             </a:r>
-          </a:p>
-        </p:txBody>
-      </p:sp>
-      <p:sp>
-        <p:nvSpPr>
-          <p:cNvPr id="51" name="TextBox 50">
-            <a:extLst>
-              <a:ext uri="{FF2B5EF4-FFF2-40B4-BE49-F238E27FC236}">
-                <a16:creationId xmlns:a16="http://schemas.microsoft.com/office/drawing/2014/main" id="{0ECD33AA-9FCD-AC05-5BE3-D21176123E1A}"/>
-              </a:ext>
-            </a:extLst>
-          </p:cNvPr>
+            <a:endParaRPr sz="1100" b="0" i="1">
+              <a:solidFill>
+                <a:srgbClr val="555566"/>
+              </a:solidFill>
+              <a:latin typeface="Calibri"/>
+            </a:endParaRPr>
+          </a:p>
+        </p:txBody>
+      </p:sp>
+      <p:sp>
+        <p:nvSpPr>
+          <p:cNvPr id="51" name="TextBox 50"/>
           <p:cNvSpPr txBox="1"/>
           <p:nvPr/>
         </p:nvSpPr>
@@ -16805,7 +17575,6 @@
           <a:lstStyle/>
           <a:p>
             <a:pPr algn="ctr"/>
-            <a:endParaRPr/>
           </a:p>
         </p:txBody>
       </p:sp>
@@ -16841,6 +17610,12 @@
               </a:rPr>
               <a:t>Key Variables: January 2022 – March 2026</a:t>
             </a:r>
+            <a:endParaRPr sz="2600" b="0" i="0">
+              <a:solidFill>
+                <a:srgbClr val="FFFFFF"/>
+              </a:solidFill>
+              <a:latin typeface="Calibri"/>
+            </a:endParaRPr>
           </a:p>
         </p:txBody>
       </p:sp>
@@ -16853,7 +17628,7 @@
           <p:nvPr/>
         </p:nvPicPr>
         <p:blipFill>
-          <a:blip r:embed="rId3"/>
+          <a:blip r:embed="rId1"/>
           <a:stretch>
             <a:fillRect/>
           </a:stretch>
@@ -16935,6 +17710,12 @@
               </a:rPr>
               <a:t>.</a:t>
             </a:r>
+            <a:endParaRPr lang="en-US" sz="1600" b="0" i="0" dirty="0">
+              <a:solidFill>
+                <a:srgbClr val="1A1A2E"/>
+              </a:solidFill>
+              <a:latin typeface="Calibri"/>
+            </a:endParaRPr>
           </a:p>
           <a:p>
             <a:pPr>
@@ -16983,6 +17764,11 @@
               </a:rPr>
               <a:t>❖  Red vertical lines = stress events we study</a:t>
             </a:r>
+            <a:endParaRPr lang="en-US" altLang="ko-KR" sz="1600" dirty="0">
+              <a:solidFill>
+                <a:srgbClr val="1A1A2E"/>
+              </a:solidFill>
+            </a:endParaRPr>
           </a:p>
           <a:p>
             <a:pPr algn="l">
@@ -17073,6 +17859,12 @@
               </a:rPr>
               <a:t>❖  C: Liquid buffer L — dangerously thin in 2022, recovering since 2023</a:t>
             </a:r>
+            <a:endParaRPr sz="1600" b="0" i="0" dirty="0">
+              <a:solidFill>
+                <a:srgbClr val="1A1A2E"/>
+              </a:solidFill>
+              <a:latin typeface="Calibri"/>
+            </a:endParaRPr>
           </a:p>
           <a:p>
             <a:pPr algn="l">
@@ -17089,6 +17881,12 @@
               </a:rPr>
               <a:t>❖  Red dashed line = our estimated safety threshold (13%)</a:t>
             </a:r>
+            <a:endParaRPr sz="1600" b="0" i="0" dirty="0">
+              <a:solidFill>
+                <a:srgbClr val="1A1A2E"/>
+              </a:solidFill>
+              <a:latin typeface="Calibri"/>
+            </a:endParaRPr>
           </a:p>
         </p:txBody>
       </p:sp>
@@ -17253,13 +18051,7 @@
       </p:sp>
       <p:sp>
         <p:nvSpPr>
-          <p:cNvPr id="14" name="TextBox 13">
-            <a:extLst>
-              <a:ext uri="{FF2B5EF4-FFF2-40B4-BE49-F238E27FC236}">
-                <a16:creationId xmlns:a16="http://schemas.microsoft.com/office/drawing/2014/main" id="{B846C20A-A273-A8A6-F48D-FDA9473737EB}"/>
-              </a:ext>
-            </a:extLst>
-          </p:cNvPr>
+          <p:cNvPr id="14" name="TextBox 13"/>
           <p:cNvSpPr txBox="1"/>
           <p:nvPr/>
         </p:nvSpPr>
@@ -17360,7 +18152,6 @@
           <a:lstStyle/>
           <a:p>
             <a:pPr algn="ctr"/>
-            <a:endParaRPr/>
           </a:p>
         </p:txBody>
       </p:sp>
@@ -17404,7 +18195,6 @@
           <a:lstStyle/>
           <a:p>
             <a:pPr algn="ctr"/>
-            <a:endParaRPr/>
           </a:p>
         </p:txBody>
       </p:sp>
@@ -17440,6 +18230,12 @@
               </a:rPr>
               <a:t>What the Data Shows Us</a:t>
             </a:r>
+            <a:endParaRPr sz="2600" b="0" i="0">
+              <a:solidFill>
+                <a:srgbClr val="FFFFFF"/>
+              </a:solidFill>
+              <a:latin typeface="Calibri"/>
+            </a:endParaRPr>
           </a:p>
         </p:txBody>
       </p:sp>
@@ -17497,7 +18293,6 @@
             <a:lstStyle/>
             <a:p>
               <a:pPr algn="ctr"/>
-              <a:endParaRPr/>
             </a:p>
           </p:txBody>
         </p:sp>
@@ -17533,6 +18328,12 @@
                 </a:rPr>
                 <a:t>MORE SUPPLY  →  LOWER SPREAD</a:t>
               </a:r>
+              <a:endParaRPr sz="1500" b="1" i="0">
+                <a:solidFill>
+                  <a:srgbClr val="FFFFFF"/>
+                </a:solidFill>
+                <a:latin typeface="Calibri"/>
+              </a:endParaRPr>
             </a:p>
           </p:txBody>
         </p:sp>
@@ -17576,7 +18377,6 @@
             <a:lstStyle/>
             <a:p>
               <a:pPr algn="ctr"/>
-              <a:endParaRPr/>
             </a:p>
           </p:txBody>
         </p:sp>
@@ -17612,6 +18412,12 @@
                 </a:rPr>
                 <a:t>As USDT and USDC supply grew, the gap between Treasury yields and overnight rates compressed. Stablecoin issuers were buying U.S. T-bills to back their tokens — deepening demand for safe assets.</a:t>
               </a:r>
+              <a:endParaRPr b="0" i="0" dirty="0">
+                <a:solidFill>
+                  <a:srgbClr val="1A1A2E"/>
+                </a:solidFill>
+                <a:latin typeface="Calibri"/>
+              </a:endParaRPr>
             </a:p>
           </p:txBody>
         </p:sp>
@@ -17670,7 +18476,6 @@
             <a:lstStyle/>
             <a:p>
               <a:pPr algn="ctr"/>
-              <a:endParaRPr/>
             </a:p>
           </p:txBody>
         </p:sp>
@@ -17706,6 +18511,12 @@
                 </a:rPr>
                 <a:t>CRISIS  →  SPREAD SPIKES</a:t>
               </a:r>
+              <a:endParaRPr sz="1500" b="1" i="0">
+                <a:solidFill>
+                  <a:srgbClr val="FFFFFF"/>
+                </a:solidFill>
+                <a:latin typeface="Calibri"/>
+              </a:endParaRPr>
             </a:p>
           </p:txBody>
         </p:sp>
@@ -17749,7 +18560,6 @@
             <a:lstStyle/>
             <a:p>
               <a:pPr algn="ctr"/>
-              <a:endParaRPr/>
             </a:p>
           </p:txBody>
         </p:sp>
@@ -17785,6 +18595,12 @@
                 </a:rPr>
                 <a:t>During the LUNA/UST collapse (May 2022), spreads spiked as issuers were forced to liquidate T-bill holdings to meet redemptions. The privilege reversed — exactly what our theory predicts.</a:t>
               </a:r>
+              <a:endParaRPr b="0" i="0" dirty="0">
+                <a:solidFill>
+                  <a:srgbClr val="1A1A2E"/>
+                </a:solidFill>
+                <a:latin typeface="Calibri"/>
+              </a:endParaRPr>
             </a:p>
           </p:txBody>
         </p:sp>
@@ -17843,7 +18659,6 @@
             <a:lstStyle/>
             <a:p>
               <a:pPr algn="ctr"/>
-              <a:endParaRPr/>
             </a:p>
           </p:txBody>
         </p:sp>
@@ -17879,6 +18694,12 @@
                 </a:rPr>
                 <a:t>BUFFER WAS THIN WHEN IT MATTERED MOST</a:t>
               </a:r>
+              <a:endParaRPr sz="1500" b="1" i="0" dirty="0">
+                <a:solidFill>
+                  <a:srgbClr val="FFFFFF"/>
+                </a:solidFill>
+                <a:latin typeface="Calibri"/>
+              </a:endParaRPr>
             </a:p>
           </p:txBody>
         </p:sp>
@@ -17922,7 +18743,6 @@
             <a:lstStyle/>
             <a:p>
               <a:pPr algn="ctr"/>
-              <a:endParaRPr/>
             </a:p>
           </p:txBody>
         </p:sp>
@@ -17958,19 +18778,19 @@
                 </a:rPr>
                 <a:t>In 2022, liquid cash reserves sat below our estimated 13% safety threshold. Issuers had to sell T-bills instead of using cash — amplifying the shock.</a:t>
               </a:r>
+              <a:endParaRPr b="0" i="0" dirty="0">
+                <a:solidFill>
+                  <a:srgbClr val="1A1A2E"/>
+                </a:solidFill>
+                <a:latin typeface="Calibri"/>
+              </a:endParaRPr>
             </a:p>
           </p:txBody>
         </p:sp>
       </p:grpSp>
       <p:sp>
         <p:nvSpPr>
-          <p:cNvPr id="24" name="TextBox 23">
-            <a:extLst>
-              <a:ext uri="{FF2B5EF4-FFF2-40B4-BE49-F238E27FC236}">
-                <a16:creationId xmlns:a16="http://schemas.microsoft.com/office/drawing/2014/main" id="{6547E5EE-039F-4F81-6F72-2229EA8586B1}"/>
-              </a:ext>
-            </a:extLst>
-          </p:cNvPr>
+          <p:cNvPr id="24" name="TextBox 23"/>
           <p:cNvSpPr txBox="1"/>
           <p:nvPr/>
         </p:nvSpPr>
@@ -18495,7 +19315,6 @@
       </a:style>
     </a:lnDef>
   </a:objectDefaults>
-  <a:extraClrSchemeLst/>
   <a:extLst>
     <a:ext uri="{05A4C25C-085E-4340-85A3-A5531E510DB2}">
       <thm15:themeFamily xmlns:thm15="http://schemas.microsoft.com/office/thememl/2012/main" name="Office Theme" id="{62F939B6-93AF-4DB8-9C6B-D6C7DFDC589F}" vid="{4A3C46E8-61CC-4603-A589-7422A47A8E4A}"/>
@@ -18776,7 +19595,6 @@
       </a:style>
     </a:lnDef>
   </a:objectDefaults>
-  <a:extraClrSchemeLst/>
   <a:extLst>
     <a:ext uri="{05A4C25C-085E-4340-85A3-A5531E510DB2}">
       <thm15:themeFamily xmlns:thm15="http://schemas.microsoft.com/office/thememl/2012/main" name="Office Theme" id="{62F939B6-93AF-4DB8-9C6B-D6C7DFDC589F}" vid="{4A3C46E8-61CC-4603-A589-7422A47A8E4A}"/>

--- a/FINAL_0512_Stablecoin_Exorbitant_Privilege.pptx
+++ b/FINAL_0512_Stablecoin_Exorbitant_Privilege.pptx
@@ -124,7 +124,7 @@
   <p:extLst>
     <p:ext uri="{EFAFB233-063F-42B5-8137-9DF3F51BA10A}">
       <p15:sldGuideLst xmlns:p15="http://schemas.microsoft.com/office/powerpoint/2012/main">
-        <p15:guide id="1" orient="horz" pos="2160" userDrawn="1">
+        <p15:guide id="1" orient="horz" pos="2161" userDrawn="1">
           <p15:clr>
             <a:srgbClr val="A4A3A4"/>
           </p15:clr>
@@ -13012,8 +13012,8 @@
         </p:nvSpPr>
         <p:spPr>
           <a:xfrm>
-            <a:off x="358140" y="1516380"/>
-            <a:ext cx="11430000" cy="1424940"/>
+            <a:off x="358140" y="1292225"/>
+            <a:ext cx="11430000" cy="1649095"/>
           </a:xfrm>
           <a:prstGeom prst="rect">
             <a:avLst/>
@@ -13055,8 +13055,8 @@
         </p:nvSpPr>
         <p:spPr>
           <a:xfrm>
-            <a:off x="502920" y="1708785"/>
-            <a:ext cx="11155680" cy="1154430"/>
+            <a:off x="368935" y="1385570"/>
+            <a:ext cx="11410315" cy="1530985"/>
           </a:xfrm>
           <a:prstGeom prst="rect">
             <a:avLst/>
@@ -13069,31 +13069,71 @@
           </a:bodyPr>
           <a:lstStyle/>
           <a:p>
-            <a:pPr algn="l">
+            <a:pPr marL="342900" indent="-342900" algn="l">
               <a:spcBef>
                 <a:spcPts val="0"/>
               </a:spcBef>
+              <a:buFont typeface="Arial" panose="020B0704020202020204" pitchFamily="34" charset="0"/>
+              <a:buChar char="•"/>
             </a:pPr>
             <a:r>
-              <a:rPr lang="en-US" altLang="en-US" sz="1900" b="0" i="1" dirty="0">
+              <a:rPr lang="en-US" altLang="en-US" sz="1600" b="0" i="1" dirty="0">
                 <a:solidFill>
                   <a:srgbClr val="1A1A2E"/>
                 </a:solidFill>
                 <a:latin typeface="Calibri"/>
               </a:rPr>
-              <a:t>Bullet points about </a:t>
-            </a:r>
-            <a:r>
-              <a:rPr lang="en-US" altLang="en-US" sz="1900" b="1" i="1" dirty="0">
+              <a:t>The US issues the world's reserve currency — allowing it to borrow cheaply while investing in higher-yielding foreign assets</a:t>
+            </a:r>
+            <a:endParaRPr lang="en-US" altLang="en-US" sz="1600" b="0" i="1" dirty="0">
+              <a:solidFill>
+                <a:srgbClr val="1A1A2E"/>
+              </a:solidFill>
+              <a:latin typeface="Calibri"/>
+            </a:endParaRPr>
+          </a:p>
+          <a:p>
+            <a:pPr marL="342900" indent="-342900" algn="l">
+              <a:spcBef>
+                <a:spcPts val="0"/>
+              </a:spcBef>
+              <a:buFont typeface="Arial" panose="020B0704020202020204" pitchFamily="34" charset="0"/>
+              <a:buChar char="•"/>
+            </a:pPr>
+            <a:r>
+              <a:rPr lang="en-US" altLang="en-US" sz="1600" b="0" i="1" dirty="0">
                 <a:solidFill>
                   <a:srgbClr val="1A1A2E"/>
                 </a:solidFill>
                 <a:latin typeface="Calibri"/>
-                <a:sym typeface="+mn-ea"/>
-              </a:rPr>
-              <a:t> Exorbitant Privilege</a:t>
-            </a:r>
-            <a:endParaRPr lang="en-US" altLang="en-US" sz="1900" b="0" i="1" dirty="0">
+              </a:rPr>
+              <a:t>This "privilege" is measured through OIS–Treasury spread compression: when demand for T-bills rises, US borrowing costs fall below the market baseline</a:t>
+            </a:r>
+            <a:endParaRPr lang="en-US" altLang="en-US" sz="1600" b="0" i="1" dirty="0">
+              <a:solidFill>
+                <a:srgbClr val="1A1A2E"/>
+              </a:solidFill>
+              <a:latin typeface="Calibri"/>
+            </a:endParaRPr>
+          </a:p>
+          <a:p>
+            <a:pPr marL="342900" indent="-342900" algn="l">
+              <a:spcBef>
+                <a:spcPts val="0"/>
+              </a:spcBef>
+              <a:buFont typeface="Arial" panose="020B0704020202020204" pitchFamily="34" charset="0"/>
+              <a:buChar char="•"/>
+            </a:pPr>
+            <a:r>
+              <a:rPr lang="en-US" altLang="en-US" sz="1600" b="0" i="1" dirty="0">
+                <a:solidFill>
+                  <a:srgbClr val="1A1A2E"/>
+                </a:solidFill>
+                <a:latin typeface="Calibri"/>
+              </a:rPr>
+              <a:t>USD-pegged stablecoins now replicate this channel privately — creating $300bn+ in structural Treasury demand outside sovereign control</a:t>
+            </a:r>
+            <a:endParaRPr lang="en-US" altLang="en-US" sz="1600" b="0" i="1" dirty="0">
               <a:solidFill>
                 <a:srgbClr val="1A1A2E"/>
               </a:solidFill>
@@ -13239,7 +13279,7 @@
         </p:nvSpPr>
         <p:spPr>
           <a:xfrm>
-            <a:off x="482600" y="1158239"/>
+            <a:off x="482600" y="969644"/>
             <a:ext cx="11430000" cy="352425"/>
           </a:xfrm>
           <a:prstGeom prst="rect">
@@ -13261,7 +13301,7 @@
                 </a:solidFill>
                 <a:latin typeface="Calibri"/>
               </a:rPr>
-              <a:t>Research Topic</a:t>
+              <a:t>Exorbitant Privilege</a:t>
             </a:r>
             <a:endParaRPr lang="en-US" sz="1700" b="1" i="0">
               <a:solidFill>

--- a/FINAL_0512_Stablecoin_Exorbitant_Privilege.pptx
+++ b/FINAL_0512_Stablecoin_Exorbitant_Privilege.pptx
@@ -13219,7 +13219,7 @@
                 </a:solidFill>
                 <a:latin typeface="Calibri"/>
               </a:rPr>
-              <a:t>Stablecoins and Exorbitant Privilege: A New Channel for Safe-Asset Demant and Its Systematic Fragility</a:t>
+              <a:t>Stablecoins and Exorbitant Privilege: A New Channel for Safe-Asset Demand  and Its Systemic Fragility</a:t>
             </a:r>
             <a:endParaRPr lang="en-US" altLang="en-US" sz="1900" b="1" i="1" dirty="0">
               <a:solidFill>
